--- a/docs/REST API Workshop.pptx
+++ b/docs/REST API Workshop.pptx
@@ -5,10 +5,10 @@
     <p:sldMasterId id="2147483648" r:id="rId4"/>
   </p:sldMasterIdLst>
   <p:notesMasterIdLst>
-    <p:notesMasterId r:id="rId16"/>
+    <p:notesMasterId r:id="rId17"/>
   </p:notesMasterIdLst>
   <p:handoutMasterIdLst>
-    <p:handoutMasterId r:id="rId17"/>
+    <p:handoutMasterId r:id="rId18"/>
   </p:handoutMasterIdLst>
   <p:sldIdLst>
     <p:sldId id="281" r:id="rId5"/>
@@ -22,6 +22,7 @@
     <p:sldId id="288" r:id="rId13"/>
     <p:sldId id="289" r:id="rId14"/>
     <p:sldId id="290" r:id="rId15"/>
+    <p:sldId id="292" r:id="rId16"/>
   </p:sldIdLst>
   <p:sldSz cx="10058400" cy="7772400"/>
   <p:notesSz cx="6858000" cy="9144000"/>
@@ -14917,6 +14918,273 @@
     <p:extLst>
       <p:ext uri="{BB962C8B-B14F-4D97-AF65-F5344CB8AC3E}">
         <p14:creationId xmlns:p14="http://schemas.microsoft.com/office/powerpoint/2010/main" val="4144966695"/>
+      </p:ext>
+    </p:extLst>
+  </p:cSld>
+  <p:clrMapOvr>
+    <a:masterClrMapping/>
+  </p:clrMapOvr>
+</p:sld>
+</file>
+
+<file path=ppt/slides/slide12.xml><?xml version="1.0" encoding="utf-8"?>
+<p:sld xmlns:a="http://schemas.openxmlformats.org/drawingml/2006/main" xmlns:r="http://schemas.openxmlformats.org/officeDocument/2006/relationships" xmlns:p="http://schemas.openxmlformats.org/presentationml/2006/main">
+  <p:cSld>
+    <p:bg>
+      <p:bgPr>
+        <a:solidFill>
+          <a:schemeClr val="bg1"/>
+        </a:solidFill>
+        <a:effectLst/>
+      </p:bgPr>
+    </p:bg>
+    <p:spTree>
+      <p:nvGrpSpPr>
+        <p:cNvPr id="1" name="">
+          <a:extLst>
+            <a:ext uri="{FF2B5EF4-FFF2-40B4-BE49-F238E27FC236}">
+              <a16:creationId xmlns:a16="http://schemas.microsoft.com/office/drawing/2014/main" id="{61F2E731-AED4-CD82-27CB-FDA9EB78F9AA}"/>
+            </a:ext>
+          </a:extLst>
+        </p:cNvPr>
+        <p:cNvGrpSpPr/>
+        <p:nvPr/>
+      </p:nvGrpSpPr>
+      <p:grpSpPr>
+        <a:xfrm>
+          <a:off x="0" y="0"/>
+          <a:ext cx="0" cy="0"/>
+          <a:chOff x="0" y="0"/>
+          <a:chExt cx="0" cy="0"/>
+        </a:xfrm>
+      </p:grpSpPr>
+      <p:sp>
+        <p:nvSpPr>
+          <p:cNvPr id="2" name="Title 1" hidden="1">
+            <a:extLst>
+              <a:ext uri="{FF2B5EF4-FFF2-40B4-BE49-F238E27FC236}">
+                <a16:creationId xmlns:a16="http://schemas.microsoft.com/office/drawing/2014/main" id="{22B52629-263F-2E6F-885B-F8CF97950FD6}"/>
+              </a:ext>
+            </a:extLst>
+          </p:cNvPr>
+          <p:cNvSpPr>
+            <a:spLocks noGrp="1"/>
+          </p:cNvSpPr>
+          <p:nvPr>
+            <p:ph type="title"/>
+          </p:nvPr>
+        </p:nvSpPr>
+        <p:spPr/>
+        <p:txBody>
+          <a:bodyPr/>
+          <a:lstStyle/>
+          <a:p>
+            <a:r>
+              <a:rPr lang="en-US" dirty="0"/>
+              <a:t>Cover Page</a:t>
+            </a:r>
+          </a:p>
+        </p:txBody>
+      </p:sp>
+      <p:sp>
+        <p:nvSpPr>
+          <p:cNvPr id="8" name="Title 1">
+            <a:extLst>
+              <a:ext uri="{FF2B5EF4-FFF2-40B4-BE49-F238E27FC236}">
+                <a16:creationId xmlns:a16="http://schemas.microsoft.com/office/drawing/2014/main" id="{40684A58-A206-6CD9-6C6D-8D3496F0594B}"/>
+              </a:ext>
+            </a:extLst>
+          </p:cNvPr>
+          <p:cNvSpPr txBox="1">
+            <a:spLocks/>
+          </p:cNvSpPr>
+          <p:nvPr/>
+        </p:nvSpPr>
+        <p:spPr>
+          <a:xfrm>
+            <a:off x="1161975" y="151635"/>
+            <a:ext cx="7804774" cy="719719"/>
+          </a:xfrm>
+          <a:prstGeom prst="rect">
+            <a:avLst/>
+          </a:prstGeom>
+        </p:spPr>
+        <p:txBody>
+          <a:bodyPr vert="horz" lIns="0" tIns="0" rIns="0" bIns="0" rtlCol="0" anchor="t">
+            <a:noAutofit/>
+          </a:bodyPr>
+          <a:lstStyle>
+            <a:lvl1pPr algn="ctr" defTabSz="754380" rtl="0" eaLnBrk="1" latinLnBrk="0" hangingPunct="1">
+              <a:lnSpc>
+                <a:spcPct val="90000"/>
+              </a:lnSpc>
+              <a:spcBef>
+                <a:spcPct val="0"/>
+              </a:spcBef>
+              <a:buNone/>
+              <a:defRPr sz="4000" kern="1200">
+                <a:solidFill>
+                  <a:schemeClr val="tx1"/>
+                </a:solidFill>
+                <a:latin typeface="+mj-lt"/>
+                <a:ea typeface="+mj-ea"/>
+                <a:cs typeface="+mj-cs"/>
+              </a:defRPr>
+            </a:lvl1pPr>
+          </a:lstStyle>
+          <a:p>
+            <a:pPr>
+              <a:lnSpc>
+                <a:spcPct val="75000"/>
+              </a:lnSpc>
+            </a:pPr>
+            <a:r>
+              <a:rPr lang="en-US" sz="6000" u="sng" dirty="0">
+                <a:ln w="41275">
+                  <a:noFill/>
+                </a:ln>
+                <a:solidFill>
+                  <a:schemeClr val="accent2"/>
+                </a:solidFill>
+                <a:ea typeface="Source Sans Pro Black"/>
+              </a:rPr>
+              <a:t>Postman</a:t>
+            </a:r>
+          </a:p>
+          <a:p>
+            <a:pPr>
+              <a:lnSpc>
+                <a:spcPct val="75000"/>
+              </a:lnSpc>
+            </a:pPr>
+            <a:r>
+              <a:rPr lang="en-US" sz="3200" dirty="0">
+                <a:ln w="41275">
+                  <a:noFill/>
+                </a:ln>
+                <a:solidFill>
+                  <a:schemeClr val="tx1">
+                    <a:lumMod val="76000"/>
+                    <a:lumOff val="24000"/>
+                  </a:schemeClr>
+                </a:solidFill>
+                <a:ea typeface="Source Sans Pro Black"/>
+              </a:rPr>
+              <a:t>Now you try</a:t>
+            </a:r>
+            <a:endParaRPr lang="en-US" sz="3200" u="sng" dirty="0">
+              <a:ln w="41275">
+                <a:noFill/>
+              </a:ln>
+              <a:solidFill>
+                <a:schemeClr val="tx1">
+                  <a:lumMod val="76000"/>
+                  <a:lumOff val="24000"/>
+                </a:schemeClr>
+              </a:solidFill>
+              <a:ea typeface="Source Sans Pro Black"/>
+            </a:endParaRPr>
+          </a:p>
+        </p:txBody>
+      </p:sp>
+      <p:sp>
+        <p:nvSpPr>
+          <p:cNvPr id="32" name="TextBox 31">
+            <a:extLst>
+              <a:ext uri="{FF2B5EF4-FFF2-40B4-BE49-F238E27FC236}">
+                <a16:creationId xmlns:a16="http://schemas.microsoft.com/office/drawing/2014/main" id="{837B7CAE-565E-9757-D11D-E7641A17D49F}"/>
+              </a:ext>
+            </a:extLst>
+          </p:cNvPr>
+          <p:cNvSpPr txBox="1"/>
+          <p:nvPr/>
+        </p:nvSpPr>
+        <p:spPr>
+          <a:xfrm>
+            <a:off x="2395248" y="1652683"/>
+            <a:ext cx="5257799" cy="1200329"/>
+          </a:xfrm>
+          <a:prstGeom prst="rect">
+            <a:avLst/>
+          </a:prstGeom>
+          <a:noFill/>
+        </p:spPr>
+        <p:txBody>
+          <a:bodyPr rot="0" spcFirstLastPara="0" vertOverflow="overflow" horzOverflow="overflow" vert="horz" wrap="square" lIns="91440" tIns="45720" rIns="91440" bIns="45720" numCol="1" spcCol="0" rtlCol="0" fromWordArt="0" anchor="t" anchorCtr="0" forceAA="0" compatLnSpc="1">
+            <a:prstTxWarp prst="textNoShape">
+              <a:avLst/>
+            </a:prstTxWarp>
+            <a:spAutoFit/>
+          </a:bodyPr>
+          <a:lstStyle/>
+          <a:p>
+            <a:pPr algn="ctr"/>
+            <a:br>
+              <a:rPr lang="en-GB" sz="3600" dirty="0">
+                <a:ea typeface="Source Sans Pro"/>
+              </a:rPr>
+            </a:br>
+            <a:endParaRPr lang="en-GB" sz="3600">
+              <a:solidFill>
+                <a:schemeClr val="bg2">
+                  <a:lumMod val="49000"/>
+                </a:schemeClr>
+              </a:solidFill>
+              <a:ea typeface="Source Sans Pro"/>
+            </a:endParaRPr>
+          </a:p>
+        </p:txBody>
+      </p:sp>
+      <p:cxnSp>
+        <p:nvCxnSpPr>
+          <p:cNvPr id="47" name="Straight Connector 46">
+            <a:extLst>
+              <a:ext uri="{FF2B5EF4-FFF2-40B4-BE49-F238E27FC236}">
+                <a16:creationId xmlns:a16="http://schemas.microsoft.com/office/drawing/2014/main" id="{C7CEA8FC-EDBD-40E8-1D42-70C38D68F2EC}"/>
+              </a:ext>
+              <a:ext uri="{C183D7F6-B498-43B3-948B-1728B52AA6E4}">
+                <adec:decorative xmlns:adec="http://schemas.microsoft.com/office/drawing/2017/decorative" val="1"/>
+              </a:ext>
+            </a:extLst>
+          </p:cNvPr>
+          <p:cNvCxnSpPr>
+            <a:cxnSpLocks/>
+          </p:cNvCxnSpPr>
+          <p:nvPr/>
+        </p:nvCxnSpPr>
+        <p:spPr>
+          <a:xfrm>
+            <a:off x="839615" y="1271285"/>
+            <a:ext cx="8677751" cy="0"/>
+          </a:xfrm>
+          <a:prstGeom prst="line">
+            <a:avLst/>
+          </a:prstGeom>
+          <a:ln w="25400">
+            <a:solidFill>
+              <a:schemeClr val="accent2"/>
+            </a:solidFill>
+          </a:ln>
+        </p:spPr>
+        <p:style>
+          <a:lnRef idx="1">
+            <a:schemeClr val="accent1"/>
+          </a:lnRef>
+          <a:fillRef idx="0">
+            <a:schemeClr val="accent1"/>
+          </a:fillRef>
+          <a:effectRef idx="0">
+            <a:schemeClr val="accent1"/>
+          </a:effectRef>
+          <a:fontRef idx="minor">
+            <a:schemeClr val="tx1"/>
+          </a:fontRef>
+        </p:style>
+      </p:cxnSp>
+    </p:spTree>
+    <p:extLst>
+      <p:ext uri="{BB962C8B-B14F-4D97-AF65-F5344CB8AC3E}">
+        <p14:creationId xmlns:p14="http://schemas.microsoft.com/office/powerpoint/2010/main" val="2273134353"/>
       </p:ext>
     </p:extLst>
   </p:cSld>
@@ -28009,26 +28277,6 @@
 </file>
 
 <file path=customXml/item1.xml><?xml version="1.0" encoding="utf-8"?>
-<p:properties xmlns:p="http://schemas.microsoft.com/office/2006/metadata/properties" xmlns:xsi="http://www.w3.org/2001/XMLSchema-instance" xmlns:pc="http://schemas.microsoft.com/office/infopath/2007/PartnerControls">
-  <documentManagement>
-    <_ip_UnifiedCompliancePolicyUIAction xmlns="http://schemas.microsoft.com/sharepoint/v3" xsi:nil="true"/>
-    <Image xmlns="71af3243-3dd4-4a8d-8c0d-dd76da1f02a5">
-      <Url xsi:nil="true"/>
-      <Description xsi:nil="true"/>
-    </Image>
-    <Status xmlns="71af3243-3dd4-4a8d-8c0d-dd76da1f02a5">Not started</Status>
-    <Background xmlns="71af3243-3dd4-4a8d-8c0d-dd76da1f02a5">false</Background>
-    <_ip_UnifiedCompliancePolicyProperties xmlns="http://schemas.microsoft.com/sharepoint/v3" xsi:nil="true"/>
-    <ImageTagsTaxHTField xmlns="71af3243-3dd4-4a8d-8c0d-dd76da1f02a5">
-      <Terms xmlns="http://schemas.microsoft.com/office/infopath/2007/PartnerControls"/>
-    </ImageTagsTaxHTField>
-    <TaxCatchAll xmlns="230e9df3-be65-4c73-a93b-d1236ebd677e" xsi:nil="true"/>
-    <MediaServiceKeyPoints xmlns="71af3243-3dd4-4a8d-8c0d-dd76da1f02a5" xsi:nil="true"/>
-  </documentManagement>
-</p:properties>
-</file>
-
-<file path=customXml/item2.xml><?xml version="1.0" encoding="utf-8"?>
 <ct:contentTypeSchema xmlns:ct="http://schemas.microsoft.com/office/2006/metadata/contentType" xmlns:ma="http://schemas.microsoft.com/office/2006/metadata/properties/metaAttributes" ct:_="" ma:_="" ma:contentTypeName="Document" ma:contentTypeID="0x01010079F111ED35F8CC479449609E8A0923A6" ma:contentTypeVersion="26" ma:contentTypeDescription="Create a new document." ma:contentTypeScope="" ma:versionID="ac37c1753acd5e330d2062ccec26ea66">
   <xsd:schema xmlns:xsd="http://www.w3.org/2001/XMLSchema" xmlns:xs="http://www.w3.org/2001/XMLSchema" xmlns:p="http://schemas.microsoft.com/office/2006/metadata/properties" xmlns:ns1="http://schemas.microsoft.com/sharepoint/v3" xmlns:ns2="71af3243-3dd4-4a8d-8c0d-dd76da1f02a5" xmlns:ns3="16c05727-aa75-4e4a-9b5f-8a80a1165891" xmlns:ns4="230e9df3-be65-4c73-a93b-d1236ebd677e" targetNamespace="http://schemas.microsoft.com/office/2006/metadata/properties" ma:root="true" ma:fieldsID="3b340c7101c92c5120abd06486f94548" ns1:_="" ns2:_="" ns3:_="" ns4:_="">
     <xsd:import namespace="http://schemas.microsoft.com/sharepoint/v3"/>
@@ -28328,6 +28576,26 @@
 </ct:contentTypeSchema>
 </file>
 
+<file path=customXml/item2.xml><?xml version="1.0" encoding="utf-8"?>
+<p:properties xmlns:p="http://schemas.microsoft.com/office/2006/metadata/properties" xmlns:xsi="http://www.w3.org/2001/XMLSchema-instance" xmlns:pc="http://schemas.microsoft.com/office/infopath/2007/PartnerControls">
+  <documentManagement>
+    <_ip_UnifiedCompliancePolicyUIAction xmlns="http://schemas.microsoft.com/sharepoint/v3" xsi:nil="true"/>
+    <Image xmlns="71af3243-3dd4-4a8d-8c0d-dd76da1f02a5">
+      <Url xsi:nil="true"/>
+      <Description xsi:nil="true"/>
+    </Image>
+    <Status xmlns="71af3243-3dd4-4a8d-8c0d-dd76da1f02a5">Not started</Status>
+    <Background xmlns="71af3243-3dd4-4a8d-8c0d-dd76da1f02a5">false</Background>
+    <_ip_UnifiedCompliancePolicyProperties xmlns="http://schemas.microsoft.com/sharepoint/v3" xsi:nil="true"/>
+    <ImageTagsTaxHTField xmlns="71af3243-3dd4-4a8d-8c0d-dd76da1f02a5">
+      <Terms xmlns="http://schemas.microsoft.com/office/infopath/2007/PartnerControls"/>
+    </ImageTagsTaxHTField>
+    <TaxCatchAll xmlns="230e9df3-be65-4c73-a93b-d1236ebd677e" xsi:nil="true"/>
+    <MediaServiceKeyPoints xmlns="71af3243-3dd4-4a8d-8c0d-dd76da1f02a5" xsi:nil="true"/>
+  </documentManagement>
+</p:properties>
+</file>
+
 <file path=customXml/item3.xml><?xml version="1.0" encoding="utf-8"?>
 <?mso-contentType ?>
 <FormTemplates xmlns="http://schemas.microsoft.com/sharepoint/v3/contenttype/forms">
@@ -28338,18 +28606,6 @@
 </file>
 
 <file path=customXml/itemProps1.xml><?xml version="1.0" encoding="utf-8"?>
-<ds:datastoreItem xmlns:ds="http://schemas.openxmlformats.org/officeDocument/2006/customXml" ds:itemID="{BA7C7500-373E-4155-9EAA-9FE9576B0BE6}">
-  <ds:schemaRefs>
-    <ds:schemaRef ds:uri="http://schemas.microsoft.com/office/2006/metadata/properties"/>
-    <ds:schemaRef ds:uri="http://schemas.microsoft.com/office/infopath/2007/PartnerControls"/>
-    <ds:schemaRef ds:uri="http://schemas.microsoft.com/sharepoint/v3"/>
-    <ds:schemaRef ds:uri="71af3243-3dd4-4a8d-8c0d-dd76da1f02a5"/>
-    <ds:schemaRef ds:uri="230e9df3-be65-4c73-a93b-d1236ebd677e"/>
-  </ds:schemaRefs>
-</ds:datastoreItem>
-</file>
-
-<file path=customXml/itemProps2.xml><?xml version="1.0" encoding="utf-8"?>
 <ds:datastoreItem xmlns:ds="http://schemas.openxmlformats.org/officeDocument/2006/customXml" ds:itemID="{5D948EC7-70A8-4BA0-9397-CCEC9EEE03CC}">
   <ds:schemaRefs>
     <ds:schemaRef ds:uri="http://schemas.microsoft.com/office/2006/metadata/contentType"/>
@@ -28370,6 +28626,18 @@
 </ds:datastoreItem>
 </file>
 
+<file path=customXml/itemProps2.xml><?xml version="1.0" encoding="utf-8"?>
+<ds:datastoreItem xmlns:ds="http://schemas.openxmlformats.org/officeDocument/2006/customXml" ds:itemID="{BA7C7500-373E-4155-9EAA-9FE9576B0BE6}">
+  <ds:schemaRefs>
+    <ds:schemaRef ds:uri="http://schemas.microsoft.com/office/2006/metadata/properties"/>
+    <ds:schemaRef ds:uri="http://schemas.microsoft.com/office/infopath/2007/PartnerControls"/>
+    <ds:schemaRef ds:uri="http://schemas.microsoft.com/sharepoint/v3"/>
+    <ds:schemaRef ds:uri="71af3243-3dd4-4a8d-8c0d-dd76da1f02a5"/>
+    <ds:schemaRef ds:uri="230e9df3-be65-4c73-a93b-d1236ebd677e"/>
+  </ds:schemaRefs>
+</ds:datastoreItem>
+</file>
+
 <file path=customXml/itemProps3.xml><?xml version="1.0" encoding="utf-8"?>
 <ds:datastoreItem xmlns:ds="http://schemas.openxmlformats.org/officeDocument/2006/customXml" ds:itemID="{C700B919-5B9C-4D06-B24A-7BB87EEF69EA}">
   <ds:schemaRefs>

--- a/docs/REST API Workshop.pptx
+++ b/docs/REST API Workshop.pptx
@@ -5,24 +5,37 @@
     <p:sldMasterId id="2147483648" r:id="rId4"/>
   </p:sldMasterIdLst>
   <p:notesMasterIdLst>
-    <p:notesMasterId r:id="rId17"/>
+    <p:notesMasterId r:id="rId30"/>
   </p:notesMasterIdLst>
   <p:handoutMasterIdLst>
-    <p:handoutMasterId r:id="rId18"/>
+    <p:handoutMasterId r:id="rId31"/>
   </p:handoutMasterIdLst>
   <p:sldIdLst>
     <p:sldId id="281" r:id="rId5"/>
     <p:sldId id="282" r:id="rId6"/>
     <p:sldId id="283" r:id="rId7"/>
     <p:sldId id="284" r:id="rId8"/>
-    <p:sldId id="285" r:id="rId9"/>
-    <p:sldId id="286" r:id="rId10"/>
-    <p:sldId id="287" r:id="rId11"/>
-    <p:sldId id="291" r:id="rId12"/>
-    <p:sldId id="288" r:id="rId13"/>
-    <p:sldId id="289" r:id="rId14"/>
-    <p:sldId id="290" r:id="rId15"/>
-    <p:sldId id="292" r:id="rId16"/>
+    <p:sldId id="296" r:id="rId9"/>
+    <p:sldId id="285" r:id="rId10"/>
+    <p:sldId id="286" r:id="rId11"/>
+    <p:sldId id="287" r:id="rId12"/>
+    <p:sldId id="291" r:id="rId13"/>
+    <p:sldId id="288" r:id="rId14"/>
+    <p:sldId id="289" r:id="rId15"/>
+    <p:sldId id="290" r:id="rId16"/>
+    <p:sldId id="292" r:id="rId17"/>
+    <p:sldId id="304" r:id="rId18"/>
+    <p:sldId id="293" r:id="rId19"/>
+    <p:sldId id="294" r:id="rId20"/>
+    <p:sldId id="295" r:id="rId21"/>
+    <p:sldId id="297" r:id="rId22"/>
+    <p:sldId id="298" r:id="rId23"/>
+    <p:sldId id="299" r:id="rId24"/>
+    <p:sldId id="301" r:id="rId25"/>
+    <p:sldId id="302" r:id="rId26"/>
+    <p:sldId id="303" r:id="rId27"/>
+    <p:sldId id="305" r:id="rId28"/>
+    <p:sldId id="306" r:id="rId29"/>
   </p:sldIdLst>
   <p:sldSz cx="10058400" cy="7772400"/>
   <p:notesSz cx="6858000" cy="9144000"/>
@@ -247,7 +260,7 @@
           <a:p>
             <a:fld id="{668871CB-7D37-4FAB-B9ED-4377A4D8FB20}" type="datetimeFigureOut">
               <a:rPr lang="en-US" smtClean="0"/>
-              <a:t>4/25/2026</a:t>
+              <a:t>5/8/2026</a:t>
             </a:fld>
             <a:endParaRPr lang="en-US" dirty="0"/>
           </a:p>
@@ -424,7 +437,7 @@
           <a:p>
             <a:fld id="{443EEF79-99CC-4F81-B4D6-D8238D76DBFC}" type="datetimeFigureOut">
               <a:rPr lang="en-US" smtClean="0"/>
-              <a:t>4/25/2026</a:t>
+              <a:t>5/8/2026</a:t>
             </a:fld>
             <a:endParaRPr lang="en-US" dirty="0"/>
           </a:p>
@@ -865,7 +878,7 @@
           <a:p>
             <a:fld id="{B32EBECA-3212-4A5B-B9AF-C03EDE72AD91}" type="datetimeFigureOut">
               <a:rPr lang="en-US" smtClean="0"/>
-              <a:t>4/25/2026</a:t>
+              <a:t>5/8/2026</a:t>
             </a:fld>
             <a:endParaRPr lang="en-US" dirty="0"/>
           </a:p>
@@ -1050,7 +1063,7 @@
           <a:p>
             <a:fld id="{B32EBECA-3212-4A5B-B9AF-C03EDE72AD91}" type="datetimeFigureOut">
               <a:rPr lang="en-US" smtClean="0"/>
-              <a:t>4/25/2026</a:t>
+              <a:t>5/8/2026</a:t>
             </a:fld>
             <a:endParaRPr lang="en-US" dirty="0"/>
           </a:p>
@@ -1291,7 +1304,7 @@
           <a:p>
             <a:fld id="{B32EBECA-3212-4A5B-B9AF-C03EDE72AD91}" type="datetimeFigureOut">
               <a:rPr lang="en-US" smtClean="0"/>
-              <a:t>4/25/2026</a:t>
+              <a:t>5/8/2026</a:t>
             </a:fld>
             <a:endParaRPr lang="en-US" dirty="0"/>
           </a:p>
@@ -14004,6 +14017,938 @@
         <p:cNvPr id="1" name="">
           <a:extLst>
             <a:ext uri="{FF2B5EF4-FFF2-40B4-BE49-F238E27FC236}">
+              <a16:creationId xmlns:a16="http://schemas.microsoft.com/office/drawing/2014/main" id="{B1799FC5-CC8B-5EAD-DDDA-FB04AEE939BA}"/>
+            </a:ext>
+          </a:extLst>
+        </p:cNvPr>
+        <p:cNvGrpSpPr/>
+        <p:nvPr/>
+      </p:nvGrpSpPr>
+      <p:grpSpPr>
+        <a:xfrm>
+          <a:off x="0" y="0"/>
+          <a:ext cx="0" cy="0"/>
+          <a:chOff x="0" y="0"/>
+          <a:chExt cx="0" cy="0"/>
+        </a:xfrm>
+      </p:grpSpPr>
+      <p:sp>
+        <p:nvSpPr>
+          <p:cNvPr id="2" name="Title 1" hidden="1">
+            <a:extLst>
+              <a:ext uri="{FF2B5EF4-FFF2-40B4-BE49-F238E27FC236}">
+                <a16:creationId xmlns:a16="http://schemas.microsoft.com/office/drawing/2014/main" id="{B6672C1D-04AF-5C93-AF31-F95CBE8A812A}"/>
+              </a:ext>
+            </a:extLst>
+          </p:cNvPr>
+          <p:cNvSpPr>
+            <a:spLocks noGrp="1"/>
+          </p:cNvSpPr>
+          <p:nvPr>
+            <p:ph type="title"/>
+          </p:nvPr>
+        </p:nvSpPr>
+        <p:spPr/>
+        <p:txBody>
+          <a:bodyPr/>
+          <a:lstStyle/>
+          <a:p>
+            <a:r>
+              <a:rPr lang="en-US" dirty="0"/>
+              <a:t>Cover Page</a:t>
+            </a:r>
+          </a:p>
+        </p:txBody>
+      </p:sp>
+      <p:sp>
+        <p:nvSpPr>
+          <p:cNvPr id="8" name="Title 1">
+            <a:extLst>
+              <a:ext uri="{FF2B5EF4-FFF2-40B4-BE49-F238E27FC236}">
+                <a16:creationId xmlns:a16="http://schemas.microsoft.com/office/drawing/2014/main" id="{ED2B5AE5-9694-665D-C1F4-7F4373A33DDF}"/>
+              </a:ext>
+            </a:extLst>
+          </p:cNvPr>
+          <p:cNvSpPr txBox="1">
+            <a:spLocks/>
+          </p:cNvSpPr>
+          <p:nvPr/>
+        </p:nvSpPr>
+        <p:spPr>
+          <a:xfrm>
+            <a:off x="1161975" y="151635"/>
+            <a:ext cx="7804774" cy="719719"/>
+          </a:xfrm>
+          <a:prstGeom prst="rect">
+            <a:avLst/>
+          </a:prstGeom>
+        </p:spPr>
+        <p:txBody>
+          <a:bodyPr vert="horz" lIns="0" tIns="0" rIns="0" bIns="0" rtlCol="0" anchor="t">
+            <a:noAutofit/>
+          </a:bodyPr>
+          <a:lstStyle>
+            <a:lvl1pPr algn="ctr" defTabSz="754380" rtl="0" eaLnBrk="1" latinLnBrk="0" hangingPunct="1">
+              <a:lnSpc>
+                <a:spcPct val="90000"/>
+              </a:lnSpc>
+              <a:spcBef>
+                <a:spcPct val="0"/>
+              </a:spcBef>
+              <a:buNone/>
+              <a:defRPr sz="4000" kern="1200">
+                <a:solidFill>
+                  <a:schemeClr val="tx1"/>
+                </a:solidFill>
+                <a:latin typeface="+mj-lt"/>
+                <a:ea typeface="+mj-ea"/>
+                <a:cs typeface="+mj-cs"/>
+              </a:defRPr>
+            </a:lvl1pPr>
+          </a:lstStyle>
+          <a:p>
+            <a:pPr>
+              <a:lnSpc>
+                <a:spcPct val="75000"/>
+              </a:lnSpc>
+            </a:pPr>
+            <a:r>
+              <a:rPr lang="en-US" sz="6000" u="sng">
+                <a:ln w="41275">
+                  <a:noFill/>
+                </a:ln>
+                <a:solidFill>
+                  <a:schemeClr val="accent2"/>
+                </a:solidFill>
+                <a:ea typeface="Source Sans Pro Black"/>
+              </a:rPr>
+              <a:t>Conventional Commits</a:t>
+            </a:r>
+            <a:endParaRPr lang="en-US" u="sng" dirty="0" err="1">
+              <a:solidFill>
+                <a:schemeClr val="accent2"/>
+              </a:solidFill>
+            </a:endParaRPr>
+          </a:p>
+          <a:p>
+            <a:pPr>
+              <a:lnSpc>
+                <a:spcPct val="75000"/>
+              </a:lnSpc>
+            </a:pPr>
+            <a:r>
+              <a:rPr lang="en-US" sz="3200">
+                <a:ln w="41275">
+                  <a:noFill/>
+                </a:ln>
+                <a:solidFill>
+                  <a:schemeClr val="tx1">
+                    <a:lumMod val="76000"/>
+                    <a:lumOff val="24000"/>
+                  </a:schemeClr>
+                </a:solidFill>
+                <a:ea typeface="Source Sans Pro Black"/>
+              </a:rPr>
+              <a:t>Git Commit Standards</a:t>
+            </a:r>
+            <a:endParaRPr lang="en-US" sz="3200" u="sng" dirty="0">
+              <a:ln w="41275">
+                <a:noFill/>
+              </a:ln>
+              <a:solidFill>
+                <a:schemeClr val="tx1">
+                  <a:lumMod val="76000"/>
+                  <a:lumOff val="24000"/>
+                </a:schemeClr>
+              </a:solidFill>
+              <a:ea typeface="Source Sans Pro Black"/>
+            </a:endParaRPr>
+          </a:p>
+        </p:txBody>
+      </p:sp>
+      <p:sp>
+        <p:nvSpPr>
+          <p:cNvPr id="32" name="TextBox 31">
+            <a:extLst>
+              <a:ext uri="{FF2B5EF4-FFF2-40B4-BE49-F238E27FC236}">
+                <a16:creationId xmlns:a16="http://schemas.microsoft.com/office/drawing/2014/main" id="{D461B505-22F9-5F3F-2A49-7DB9A0BAC8D0}"/>
+              </a:ext>
+            </a:extLst>
+          </p:cNvPr>
+          <p:cNvSpPr txBox="1"/>
+          <p:nvPr/>
+        </p:nvSpPr>
+        <p:spPr>
+          <a:xfrm>
+            <a:off x="2395248" y="1652683"/>
+            <a:ext cx="5257799" cy="1200329"/>
+          </a:xfrm>
+          <a:prstGeom prst="rect">
+            <a:avLst/>
+          </a:prstGeom>
+          <a:noFill/>
+        </p:spPr>
+        <p:txBody>
+          <a:bodyPr rot="0" spcFirstLastPara="0" vertOverflow="overflow" horzOverflow="overflow" vert="horz" wrap="square" lIns="91440" tIns="45720" rIns="91440" bIns="45720" numCol="1" spcCol="0" rtlCol="0" fromWordArt="0" anchor="t" anchorCtr="0" forceAA="0" compatLnSpc="1">
+            <a:prstTxWarp prst="textNoShape">
+              <a:avLst/>
+            </a:prstTxWarp>
+            <a:spAutoFit/>
+          </a:bodyPr>
+          <a:lstStyle/>
+          <a:p>
+            <a:pPr algn="ctr"/>
+            <a:br>
+              <a:rPr lang="en-GB" sz="3600" dirty="0">
+                <a:ea typeface="Source Sans Pro"/>
+              </a:rPr>
+            </a:br>
+            <a:endParaRPr lang="en-GB" sz="3600">
+              <a:solidFill>
+                <a:schemeClr val="bg2">
+                  <a:lumMod val="49000"/>
+                </a:schemeClr>
+              </a:solidFill>
+              <a:ea typeface="Source Sans Pro"/>
+            </a:endParaRPr>
+          </a:p>
+        </p:txBody>
+      </p:sp>
+      <p:cxnSp>
+        <p:nvCxnSpPr>
+          <p:cNvPr id="47" name="Straight Connector 46">
+            <a:extLst>
+              <a:ext uri="{FF2B5EF4-FFF2-40B4-BE49-F238E27FC236}">
+                <a16:creationId xmlns:a16="http://schemas.microsoft.com/office/drawing/2014/main" id="{8A41885E-E046-75DF-27E0-05EAE675EB6A}"/>
+              </a:ext>
+              <a:ext uri="{C183D7F6-B498-43B3-948B-1728B52AA6E4}">
+                <adec:decorative xmlns:adec="http://schemas.microsoft.com/office/drawing/2017/decorative" val="1"/>
+              </a:ext>
+            </a:extLst>
+          </p:cNvPr>
+          <p:cNvCxnSpPr>
+            <a:cxnSpLocks/>
+          </p:cNvCxnSpPr>
+          <p:nvPr/>
+        </p:nvCxnSpPr>
+        <p:spPr>
+          <a:xfrm>
+            <a:off x="839615" y="1271285"/>
+            <a:ext cx="8677751" cy="0"/>
+          </a:xfrm>
+          <a:prstGeom prst="line">
+            <a:avLst/>
+          </a:prstGeom>
+          <a:ln w="25400">
+            <a:solidFill>
+              <a:schemeClr val="accent2"/>
+            </a:solidFill>
+          </a:ln>
+        </p:spPr>
+        <p:style>
+          <a:lnRef idx="1">
+            <a:schemeClr val="accent1"/>
+          </a:lnRef>
+          <a:fillRef idx="0">
+            <a:schemeClr val="accent1"/>
+          </a:fillRef>
+          <a:effectRef idx="0">
+            <a:schemeClr val="accent1"/>
+          </a:effectRef>
+          <a:fontRef idx="minor">
+            <a:schemeClr val="tx1"/>
+          </a:fontRef>
+        </p:style>
+      </p:cxnSp>
+      <p:sp>
+        <p:nvSpPr>
+          <p:cNvPr id="6" name="TextBox 5">
+            <a:extLst>
+              <a:ext uri="{FF2B5EF4-FFF2-40B4-BE49-F238E27FC236}">
+                <a16:creationId xmlns:a16="http://schemas.microsoft.com/office/drawing/2014/main" id="{C096E87A-9787-C9F0-2B5A-72B6AD3B98DF}"/>
+              </a:ext>
+            </a:extLst>
+          </p:cNvPr>
+          <p:cNvSpPr txBox="1"/>
+          <p:nvPr/>
+        </p:nvSpPr>
+        <p:spPr>
+          <a:xfrm>
+            <a:off x="843845" y="6864303"/>
+            <a:ext cx="9217376" cy="1016560"/>
+          </a:xfrm>
+          <a:prstGeom prst="rect">
+            <a:avLst/>
+          </a:prstGeom>
+          <a:noFill/>
+        </p:spPr>
+        <p:txBody>
+          <a:bodyPr rot="0" spcFirstLastPara="0" vertOverflow="overflow" horzOverflow="overflow" vert="horz" wrap="square" lIns="91440" tIns="45720" rIns="91440" bIns="45720" numCol="1" spcCol="0" rtlCol="0" fromWordArt="0" anchor="t" anchorCtr="0" forceAA="0" compatLnSpc="1">
+            <a:prstTxWarp prst="textNoShape">
+              <a:avLst/>
+            </a:prstTxWarp>
+            <a:spAutoFit/>
+          </a:bodyPr>
+          <a:lstStyle/>
+          <a:p>
+            <a:r>
+              <a:rPr lang="en-GB" sz="2000" baseline="0">
+                <a:latin typeface="Source Sans Pro"/>
+              </a:rPr>
+              <a:t>Document reference:</a:t>
+            </a:r>
+            <a:r>
+              <a:rPr sz="2000">
+                <a:latin typeface="Source Sans Pro"/>
+                <a:ea typeface="Source Sans Pro"/>
+                <a:cs typeface="Source Sans Pro"/>
+              </a:rPr>
+              <a:t>​</a:t>
+            </a:r>
+            <a:br>
+              <a:rPr sz="2000" dirty="0">
+                <a:latin typeface="Source Sans Pro"/>
+                <a:ea typeface="Source Sans Pro"/>
+                <a:cs typeface="Source Sans Pro"/>
+              </a:rPr>
+            </a:br>
+            <a:r>
+              <a:rPr lang="en-GB" sz="2000" strike="noStrike" baseline="0" dirty="0">
+                <a:ea typeface="+mn-lt"/>
+                <a:cs typeface="+mn-lt"/>
+                <a:hlinkClick r:id="rId2">
+                  <a:extLst>
+                    <a:ext uri="{A12FA001-AC4F-418D-AE19-62706E023703}">
+                      <ahyp:hlinkClr xmlns:ahyp="http://schemas.microsoft.com/office/drawing/2018/hyperlinkcolor" val="tx"/>
+                    </a:ext>
+                  </a:extLst>
+                </a:hlinkClick>
+              </a:rPr>
+              <a:t>https://www.</a:t>
+            </a:r>
+            <a:r>
+              <a:rPr lang="en-GB" sz="2000" dirty="0">
+                <a:ea typeface="+mn-lt"/>
+                <a:cs typeface="+mn-lt"/>
+                <a:hlinkClick r:id="rId2">
+                  <a:extLst>
+                    <a:ext uri="{A12FA001-AC4F-418D-AE19-62706E023703}">
+                      <ahyp:hlinkClr xmlns:ahyp="http://schemas.microsoft.com/office/drawing/2018/hyperlinkcolor" val="tx"/>
+                    </a:ext>
+                  </a:extLst>
+                </a:hlinkClick>
+              </a:rPr>
+              <a:t>conventionalcommits</a:t>
+            </a:r>
+            <a:r>
+              <a:rPr lang="en-GB" sz="2000" strike="noStrike" baseline="0" dirty="0">
+                <a:ea typeface="+mn-lt"/>
+                <a:cs typeface="+mn-lt"/>
+                <a:hlinkClick r:id="rId2">
+                  <a:extLst>
+                    <a:ext uri="{A12FA001-AC4F-418D-AE19-62706E023703}">
+                      <ahyp:hlinkClr xmlns:ahyp="http://schemas.microsoft.com/office/drawing/2018/hyperlinkcolor" val="tx"/>
+                    </a:ext>
+                  </a:extLst>
+                </a:hlinkClick>
+              </a:rPr>
+              <a:t>.</a:t>
+            </a:r>
+            <a:r>
+              <a:rPr lang="en-GB" sz="2000" dirty="0">
+                <a:ea typeface="+mn-lt"/>
+                <a:cs typeface="+mn-lt"/>
+                <a:hlinkClick r:id="rId2">
+                  <a:extLst>
+                    <a:ext uri="{A12FA001-AC4F-418D-AE19-62706E023703}">
+                      <ahyp:hlinkClr xmlns:ahyp="http://schemas.microsoft.com/office/drawing/2018/hyperlinkcolor" val="tx"/>
+                    </a:ext>
+                  </a:extLst>
+                </a:hlinkClick>
+              </a:rPr>
+              <a:t>org</a:t>
+            </a:r>
+            <a:r>
+              <a:rPr lang="en-GB" sz="2000" strike="noStrike" baseline="0" dirty="0">
+                <a:ea typeface="+mn-lt"/>
+                <a:cs typeface="+mn-lt"/>
+                <a:hlinkClick r:id="rId2">
+                  <a:extLst>
+                    <a:ext uri="{A12FA001-AC4F-418D-AE19-62706E023703}">
+                      <ahyp:hlinkClr xmlns:ahyp="http://schemas.microsoft.com/office/drawing/2018/hyperlinkcolor" val="tx"/>
+                    </a:ext>
+                  </a:extLst>
+                </a:hlinkClick>
+              </a:rPr>
+              <a:t>/</a:t>
+            </a:r>
+            <a:r>
+              <a:rPr lang="en-GB" sz="2000" dirty="0">
+                <a:ea typeface="+mn-lt"/>
+                <a:cs typeface="+mn-lt"/>
+                <a:hlinkClick r:id="rId2">
+                  <a:extLst>
+                    <a:ext uri="{A12FA001-AC4F-418D-AE19-62706E023703}">
+                      <ahyp:hlinkClr xmlns:ahyp="http://schemas.microsoft.com/office/drawing/2018/hyperlinkcolor" val="tx"/>
+                    </a:ext>
+                  </a:extLst>
+                </a:hlinkClick>
+              </a:rPr>
+              <a:t>en</a:t>
+            </a:r>
+            <a:r>
+              <a:rPr lang="en-GB" sz="2000" strike="noStrike" baseline="0" dirty="0">
+                <a:ea typeface="+mn-lt"/>
+                <a:cs typeface="+mn-lt"/>
+                <a:hlinkClick r:id="rId2">
+                  <a:extLst>
+                    <a:ext uri="{A12FA001-AC4F-418D-AE19-62706E023703}">
+                      <ahyp:hlinkClr xmlns:ahyp="http://schemas.microsoft.com/office/drawing/2018/hyperlinkcolor" val="tx"/>
+                    </a:ext>
+                  </a:extLst>
+                </a:hlinkClick>
+              </a:rPr>
+              <a:t>/</a:t>
+            </a:r>
+            <a:r>
+              <a:rPr lang="en-GB" sz="2000" dirty="0">
+                <a:ea typeface="+mn-lt"/>
+                <a:cs typeface="+mn-lt"/>
+                <a:hlinkClick r:id="rId2">
+                  <a:extLst>
+                    <a:ext uri="{A12FA001-AC4F-418D-AE19-62706E023703}">
+                      <ahyp:hlinkClr xmlns:ahyp="http://schemas.microsoft.com/office/drawing/2018/hyperlinkcolor" val="tx"/>
+                    </a:ext>
+                  </a:extLst>
+                </a:hlinkClick>
+              </a:rPr>
+              <a:t>v1.0.0-beta.4/#specification</a:t>
+            </a:r>
+            <a:endParaRPr lang="en-GB"/>
+          </a:p>
+          <a:p>
+            <a:pPr algn="ctr"/>
+            <a:endParaRPr lang="en-GB"/>
+          </a:p>
+        </p:txBody>
+      </p:sp>
+      <p:sp>
+        <p:nvSpPr>
+          <p:cNvPr id="3" name="TextBox 2">
+            <a:extLst>
+              <a:ext uri="{FF2B5EF4-FFF2-40B4-BE49-F238E27FC236}">
+                <a16:creationId xmlns:a16="http://schemas.microsoft.com/office/drawing/2014/main" id="{282E0107-6524-BF5C-CACE-BD5C27E36BA5}"/>
+              </a:ext>
+            </a:extLst>
+          </p:cNvPr>
+          <p:cNvSpPr txBox="1"/>
+          <p:nvPr/>
+        </p:nvSpPr>
+        <p:spPr>
+          <a:xfrm>
+            <a:off x="617576" y="1781609"/>
+            <a:ext cx="8812826" cy="5325432"/>
+          </a:xfrm>
+          <a:prstGeom prst="rect">
+            <a:avLst/>
+          </a:prstGeom>
+          <a:noFill/>
+        </p:spPr>
+        <p:txBody>
+          <a:bodyPr rot="0" spcFirstLastPara="0" vertOverflow="overflow" horzOverflow="overflow" vert="horz" wrap="square" lIns="91440" tIns="45720" rIns="91440" bIns="45720" numCol="1" spcCol="0" rtlCol="0" fromWordArt="0" anchor="t" anchorCtr="0" forceAA="0" compatLnSpc="1">
+            <a:prstTxWarp prst="textNoShape">
+              <a:avLst/>
+            </a:prstTxWarp>
+            <a:spAutoFit/>
+          </a:bodyPr>
+          <a:lstStyle/>
+          <a:p>
+            <a:pPr marL="342900">
+              <a:buFont typeface="Wingdings"/>
+              <a:buChar char="v"/>
+            </a:pPr>
+            <a:r>
+              <a:rPr lang="en-US" sz="2000" b="1">
+                <a:solidFill>
+                  <a:srgbClr val="24292E"/>
+                </a:solidFill>
+                <a:latin typeface="-apple-system"/>
+                <a:ea typeface="-apple-system"/>
+                <a:cs typeface="-apple-system"/>
+              </a:rPr>
+              <a:t>fix - </a:t>
+            </a:r>
+            <a:r>
+              <a:rPr lang="en-US" sz="2000">
+                <a:solidFill>
+                  <a:srgbClr val="24292E"/>
+                </a:solidFill>
+                <a:latin typeface="-apple-system"/>
+                <a:ea typeface="-apple-system"/>
+                <a:cs typeface="-apple-system"/>
+              </a:rPr>
+              <a:t>a commit noting a fix to the codebase</a:t>
+            </a:r>
+            <a:endParaRPr lang="en-US">
+              <a:ea typeface="Source Sans Pro"/>
+            </a:endParaRPr>
+          </a:p>
+          <a:p>
+            <a:pPr marL="342900">
+              <a:buFont typeface="Wingdings"/>
+              <a:buChar char="v"/>
+            </a:pPr>
+            <a:r>
+              <a:rPr lang="en-US" sz="2000" b="1">
+                <a:solidFill>
+                  <a:srgbClr val="24292E"/>
+                </a:solidFill>
+                <a:latin typeface="-apple-system"/>
+                <a:ea typeface="-apple-system"/>
+                <a:cs typeface="-apple-system"/>
+              </a:rPr>
+              <a:t>feat -</a:t>
+            </a:r>
+            <a:r>
+              <a:rPr lang="en-US" sz="2000" b="0" i="0">
+                <a:solidFill>
+                  <a:srgbClr val="24292E"/>
+                </a:solidFill>
+                <a:latin typeface="-apple-system"/>
+                <a:ea typeface="-apple-system"/>
+                <a:cs typeface="-apple-system"/>
+              </a:rPr>
+              <a:t> a commit of the </a:t>
+            </a:r>
+            <a:r>
+              <a:rPr lang="en-US" sz="2000" b="0" i="1">
+                <a:solidFill>
+                  <a:srgbClr val="24292E"/>
+                </a:solidFill>
+                <a:latin typeface="-apple-system"/>
+                <a:ea typeface="-apple-system"/>
+                <a:cs typeface="-apple-system"/>
+              </a:rPr>
+              <a:t>type</a:t>
+            </a:r>
+            <a:r>
+              <a:rPr lang="en-US" sz="2000" b="0" i="0">
+                <a:solidFill>
+                  <a:srgbClr val="24292E"/>
+                </a:solidFill>
+                <a:latin typeface="-apple-system"/>
+                <a:ea typeface="-apple-system"/>
+                <a:cs typeface="-apple-system"/>
+              </a:rPr>
+              <a:t> feat introduces a new feature to the codebase</a:t>
+            </a:r>
+            <a:endParaRPr lang="en-US" sz="2000">
+              <a:solidFill>
+                <a:srgbClr val="24292E"/>
+              </a:solidFill>
+              <a:latin typeface="-apple-system"/>
+              <a:ea typeface="-apple-system"/>
+              <a:cs typeface="-apple-system"/>
+            </a:endParaRPr>
+          </a:p>
+          <a:p>
+            <a:pPr marL="342900">
+              <a:buFont typeface="Wingdings"/>
+              <a:buChar char="v"/>
+            </a:pPr>
+            <a:r>
+              <a:rPr lang="en-US" sz="2000" b="1" i="0" dirty="0">
+                <a:solidFill>
+                  <a:srgbClr val="24292E"/>
+                </a:solidFill>
+                <a:latin typeface="-apple-system"/>
+                <a:ea typeface="-apple-system"/>
+                <a:cs typeface="-apple-system"/>
+              </a:rPr>
+              <a:t>BREAKING CHANGE</a:t>
+            </a:r>
+            <a:r>
+              <a:rPr lang="en-US" sz="2000" b="1" dirty="0">
+                <a:solidFill>
+                  <a:srgbClr val="24292E"/>
+                </a:solidFill>
+                <a:latin typeface="-apple-system"/>
+                <a:ea typeface="-apple-system"/>
+                <a:cs typeface="-apple-system"/>
+              </a:rPr>
+              <a:t> -</a:t>
+            </a:r>
+            <a:r>
+              <a:rPr lang="en-US" sz="2000" b="0" i="0" dirty="0">
+                <a:solidFill>
+                  <a:srgbClr val="24292E"/>
+                </a:solidFill>
+                <a:latin typeface="-apple-system"/>
+                <a:ea typeface="-apple-system"/>
+                <a:cs typeface="-apple-system"/>
+              </a:rPr>
+              <a:t> </a:t>
+            </a:r>
+            <a:r>
+              <a:rPr lang="en-US" sz="2000" dirty="0">
+                <a:solidFill>
+                  <a:srgbClr val="24292E"/>
+                </a:solidFill>
+                <a:latin typeface="-apple-system"/>
+                <a:ea typeface="-apple-system"/>
+                <a:cs typeface="-apple-system"/>
+              </a:rPr>
+              <a:t>specified at the start or end of the commit, noting the </a:t>
+            </a:r>
+            <a:r>
+              <a:rPr lang="en-US" sz="2000">
+                <a:solidFill>
+                  <a:srgbClr val="24292E"/>
+                </a:solidFill>
+                <a:latin typeface="-apple-system"/>
+                <a:ea typeface="-apple-system"/>
+                <a:cs typeface="-apple-system"/>
+              </a:rPr>
+              <a:t>commit will cause changes that will break changes such as to the API.</a:t>
+            </a:r>
+          </a:p>
+          <a:p>
+            <a:pPr marL="342900">
+              <a:buFont typeface="Wingdings"/>
+              <a:buChar char="v"/>
+            </a:pPr>
+            <a:r>
+              <a:rPr lang="en-US" sz="2000" dirty="0">
+                <a:solidFill>
+                  <a:srgbClr val="24292E"/>
+                </a:solidFill>
+                <a:latin typeface="-apple-system"/>
+                <a:ea typeface="-apple-system"/>
+                <a:cs typeface="-apple-system"/>
+              </a:rPr>
+              <a:t>! </a:t>
+            </a:r>
+            <a:r>
+              <a:rPr lang="en-US" sz="2000" b="1" dirty="0">
+                <a:solidFill>
+                  <a:srgbClr val="24292E"/>
+                </a:solidFill>
+                <a:latin typeface="-apple-system"/>
+                <a:ea typeface="-apple-system"/>
+                <a:cs typeface="-apple-system"/>
+              </a:rPr>
+              <a:t>- </a:t>
+            </a:r>
+            <a:r>
+              <a:rPr lang="en-US" sz="2000" dirty="0">
+                <a:solidFill>
+                  <a:srgbClr val="24292E"/>
+                </a:solidFill>
+                <a:latin typeface="-apple-system"/>
+                <a:ea typeface="-apple-system"/>
+                <a:cs typeface="-apple-system"/>
+              </a:rPr>
+              <a:t>can be used together with commit prefixes to indicate there's a BREAKING CHANGE</a:t>
+            </a:r>
+          </a:p>
+          <a:p>
+            <a:pPr marL="342900">
+              <a:buFont typeface="Wingdings"/>
+              <a:buChar char="v"/>
+            </a:pPr>
+            <a:r>
+              <a:rPr lang="en-US" sz="2000">
+                <a:solidFill>
+                  <a:srgbClr val="24292E"/>
+                </a:solidFill>
+                <a:latin typeface="-apple-system"/>
+                <a:ea typeface="-apple-system"/>
+                <a:cs typeface="-apple-system"/>
+              </a:rPr>
+              <a:t>Other kinds such as</a:t>
+            </a:r>
+          </a:p>
+          <a:p>
+            <a:pPr marL="852170" lvl="1">
+              <a:buFont typeface="Courier New"/>
+              <a:buChar char="o"/>
+            </a:pPr>
+            <a:r>
+              <a:rPr lang="en-US" sz="2000" b="1" dirty="0">
+                <a:solidFill>
+                  <a:srgbClr val="24292E"/>
+                </a:solidFill>
+                <a:latin typeface="-apple-system"/>
+                <a:ea typeface="-apple-system"/>
+                <a:cs typeface="-apple-system"/>
+              </a:rPr>
+              <a:t>chore – </a:t>
+            </a:r>
+            <a:r>
+              <a:rPr lang="en-US" sz="2000" dirty="0">
+                <a:solidFill>
+                  <a:srgbClr val="24292E"/>
+                </a:solidFill>
+                <a:latin typeface="-apple-system"/>
+                <a:ea typeface="-apple-system"/>
+                <a:cs typeface="-apple-system"/>
+              </a:rPr>
+              <a:t>a commit that does not affect code changes, e.g. adding comments</a:t>
+            </a:r>
+          </a:p>
+          <a:p>
+            <a:pPr marL="852170" lvl="1">
+              <a:buFont typeface="Courier New"/>
+              <a:buChar char="o"/>
+            </a:pPr>
+            <a:r>
+              <a:rPr lang="en-US" sz="2000" b="1">
+                <a:solidFill>
+                  <a:srgbClr val="24292E"/>
+                </a:solidFill>
+                <a:latin typeface="-apple-system"/>
+                <a:ea typeface="-apple-system"/>
+                <a:cs typeface="-apple-system"/>
+              </a:rPr>
+              <a:t>docs – </a:t>
+            </a:r>
+            <a:r>
+              <a:rPr lang="en-US" sz="2000">
+                <a:solidFill>
+                  <a:srgbClr val="24292E"/>
+                </a:solidFill>
+                <a:latin typeface="-apple-system"/>
+                <a:ea typeface="-apple-system"/>
+                <a:cs typeface="-apple-system"/>
+              </a:rPr>
+              <a:t>a commit to update documentation</a:t>
+            </a:r>
+          </a:p>
+          <a:p>
+            <a:pPr marL="852170" lvl="1">
+              <a:buFont typeface="Courier New"/>
+              <a:buChar char="o"/>
+            </a:pPr>
+            <a:r>
+              <a:rPr lang="en-US" sz="2000" b="1" dirty="0">
+                <a:solidFill>
+                  <a:srgbClr val="24292E"/>
+                </a:solidFill>
+                <a:latin typeface="-apple-system"/>
+                <a:ea typeface="-apple-system"/>
+                <a:cs typeface="-apple-system"/>
+              </a:rPr>
+              <a:t>style – </a:t>
+            </a:r>
+            <a:r>
+              <a:rPr lang="en-US" sz="2000" dirty="0">
+                <a:solidFill>
+                  <a:srgbClr val="24292E"/>
+                </a:solidFill>
+                <a:latin typeface="-apple-system"/>
+                <a:ea typeface="-apple-system"/>
+                <a:cs typeface="-apple-system"/>
+              </a:rPr>
+              <a:t>a commit noting visual changes such as </a:t>
+            </a:r>
+            <a:r>
+              <a:rPr lang="en-US" sz="2000" dirty="0" err="1">
+                <a:solidFill>
+                  <a:srgbClr val="24292E"/>
+                </a:solidFill>
+                <a:latin typeface="-apple-system"/>
+                <a:ea typeface="-apple-system"/>
+                <a:cs typeface="-apple-system"/>
+              </a:rPr>
+              <a:t>css</a:t>
+            </a:r>
+            <a:endParaRPr lang="en-US" sz="2000" dirty="0">
+              <a:solidFill>
+                <a:srgbClr val="24292E"/>
+              </a:solidFill>
+              <a:latin typeface="-apple-system"/>
+              <a:ea typeface="-apple-system"/>
+              <a:cs typeface="-apple-system"/>
+            </a:endParaRPr>
+          </a:p>
+          <a:p>
+            <a:pPr marL="852170" lvl="1">
+              <a:buFont typeface="Courier New"/>
+              <a:buChar char="o"/>
+            </a:pPr>
+            <a:r>
+              <a:rPr lang="en-US" sz="2000" b="1">
+                <a:solidFill>
+                  <a:srgbClr val="24292E"/>
+                </a:solidFill>
+                <a:latin typeface="-apple-system"/>
+                <a:ea typeface="-apple-system"/>
+                <a:cs typeface="-apple-system"/>
+              </a:rPr>
+              <a:t>refactor – </a:t>
+            </a:r>
+            <a:r>
+              <a:rPr lang="en-US" sz="2000">
+                <a:solidFill>
+                  <a:srgbClr val="24292E"/>
+                </a:solidFill>
+                <a:latin typeface="-apple-system"/>
+                <a:ea typeface="-apple-system"/>
+                <a:cs typeface="-apple-system"/>
+              </a:rPr>
+              <a:t>a commit noting a rework in the codebase</a:t>
+            </a:r>
+          </a:p>
+          <a:p>
+            <a:pPr marL="852170" lvl="1">
+              <a:buFont typeface="Courier New"/>
+              <a:buChar char="o"/>
+            </a:pPr>
+            <a:r>
+              <a:rPr lang="en-US" sz="2000" b="1">
+                <a:solidFill>
+                  <a:srgbClr val="24292E"/>
+                </a:solidFill>
+                <a:latin typeface="-apple-system"/>
+                <a:ea typeface="-apple-system"/>
+                <a:cs typeface="-apple-system"/>
+              </a:rPr>
+              <a:t>perf – </a:t>
+            </a:r>
+            <a:r>
+              <a:rPr lang="en-US" sz="2000">
+                <a:solidFill>
+                  <a:srgbClr val="24292E"/>
+                </a:solidFill>
+                <a:latin typeface="-apple-system"/>
+                <a:ea typeface="-apple-system"/>
+                <a:cs typeface="-apple-system"/>
+              </a:rPr>
+              <a:t>a commit noting a performance change such as performance improvements</a:t>
+            </a:r>
+          </a:p>
+          <a:p>
+            <a:pPr marL="852170" lvl="1">
+              <a:buFont typeface="Courier New"/>
+              <a:buChar char="o"/>
+            </a:pPr>
+            <a:r>
+              <a:rPr lang="en-US" sz="2000" b="1">
+                <a:solidFill>
+                  <a:srgbClr val="24292E"/>
+                </a:solidFill>
+                <a:latin typeface="-apple-system"/>
+                <a:ea typeface="-apple-system"/>
+                <a:cs typeface="-apple-system"/>
+              </a:rPr>
+              <a:t>test – </a:t>
+            </a:r>
+            <a:r>
+              <a:rPr lang="en-US" sz="2000">
+                <a:solidFill>
+                  <a:srgbClr val="24292E"/>
+                </a:solidFill>
+                <a:latin typeface="-apple-system"/>
+                <a:ea typeface="-apple-system"/>
+                <a:cs typeface="-apple-system"/>
+              </a:rPr>
+              <a:t>a commit noting changes or additions to the test cases</a:t>
+            </a:r>
+          </a:p>
+          <a:p>
+            <a:pPr marL="852170" lvl="1">
+              <a:buFont typeface="Courier New"/>
+              <a:buChar char="o"/>
+            </a:pPr>
+            <a:r>
+              <a:rPr lang="en-US" sz="2000" b="0" i="0">
+                <a:solidFill>
+                  <a:srgbClr val="24292E"/>
+                </a:solidFill>
+                <a:latin typeface="-apple-system"/>
+                <a:ea typeface="-apple-system"/>
+                <a:cs typeface="-apple-system"/>
+              </a:rPr>
+              <a:t>and others.</a:t>
+            </a:r>
+            <a:endParaRPr lang="en-US" sz="2000">
+              <a:solidFill>
+                <a:srgbClr val="24292E"/>
+              </a:solidFill>
+              <a:latin typeface="-apple-system"/>
+            </a:endParaRPr>
+          </a:p>
+          <a:p>
+            <a:pPr algn="ctr"/>
+            <a:endParaRPr lang="en-GB"/>
+          </a:p>
+        </p:txBody>
+      </p:sp>
+      <p:pic>
+        <p:nvPicPr>
+          <p:cNvPr id="4" name="Picture 3" descr="A cartoon character reading a book&#10;&#10;AI-generated content may be incorrect.">
+            <a:extLst>
+              <a:ext uri="{FF2B5EF4-FFF2-40B4-BE49-F238E27FC236}">
+                <a16:creationId xmlns:a16="http://schemas.microsoft.com/office/drawing/2014/main" id="{3F4A70C2-C3D3-ADEE-2CCD-CE0A093F7396}"/>
+              </a:ext>
+            </a:extLst>
+          </p:cNvPr>
+          <p:cNvPicPr>
+            <a:picLocks noChangeAspect="1"/>
+          </p:cNvPicPr>
+          <p:nvPr/>
+        </p:nvPicPr>
+        <p:blipFill>
+          <a:blip r:embed="rId3"/>
+          <a:stretch>
+            <a:fillRect/>
+          </a:stretch>
+        </p:blipFill>
+        <p:spPr>
+          <a:xfrm>
+            <a:off x="8331537" y="3688422"/>
+            <a:ext cx="1726863" cy="1751264"/>
+          </a:xfrm>
+          <a:prstGeom prst="rect">
+            <a:avLst/>
+          </a:prstGeom>
+          <a:ln>
+            <a:noFill/>
+          </a:ln>
+          <a:effectLst>
+            <a:softEdge rad="112500"/>
+          </a:effectLst>
+        </p:spPr>
+      </p:pic>
+    </p:spTree>
+    <p:extLst>
+      <p:ext uri="{BB962C8B-B14F-4D97-AF65-F5344CB8AC3E}">
+        <p14:creationId xmlns:p14="http://schemas.microsoft.com/office/powerpoint/2010/main" val="3071021880"/>
+      </p:ext>
+    </p:extLst>
+  </p:cSld>
+  <p:clrMapOvr>
+    <a:masterClrMapping/>
+  </p:clrMapOvr>
+</p:sld>
+</file>
+
+<file path=ppt/slides/slide11.xml><?xml version="1.0" encoding="utf-8"?>
+<p:sld xmlns:a="http://schemas.openxmlformats.org/drawingml/2006/main" xmlns:r="http://schemas.openxmlformats.org/officeDocument/2006/relationships" xmlns:p="http://schemas.openxmlformats.org/presentationml/2006/main">
+  <p:cSld>
+    <p:bg>
+      <p:bgPr>
+        <a:solidFill>
+          <a:schemeClr val="bg1"/>
+        </a:solidFill>
+        <a:effectLst/>
+      </p:bgPr>
+    </p:bg>
+    <p:spTree>
+      <p:nvGrpSpPr>
+        <p:cNvPr id="1" name="">
+          <a:extLst>
+            <a:ext uri="{FF2B5EF4-FFF2-40B4-BE49-F238E27FC236}">
               <a16:creationId xmlns:a16="http://schemas.microsoft.com/office/drawing/2014/main" id="{729415D0-0171-1124-BD38-1882015A14FA}"/>
             </a:ext>
           </a:extLst>
@@ -14595,7 +15540,7 @@
 </p:sld>
 </file>
 
-<file path=ppt/slides/slide11.xml><?xml version="1.0" encoding="utf-8"?>
+<file path=ppt/slides/slide12.xml><?xml version="1.0" encoding="utf-8"?>
 <p:sld xmlns:a="http://schemas.openxmlformats.org/drawingml/2006/main" xmlns:r="http://schemas.openxmlformats.org/officeDocument/2006/relationships" xmlns:p="http://schemas.openxmlformats.org/presentationml/2006/main">
   <p:cSld>
     <p:bg>
@@ -14927,7 +15872,7 @@
 </p:sld>
 </file>
 
-<file path=ppt/slides/slide12.xml><?xml version="1.0" encoding="utf-8"?>
+<file path=ppt/slides/slide13.xml><?xml version="1.0" encoding="utf-8"?>
 <p:sld xmlns:a="http://schemas.openxmlformats.org/drawingml/2006/main" xmlns:r="http://schemas.openxmlformats.org/officeDocument/2006/relationships" xmlns:p="http://schemas.openxmlformats.org/presentationml/2006/main">
   <p:cSld>
     <p:bg>
@@ -15181,10 +16126,2173 @@
           </a:fontRef>
         </p:style>
       </p:cxnSp>
+      <p:pic>
+        <p:nvPicPr>
+          <p:cNvPr id="6" name="Picture 5">
+            <a:extLst>
+              <a:ext uri="{FF2B5EF4-FFF2-40B4-BE49-F238E27FC236}">
+                <a16:creationId xmlns:a16="http://schemas.microsoft.com/office/drawing/2014/main" id="{1E61713F-62B1-5597-71BA-84781F460291}"/>
+              </a:ext>
+            </a:extLst>
+          </p:cNvPr>
+          <p:cNvPicPr>
+            <a:picLocks noChangeAspect="1"/>
+          </p:cNvPicPr>
+          <p:nvPr/>
+        </p:nvPicPr>
+        <p:blipFill>
+          <a:blip r:embed="rId2"/>
+          <a:stretch>
+            <a:fillRect/>
+          </a:stretch>
+        </p:blipFill>
+        <p:spPr>
+          <a:xfrm>
+            <a:off x="136934" y="1428108"/>
+            <a:ext cx="9774426" cy="5253754"/>
+          </a:xfrm>
+          <a:prstGeom prst="rect">
+            <a:avLst/>
+          </a:prstGeom>
+        </p:spPr>
+      </p:pic>
     </p:spTree>
     <p:extLst>
       <p:ext uri="{BB962C8B-B14F-4D97-AF65-F5344CB8AC3E}">
         <p14:creationId xmlns:p14="http://schemas.microsoft.com/office/powerpoint/2010/main" val="2273134353"/>
+      </p:ext>
+    </p:extLst>
+  </p:cSld>
+  <p:clrMapOvr>
+    <a:masterClrMapping/>
+  </p:clrMapOvr>
+</p:sld>
+</file>
+
+<file path=ppt/slides/slide14.xml><?xml version="1.0" encoding="utf-8"?>
+<p:sld xmlns:a="http://schemas.openxmlformats.org/drawingml/2006/main" xmlns:r="http://schemas.openxmlformats.org/officeDocument/2006/relationships" xmlns:p="http://schemas.openxmlformats.org/presentationml/2006/main">
+  <p:cSld>
+    <p:bg>
+      <p:bgPr>
+        <a:solidFill>
+          <a:schemeClr val="bg1"/>
+        </a:solidFill>
+        <a:effectLst/>
+      </p:bgPr>
+    </p:bg>
+    <p:spTree>
+      <p:nvGrpSpPr>
+        <p:cNvPr id="1" name="">
+          <a:extLst>
+            <a:ext uri="{FF2B5EF4-FFF2-40B4-BE49-F238E27FC236}">
+              <a16:creationId xmlns:a16="http://schemas.microsoft.com/office/drawing/2014/main" id="{2EE5D59B-710F-1042-253B-F5265E92FD6A}"/>
+            </a:ext>
+          </a:extLst>
+        </p:cNvPr>
+        <p:cNvGrpSpPr/>
+        <p:nvPr/>
+      </p:nvGrpSpPr>
+      <p:grpSpPr>
+        <a:xfrm>
+          <a:off x="0" y="0"/>
+          <a:ext cx="0" cy="0"/>
+          <a:chOff x="0" y="0"/>
+          <a:chExt cx="0" cy="0"/>
+        </a:xfrm>
+      </p:grpSpPr>
+      <p:sp>
+        <p:nvSpPr>
+          <p:cNvPr id="2" name="Title 1" hidden="1">
+            <a:extLst>
+              <a:ext uri="{FF2B5EF4-FFF2-40B4-BE49-F238E27FC236}">
+                <a16:creationId xmlns:a16="http://schemas.microsoft.com/office/drawing/2014/main" id="{A4810DC1-8283-3D2C-CB45-090FF05AD8F6}"/>
+              </a:ext>
+            </a:extLst>
+          </p:cNvPr>
+          <p:cNvSpPr>
+            <a:spLocks noGrp="1"/>
+          </p:cNvSpPr>
+          <p:nvPr>
+            <p:ph type="title"/>
+          </p:nvPr>
+        </p:nvSpPr>
+        <p:spPr/>
+        <p:txBody>
+          <a:bodyPr/>
+          <a:lstStyle/>
+          <a:p>
+            <a:r>
+              <a:rPr lang="en-US" dirty="0"/>
+              <a:t>Cover Page</a:t>
+            </a:r>
+          </a:p>
+        </p:txBody>
+      </p:sp>
+      <p:sp>
+        <p:nvSpPr>
+          <p:cNvPr id="8" name="Title 1">
+            <a:extLst>
+              <a:ext uri="{FF2B5EF4-FFF2-40B4-BE49-F238E27FC236}">
+                <a16:creationId xmlns:a16="http://schemas.microsoft.com/office/drawing/2014/main" id="{DE48E057-AAF5-0420-753B-E27E2B25D90A}"/>
+              </a:ext>
+            </a:extLst>
+          </p:cNvPr>
+          <p:cNvSpPr txBox="1">
+            <a:spLocks/>
+          </p:cNvSpPr>
+          <p:nvPr/>
+        </p:nvSpPr>
+        <p:spPr>
+          <a:xfrm>
+            <a:off x="1126813" y="3166481"/>
+            <a:ext cx="7804774" cy="719719"/>
+          </a:xfrm>
+          <a:prstGeom prst="rect">
+            <a:avLst/>
+          </a:prstGeom>
+        </p:spPr>
+        <p:txBody>
+          <a:bodyPr vert="horz" lIns="0" tIns="0" rIns="0" bIns="0" rtlCol="0" anchor="t">
+            <a:noAutofit/>
+          </a:bodyPr>
+          <a:lstStyle>
+            <a:lvl1pPr algn="ctr" defTabSz="754380" rtl="0" eaLnBrk="1" latinLnBrk="0" hangingPunct="1">
+              <a:lnSpc>
+                <a:spcPct val="90000"/>
+              </a:lnSpc>
+              <a:spcBef>
+                <a:spcPct val="0"/>
+              </a:spcBef>
+              <a:buNone/>
+              <a:defRPr sz="4000" kern="1200">
+                <a:solidFill>
+                  <a:schemeClr val="tx1"/>
+                </a:solidFill>
+                <a:latin typeface="+mj-lt"/>
+                <a:ea typeface="+mj-ea"/>
+                <a:cs typeface="+mj-cs"/>
+              </a:defRPr>
+            </a:lvl1pPr>
+          </a:lstStyle>
+          <a:p>
+            <a:pPr>
+              <a:lnSpc>
+                <a:spcPct val="75000"/>
+              </a:lnSpc>
+            </a:pPr>
+            <a:r>
+              <a:rPr lang="en-US" sz="16000" dirty="0">
+                <a:ln w="41275">
+                  <a:noFill/>
+                </a:ln>
+                <a:solidFill>
+                  <a:schemeClr val="tx1">
+                    <a:lumMod val="76000"/>
+                    <a:lumOff val="24000"/>
+                  </a:schemeClr>
+                </a:solidFill>
+                <a:ea typeface="Source Sans Pro Black"/>
+              </a:rPr>
+              <a:t>Q&amp;A</a:t>
+            </a:r>
+          </a:p>
+        </p:txBody>
+      </p:sp>
+      <p:pic>
+        <p:nvPicPr>
+          <p:cNvPr id="5" name="Picture 4">
+            <a:extLst>
+              <a:ext uri="{FF2B5EF4-FFF2-40B4-BE49-F238E27FC236}">
+                <a16:creationId xmlns:a16="http://schemas.microsoft.com/office/drawing/2014/main" id="{9A9593A8-7974-23D0-1266-F9438FAE4E73}"/>
+              </a:ext>
+            </a:extLst>
+          </p:cNvPr>
+          <p:cNvPicPr>
+            <a:picLocks noChangeAspect="1"/>
+          </p:cNvPicPr>
+          <p:nvPr/>
+        </p:nvPicPr>
+        <p:blipFill>
+          <a:blip r:embed="rId2"/>
+          <a:stretch>
+            <a:fillRect/>
+          </a:stretch>
+        </p:blipFill>
+        <p:spPr>
+          <a:xfrm>
+            <a:off x="3168897" y="4983886"/>
+            <a:ext cx="2172003" cy="1867161"/>
+          </a:xfrm>
+          <a:prstGeom prst="rect">
+            <a:avLst/>
+          </a:prstGeom>
+        </p:spPr>
+      </p:pic>
+      <p:pic>
+        <p:nvPicPr>
+          <p:cNvPr id="9" name="Picture 8">
+            <a:extLst>
+              <a:ext uri="{FF2B5EF4-FFF2-40B4-BE49-F238E27FC236}">
+                <a16:creationId xmlns:a16="http://schemas.microsoft.com/office/drawing/2014/main" id="{BAB637E2-8BFA-860D-82F9-61734B018F53}"/>
+              </a:ext>
+            </a:extLst>
+          </p:cNvPr>
+          <p:cNvPicPr>
+            <a:picLocks noChangeAspect="1"/>
+          </p:cNvPicPr>
+          <p:nvPr/>
+        </p:nvPicPr>
+        <p:blipFill>
+          <a:blip r:embed="rId3"/>
+          <a:stretch>
+            <a:fillRect/>
+          </a:stretch>
+        </p:blipFill>
+        <p:spPr>
+          <a:xfrm>
+            <a:off x="7388782" y="3575625"/>
+            <a:ext cx="2200582" cy="1924319"/>
+          </a:xfrm>
+          <a:prstGeom prst="rect">
+            <a:avLst/>
+          </a:prstGeom>
+        </p:spPr>
+      </p:pic>
+      <p:pic>
+        <p:nvPicPr>
+          <p:cNvPr id="11" name="Picture 10">
+            <a:extLst>
+              <a:ext uri="{FF2B5EF4-FFF2-40B4-BE49-F238E27FC236}">
+                <a16:creationId xmlns:a16="http://schemas.microsoft.com/office/drawing/2014/main" id="{56499C54-D026-FE97-5ED2-7EF286D00F28}"/>
+              </a:ext>
+            </a:extLst>
+          </p:cNvPr>
+          <p:cNvPicPr>
+            <a:picLocks noChangeAspect="1"/>
+          </p:cNvPicPr>
+          <p:nvPr/>
+        </p:nvPicPr>
+        <p:blipFill>
+          <a:blip r:embed="rId4"/>
+          <a:stretch>
+            <a:fillRect/>
+          </a:stretch>
+        </p:blipFill>
+        <p:spPr>
+          <a:xfrm>
+            <a:off x="5502422" y="614393"/>
+            <a:ext cx="2162477" cy="1876687"/>
+          </a:xfrm>
+          <a:prstGeom prst="rect">
+            <a:avLst/>
+          </a:prstGeom>
+        </p:spPr>
+      </p:pic>
+      <p:pic>
+        <p:nvPicPr>
+          <p:cNvPr id="13" name="Picture 12">
+            <a:extLst>
+              <a:ext uri="{FF2B5EF4-FFF2-40B4-BE49-F238E27FC236}">
+                <a16:creationId xmlns:a16="http://schemas.microsoft.com/office/drawing/2014/main" id="{EB8660DD-AC6A-2CD5-2C13-75BEFDE3BE68}"/>
+              </a:ext>
+            </a:extLst>
+          </p:cNvPr>
+          <p:cNvPicPr>
+            <a:picLocks noChangeAspect="1"/>
+          </p:cNvPicPr>
+          <p:nvPr/>
+        </p:nvPicPr>
+        <p:blipFill>
+          <a:blip r:embed="rId5"/>
+          <a:stretch>
+            <a:fillRect/>
+          </a:stretch>
+        </p:blipFill>
+        <p:spPr>
+          <a:xfrm>
+            <a:off x="600358" y="2355737"/>
+            <a:ext cx="2076740" cy="1886213"/>
+          </a:xfrm>
+          <a:prstGeom prst="rect">
+            <a:avLst/>
+          </a:prstGeom>
+        </p:spPr>
+      </p:pic>
+    </p:spTree>
+    <p:extLst>
+      <p:ext uri="{BB962C8B-B14F-4D97-AF65-F5344CB8AC3E}">
+        <p14:creationId xmlns:p14="http://schemas.microsoft.com/office/powerpoint/2010/main" val="3564112366"/>
+      </p:ext>
+    </p:extLst>
+  </p:cSld>
+  <p:clrMapOvr>
+    <a:masterClrMapping/>
+  </p:clrMapOvr>
+</p:sld>
+</file>
+
+<file path=ppt/slides/slide15.xml><?xml version="1.0" encoding="utf-8"?>
+<p:sld xmlns:a="http://schemas.openxmlformats.org/drawingml/2006/main" xmlns:r="http://schemas.openxmlformats.org/officeDocument/2006/relationships" xmlns:p="http://schemas.openxmlformats.org/presentationml/2006/main">
+  <p:cSld>
+    <p:bg>
+      <p:bgPr>
+        <a:solidFill>
+          <a:schemeClr val="bg1"/>
+        </a:solidFill>
+        <a:effectLst/>
+      </p:bgPr>
+    </p:bg>
+    <p:spTree>
+      <p:nvGrpSpPr>
+        <p:cNvPr id="1" name="">
+          <a:extLst>
+            <a:ext uri="{FF2B5EF4-FFF2-40B4-BE49-F238E27FC236}">
+              <a16:creationId xmlns:a16="http://schemas.microsoft.com/office/drawing/2014/main" id="{3FED9C38-FE5B-DD37-B26A-0C822C0968CD}"/>
+            </a:ext>
+          </a:extLst>
+        </p:cNvPr>
+        <p:cNvGrpSpPr/>
+        <p:nvPr/>
+      </p:nvGrpSpPr>
+      <p:grpSpPr>
+        <a:xfrm>
+          <a:off x="0" y="0"/>
+          <a:ext cx="0" cy="0"/>
+          <a:chOff x="0" y="0"/>
+          <a:chExt cx="0" cy="0"/>
+        </a:xfrm>
+      </p:grpSpPr>
+      <p:sp>
+        <p:nvSpPr>
+          <p:cNvPr id="2" name="Title 1" hidden="1">
+            <a:extLst>
+              <a:ext uri="{FF2B5EF4-FFF2-40B4-BE49-F238E27FC236}">
+                <a16:creationId xmlns:a16="http://schemas.microsoft.com/office/drawing/2014/main" id="{E1A9F5C8-0B02-9D3A-6332-1113DCFE2908}"/>
+              </a:ext>
+            </a:extLst>
+          </p:cNvPr>
+          <p:cNvSpPr>
+            <a:spLocks noGrp="1"/>
+          </p:cNvSpPr>
+          <p:nvPr>
+            <p:ph type="title"/>
+          </p:nvPr>
+        </p:nvSpPr>
+        <p:spPr/>
+        <p:txBody>
+          <a:bodyPr/>
+          <a:lstStyle/>
+          <a:p>
+            <a:r>
+              <a:rPr lang="en-US" dirty="0"/>
+              <a:t>Cover Page</a:t>
+            </a:r>
+          </a:p>
+        </p:txBody>
+      </p:sp>
+      <p:sp>
+        <p:nvSpPr>
+          <p:cNvPr id="8" name="Title 1">
+            <a:extLst>
+              <a:ext uri="{FF2B5EF4-FFF2-40B4-BE49-F238E27FC236}">
+                <a16:creationId xmlns:a16="http://schemas.microsoft.com/office/drawing/2014/main" id="{7E2BEA9E-1F8C-D317-E624-000687E8F269}"/>
+              </a:ext>
+            </a:extLst>
+          </p:cNvPr>
+          <p:cNvSpPr txBox="1">
+            <a:spLocks/>
+          </p:cNvSpPr>
+          <p:nvPr/>
+        </p:nvSpPr>
+        <p:spPr>
+          <a:xfrm>
+            <a:off x="1161975" y="151635"/>
+            <a:ext cx="7804774" cy="719719"/>
+          </a:xfrm>
+          <a:prstGeom prst="rect">
+            <a:avLst/>
+          </a:prstGeom>
+        </p:spPr>
+        <p:txBody>
+          <a:bodyPr vert="horz" lIns="0" tIns="0" rIns="0" bIns="0" rtlCol="0" anchor="t">
+            <a:noAutofit/>
+          </a:bodyPr>
+          <a:lstStyle>
+            <a:lvl1pPr algn="ctr" defTabSz="754380" rtl="0" eaLnBrk="1" latinLnBrk="0" hangingPunct="1">
+              <a:lnSpc>
+                <a:spcPct val="90000"/>
+              </a:lnSpc>
+              <a:spcBef>
+                <a:spcPct val="0"/>
+              </a:spcBef>
+              <a:buNone/>
+              <a:defRPr sz="4000" kern="1200">
+                <a:solidFill>
+                  <a:schemeClr val="tx1"/>
+                </a:solidFill>
+                <a:latin typeface="+mj-lt"/>
+                <a:ea typeface="+mj-ea"/>
+                <a:cs typeface="+mj-cs"/>
+              </a:defRPr>
+            </a:lvl1pPr>
+          </a:lstStyle>
+          <a:p>
+            <a:pPr>
+              <a:lnSpc>
+                <a:spcPct val="75000"/>
+              </a:lnSpc>
+            </a:pPr>
+            <a:r>
+              <a:rPr lang="en-US" sz="6000" u="sng" dirty="0">
+                <a:ln w="41275">
+                  <a:noFill/>
+                </a:ln>
+                <a:solidFill>
+                  <a:schemeClr val="accent2"/>
+                </a:solidFill>
+                <a:ea typeface="Source Sans Pro Black"/>
+              </a:rPr>
+              <a:t>Postman</a:t>
+            </a:r>
+          </a:p>
+          <a:p>
+            <a:pPr>
+              <a:lnSpc>
+                <a:spcPct val="75000"/>
+              </a:lnSpc>
+            </a:pPr>
+            <a:r>
+              <a:rPr lang="en-US" sz="3200" dirty="0">
+                <a:ln w="41275">
+                  <a:noFill/>
+                </a:ln>
+                <a:solidFill>
+                  <a:schemeClr val="tx1">
+                    <a:lumMod val="76000"/>
+                    <a:lumOff val="24000"/>
+                  </a:schemeClr>
+                </a:solidFill>
+                <a:ea typeface="Source Sans Pro Black"/>
+              </a:rPr>
+              <a:t>Now you try</a:t>
+            </a:r>
+            <a:endParaRPr lang="en-US" sz="3200" u="sng" dirty="0">
+              <a:ln w="41275">
+                <a:noFill/>
+              </a:ln>
+              <a:solidFill>
+                <a:schemeClr val="tx1">
+                  <a:lumMod val="76000"/>
+                  <a:lumOff val="24000"/>
+                </a:schemeClr>
+              </a:solidFill>
+              <a:ea typeface="Source Sans Pro Black"/>
+            </a:endParaRPr>
+          </a:p>
+        </p:txBody>
+      </p:sp>
+      <p:sp>
+        <p:nvSpPr>
+          <p:cNvPr id="32" name="TextBox 31">
+            <a:extLst>
+              <a:ext uri="{FF2B5EF4-FFF2-40B4-BE49-F238E27FC236}">
+                <a16:creationId xmlns:a16="http://schemas.microsoft.com/office/drawing/2014/main" id="{B3017F06-AB1B-FA30-BEF8-6091B04BCFE9}"/>
+              </a:ext>
+            </a:extLst>
+          </p:cNvPr>
+          <p:cNvSpPr txBox="1"/>
+          <p:nvPr/>
+        </p:nvSpPr>
+        <p:spPr>
+          <a:xfrm>
+            <a:off x="2400298" y="2638644"/>
+            <a:ext cx="5257799" cy="338554"/>
+          </a:xfrm>
+          <a:prstGeom prst="rect">
+            <a:avLst/>
+          </a:prstGeom>
+          <a:noFill/>
+        </p:spPr>
+        <p:txBody>
+          <a:bodyPr rot="0" spcFirstLastPara="0" vertOverflow="overflow" horzOverflow="overflow" vert="horz" wrap="square" lIns="91440" tIns="45720" rIns="91440" bIns="45720" numCol="1" spcCol="0" rtlCol="0" fromWordArt="0" anchor="t" anchorCtr="0" forceAA="0" compatLnSpc="1">
+            <a:prstTxWarp prst="textNoShape">
+              <a:avLst/>
+            </a:prstTxWarp>
+            <a:spAutoFit/>
+          </a:bodyPr>
+          <a:lstStyle/>
+          <a:p>
+            <a:pPr algn="ctr"/>
+            <a:r>
+              <a:rPr lang="en-US" sz="1600" dirty="0">
+                <a:ea typeface="Source Sans Pro"/>
+              </a:rPr>
+              <a:t>Expand on the “</a:t>
+            </a:r>
+            <a:r>
+              <a:rPr lang="en-US" sz="1600" b="1" dirty="0" err="1">
+                <a:ea typeface="Source Sans Pro"/>
+              </a:rPr>
+              <a:t>todos</a:t>
+            </a:r>
+            <a:r>
+              <a:rPr lang="en-US" sz="1600" dirty="0">
+                <a:ea typeface="Source Sans Pro"/>
+              </a:rPr>
+              <a:t>” dropdown</a:t>
+            </a:r>
+            <a:endParaRPr lang="en-GB" sz="1600" dirty="0">
+              <a:ea typeface="Source Sans Pro"/>
+            </a:endParaRPr>
+          </a:p>
+        </p:txBody>
+      </p:sp>
+      <p:cxnSp>
+        <p:nvCxnSpPr>
+          <p:cNvPr id="47" name="Straight Connector 46">
+            <a:extLst>
+              <a:ext uri="{FF2B5EF4-FFF2-40B4-BE49-F238E27FC236}">
+                <a16:creationId xmlns:a16="http://schemas.microsoft.com/office/drawing/2014/main" id="{59EFE8A9-7952-D1C2-2A05-67867C8BBA36}"/>
+              </a:ext>
+              <a:ext uri="{C183D7F6-B498-43B3-948B-1728B52AA6E4}">
+                <adec:decorative xmlns:adec="http://schemas.microsoft.com/office/drawing/2017/decorative" val="1"/>
+              </a:ext>
+            </a:extLst>
+          </p:cNvPr>
+          <p:cNvCxnSpPr>
+            <a:cxnSpLocks/>
+          </p:cNvCxnSpPr>
+          <p:nvPr/>
+        </p:nvCxnSpPr>
+        <p:spPr>
+          <a:xfrm>
+            <a:off x="839615" y="1271285"/>
+            <a:ext cx="8677751" cy="0"/>
+          </a:xfrm>
+          <a:prstGeom prst="line">
+            <a:avLst/>
+          </a:prstGeom>
+          <a:ln w="25400">
+            <a:solidFill>
+              <a:schemeClr val="accent2"/>
+            </a:solidFill>
+          </a:ln>
+        </p:spPr>
+        <p:style>
+          <a:lnRef idx="1">
+            <a:schemeClr val="accent1"/>
+          </a:lnRef>
+          <a:fillRef idx="0">
+            <a:schemeClr val="accent1"/>
+          </a:fillRef>
+          <a:effectRef idx="0">
+            <a:schemeClr val="accent1"/>
+          </a:effectRef>
+          <a:fontRef idx="minor">
+            <a:schemeClr val="tx1"/>
+          </a:fontRef>
+        </p:style>
+      </p:cxnSp>
+      <p:sp>
+        <p:nvSpPr>
+          <p:cNvPr id="4" name="TextBox 3">
+            <a:extLst>
+              <a:ext uri="{FF2B5EF4-FFF2-40B4-BE49-F238E27FC236}">
+                <a16:creationId xmlns:a16="http://schemas.microsoft.com/office/drawing/2014/main" id="{8C98F154-8F31-0DD8-8DC4-0057CCC1F4B6}"/>
+              </a:ext>
+            </a:extLst>
+          </p:cNvPr>
+          <p:cNvSpPr txBox="1"/>
+          <p:nvPr/>
+        </p:nvSpPr>
+        <p:spPr>
+          <a:xfrm>
+            <a:off x="2904721" y="2006982"/>
+            <a:ext cx="5029200" cy="401007"/>
+          </a:xfrm>
+          <a:prstGeom prst="rect">
+            <a:avLst/>
+          </a:prstGeom>
+          <a:noFill/>
+        </p:spPr>
+        <p:txBody>
+          <a:bodyPr wrap="square">
+            <a:spAutoFit/>
+          </a:bodyPr>
+          <a:lstStyle/>
+          <a:p>
+            <a:r>
+              <a:rPr lang="en-US" dirty="0"/>
+              <a:t>Head over to </a:t>
+            </a:r>
+            <a:r>
+              <a:rPr lang="en-001" dirty="0">
+                <a:hlinkClick r:id="rId2"/>
+              </a:rPr>
+              <a:t>http://localhost:8000/api/docs/</a:t>
+            </a:r>
+            <a:endParaRPr lang="en-001" dirty="0"/>
+          </a:p>
+        </p:txBody>
+      </p:sp>
+      <p:pic>
+        <p:nvPicPr>
+          <p:cNvPr id="10" name="Picture 9">
+            <a:extLst>
+              <a:ext uri="{FF2B5EF4-FFF2-40B4-BE49-F238E27FC236}">
+                <a16:creationId xmlns:a16="http://schemas.microsoft.com/office/drawing/2014/main" id="{D0E2CA7E-3533-E3F5-6F8D-9499ED5BD6A7}"/>
+              </a:ext>
+            </a:extLst>
+          </p:cNvPr>
+          <p:cNvPicPr>
+            <a:picLocks noChangeAspect="1"/>
+          </p:cNvPicPr>
+          <p:nvPr/>
+        </p:nvPicPr>
+        <p:blipFill>
+          <a:blip r:embed="rId3"/>
+          <a:stretch>
+            <a:fillRect/>
+          </a:stretch>
+        </p:blipFill>
+        <p:spPr>
+          <a:xfrm>
+            <a:off x="419806" y="3207853"/>
+            <a:ext cx="9218785" cy="2234079"/>
+          </a:xfrm>
+          <a:prstGeom prst="rect">
+            <a:avLst/>
+          </a:prstGeom>
+        </p:spPr>
+      </p:pic>
+      <p:sp>
+        <p:nvSpPr>
+          <p:cNvPr id="12" name="TextBox 11">
+            <a:extLst>
+              <a:ext uri="{FF2B5EF4-FFF2-40B4-BE49-F238E27FC236}">
+                <a16:creationId xmlns:a16="http://schemas.microsoft.com/office/drawing/2014/main" id="{AEC75BA6-1968-6547-16AA-5471F7BB1FA0}"/>
+              </a:ext>
+            </a:extLst>
+          </p:cNvPr>
+          <p:cNvSpPr txBox="1"/>
+          <p:nvPr/>
+        </p:nvSpPr>
+        <p:spPr>
+          <a:xfrm>
+            <a:off x="2576560" y="5703187"/>
+            <a:ext cx="5203860" cy="1077218"/>
+          </a:xfrm>
+          <a:prstGeom prst="rect">
+            <a:avLst/>
+          </a:prstGeom>
+          <a:noFill/>
+        </p:spPr>
+        <p:txBody>
+          <a:bodyPr wrap="square">
+            <a:spAutoFit/>
+          </a:bodyPr>
+          <a:lstStyle/>
+          <a:p>
+            <a:pPr algn="ctr"/>
+            <a:r>
+              <a:rPr lang="en-US" sz="1600" dirty="0">
+                <a:ea typeface="Source Sans Pro"/>
+              </a:rPr>
+              <a:t>The URL would be the website, in our case </a:t>
+            </a:r>
+            <a:r>
+              <a:rPr lang="en-US" sz="1600" dirty="0">
+                <a:ea typeface="Source Sans Pro"/>
+                <a:hlinkClick r:id="rId4"/>
+              </a:rPr>
+              <a:t>http://localhost</a:t>
+            </a:r>
+            <a:r>
+              <a:rPr lang="en-US" sz="1600" dirty="0">
+                <a:ea typeface="Source Sans Pro"/>
+              </a:rPr>
+              <a:t> appended with the </a:t>
+            </a:r>
+            <a:r>
+              <a:rPr lang="en-US" sz="1600" dirty="0" err="1">
+                <a:ea typeface="Source Sans Pro"/>
+              </a:rPr>
+              <a:t>api</a:t>
+            </a:r>
+            <a:r>
+              <a:rPr lang="en-US" sz="1600" dirty="0">
+                <a:ea typeface="Source Sans Pro"/>
+              </a:rPr>
+              <a:t> in this case “/</a:t>
+            </a:r>
+            <a:r>
+              <a:rPr lang="en-US" sz="1600" dirty="0" err="1">
+                <a:ea typeface="Source Sans Pro"/>
+              </a:rPr>
+              <a:t>api</a:t>
+            </a:r>
+            <a:r>
+              <a:rPr lang="en-US" sz="1600" dirty="0">
+                <a:ea typeface="Source Sans Pro"/>
+              </a:rPr>
+              <a:t>/</a:t>
+            </a:r>
+            <a:r>
+              <a:rPr lang="en-US" sz="1600" dirty="0" err="1">
+                <a:ea typeface="Source Sans Pro"/>
+              </a:rPr>
+              <a:t>todos</a:t>
+            </a:r>
+            <a:r>
+              <a:rPr lang="en-US" sz="1600" dirty="0">
+                <a:ea typeface="Source Sans Pro"/>
+              </a:rPr>
+              <a:t>/” which would look like </a:t>
+            </a:r>
+            <a:r>
+              <a:rPr lang="en-US" sz="1600" dirty="0">
+                <a:ea typeface="Source Sans Pro"/>
+                <a:hlinkClick r:id="rId5"/>
+              </a:rPr>
+              <a:t>http://localhost/api/todos/</a:t>
+            </a:r>
+            <a:endParaRPr lang="en-US" sz="1600" dirty="0">
+              <a:ea typeface="Source Sans Pro"/>
+            </a:endParaRPr>
+          </a:p>
+          <a:p>
+            <a:pPr algn="ctr"/>
+            <a:endParaRPr lang="en-GB" sz="1600" dirty="0">
+              <a:ea typeface="Source Sans Pro"/>
+            </a:endParaRPr>
+          </a:p>
+        </p:txBody>
+      </p:sp>
+    </p:spTree>
+    <p:extLst>
+      <p:ext uri="{BB962C8B-B14F-4D97-AF65-F5344CB8AC3E}">
+        <p14:creationId xmlns:p14="http://schemas.microsoft.com/office/powerpoint/2010/main" val="628233518"/>
+      </p:ext>
+    </p:extLst>
+  </p:cSld>
+  <p:clrMapOvr>
+    <a:masterClrMapping/>
+  </p:clrMapOvr>
+</p:sld>
+</file>
+
+<file path=ppt/slides/slide16.xml><?xml version="1.0" encoding="utf-8"?>
+<p:sld xmlns:a="http://schemas.openxmlformats.org/drawingml/2006/main" xmlns:r="http://schemas.openxmlformats.org/officeDocument/2006/relationships" xmlns:p="http://schemas.openxmlformats.org/presentationml/2006/main">
+  <p:cSld>
+    <p:bg>
+      <p:bgPr>
+        <a:solidFill>
+          <a:schemeClr val="bg1"/>
+        </a:solidFill>
+        <a:effectLst/>
+      </p:bgPr>
+    </p:bg>
+    <p:spTree>
+      <p:nvGrpSpPr>
+        <p:cNvPr id="1" name="">
+          <a:extLst>
+            <a:ext uri="{FF2B5EF4-FFF2-40B4-BE49-F238E27FC236}">
+              <a16:creationId xmlns:a16="http://schemas.microsoft.com/office/drawing/2014/main" id="{0C798577-D19A-689E-C6D0-3C609C961EF5}"/>
+            </a:ext>
+          </a:extLst>
+        </p:cNvPr>
+        <p:cNvGrpSpPr/>
+        <p:nvPr/>
+      </p:nvGrpSpPr>
+      <p:grpSpPr>
+        <a:xfrm>
+          <a:off x="0" y="0"/>
+          <a:ext cx="0" cy="0"/>
+          <a:chOff x="0" y="0"/>
+          <a:chExt cx="0" cy="0"/>
+        </a:xfrm>
+      </p:grpSpPr>
+      <p:sp>
+        <p:nvSpPr>
+          <p:cNvPr id="2" name="Title 1" hidden="1">
+            <a:extLst>
+              <a:ext uri="{FF2B5EF4-FFF2-40B4-BE49-F238E27FC236}">
+                <a16:creationId xmlns:a16="http://schemas.microsoft.com/office/drawing/2014/main" id="{E2534742-90D7-85CC-A563-87FF584C96E2}"/>
+              </a:ext>
+            </a:extLst>
+          </p:cNvPr>
+          <p:cNvSpPr>
+            <a:spLocks noGrp="1"/>
+          </p:cNvSpPr>
+          <p:nvPr>
+            <p:ph type="title"/>
+          </p:nvPr>
+        </p:nvSpPr>
+        <p:spPr/>
+        <p:txBody>
+          <a:bodyPr/>
+          <a:lstStyle/>
+          <a:p>
+            <a:r>
+              <a:rPr lang="en-US" dirty="0"/>
+              <a:t>Cover Page</a:t>
+            </a:r>
+          </a:p>
+        </p:txBody>
+      </p:sp>
+      <p:sp>
+        <p:nvSpPr>
+          <p:cNvPr id="8" name="Title 1">
+            <a:extLst>
+              <a:ext uri="{FF2B5EF4-FFF2-40B4-BE49-F238E27FC236}">
+                <a16:creationId xmlns:a16="http://schemas.microsoft.com/office/drawing/2014/main" id="{F8F97775-20D2-EAEB-C05B-C82705C54C1A}"/>
+              </a:ext>
+            </a:extLst>
+          </p:cNvPr>
+          <p:cNvSpPr txBox="1">
+            <a:spLocks/>
+          </p:cNvSpPr>
+          <p:nvPr/>
+        </p:nvSpPr>
+        <p:spPr>
+          <a:xfrm>
+            <a:off x="1161975" y="151635"/>
+            <a:ext cx="7804774" cy="719719"/>
+          </a:xfrm>
+          <a:prstGeom prst="rect">
+            <a:avLst/>
+          </a:prstGeom>
+        </p:spPr>
+        <p:txBody>
+          <a:bodyPr vert="horz" lIns="0" tIns="0" rIns="0" bIns="0" rtlCol="0" anchor="t">
+            <a:noAutofit/>
+          </a:bodyPr>
+          <a:lstStyle>
+            <a:lvl1pPr algn="ctr" defTabSz="754380" rtl="0" eaLnBrk="1" latinLnBrk="0" hangingPunct="1">
+              <a:lnSpc>
+                <a:spcPct val="90000"/>
+              </a:lnSpc>
+              <a:spcBef>
+                <a:spcPct val="0"/>
+              </a:spcBef>
+              <a:buNone/>
+              <a:defRPr sz="4000" kern="1200">
+                <a:solidFill>
+                  <a:schemeClr val="tx1"/>
+                </a:solidFill>
+                <a:latin typeface="+mj-lt"/>
+                <a:ea typeface="+mj-ea"/>
+                <a:cs typeface="+mj-cs"/>
+              </a:defRPr>
+            </a:lvl1pPr>
+          </a:lstStyle>
+          <a:p>
+            <a:pPr>
+              <a:lnSpc>
+                <a:spcPct val="75000"/>
+              </a:lnSpc>
+            </a:pPr>
+            <a:r>
+              <a:rPr lang="en-US" sz="6000" u="sng" dirty="0">
+                <a:ln w="41275">
+                  <a:noFill/>
+                </a:ln>
+                <a:solidFill>
+                  <a:schemeClr val="accent2"/>
+                </a:solidFill>
+                <a:ea typeface="Source Sans Pro Black"/>
+              </a:rPr>
+              <a:t>Postman</a:t>
+            </a:r>
+          </a:p>
+          <a:p>
+            <a:pPr>
+              <a:lnSpc>
+                <a:spcPct val="75000"/>
+              </a:lnSpc>
+            </a:pPr>
+            <a:r>
+              <a:rPr lang="en-US" sz="3200" dirty="0">
+                <a:ln w="41275">
+                  <a:noFill/>
+                </a:ln>
+                <a:solidFill>
+                  <a:schemeClr val="tx1">
+                    <a:lumMod val="76000"/>
+                    <a:lumOff val="24000"/>
+                  </a:schemeClr>
+                </a:solidFill>
+                <a:ea typeface="Source Sans Pro Black"/>
+              </a:rPr>
+              <a:t>Now you try</a:t>
+            </a:r>
+            <a:endParaRPr lang="en-US" sz="3200" u="sng" dirty="0">
+              <a:ln w="41275">
+                <a:noFill/>
+              </a:ln>
+              <a:solidFill>
+                <a:schemeClr val="tx1">
+                  <a:lumMod val="76000"/>
+                  <a:lumOff val="24000"/>
+                </a:schemeClr>
+              </a:solidFill>
+              <a:ea typeface="Source Sans Pro Black"/>
+            </a:endParaRPr>
+          </a:p>
+        </p:txBody>
+      </p:sp>
+      <p:sp>
+        <p:nvSpPr>
+          <p:cNvPr id="32" name="TextBox 31">
+            <a:extLst>
+              <a:ext uri="{FF2B5EF4-FFF2-40B4-BE49-F238E27FC236}">
+                <a16:creationId xmlns:a16="http://schemas.microsoft.com/office/drawing/2014/main" id="{D3BD3C65-DEB9-79CA-6C18-8A9A369708C3}"/>
+              </a:ext>
+            </a:extLst>
+          </p:cNvPr>
+          <p:cNvSpPr txBox="1"/>
+          <p:nvPr/>
+        </p:nvSpPr>
+        <p:spPr>
+          <a:xfrm>
+            <a:off x="750781" y="1430859"/>
+            <a:ext cx="8546729" cy="1200329"/>
+          </a:xfrm>
+          <a:prstGeom prst="rect">
+            <a:avLst/>
+          </a:prstGeom>
+          <a:noFill/>
+        </p:spPr>
+        <p:txBody>
+          <a:bodyPr rot="0" spcFirstLastPara="0" vertOverflow="overflow" horzOverflow="overflow" vert="horz" wrap="square" lIns="91440" tIns="45720" rIns="91440" bIns="45720" numCol="1" spcCol="0" rtlCol="0" fromWordArt="0" anchor="t" anchorCtr="0" forceAA="0" compatLnSpc="1">
+            <a:prstTxWarp prst="textNoShape">
+              <a:avLst/>
+            </a:prstTxWarp>
+            <a:spAutoFit/>
+          </a:bodyPr>
+          <a:lstStyle/>
+          <a:p>
+            <a:pPr algn="ctr"/>
+            <a:r>
+              <a:rPr lang="en-GB" sz="3600" b="1" dirty="0">
+                <a:ea typeface="Source Sans Pro"/>
+              </a:rPr>
+              <a:t>Fill in the URL with the API endpoint</a:t>
+            </a:r>
+            <a:br>
+              <a:rPr lang="en-GB" sz="3600" b="1" dirty="0">
+                <a:ea typeface="Source Sans Pro"/>
+              </a:rPr>
+            </a:br>
+            <a:endParaRPr lang="en-GB" sz="3600" b="1" dirty="0">
+              <a:solidFill>
+                <a:schemeClr val="bg2">
+                  <a:lumMod val="49000"/>
+                </a:schemeClr>
+              </a:solidFill>
+              <a:ea typeface="Source Sans Pro"/>
+            </a:endParaRPr>
+          </a:p>
+        </p:txBody>
+      </p:sp>
+      <p:cxnSp>
+        <p:nvCxnSpPr>
+          <p:cNvPr id="47" name="Straight Connector 46">
+            <a:extLst>
+              <a:ext uri="{FF2B5EF4-FFF2-40B4-BE49-F238E27FC236}">
+                <a16:creationId xmlns:a16="http://schemas.microsoft.com/office/drawing/2014/main" id="{9AB4DA6B-817D-B0B3-A2E3-E04DE1976B14}"/>
+              </a:ext>
+              <a:ext uri="{C183D7F6-B498-43B3-948B-1728B52AA6E4}">
+                <adec:decorative xmlns:adec="http://schemas.microsoft.com/office/drawing/2017/decorative" val="1"/>
+              </a:ext>
+            </a:extLst>
+          </p:cNvPr>
+          <p:cNvCxnSpPr>
+            <a:cxnSpLocks/>
+          </p:cNvCxnSpPr>
+          <p:nvPr/>
+        </p:nvCxnSpPr>
+        <p:spPr>
+          <a:xfrm>
+            <a:off x="839615" y="1271285"/>
+            <a:ext cx="8677751" cy="0"/>
+          </a:xfrm>
+          <a:prstGeom prst="line">
+            <a:avLst/>
+          </a:prstGeom>
+          <a:ln w="25400">
+            <a:solidFill>
+              <a:schemeClr val="accent2"/>
+            </a:solidFill>
+          </a:ln>
+        </p:spPr>
+        <p:style>
+          <a:lnRef idx="1">
+            <a:schemeClr val="accent1"/>
+          </a:lnRef>
+          <a:fillRef idx="0">
+            <a:schemeClr val="accent1"/>
+          </a:fillRef>
+          <a:effectRef idx="0">
+            <a:schemeClr val="accent1"/>
+          </a:effectRef>
+          <a:fontRef idx="minor">
+            <a:schemeClr val="tx1"/>
+          </a:fontRef>
+        </p:style>
+      </p:cxnSp>
+      <p:pic>
+        <p:nvPicPr>
+          <p:cNvPr id="7" name="Picture 6">
+            <a:extLst>
+              <a:ext uri="{FF2B5EF4-FFF2-40B4-BE49-F238E27FC236}">
+                <a16:creationId xmlns:a16="http://schemas.microsoft.com/office/drawing/2014/main" id="{5E68B5B7-3992-6F07-C8AD-D52E3249D22B}"/>
+              </a:ext>
+            </a:extLst>
+          </p:cNvPr>
+          <p:cNvPicPr>
+            <a:picLocks noChangeAspect="1"/>
+          </p:cNvPicPr>
+          <p:nvPr/>
+        </p:nvPicPr>
+        <p:blipFill>
+          <a:blip r:embed="rId2"/>
+          <a:stretch>
+            <a:fillRect/>
+          </a:stretch>
+        </p:blipFill>
+        <p:spPr>
+          <a:xfrm>
+            <a:off x="1127878" y="2318701"/>
+            <a:ext cx="7792537" cy="5201376"/>
+          </a:xfrm>
+          <a:prstGeom prst="rect">
+            <a:avLst/>
+          </a:prstGeom>
+        </p:spPr>
+      </p:pic>
+    </p:spTree>
+    <p:extLst>
+      <p:ext uri="{BB962C8B-B14F-4D97-AF65-F5344CB8AC3E}">
+        <p14:creationId xmlns:p14="http://schemas.microsoft.com/office/powerpoint/2010/main" val="330823196"/>
+      </p:ext>
+    </p:extLst>
+  </p:cSld>
+  <p:clrMapOvr>
+    <a:masterClrMapping/>
+  </p:clrMapOvr>
+</p:sld>
+</file>
+
+<file path=ppt/slides/slide17.xml><?xml version="1.0" encoding="utf-8"?>
+<p:sld xmlns:a="http://schemas.openxmlformats.org/drawingml/2006/main" xmlns:r="http://schemas.openxmlformats.org/officeDocument/2006/relationships" xmlns:p="http://schemas.openxmlformats.org/presentationml/2006/main">
+  <p:cSld>
+    <p:bg>
+      <p:bgPr>
+        <a:solidFill>
+          <a:schemeClr val="bg1"/>
+        </a:solidFill>
+        <a:effectLst/>
+      </p:bgPr>
+    </p:bg>
+    <p:spTree>
+      <p:nvGrpSpPr>
+        <p:cNvPr id="1" name="">
+          <a:extLst>
+            <a:ext uri="{FF2B5EF4-FFF2-40B4-BE49-F238E27FC236}">
+              <a16:creationId xmlns:a16="http://schemas.microsoft.com/office/drawing/2014/main" id="{4A32D451-0C06-7DAD-7710-43F4902E99B8}"/>
+            </a:ext>
+          </a:extLst>
+        </p:cNvPr>
+        <p:cNvGrpSpPr/>
+        <p:nvPr/>
+      </p:nvGrpSpPr>
+      <p:grpSpPr>
+        <a:xfrm>
+          <a:off x="0" y="0"/>
+          <a:ext cx="0" cy="0"/>
+          <a:chOff x="0" y="0"/>
+          <a:chExt cx="0" cy="0"/>
+        </a:xfrm>
+      </p:grpSpPr>
+      <p:sp>
+        <p:nvSpPr>
+          <p:cNvPr id="2" name="Title 1" hidden="1">
+            <a:extLst>
+              <a:ext uri="{FF2B5EF4-FFF2-40B4-BE49-F238E27FC236}">
+                <a16:creationId xmlns:a16="http://schemas.microsoft.com/office/drawing/2014/main" id="{CA8C8F62-99EC-934F-3B7E-F62FCD23BAD4}"/>
+              </a:ext>
+            </a:extLst>
+          </p:cNvPr>
+          <p:cNvSpPr>
+            <a:spLocks noGrp="1"/>
+          </p:cNvSpPr>
+          <p:nvPr>
+            <p:ph type="title"/>
+          </p:nvPr>
+        </p:nvSpPr>
+        <p:spPr/>
+        <p:txBody>
+          <a:bodyPr/>
+          <a:lstStyle/>
+          <a:p>
+            <a:r>
+              <a:rPr lang="en-US" dirty="0"/>
+              <a:t>Cover Page</a:t>
+            </a:r>
+          </a:p>
+        </p:txBody>
+      </p:sp>
+      <p:sp>
+        <p:nvSpPr>
+          <p:cNvPr id="8" name="Title 1">
+            <a:extLst>
+              <a:ext uri="{FF2B5EF4-FFF2-40B4-BE49-F238E27FC236}">
+                <a16:creationId xmlns:a16="http://schemas.microsoft.com/office/drawing/2014/main" id="{8409BC04-96F6-B820-54A9-F40CDD84EAA3}"/>
+              </a:ext>
+            </a:extLst>
+          </p:cNvPr>
+          <p:cNvSpPr txBox="1">
+            <a:spLocks/>
+          </p:cNvSpPr>
+          <p:nvPr/>
+        </p:nvSpPr>
+        <p:spPr>
+          <a:xfrm>
+            <a:off x="1161975" y="151635"/>
+            <a:ext cx="7804774" cy="719719"/>
+          </a:xfrm>
+          <a:prstGeom prst="rect">
+            <a:avLst/>
+          </a:prstGeom>
+        </p:spPr>
+        <p:txBody>
+          <a:bodyPr vert="horz" lIns="0" tIns="0" rIns="0" bIns="0" rtlCol="0" anchor="t">
+            <a:noAutofit/>
+          </a:bodyPr>
+          <a:lstStyle>
+            <a:lvl1pPr algn="ctr" defTabSz="754380" rtl="0" eaLnBrk="1" latinLnBrk="0" hangingPunct="1">
+              <a:lnSpc>
+                <a:spcPct val="90000"/>
+              </a:lnSpc>
+              <a:spcBef>
+                <a:spcPct val="0"/>
+              </a:spcBef>
+              <a:buNone/>
+              <a:defRPr sz="4000" kern="1200">
+                <a:solidFill>
+                  <a:schemeClr val="tx1"/>
+                </a:solidFill>
+                <a:latin typeface="+mj-lt"/>
+                <a:ea typeface="+mj-ea"/>
+                <a:cs typeface="+mj-cs"/>
+              </a:defRPr>
+            </a:lvl1pPr>
+          </a:lstStyle>
+          <a:p>
+            <a:pPr>
+              <a:lnSpc>
+                <a:spcPct val="75000"/>
+              </a:lnSpc>
+            </a:pPr>
+            <a:r>
+              <a:rPr lang="en-US" sz="6000" u="sng" dirty="0">
+                <a:ln w="41275">
+                  <a:noFill/>
+                </a:ln>
+                <a:solidFill>
+                  <a:schemeClr val="accent2"/>
+                </a:solidFill>
+                <a:ea typeface="Source Sans Pro Black"/>
+              </a:rPr>
+              <a:t>Postman</a:t>
+            </a:r>
+          </a:p>
+          <a:p>
+            <a:pPr>
+              <a:lnSpc>
+                <a:spcPct val="75000"/>
+              </a:lnSpc>
+            </a:pPr>
+            <a:r>
+              <a:rPr lang="en-US" sz="3200" dirty="0">
+                <a:ln w="41275">
+                  <a:noFill/>
+                </a:ln>
+                <a:solidFill>
+                  <a:schemeClr val="tx1">
+                    <a:lumMod val="76000"/>
+                    <a:lumOff val="24000"/>
+                  </a:schemeClr>
+                </a:solidFill>
+                <a:ea typeface="Source Sans Pro Black"/>
+              </a:rPr>
+              <a:t>Now you try</a:t>
+            </a:r>
+            <a:endParaRPr lang="en-US" sz="3200" u="sng" dirty="0">
+              <a:ln w="41275">
+                <a:noFill/>
+              </a:ln>
+              <a:solidFill>
+                <a:schemeClr val="tx1">
+                  <a:lumMod val="76000"/>
+                  <a:lumOff val="24000"/>
+                </a:schemeClr>
+              </a:solidFill>
+              <a:ea typeface="Source Sans Pro Black"/>
+            </a:endParaRPr>
+          </a:p>
+        </p:txBody>
+      </p:sp>
+      <p:cxnSp>
+        <p:nvCxnSpPr>
+          <p:cNvPr id="47" name="Straight Connector 46">
+            <a:extLst>
+              <a:ext uri="{FF2B5EF4-FFF2-40B4-BE49-F238E27FC236}">
+                <a16:creationId xmlns:a16="http://schemas.microsoft.com/office/drawing/2014/main" id="{CCD3460B-0BCD-25C1-974D-C6A9332F6683}"/>
+              </a:ext>
+              <a:ext uri="{C183D7F6-B498-43B3-948B-1728B52AA6E4}">
+                <adec:decorative xmlns:adec="http://schemas.microsoft.com/office/drawing/2017/decorative" val="1"/>
+              </a:ext>
+            </a:extLst>
+          </p:cNvPr>
+          <p:cNvCxnSpPr>
+            <a:cxnSpLocks/>
+          </p:cNvCxnSpPr>
+          <p:nvPr/>
+        </p:nvCxnSpPr>
+        <p:spPr>
+          <a:xfrm>
+            <a:off x="839615" y="1271285"/>
+            <a:ext cx="8677751" cy="0"/>
+          </a:xfrm>
+          <a:prstGeom prst="line">
+            <a:avLst/>
+          </a:prstGeom>
+          <a:ln w="25400">
+            <a:solidFill>
+              <a:schemeClr val="accent2"/>
+            </a:solidFill>
+          </a:ln>
+        </p:spPr>
+        <p:style>
+          <a:lnRef idx="1">
+            <a:schemeClr val="accent1"/>
+          </a:lnRef>
+          <a:fillRef idx="0">
+            <a:schemeClr val="accent1"/>
+          </a:fillRef>
+          <a:effectRef idx="0">
+            <a:schemeClr val="accent1"/>
+          </a:effectRef>
+          <a:fontRef idx="minor">
+            <a:schemeClr val="tx1"/>
+          </a:fontRef>
+        </p:style>
+      </p:cxnSp>
+      <p:pic>
+        <p:nvPicPr>
+          <p:cNvPr id="6" name="Picture 5">
+            <a:extLst>
+              <a:ext uri="{FF2B5EF4-FFF2-40B4-BE49-F238E27FC236}">
+                <a16:creationId xmlns:a16="http://schemas.microsoft.com/office/drawing/2014/main" id="{5D58B748-9992-FC28-7D1F-8F0473B87C2A}"/>
+              </a:ext>
+            </a:extLst>
+          </p:cNvPr>
+          <p:cNvPicPr>
+            <a:picLocks noChangeAspect="1"/>
+          </p:cNvPicPr>
+          <p:nvPr/>
+        </p:nvPicPr>
+        <p:blipFill>
+          <a:blip r:embed="rId2"/>
+          <a:stretch>
+            <a:fillRect/>
+          </a:stretch>
+        </p:blipFill>
+        <p:spPr>
+          <a:xfrm>
+            <a:off x="1215725" y="2559371"/>
+            <a:ext cx="7697274" cy="1009791"/>
+          </a:xfrm>
+          <a:prstGeom prst="rect">
+            <a:avLst/>
+          </a:prstGeom>
+        </p:spPr>
+      </p:pic>
+      <p:cxnSp>
+        <p:nvCxnSpPr>
+          <p:cNvPr id="12" name="Straight Arrow Connector 11">
+            <a:extLst>
+              <a:ext uri="{FF2B5EF4-FFF2-40B4-BE49-F238E27FC236}">
+                <a16:creationId xmlns:a16="http://schemas.microsoft.com/office/drawing/2014/main" id="{BE44131A-0DF4-2366-CC96-427EB0F86EBE}"/>
+              </a:ext>
+            </a:extLst>
+          </p:cNvPr>
+          <p:cNvCxnSpPr/>
+          <p:nvPr/>
+        </p:nvCxnSpPr>
+        <p:spPr>
+          <a:xfrm flipV="1">
+            <a:off x="1808252" y="3441843"/>
+            <a:ext cx="0" cy="1140431"/>
+          </a:xfrm>
+          <a:prstGeom prst="straightConnector1">
+            <a:avLst/>
+          </a:prstGeom>
+          <a:ln>
+            <a:tailEnd type="triangle"/>
+          </a:ln>
+        </p:spPr>
+        <p:style>
+          <a:lnRef idx="3">
+            <a:schemeClr val="accent4"/>
+          </a:lnRef>
+          <a:fillRef idx="0">
+            <a:schemeClr val="accent4"/>
+          </a:fillRef>
+          <a:effectRef idx="2">
+            <a:schemeClr val="accent4"/>
+          </a:effectRef>
+          <a:fontRef idx="minor">
+            <a:schemeClr val="tx1"/>
+          </a:fontRef>
+        </p:style>
+      </p:cxnSp>
+      <p:cxnSp>
+        <p:nvCxnSpPr>
+          <p:cNvPr id="14" name="Straight Arrow Connector 13">
+            <a:extLst>
+              <a:ext uri="{FF2B5EF4-FFF2-40B4-BE49-F238E27FC236}">
+                <a16:creationId xmlns:a16="http://schemas.microsoft.com/office/drawing/2014/main" id="{902F240F-C0E9-D2D4-3572-BFFD63497A4A}"/>
+              </a:ext>
+            </a:extLst>
+          </p:cNvPr>
+          <p:cNvCxnSpPr>
+            <a:cxnSpLocks/>
+          </p:cNvCxnSpPr>
+          <p:nvPr/>
+        </p:nvCxnSpPr>
+        <p:spPr>
+          <a:xfrm flipV="1">
+            <a:off x="6739847" y="2784297"/>
+            <a:ext cx="0" cy="2732926"/>
+          </a:xfrm>
+          <a:prstGeom prst="straightConnector1">
+            <a:avLst/>
+          </a:prstGeom>
+          <a:ln w="19050">
+            <a:solidFill>
+              <a:srgbClr val="FF0000"/>
+            </a:solidFill>
+            <a:tailEnd type="triangle"/>
+          </a:ln>
+        </p:spPr>
+        <p:style>
+          <a:lnRef idx="1">
+            <a:schemeClr val="accent1"/>
+          </a:lnRef>
+          <a:fillRef idx="0">
+            <a:schemeClr val="accent1"/>
+          </a:fillRef>
+          <a:effectRef idx="0">
+            <a:schemeClr val="accent1"/>
+          </a:effectRef>
+          <a:fontRef idx="minor">
+            <a:schemeClr val="tx1"/>
+          </a:fontRef>
+        </p:style>
+      </p:cxnSp>
+      <p:cxnSp>
+        <p:nvCxnSpPr>
+          <p:cNvPr id="16" name="Straight Arrow Connector 15">
+            <a:extLst>
+              <a:ext uri="{FF2B5EF4-FFF2-40B4-BE49-F238E27FC236}">
+                <a16:creationId xmlns:a16="http://schemas.microsoft.com/office/drawing/2014/main" id="{D0DC13FB-2A1F-6023-7BD8-81E7AC3B36D0}"/>
+              </a:ext>
+            </a:extLst>
+          </p:cNvPr>
+          <p:cNvCxnSpPr/>
+          <p:nvPr/>
+        </p:nvCxnSpPr>
+        <p:spPr>
+          <a:xfrm flipV="1">
+            <a:off x="7510409" y="2784297"/>
+            <a:ext cx="0" cy="1582220"/>
+          </a:xfrm>
+          <a:prstGeom prst="straightConnector1">
+            <a:avLst/>
+          </a:prstGeom>
+          <a:ln w="19050">
+            <a:solidFill>
+              <a:srgbClr val="FF0000"/>
+            </a:solidFill>
+            <a:tailEnd type="triangle"/>
+          </a:ln>
+        </p:spPr>
+        <p:style>
+          <a:lnRef idx="1">
+            <a:schemeClr val="accent1"/>
+          </a:lnRef>
+          <a:fillRef idx="0">
+            <a:schemeClr val="accent1"/>
+          </a:fillRef>
+          <a:effectRef idx="0">
+            <a:schemeClr val="accent1"/>
+          </a:effectRef>
+          <a:fontRef idx="minor">
+            <a:schemeClr val="tx1"/>
+          </a:fontRef>
+        </p:style>
+      </p:cxnSp>
+      <p:sp>
+        <p:nvSpPr>
+          <p:cNvPr id="19" name="TextBox 18">
+            <a:extLst>
+              <a:ext uri="{FF2B5EF4-FFF2-40B4-BE49-F238E27FC236}">
+                <a16:creationId xmlns:a16="http://schemas.microsoft.com/office/drawing/2014/main" id="{4299DE5B-2380-142E-B00F-40D0FD00EDED}"/>
+              </a:ext>
+            </a:extLst>
+          </p:cNvPr>
+          <p:cNvSpPr txBox="1"/>
+          <p:nvPr/>
+        </p:nvSpPr>
+        <p:spPr>
+          <a:xfrm>
+            <a:off x="1161975" y="4656743"/>
+            <a:ext cx="1258678" cy="401007"/>
+          </a:xfrm>
+          <a:prstGeom prst="rect">
+            <a:avLst/>
+          </a:prstGeom>
+          <a:noFill/>
+        </p:spPr>
+        <p:txBody>
+          <a:bodyPr wrap="none" rtlCol="0">
+            <a:spAutoFit/>
+          </a:bodyPr>
+          <a:lstStyle/>
+          <a:p>
+            <a:r>
+              <a:rPr lang="en-US" dirty="0"/>
+              <a:t>The result</a:t>
+            </a:r>
+            <a:endParaRPr lang="en-001" dirty="0"/>
+          </a:p>
+        </p:txBody>
+      </p:sp>
+      <p:sp>
+        <p:nvSpPr>
+          <p:cNvPr id="20" name="TextBox 19">
+            <a:extLst>
+              <a:ext uri="{FF2B5EF4-FFF2-40B4-BE49-F238E27FC236}">
+                <a16:creationId xmlns:a16="http://schemas.microsoft.com/office/drawing/2014/main" id="{7E5F52CA-4AC3-FD2F-07C0-981E33574715}"/>
+              </a:ext>
+            </a:extLst>
+          </p:cNvPr>
+          <p:cNvSpPr txBox="1"/>
+          <p:nvPr/>
+        </p:nvSpPr>
+        <p:spPr>
+          <a:xfrm>
+            <a:off x="6014328" y="5531371"/>
+            <a:ext cx="1451038" cy="401007"/>
+          </a:xfrm>
+          <a:prstGeom prst="rect">
+            <a:avLst/>
+          </a:prstGeom>
+          <a:noFill/>
+        </p:spPr>
+        <p:txBody>
+          <a:bodyPr wrap="none" rtlCol="0">
+            <a:spAutoFit/>
+          </a:bodyPr>
+          <a:lstStyle/>
+          <a:p>
+            <a:r>
+              <a:rPr lang="en-US" dirty="0"/>
+              <a:t>Status code</a:t>
+            </a:r>
+            <a:endParaRPr lang="en-001" dirty="0"/>
+          </a:p>
+        </p:txBody>
+      </p:sp>
+      <p:sp>
+        <p:nvSpPr>
+          <p:cNvPr id="22" name="TextBox 21">
+            <a:extLst>
+              <a:ext uri="{FF2B5EF4-FFF2-40B4-BE49-F238E27FC236}">
+                <a16:creationId xmlns:a16="http://schemas.microsoft.com/office/drawing/2014/main" id="{DC4F8969-F2C0-A158-5BEE-086497175AF5}"/>
+              </a:ext>
+            </a:extLst>
+          </p:cNvPr>
+          <p:cNvSpPr txBox="1"/>
+          <p:nvPr/>
+        </p:nvSpPr>
+        <p:spPr>
+          <a:xfrm>
+            <a:off x="6901666" y="4390939"/>
+            <a:ext cx="1595061" cy="401007"/>
+          </a:xfrm>
+          <a:prstGeom prst="rect">
+            <a:avLst/>
+          </a:prstGeom>
+          <a:noFill/>
+        </p:spPr>
+        <p:txBody>
+          <a:bodyPr wrap="square">
+            <a:spAutoFit/>
+          </a:bodyPr>
+          <a:lstStyle/>
+          <a:p>
+            <a:r>
+              <a:rPr lang="en-US" dirty="0"/>
+              <a:t>Time taken</a:t>
+            </a:r>
+            <a:endParaRPr lang="en-001" dirty="0"/>
+          </a:p>
+        </p:txBody>
+      </p:sp>
+    </p:spTree>
+    <p:extLst>
+      <p:ext uri="{BB962C8B-B14F-4D97-AF65-F5344CB8AC3E}">
+        <p14:creationId xmlns:p14="http://schemas.microsoft.com/office/powerpoint/2010/main" val="916057669"/>
+      </p:ext>
+    </p:extLst>
+  </p:cSld>
+  <p:clrMapOvr>
+    <a:masterClrMapping/>
+  </p:clrMapOvr>
+</p:sld>
+</file>
+
+<file path=ppt/slides/slide18.xml><?xml version="1.0" encoding="utf-8"?>
+<p:sld xmlns:a="http://schemas.openxmlformats.org/drawingml/2006/main" xmlns:r="http://schemas.openxmlformats.org/officeDocument/2006/relationships" xmlns:p="http://schemas.openxmlformats.org/presentationml/2006/main">
+  <p:cSld>
+    <p:bg>
+      <p:bgPr>
+        <a:solidFill>
+          <a:schemeClr val="bg1"/>
+        </a:solidFill>
+        <a:effectLst/>
+      </p:bgPr>
+    </p:bg>
+    <p:spTree>
+      <p:nvGrpSpPr>
+        <p:cNvPr id="1" name="">
+          <a:extLst>
+            <a:ext uri="{FF2B5EF4-FFF2-40B4-BE49-F238E27FC236}">
+              <a16:creationId xmlns:a16="http://schemas.microsoft.com/office/drawing/2014/main" id="{7BC18129-AD35-8D8F-4323-77EF478FCE81}"/>
+            </a:ext>
+          </a:extLst>
+        </p:cNvPr>
+        <p:cNvGrpSpPr/>
+        <p:nvPr/>
+      </p:nvGrpSpPr>
+      <p:grpSpPr>
+        <a:xfrm>
+          <a:off x="0" y="0"/>
+          <a:ext cx="0" cy="0"/>
+          <a:chOff x="0" y="0"/>
+          <a:chExt cx="0" cy="0"/>
+        </a:xfrm>
+      </p:grpSpPr>
+      <p:sp>
+        <p:nvSpPr>
+          <p:cNvPr id="2" name="Title 1" hidden="1">
+            <a:extLst>
+              <a:ext uri="{FF2B5EF4-FFF2-40B4-BE49-F238E27FC236}">
+                <a16:creationId xmlns:a16="http://schemas.microsoft.com/office/drawing/2014/main" id="{B0ACF982-D30B-A0B5-0BE2-923B1F92E274}"/>
+              </a:ext>
+            </a:extLst>
+          </p:cNvPr>
+          <p:cNvSpPr>
+            <a:spLocks noGrp="1"/>
+          </p:cNvSpPr>
+          <p:nvPr>
+            <p:ph type="title"/>
+          </p:nvPr>
+        </p:nvSpPr>
+        <p:spPr/>
+        <p:txBody>
+          <a:bodyPr/>
+          <a:lstStyle/>
+          <a:p>
+            <a:r>
+              <a:rPr lang="en-US" dirty="0"/>
+              <a:t>Cover Page</a:t>
+            </a:r>
+          </a:p>
+        </p:txBody>
+      </p:sp>
+      <p:sp>
+        <p:nvSpPr>
+          <p:cNvPr id="8" name="Title 1">
+            <a:extLst>
+              <a:ext uri="{FF2B5EF4-FFF2-40B4-BE49-F238E27FC236}">
+                <a16:creationId xmlns:a16="http://schemas.microsoft.com/office/drawing/2014/main" id="{94C7D1FE-CC59-998E-68C3-1BD53AA51ECD}"/>
+              </a:ext>
+            </a:extLst>
+          </p:cNvPr>
+          <p:cNvSpPr txBox="1">
+            <a:spLocks/>
+          </p:cNvSpPr>
+          <p:nvPr/>
+        </p:nvSpPr>
+        <p:spPr>
+          <a:xfrm>
+            <a:off x="1161975" y="151635"/>
+            <a:ext cx="7804774" cy="719719"/>
+          </a:xfrm>
+          <a:prstGeom prst="rect">
+            <a:avLst/>
+          </a:prstGeom>
+        </p:spPr>
+        <p:txBody>
+          <a:bodyPr vert="horz" lIns="0" tIns="0" rIns="0" bIns="0" rtlCol="0" anchor="t">
+            <a:noAutofit/>
+          </a:bodyPr>
+          <a:lstStyle>
+            <a:lvl1pPr algn="ctr" defTabSz="754380" rtl="0" eaLnBrk="1" latinLnBrk="0" hangingPunct="1">
+              <a:lnSpc>
+                <a:spcPct val="90000"/>
+              </a:lnSpc>
+              <a:spcBef>
+                <a:spcPct val="0"/>
+              </a:spcBef>
+              <a:buNone/>
+              <a:defRPr sz="4000" kern="1200">
+                <a:solidFill>
+                  <a:schemeClr val="tx1"/>
+                </a:solidFill>
+                <a:latin typeface="+mj-lt"/>
+                <a:ea typeface="+mj-ea"/>
+                <a:cs typeface="+mj-cs"/>
+              </a:defRPr>
+            </a:lvl1pPr>
+          </a:lstStyle>
+          <a:p>
+            <a:pPr>
+              <a:lnSpc>
+                <a:spcPct val="75000"/>
+              </a:lnSpc>
+            </a:pPr>
+            <a:r>
+              <a:rPr lang="en-US" sz="6000" u="sng" dirty="0">
+                <a:ln w="41275">
+                  <a:noFill/>
+                </a:ln>
+                <a:solidFill>
+                  <a:schemeClr val="accent2"/>
+                </a:solidFill>
+                <a:ea typeface="Source Sans Pro Black"/>
+              </a:rPr>
+              <a:t>Website</a:t>
+            </a:r>
+          </a:p>
+          <a:p>
+            <a:pPr>
+              <a:lnSpc>
+                <a:spcPct val="75000"/>
+              </a:lnSpc>
+            </a:pPr>
+            <a:r>
+              <a:rPr lang="en-US" sz="3200" dirty="0">
+                <a:ln w="41275">
+                  <a:noFill/>
+                </a:ln>
+                <a:solidFill>
+                  <a:schemeClr val="tx1">
+                    <a:lumMod val="76000"/>
+                    <a:lumOff val="24000"/>
+                  </a:schemeClr>
+                </a:solidFill>
+                <a:ea typeface="Source Sans Pro Black"/>
+              </a:rPr>
+              <a:t>Now you try</a:t>
+            </a:r>
+            <a:endParaRPr lang="en-US" sz="3200" u="sng" dirty="0">
+              <a:ln w="41275">
+                <a:noFill/>
+              </a:ln>
+              <a:solidFill>
+                <a:schemeClr val="tx1">
+                  <a:lumMod val="76000"/>
+                  <a:lumOff val="24000"/>
+                </a:schemeClr>
+              </a:solidFill>
+              <a:ea typeface="Source Sans Pro Black"/>
+            </a:endParaRPr>
+          </a:p>
+        </p:txBody>
+      </p:sp>
+      <p:cxnSp>
+        <p:nvCxnSpPr>
+          <p:cNvPr id="47" name="Straight Connector 46">
+            <a:extLst>
+              <a:ext uri="{FF2B5EF4-FFF2-40B4-BE49-F238E27FC236}">
+                <a16:creationId xmlns:a16="http://schemas.microsoft.com/office/drawing/2014/main" id="{76FD6A2C-0DF1-6F56-FC5C-B5F79B417FA2}"/>
+              </a:ext>
+              <a:ext uri="{C183D7F6-B498-43B3-948B-1728B52AA6E4}">
+                <adec:decorative xmlns:adec="http://schemas.microsoft.com/office/drawing/2017/decorative" val="1"/>
+              </a:ext>
+            </a:extLst>
+          </p:cNvPr>
+          <p:cNvCxnSpPr>
+            <a:cxnSpLocks/>
+          </p:cNvCxnSpPr>
+          <p:nvPr/>
+        </p:nvCxnSpPr>
+        <p:spPr>
+          <a:xfrm>
+            <a:off x="839615" y="1271285"/>
+            <a:ext cx="8677751" cy="0"/>
+          </a:xfrm>
+          <a:prstGeom prst="line">
+            <a:avLst/>
+          </a:prstGeom>
+          <a:ln w="25400">
+            <a:solidFill>
+              <a:schemeClr val="accent2"/>
+            </a:solidFill>
+          </a:ln>
+        </p:spPr>
+        <p:style>
+          <a:lnRef idx="1">
+            <a:schemeClr val="accent1"/>
+          </a:lnRef>
+          <a:fillRef idx="0">
+            <a:schemeClr val="accent1"/>
+          </a:fillRef>
+          <a:effectRef idx="0">
+            <a:schemeClr val="accent1"/>
+          </a:effectRef>
+          <a:fontRef idx="minor">
+            <a:schemeClr val="tx1"/>
+          </a:fontRef>
+        </p:style>
+      </p:cxnSp>
+      <p:sp>
+        <p:nvSpPr>
+          <p:cNvPr id="4" name="TextBox 3">
+            <a:extLst>
+              <a:ext uri="{FF2B5EF4-FFF2-40B4-BE49-F238E27FC236}">
+                <a16:creationId xmlns:a16="http://schemas.microsoft.com/office/drawing/2014/main" id="{6D634C00-33F6-ED3B-39D9-7C187DEBE2EE}"/>
+              </a:ext>
+            </a:extLst>
+          </p:cNvPr>
+          <p:cNvSpPr txBox="1"/>
+          <p:nvPr/>
+        </p:nvSpPr>
+        <p:spPr>
+          <a:xfrm>
+            <a:off x="2904721" y="2006982"/>
+            <a:ext cx="5029200" cy="401007"/>
+          </a:xfrm>
+          <a:prstGeom prst="rect">
+            <a:avLst/>
+          </a:prstGeom>
+          <a:noFill/>
+        </p:spPr>
+        <p:txBody>
+          <a:bodyPr wrap="square">
+            <a:spAutoFit/>
+          </a:bodyPr>
+          <a:lstStyle/>
+          <a:p>
+            <a:pPr algn="just"/>
+            <a:r>
+              <a:rPr lang="en-US" dirty="0"/>
+              <a:t>Head over to </a:t>
+            </a:r>
+            <a:r>
+              <a:rPr lang="en-001" dirty="0">
+                <a:hlinkClick r:id="rId2"/>
+              </a:rPr>
+              <a:t>http://localhost:</a:t>
+            </a:r>
+            <a:r>
+              <a:rPr lang="en-US" dirty="0">
+                <a:hlinkClick r:id="rId2"/>
+              </a:rPr>
+              <a:t>3</a:t>
+            </a:r>
+            <a:r>
+              <a:rPr lang="en-001" dirty="0">
+                <a:hlinkClick r:id="rId2"/>
+              </a:rPr>
+              <a:t>00</a:t>
+            </a:r>
+            <a:r>
+              <a:rPr lang="en-US" dirty="0">
+                <a:hlinkClick r:id="rId2"/>
+              </a:rPr>
+              <a:t>0/</a:t>
+            </a:r>
+            <a:endParaRPr lang="en-001" dirty="0"/>
+          </a:p>
+        </p:txBody>
+      </p:sp>
+      <p:pic>
+        <p:nvPicPr>
+          <p:cNvPr id="5" name="Picture 4">
+            <a:extLst>
+              <a:ext uri="{FF2B5EF4-FFF2-40B4-BE49-F238E27FC236}">
+                <a16:creationId xmlns:a16="http://schemas.microsoft.com/office/drawing/2014/main" id="{E0838244-AF26-1FD2-3F39-D30FFFC108EE}"/>
+              </a:ext>
+            </a:extLst>
+          </p:cNvPr>
+          <p:cNvPicPr>
+            <a:picLocks noChangeAspect="1"/>
+          </p:cNvPicPr>
+          <p:nvPr/>
+        </p:nvPicPr>
+        <p:blipFill>
+          <a:blip r:embed="rId3"/>
+          <a:stretch>
+            <a:fillRect/>
+          </a:stretch>
+        </p:blipFill>
+        <p:spPr>
+          <a:xfrm>
+            <a:off x="873303" y="2977198"/>
+            <a:ext cx="8311793" cy="2433693"/>
+          </a:xfrm>
+          <a:prstGeom prst="rect">
+            <a:avLst/>
+          </a:prstGeom>
+        </p:spPr>
+      </p:pic>
+    </p:spTree>
+    <p:extLst>
+      <p:ext uri="{BB962C8B-B14F-4D97-AF65-F5344CB8AC3E}">
+        <p14:creationId xmlns:p14="http://schemas.microsoft.com/office/powerpoint/2010/main" val="767257223"/>
+      </p:ext>
+    </p:extLst>
+  </p:cSld>
+  <p:clrMapOvr>
+    <a:masterClrMapping/>
+  </p:clrMapOvr>
+</p:sld>
+</file>
+
+<file path=ppt/slides/slide19.xml><?xml version="1.0" encoding="utf-8"?>
+<p:sld xmlns:a="http://schemas.openxmlformats.org/drawingml/2006/main" xmlns:r="http://schemas.openxmlformats.org/officeDocument/2006/relationships" xmlns:p="http://schemas.openxmlformats.org/presentationml/2006/main">
+  <p:cSld>
+    <p:bg>
+      <p:bgPr>
+        <a:solidFill>
+          <a:schemeClr val="bg1"/>
+        </a:solidFill>
+        <a:effectLst/>
+      </p:bgPr>
+    </p:bg>
+    <p:spTree>
+      <p:nvGrpSpPr>
+        <p:cNvPr id="1" name="">
+          <a:extLst>
+            <a:ext uri="{FF2B5EF4-FFF2-40B4-BE49-F238E27FC236}">
+              <a16:creationId xmlns:a16="http://schemas.microsoft.com/office/drawing/2014/main" id="{1AE891E2-3DEB-70ED-5E82-C981D8871A27}"/>
+            </a:ext>
+          </a:extLst>
+        </p:cNvPr>
+        <p:cNvGrpSpPr/>
+        <p:nvPr/>
+      </p:nvGrpSpPr>
+      <p:grpSpPr>
+        <a:xfrm>
+          <a:off x="0" y="0"/>
+          <a:ext cx="0" cy="0"/>
+          <a:chOff x="0" y="0"/>
+          <a:chExt cx="0" cy="0"/>
+        </a:xfrm>
+      </p:grpSpPr>
+      <p:sp>
+        <p:nvSpPr>
+          <p:cNvPr id="2" name="Title 1" hidden="1">
+            <a:extLst>
+              <a:ext uri="{FF2B5EF4-FFF2-40B4-BE49-F238E27FC236}">
+                <a16:creationId xmlns:a16="http://schemas.microsoft.com/office/drawing/2014/main" id="{7D249ED0-9F09-24E6-BBA9-3063F7FA8A06}"/>
+              </a:ext>
+            </a:extLst>
+          </p:cNvPr>
+          <p:cNvSpPr>
+            <a:spLocks noGrp="1"/>
+          </p:cNvSpPr>
+          <p:nvPr>
+            <p:ph type="title"/>
+          </p:nvPr>
+        </p:nvSpPr>
+        <p:spPr/>
+        <p:txBody>
+          <a:bodyPr/>
+          <a:lstStyle/>
+          <a:p>
+            <a:r>
+              <a:rPr lang="en-US" dirty="0"/>
+              <a:t>Cover Page</a:t>
+            </a:r>
+          </a:p>
+        </p:txBody>
+      </p:sp>
+      <p:sp>
+        <p:nvSpPr>
+          <p:cNvPr id="8" name="Title 1">
+            <a:extLst>
+              <a:ext uri="{FF2B5EF4-FFF2-40B4-BE49-F238E27FC236}">
+                <a16:creationId xmlns:a16="http://schemas.microsoft.com/office/drawing/2014/main" id="{1252D777-353B-DC6A-D03D-333EF73131A2}"/>
+              </a:ext>
+            </a:extLst>
+          </p:cNvPr>
+          <p:cNvSpPr txBox="1">
+            <a:spLocks/>
+          </p:cNvSpPr>
+          <p:nvPr/>
+        </p:nvSpPr>
+        <p:spPr>
+          <a:xfrm>
+            <a:off x="1161975" y="151635"/>
+            <a:ext cx="7804774" cy="719719"/>
+          </a:xfrm>
+          <a:prstGeom prst="rect">
+            <a:avLst/>
+          </a:prstGeom>
+        </p:spPr>
+        <p:txBody>
+          <a:bodyPr vert="horz" lIns="0" tIns="0" rIns="0" bIns="0" rtlCol="0" anchor="t">
+            <a:noAutofit/>
+          </a:bodyPr>
+          <a:lstStyle>
+            <a:lvl1pPr algn="ctr" defTabSz="754380" rtl="0" eaLnBrk="1" latinLnBrk="0" hangingPunct="1">
+              <a:lnSpc>
+                <a:spcPct val="90000"/>
+              </a:lnSpc>
+              <a:spcBef>
+                <a:spcPct val="0"/>
+              </a:spcBef>
+              <a:buNone/>
+              <a:defRPr sz="4000" kern="1200">
+                <a:solidFill>
+                  <a:schemeClr val="tx1"/>
+                </a:solidFill>
+                <a:latin typeface="+mj-lt"/>
+                <a:ea typeface="+mj-ea"/>
+                <a:cs typeface="+mj-cs"/>
+              </a:defRPr>
+            </a:lvl1pPr>
+          </a:lstStyle>
+          <a:p>
+            <a:pPr>
+              <a:lnSpc>
+                <a:spcPct val="75000"/>
+              </a:lnSpc>
+            </a:pPr>
+            <a:r>
+              <a:rPr lang="en-US" sz="6000" u="sng" dirty="0">
+                <a:ln w="41275">
+                  <a:noFill/>
+                </a:ln>
+                <a:solidFill>
+                  <a:schemeClr val="accent2"/>
+                </a:solidFill>
+                <a:ea typeface="Source Sans Pro Black"/>
+              </a:rPr>
+              <a:t>Website</a:t>
+            </a:r>
+          </a:p>
+          <a:p>
+            <a:pPr>
+              <a:lnSpc>
+                <a:spcPct val="75000"/>
+              </a:lnSpc>
+            </a:pPr>
+            <a:r>
+              <a:rPr lang="en-US" sz="3200" dirty="0">
+                <a:ln w="41275">
+                  <a:noFill/>
+                </a:ln>
+                <a:solidFill>
+                  <a:schemeClr val="tx1">
+                    <a:lumMod val="76000"/>
+                    <a:lumOff val="24000"/>
+                  </a:schemeClr>
+                </a:solidFill>
+                <a:ea typeface="Source Sans Pro Black"/>
+              </a:rPr>
+              <a:t>Now you try</a:t>
+            </a:r>
+            <a:endParaRPr lang="en-US" sz="3200" u="sng" dirty="0">
+              <a:ln w="41275">
+                <a:noFill/>
+              </a:ln>
+              <a:solidFill>
+                <a:schemeClr val="tx1">
+                  <a:lumMod val="76000"/>
+                  <a:lumOff val="24000"/>
+                </a:schemeClr>
+              </a:solidFill>
+              <a:ea typeface="Source Sans Pro Black"/>
+            </a:endParaRPr>
+          </a:p>
+        </p:txBody>
+      </p:sp>
+      <p:cxnSp>
+        <p:nvCxnSpPr>
+          <p:cNvPr id="47" name="Straight Connector 46">
+            <a:extLst>
+              <a:ext uri="{FF2B5EF4-FFF2-40B4-BE49-F238E27FC236}">
+                <a16:creationId xmlns:a16="http://schemas.microsoft.com/office/drawing/2014/main" id="{B33DBE30-D644-2F1A-E870-BC9784407308}"/>
+              </a:ext>
+              <a:ext uri="{C183D7F6-B498-43B3-948B-1728B52AA6E4}">
+                <adec:decorative xmlns:adec="http://schemas.microsoft.com/office/drawing/2017/decorative" val="1"/>
+              </a:ext>
+            </a:extLst>
+          </p:cNvPr>
+          <p:cNvCxnSpPr>
+            <a:cxnSpLocks/>
+          </p:cNvCxnSpPr>
+          <p:nvPr/>
+        </p:nvCxnSpPr>
+        <p:spPr>
+          <a:xfrm>
+            <a:off x="839615" y="1271285"/>
+            <a:ext cx="8677751" cy="0"/>
+          </a:xfrm>
+          <a:prstGeom prst="line">
+            <a:avLst/>
+          </a:prstGeom>
+          <a:ln w="25400">
+            <a:solidFill>
+              <a:schemeClr val="accent2"/>
+            </a:solidFill>
+          </a:ln>
+        </p:spPr>
+        <p:style>
+          <a:lnRef idx="1">
+            <a:schemeClr val="accent1"/>
+          </a:lnRef>
+          <a:fillRef idx="0">
+            <a:schemeClr val="accent1"/>
+          </a:fillRef>
+          <a:effectRef idx="0">
+            <a:schemeClr val="accent1"/>
+          </a:effectRef>
+          <a:fontRef idx="minor">
+            <a:schemeClr val="tx1"/>
+          </a:fontRef>
+        </p:style>
+      </p:cxnSp>
+      <p:pic>
+        <p:nvPicPr>
+          <p:cNvPr id="6" name="Picture 5">
+            <a:extLst>
+              <a:ext uri="{FF2B5EF4-FFF2-40B4-BE49-F238E27FC236}">
+                <a16:creationId xmlns:a16="http://schemas.microsoft.com/office/drawing/2014/main" id="{2E5807B5-8197-33A9-F7C8-FF57246D8179}"/>
+              </a:ext>
+            </a:extLst>
+          </p:cNvPr>
+          <p:cNvPicPr>
+            <a:picLocks noChangeAspect="1"/>
+          </p:cNvPicPr>
+          <p:nvPr/>
+        </p:nvPicPr>
+        <p:blipFill>
+          <a:blip r:embed="rId2"/>
+          <a:stretch>
+            <a:fillRect/>
+          </a:stretch>
+        </p:blipFill>
+        <p:spPr>
+          <a:xfrm>
+            <a:off x="1513984" y="1671217"/>
+            <a:ext cx="7030431" cy="4096322"/>
+          </a:xfrm>
+          <a:prstGeom prst="rect">
+            <a:avLst/>
+          </a:prstGeom>
+        </p:spPr>
+      </p:pic>
+      <p:sp>
+        <p:nvSpPr>
+          <p:cNvPr id="7" name="TextBox 6">
+            <a:extLst>
+              <a:ext uri="{FF2B5EF4-FFF2-40B4-BE49-F238E27FC236}">
+                <a16:creationId xmlns:a16="http://schemas.microsoft.com/office/drawing/2014/main" id="{FD1881F3-1895-9655-B589-01B0A2FDDDB1}"/>
+              </a:ext>
+            </a:extLst>
+          </p:cNvPr>
+          <p:cNvSpPr txBox="1"/>
+          <p:nvPr/>
+        </p:nvSpPr>
+        <p:spPr>
+          <a:xfrm>
+            <a:off x="6655063" y="5938463"/>
+            <a:ext cx="2075380" cy="709681"/>
+          </a:xfrm>
+          <a:prstGeom prst="rect">
+            <a:avLst/>
+          </a:prstGeom>
+          <a:noFill/>
+        </p:spPr>
+        <p:txBody>
+          <a:bodyPr wrap="square" rtlCol="0">
+            <a:spAutoFit/>
+          </a:bodyPr>
+          <a:lstStyle/>
+          <a:p>
+            <a:r>
+              <a:rPr lang="en-US" dirty="0"/>
+              <a:t>This intentionally doesn’t work</a:t>
+            </a:r>
+            <a:endParaRPr lang="en-001" dirty="0"/>
+          </a:p>
+        </p:txBody>
+      </p:sp>
+      <p:cxnSp>
+        <p:nvCxnSpPr>
+          <p:cNvPr id="12" name="Straight Arrow Connector 11">
+            <a:extLst>
+              <a:ext uri="{FF2B5EF4-FFF2-40B4-BE49-F238E27FC236}">
+                <a16:creationId xmlns:a16="http://schemas.microsoft.com/office/drawing/2014/main" id="{38F12B92-775C-A230-34DC-E36BEC16D829}"/>
+              </a:ext>
+            </a:extLst>
+          </p:cNvPr>
+          <p:cNvCxnSpPr>
+            <a:endCxn id="7" idx="0"/>
+          </p:cNvCxnSpPr>
+          <p:nvPr/>
+        </p:nvCxnSpPr>
+        <p:spPr>
+          <a:xfrm>
+            <a:off x="7582328" y="5568593"/>
+            <a:ext cx="110425" cy="369870"/>
+          </a:xfrm>
+          <a:prstGeom prst="straightConnector1">
+            <a:avLst/>
+          </a:prstGeom>
+          <a:ln>
+            <a:tailEnd type="triangle"/>
+          </a:ln>
+        </p:spPr>
+        <p:style>
+          <a:lnRef idx="3">
+            <a:schemeClr val="accent4"/>
+          </a:lnRef>
+          <a:fillRef idx="0">
+            <a:schemeClr val="accent4"/>
+          </a:fillRef>
+          <a:effectRef idx="2">
+            <a:schemeClr val="accent4"/>
+          </a:effectRef>
+          <a:fontRef idx="minor">
+            <a:schemeClr val="tx1"/>
+          </a:fontRef>
+        </p:style>
+      </p:cxnSp>
+    </p:spTree>
+    <p:extLst>
+      <p:ext uri="{BB962C8B-B14F-4D97-AF65-F5344CB8AC3E}">
+        <p14:creationId xmlns:p14="http://schemas.microsoft.com/office/powerpoint/2010/main" val="3562649241"/>
       </p:ext>
     </p:extLst>
   </p:cSld>
@@ -19838,6 +22946,2138 @@
     <p:extLst>
       <p:ext uri="{BB962C8B-B14F-4D97-AF65-F5344CB8AC3E}">
         <p14:creationId xmlns:p14="http://schemas.microsoft.com/office/powerpoint/2010/main" val="2705195337"/>
+      </p:ext>
+    </p:extLst>
+  </p:cSld>
+  <p:clrMapOvr>
+    <a:masterClrMapping/>
+  </p:clrMapOvr>
+</p:sld>
+</file>
+
+<file path=ppt/slides/slide20.xml><?xml version="1.0" encoding="utf-8"?>
+<p:sld xmlns:a="http://schemas.openxmlformats.org/drawingml/2006/main" xmlns:r="http://schemas.openxmlformats.org/officeDocument/2006/relationships" xmlns:p="http://schemas.openxmlformats.org/presentationml/2006/main">
+  <p:cSld>
+    <p:bg>
+      <p:bgPr>
+        <a:solidFill>
+          <a:schemeClr val="bg1"/>
+        </a:solidFill>
+        <a:effectLst/>
+      </p:bgPr>
+    </p:bg>
+    <p:spTree>
+      <p:nvGrpSpPr>
+        <p:cNvPr id="1" name="">
+          <a:extLst>
+            <a:ext uri="{FF2B5EF4-FFF2-40B4-BE49-F238E27FC236}">
+              <a16:creationId xmlns:a16="http://schemas.microsoft.com/office/drawing/2014/main" id="{29192E6A-2D42-3B69-A4E6-2A5289F9EAE0}"/>
+            </a:ext>
+          </a:extLst>
+        </p:cNvPr>
+        <p:cNvGrpSpPr/>
+        <p:nvPr/>
+      </p:nvGrpSpPr>
+      <p:grpSpPr>
+        <a:xfrm>
+          <a:off x="0" y="0"/>
+          <a:ext cx="0" cy="0"/>
+          <a:chOff x="0" y="0"/>
+          <a:chExt cx="0" cy="0"/>
+        </a:xfrm>
+      </p:grpSpPr>
+      <p:sp>
+        <p:nvSpPr>
+          <p:cNvPr id="2" name="Title 1" hidden="1">
+            <a:extLst>
+              <a:ext uri="{FF2B5EF4-FFF2-40B4-BE49-F238E27FC236}">
+                <a16:creationId xmlns:a16="http://schemas.microsoft.com/office/drawing/2014/main" id="{91F80384-AE19-E179-ED9B-A0C4311A9BED}"/>
+              </a:ext>
+            </a:extLst>
+          </p:cNvPr>
+          <p:cNvSpPr>
+            <a:spLocks noGrp="1"/>
+          </p:cNvSpPr>
+          <p:nvPr>
+            <p:ph type="title"/>
+          </p:nvPr>
+        </p:nvSpPr>
+        <p:spPr/>
+        <p:txBody>
+          <a:bodyPr/>
+          <a:lstStyle/>
+          <a:p>
+            <a:r>
+              <a:rPr lang="en-US" dirty="0"/>
+              <a:t>Cover Page</a:t>
+            </a:r>
+          </a:p>
+        </p:txBody>
+      </p:sp>
+      <p:sp>
+        <p:nvSpPr>
+          <p:cNvPr id="8" name="Title 1">
+            <a:extLst>
+              <a:ext uri="{FF2B5EF4-FFF2-40B4-BE49-F238E27FC236}">
+                <a16:creationId xmlns:a16="http://schemas.microsoft.com/office/drawing/2014/main" id="{615774D2-358C-FA12-162E-92AA6F9774C9}"/>
+              </a:ext>
+            </a:extLst>
+          </p:cNvPr>
+          <p:cNvSpPr txBox="1">
+            <a:spLocks/>
+          </p:cNvSpPr>
+          <p:nvPr/>
+        </p:nvSpPr>
+        <p:spPr>
+          <a:xfrm>
+            <a:off x="1161975" y="151635"/>
+            <a:ext cx="7804774" cy="719719"/>
+          </a:xfrm>
+          <a:prstGeom prst="rect">
+            <a:avLst/>
+          </a:prstGeom>
+        </p:spPr>
+        <p:txBody>
+          <a:bodyPr vert="horz" lIns="0" tIns="0" rIns="0" bIns="0" rtlCol="0" anchor="t">
+            <a:noAutofit/>
+          </a:bodyPr>
+          <a:lstStyle>
+            <a:lvl1pPr algn="ctr" defTabSz="754380" rtl="0" eaLnBrk="1" latinLnBrk="0" hangingPunct="1">
+              <a:lnSpc>
+                <a:spcPct val="90000"/>
+              </a:lnSpc>
+              <a:spcBef>
+                <a:spcPct val="0"/>
+              </a:spcBef>
+              <a:buNone/>
+              <a:defRPr sz="4000" kern="1200">
+                <a:solidFill>
+                  <a:schemeClr val="tx1"/>
+                </a:solidFill>
+                <a:latin typeface="+mj-lt"/>
+                <a:ea typeface="+mj-ea"/>
+                <a:cs typeface="+mj-cs"/>
+              </a:defRPr>
+            </a:lvl1pPr>
+          </a:lstStyle>
+          <a:p>
+            <a:pPr>
+              <a:lnSpc>
+                <a:spcPct val="75000"/>
+              </a:lnSpc>
+            </a:pPr>
+            <a:r>
+              <a:rPr lang="en-US" sz="6000" u="sng" dirty="0">
+                <a:ln w="41275">
+                  <a:noFill/>
+                </a:ln>
+                <a:solidFill>
+                  <a:schemeClr val="accent2"/>
+                </a:solidFill>
+                <a:ea typeface="Source Sans Pro Black"/>
+              </a:rPr>
+              <a:t>Website</a:t>
+            </a:r>
+          </a:p>
+          <a:p>
+            <a:pPr>
+              <a:lnSpc>
+                <a:spcPct val="75000"/>
+              </a:lnSpc>
+            </a:pPr>
+            <a:r>
+              <a:rPr lang="en-US" sz="3200" dirty="0">
+                <a:ln w="41275">
+                  <a:noFill/>
+                </a:ln>
+                <a:solidFill>
+                  <a:schemeClr val="tx1">
+                    <a:lumMod val="76000"/>
+                    <a:lumOff val="24000"/>
+                  </a:schemeClr>
+                </a:solidFill>
+                <a:ea typeface="Source Sans Pro Black"/>
+              </a:rPr>
+              <a:t>Now you try</a:t>
+            </a:r>
+            <a:endParaRPr lang="en-US" sz="3200" u="sng" dirty="0">
+              <a:ln w="41275">
+                <a:noFill/>
+              </a:ln>
+              <a:solidFill>
+                <a:schemeClr val="tx1">
+                  <a:lumMod val="76000"/>
+                  <a:lumOff val="24000"/>
+                </a:schemeClr>
+              </a:solidFill>
+              <a:ea typeface="Source Sans Pro Black"/>
+            </a:endParaRPr>
+          </a:p>
+        </p:txBody>
+      </p:sp>
+      <p:cxnSp>
+        <p:nvCxnSpPr>
+          <p:cNvPr id="47" name="Straight Connector 46">
+            <a:extLst>
+              <a:ext uri="{FF2B5EF4-FFF2-40B4-BE49-F238E27FC236}">
+                <a16:creationId xmlns:a16="http://schemas.microsoft.com/office/drawing/2014/main" id="{813AF47B-C8E5-125D-CCAF-B05780DA33BA}"/>
+              </a:ext>
+              <a:ext uri="{C183D7F6-B498-43B3-948B-1728B52AA6E4}">
+                <adec:decorative xmlns:adec="http://schemas.microsoft.com/office/drawing/2017/decorative" val="1"/>
+              </a:ext>
+            </a:extLst>
+          </p:cNvPr>
+          <p:cNvCxnSpPr>
+            <a:cxnSpLocks/>
+          </p:cNvCxnSpPr>
+          <p:nvPr/>
+        </p:nvCxnSpPr>
+        <p:spPr>
+          <a:xfrm>
+            <a:off x="839615" y="1271285"/>
+            <a:ext cx="8677751" cy="0"/>
+          </a:xfrm>
+          <a:prstGeom prst="line">
+            <a:avLst/>
+          </a:prstGeom>
+          <a:ln w="25400">
+            <a:solidFill>
+              <a:schemeClr val="accent2"/>
+            </a:solidFill>
+          </a:ln>
+        </p:spPr>
+        <p:style>
+          <a:lnRef idx="1">
+            <a:schemeClr val="accent1"/>
+          </a:lnRef>
+          <a:fillRef idx="0">
+            <a:schemeClr val="accent1"/>
+          </a:fillRef>
+          <a:effectRef idx="0">
+            <a:schemeClr val="accent1"/>
+          </a:effectRef>
+          <a:fontRef idx="minor">
+            <a:schemeClr val="tx1"/>
+          </a:fontRef>
+        </p:style>
+      </p:cxnSp>
+      <p:pic>
+        <p:nvPicPr>
+          <p:cNvPr id="4" name="Picture 3">
+            <a:extLst>
+              <a:ext uri="{FF2B5EF4-FFF2-40B4-BE49-F238E27FC236}">
+                <a16:creationId xmlns:a16="http://schemas.microsoft.com/office/drawing/2014/main" id="{34A6103B-3FD7-6921-6A18-30F05B5641E8}"/>
+              </a:ext>
+            </a:extLst>
+          </p:cNvPr>
+          <p:cNvPicPr>
+            <a:picLocks noChangeAspect="1"/>
+          </p:cNvPicPr>
+          <p:nvPr/>
+        </p:nvPicPr>
+        <p:blipFill>
+          <a:blip r:embed="rId2"/>
+          <a:stretch>
+            <a:fillRect/>
+          </a:stretch>
+        </p:blipFill>
+        <p:spPr>
+          <a:xfrm>
+            <a:off x="1771195" y="2238145"/>
+            <a:ext cx="6516009" cy="3296110"/>
+          </a:xfrm>
+          <a:prstGeom prst="rect">
+            <a:avLst/>
+          </a:prstGeom>
+        </p:spPr>
+      </p:pic>
+    </p:spTree>
+    <p:extLst>
+      <p:ext uri="{BB962C8B-B14F-4D97-AF65-F5344CB8AC3E}">
+        <p14:creationId xmlns:p14="http://schemas.microsoft.com/office/powerpoint/2010/main" val="2462823488"/>
+      </p:ext>
+    </p:extLst>
+  </p:cSld>
+  <p:clrMapOvr>
+    <a:masterClrMapping/>
+  </p:clrMapOvr>
+</p:sld>
+</file>
+
+<file path=ppt/slides/slide21.xml><?xml version="1.0" encoding="utf-8"?>
+<p:sld xmlns:a="http://schemas.openxmlformats.org/drawingml/2006/main" xmlns:r="http://schemas.openxmlformats.org/officeDocument/2006/relationships" xmlns:p="http://schemas.openxmlformats.org/presentationml/2006/main">
+  <p:cSld>
+    <p:spTree>
+      <p:nvGrpSpPr>
+        <p:cNvPr id="1" name="">
+          <a:extLst>
+            <a:ext uri="{FF2B5EF4-FFF2-40B4-BE49-F238E27FC236}">
+              <a16:creationId xmlns:a16="http://schemas.microsoft.com/office/drawing/2014/main" id="{8672C147-224A-7BA9-1AA9-DC00027B8C0E}"/>
+            </a:ext>
+          </a:extLst>
+        </p:cNvPr>
+        <p:cNvGrpSpPr/>
+        <p:nvPr/>
+      </p:nvGrpSpPr>
+      <p:grpSpPr>
+        <a:xfrm>
+          <a:off x="0" y="0"/>
+          <a:ext cx="0" cy="0"/>
+          <a:chOff x="0" y="0"/>
+          <a:chExt cx="0" cy="0"/>
+        </a:xfrm>
+      </p:grpSpPr>
+      <p:sp>
+        <p:nvSpPr>
+          <p:cNvPr id="2" name="Title 1" hidden="1">
+            <a:extLst>
+              <a:ext uri="{FF2B5EF4-FFF2-40B4-BE49-F238E27FC236}">
+                <a16:creationId xmlns:a16="http://schemas.microsoft.com/office/drawing/2014/main" id="{A86D7E21-56F4-C242-93ED-3D6EB5B476C9}"/>
+              </a:ext>
+            </a:extLst>
+          </p:cNvPr>
+          <p:cNvSpPr>
+            <a:spLocks noGrp="1"/>
+          </p:cNvSpPr>
+          <p:nvPr>
+            <p:ph type="title"/>
+          </p:nvPr>
+        </p:nvSpPr>
+        <p:spPr/>
+        <p:txBody>
+          <a:bodyPr/>
+          <a:lstStyle/>
+          <a:p>
+            <a:r>
+              <a:rPr lang="en-US" dirty="0"/>
+              <a:t>Cover Page</a:t>
+            </a:r>
+          </a:p>
+        </p:txBody>
+      </p:sp>
+      <p:sp>
+        <p:nvSpPr>
+          <p:cNvPr id="8" name="Title 1">
+            <a:extLst>
+              <a:ext uri="{FF2B5EF4-FFF2-40B4-BE49-F238E27FC236}">
+                <a16:creationId xmlns:a16="http://schemas.microsoft.com/office/drawing/2014/main" id="{0C6EEFA2-9AAD-AB30-6166-21D88778B712}"/>
+              </a:ext>
+            </a:extLst>
+          </p:cNvPr>
+          <p:cNvSpPr txBox="1">
+            <a:spLocks/>
+          </p:cNvSpPr>
+          <p:nvPr/>
+        </p:nvSpPr>
+        <p:spPr>
+          <a:xfrm>
+            <a:off x="1161975" y="151635"/>
+            <a:ext cx="7804774" cy="719719"/>
+          </a:xfrm>
+          <a:prstGeom prst="rect">
+            <a:avLst/>
+          </a:prstGeom>
+        </p:spPr>
+        <p:txBody>
+          <a:bodyPr vert="horz" lIns="0" tIns="0" rIns="0" bIns="0" rtlCol="0" anchor="t">
+            <a:noAutofit/>
+          </a:bodyPr>
+          <a:lstStyle>
+            <a:lvl1pPr algn="ctr" defTabSz="754380" rtl="0" eaLnBrk="1" latinLnBrk="0" hangingPunct="1">
+              <a:lnSpc>
+                <a:spcPct val="90000"/>
+              </a:lnSpc>
+              <a:spcBef>
+                <a:spcPct val="0"/>
+              </a:spcBef>
+              <a:buNone/>
+              <a:defRPr sz="4000" kern="1200">
+                <a:solidFill>
+                  <a:schemeClr val="tx1"/>
+                </a:solidFill>
+                <a:latin typeface="+mj-lt"/>
+                <a:ea typeface="+mj-ea"/>
+                <a:cs typeface="+mj-cs"/>
+              </a:defRPr>
+            </a:lvl1pPr>
+          </a:lstStyle>
+          <a:p>
+            <a:pPr>
+              <a:lnSpc>
+                <a:spcPct val="75000"/>
+              </a:lnSpc>
+            </a:pPr>
+            <a:r>
+              <a:rPr lang="en-US" sz="6000" u="sng" dirty="0">
+                <a:ln w="41275">
+                  <a:noFill/>
+                </a:ln>
+                <a:solidFill>
+                  <a:schemeClr val="accent2"/>
+                </a:solidFill>
+                <a:ea typeface="Source Sans Pro Black"/>
+              </a:rPr>
+              <a:t>Back to Postman</a:t>
+            </a:r>
+          </a:p>
+          <a:p>
+            <a:pPr>
+              <a:lnSpc>
+                <a:spcPct val="75000"/>
+              </a:lnSpc>
+            </a:pPr>
+            <a:r>
+              <a:rPr lang="en-US" sz="3200" dirty="0">
+                <a:ln w="41275">
+                  <a:noFill/>
+                </a:ln>
+                <a:solidFill>
+                  <a:schemeClr val="tx1">
+                    <a:lumMod val="76000"/>
+                    <a:lumOff val="24000"/>
+                  </a:schemeClr>
+                </a:solidFill>
+                <a:ea typeface="Source Sans Pro Black"/>
+              </a:rPr>
+              <a:t>Now you try</a:t>
+            </a:r>
+            <a:endParaRPr lang="en-US" sz="3200" u="sng" dirty="0">
+              <a:ln w="41275">
+                <a:noFill/>
+              </a:ln>
+              <a:solidFill>
+                <a:schemeClr val="tx1">
+                  <a:lumMod val="76000"/>
+                  <a:lumOff val="24000"/>
+                </a:schemeClr>
+              </a:solidFill>
+              <a:ea typeface="Source Sans Pro Black"/>
+            </a:endParaRPr>
+          </a:p>
+        </p:txBody>
+      </p:sp>
+      <p:cxnSp>
+        <p:nvCxnSpPr>
+          <p:cNvPr id="47" name="Straight Connector 46">
+            <a:extLst>
+              <a:ext uri="{FF2B5EF4-FFF2-40B4-BE49-F238E27FC236}">
+                <a16:creationId xmlns:a16="http://schemas.microsoft.com/office/drawing/2014/main" id="{D148BC2A-4C47-1A07-BD2A-35D5D2463C9B}"/>
+              </a:ext>
+              <a:ext uri="{C183D7F6-B498-43B3-948B-1728B52AA6E4}">
+                <adec:decorative xmlns:adec="http://schemas.microsoft.com/office/drawing/2017/decorative" val="1"/>
+              </a:ext>
+            </a:extLst>
+          </p:cNvPr>
+          <p:cNvCxnSpPr>
+            <a:cxnSpLocks/>
+          </p:cNvCxnSpPr>
+          <p:nvPr/>
+        </p:nvCxnSpPr>
+        <p:spPr>
+          <a:xfrm>
+            <a:off x="839615" y="1271285"/>
+            <a:ext cx="8677751" cy="0"/>
+          </a:xfrm>
+          <a:prstGeom prst="line">
+            <a:avLst/>
+          </a:prstGeom>
+          <a:ln w="25400">
+            <a:solidFill>
+              <a:schemeClr val="accent2"/>
+            </a:solidFill>
+          </a:ln>
+        </p:spPr>
+        <p:style>
+          <a:lnRef idx="1">
+            <a:schemeClr val="accent1"/>
+          </a:lnRef>
+          <a:fillRef idx="0">
+            <a:schemeClr val="accent1"/>
+          </a:fillRef>
+          <a:effectRef idx="0">
+            <a:schemeClr val="accent1"/>
+          </a:effectRef>
+          <a:fontRef idx="minor">
+            <a:schemeClr val="tx1"/>
+          </a:fontRef>
+        </p:style>
+      </p:cxnSp>
+      <p:sp>
+        <p:nvSpPr>
+          <p:cNvPr id="4" name="TextBox 3">
+            <a:extLst>
+              <a:ext uri="{FF2B5EF4-FFF2-40B4-BE49-F238E27FC236}">
+                <a16:creationId xmlns:a16="http://schemas.microsoft.com/office/drawing/2014/main" id="{BC21AD11-4240-6435-FB08-35D6566C66D8}"/>
+              </a:ext>
+            </a:extLst>
+          </p:cNvPr>
+          <p:cNvSpPr txBox="1"/>
+          <p:nvPr/>
+        </p:nvSpPr>
+        <p:spPr>
+          <a:xfrm>
+            <a:off x="2904721" y="2006982"/>
+            <a:ext cx="5029200" cy="401007"/>
+          </a:xfrm>
+          <a:prstGeom prst="rect">
+            <a:avLst/>
+          </a:prstGeom>
+          <a:noFill/>
+        </p:spPr>
+        <p:txBody>
+          <a:bodyPr wrap="square">
+            <a:spAutoFit/>
+          </a:bodyPr>
+          <a:lstStyle/>
+          <a:p>
+            <a:r>
+              <a:rPr lang="en-US" dirty="0"/>
+              <a:t>Head over to </a:t>
+            </a:r>
+            <a:r>
+              <a:rPr lang="en-001" dirty="0">
+                <a:hlinkClick r:id="rId2"/>
+              </a:rPr>
+              <a:t>http://localhost:8000/api/docs/</a:t>
+            </a:r>
+            <a:endParaRPr lang="en-001" dirty="0"/>
+          </a:p>
+        </p:txBody>
+      </p:sp>
+      <p:sp>
+        <p:nvSpPr>
+          <p:cNvPr id="12" name="TextBox 11">
+            <a:extLst>
+              <a:ext uri="{FF2B5EF4-FFF2-40B4-BE49-F238E27FC236}">
+                <a16:creationId xmlns:a16="http://schemas.microsoft.com/office/drawing/2014/main" id="{0F7DBA52-8219-4066-F219-D535BE309BBB}"/>
+              </a:ext>
+            </a:extLst>
+          </p:cNvPr>
+          <p:cNvSpPr txBox="1"/>
+          <p:nvPr/>
+        </p:nvSpPr>
+        <p:spPr>
+          <a:xfrm>
+            <a:off x="2576560" y="6055518"/>
+            <a:ext cx="5203860" cy="1077218"/>
+          </a:xfrm>
+          <a:prstGeom prst="rect">
+            <a:avLst/>
+          </a:prstGeom>
+          <a:noFill/>
+        </p:spPr>
+        <p:txBody>
+          <a:bodyPr wrap="square">
+            <a:spAutoFit/>
+          </a:bodyPr>
+          <a:lstStyle/>
+          <a:p>
+            <a:pPr algn="ctr"/>
+            <a:r>
+              <a:rPr lang="en-US" sz="1600" dirty="0">
+                <a:ea typeface="Source Sans Pro"/>
+              </a:rPr>
+              <a:t>The URL would be the website, in our case </a:t>
+            </a:r>
+            <a:r>
+              <a:rPr lang="en-US" sz="1600" dirty="0">
+                <a:ea typeface="Source Sans Pro"/>
+                <a:hlinkClick r:id="rId3"/>
+              </a:rPr>
+              <a:t>http://localhost</a:t>
+            </a:r>
+            <a:r>
+              <a:rPr lang="en-US" sz="1600" dirty="0">
+                <a:ea typeface="Source Sans Pro"/>
+              </a:rPr>
+              <a:t> appended with the </a:t>
+            </a:r>
+            <a:r>
+              <a:rPr lang="en-US" sz="1600" dirty="0" err="1">
+                <a:ea typeface="Source Sans Pro"/>
+              </a:rPr>
+              <a:t>api</a:t>
+            </a:r>
+            <a:r>
+              <a:rPr lang="en-US" sz="1600" dirty="0">
+                <a:ea typeface="Source Sans Pro"/>
+              </a:rPr>
+              <a:t> in this case “/</a:t>
+            </a:r>
+            <a:r>
+              <a:rPr lang="en-US" sz="1600" dirty="0" err="1">
+                <a:ea typeface="Source Sans Pro"/>
+              </a:rPr>
+              <a:t>api</a:t>
+            </a:r>
+            <a:r>
+              <a:rPr lang="en-US" sz="1600" dirty="0">
+                <a:ea typeface="Source Sans Pro"/>
+              </a:rPr>
+              <a:t>/</a:t>
+            </a:r>
+            <a:r>
+              <a:rPr lang="en-US" sz="1600" dirty="0" err="1">
+                <a:ea typeface="Source Sans Pro"/>
+              </a:rPr>
+              <a:t>todos</a:t>
+            </a:r>
+            <a:r>
+              <a:rPr lang="en-US" sz="1600" dirty="0">
+                <a:ea typeface="Source Sans Pro"/>
+              </a:rPr>
+              <a:t>/{id}/” which would look like </a:t>
+            </a:r>
+            <a:r>
+              <a:rPr lang="en-US" sz="1600" dirty="0">
+                <a:ea typeface="Source Sans Pro"/>
+                <a:hlinkClick r:id="rId4"/>
+              </a:rPr>
+              <a:t>http://localhost/api/todos/1/</a:t>
+            </a:r>
+            <a:endParaRPr lang="en-US" sz="1600" dirty="0">
+              <a:ea typeface="Source Sans Pro"/>
+            </a:endParaRPr>
+          </a:p>
+          <a:p>
+            <a:pPr algn="ctr"/>
+            <a:endParaRPr lang="en-GB" sz="1600" dirty="0">
+              <a:ea typeface="Source Sans Pro"/>
+            </a:endParaRPr>
+          </a:p>
+        </p:txBody>
+      </p:sp>
+      <p:pic>
+        <p:nvPicPr>
+          <p:cNvPr id="5" name="Picture 4">
+            <a:extLst>
+              <a:ext uri="{FF2B5EF4-FFF2-40B4-BE49-F238E27FC236}">
+                <a16:creationId xmlns:a16="http://schemas.microsoft.com/office/drawing/2014/main" id="{B69431FE-8C89-6180-F879-3A63B9F96F68}"/>
+              </a:ext>
+            </a:extLst>
+          </p:cNvPr>
+          <p:cNvPicPr>
+            <a:picLocks noChangeAspect="1"/>
+          </p:cNvPicPr>
+          <p:nvPr/>
+        </p:nvPicPr>
+        <p:blipFill>
+          <a:blip r:embed="rId5"/>
+          <a:stretch>
+            <a:fillRect/>
+          </a:stretch>
+        </p:blipFill>
+        <p:spPr>
+          <a:xfrm>
+            <a:off x="1970783" y="2407989"/>
+            <a:ext cx="6415414" cy="3647529"/>
+          </a:xfrm>
+          <a:prstGeom prst="rect">
+            <a:avLst/>
+          </a:prstGeom>
+        </p:spPr>
+      </p:pic>
+    </p:spTree>
+    <p:extLst>
+      <p:ext uri="{BB962C8B-B14F-4D97-AF65-F5344CB8AC3E}">
+        <p14:creationId xmlns:p14="http://schemas.microsoft.com/office/powerpoint/2010/main" val="3522050974"/>
+      </p:ext>
+    </p:extLst>
+  </p:cSld>
+  <p:clrMapOvr>
+    <a:masterClrMapping/>
+  </p:clrMapOvr>
+</p:sld>
+</file>
+
+<file path=ppt/slides/slide22.xml><?xml version="1.0" encoding="utf-8"?>
+<p:sld xmlns:a="http://schemas.openxmlformats.org/drawingml/2006/main" xmlns:r="http://schemas.openxmlformats.org/officeDocument/2006/relationships" xmlns:p="http://schemas.openxmlformats.org/presentationml/2006/main">
+  <p:cSld>
+    <p:spTree>
+      <p:nvGrpSpPr>
+        <p:cNvPr id="1" name="">
+          <a:extLst>
+            <a:ext uri="{FF2B5EF4-FFF2-40B4-BE49-F238E27FC236}">
+              <a16:creationId xmlns:a16="http://schemas.microsoft.com/office/drawing/2014/main" id="{9C96AE1A-299C-DEDC-6B49-689F9E910896}"/>
+            </a:ext>
+          </a:extLst>
+        </p:cNvPr>
+        <p:cNvGrpSpPr/>
+        <p:nvPr/>
+      </p:nvGrpSpPr>
+      <p:grpSpPr>
+        <a:xfrm>
+          <a:off x="0" y="0"/>
+          <a:ext cx="0" cy="0"/>
+          <a:chOff x="0" y="0"/>
+          <a:chExt cx="0" cy="0"/>
+        </a:xfrm>
+      </p:grpSpPr>
+      <p:sp>
+        <p:nvSpPr>
+          <p:cNvPr id="2" name="Title 1" hidden="1">
+            <a:extLst>
+              <a:ext uri="{FF2B5EF4-FFF2-40B4-BE49-F238E27FC236}">
+                <a16:creationId xmlns:a16="http://schemas.microsoft.com/office/drawing/2014/main" id="{8B2CE999-548D-6835-95FA-430B4C62ACB5}"/>
+              </a:ext>
+            </a:extLst>
+          </p:cNvPr>
+          <p:cNvSpPr>
+            <a:spLocks noGrp="1"/>
+          </p:cNvSpPr>
+          <p:nvPr>
+            <p:ph type="title"/>
+          </p:nvPr>
+        </p:nvSpPr>
+        <p:spPr/>
+        <p:txBody>
+          <a:bodyPr/>
+          <a:lstStyle/>
+          <a:p>
+            <a:r>
+              <a:rPr lang="en-US" dirty="0"/>
+              <a:t>Cover Page</a:t>
+            </a:r>
+          </a:p>
+        </p:txBody>
+      </p:sp>
+      <p:sp>
+        <p:nvSpPr>
+          <p:cNvPr id="8" name="Title 1">
+            <a:extLst>
+              <a:ext uri="{FF2B5EF4-FFF2-40B4-BE49-F238E27FC236}">
+                <a16:creationId xmlns:a16="http://schemas.microsoft.com/office/drawing/2014/main" id="{4C5C8D31-4C9C-EE85-1E53-F4B1862089E8}"/>
+              </a:ext>
+            </a:extLst>
+          </p:cNvPr>
+          <p:cNvSpPr txBox="1">
+            <a:spLocks/>
+          </p:cNvSpPr>
+          <p:nvPr/>
+        </p:nvSpPr>
+        <p:spPr>
+          <a:xfrm>
+            <a:off x="1161975" y="151635"/>
+            <a:ext cx="7804774" cy="719719"/>
+          </a:xfrm>
+          <a:prstGeom prst="rect">
+            <a:avLst/>
+          </a:prstGeom>
+        </p:spPr>
+        <p:txBody>
+          <a:bodyPr vert="horz" lIns="0" tIns="0" rIns="0" bIns="0" rtlCol="0" anchor="t">
+            <a:noAutofit/>
+          </a:bodyPr>
+          <a:lstStyle>
+            <a:lvl1pPr algn="ctr" defTabSz="754380" rtl="0" eaLnBrk="1" latinLnBrk="0" hangingPunct="1">
+              <a:lnSpc>
+                <a:spcPct val="90000"/>
+              </a:lnSpc>
+              <a:spcBef>
+                <a:spcPct val="0"/>
+              </a:spcBef>
+              <a:buNone/>
+              <a:defRPr sz="4000" kern="1200">
+                <a:solidFill>
+                  <a:schemeClr val="tx1"/>
+                </a:solidFill>
+                <a:latin typeface="+mj-lt"/>
+                <a:ea typeface="+mj-ea"/>
+                <a:cs typeface="+mj-cs"/>
+              </a:defRPr>
+            </a:lvl1pPr>
+          </a:lstStyle>
+          <a:p>
+            <a:pPr>
+              <a:lnSpc>
+                <a:spcPct val="75000"/>
+              </a:lnSpc>
+            </a:pPr>
+            <a:r>
+              <a:rPr lang="en-US" sz="6000" u="sng" dirty="0">
+                <a:ln w="41275">
+                  <a:noFill/>
+                </a:ln>
+                <a:solidFill>
+                  <a:schemeClr val="accent2"/>
+                </a:solidFill>
+                <a:ea typeface="Source Sans Pro Black"/>
+              </a:rPr>
+              <a:t>Back to Postman</a:t>
+            </a:r>
+          </a:p>
+          <a:p>
+            <a:pPr>
+              <a:lnSpc>
+                <a:spcPct val="75000"/>
+              </a:lnSpc>
+            </a:pPr>
+            <a:r>
+              <a:rPr lang="en-US" sz="3200" dirty="0">
+                <a:ln w="41275">
+                  <a:noFill/>
+                </a:ln>
+                <a:solidFill>
+                  <a:schemeClr val="tx1">
+                    <a:lumMod val="76000"/>
+                    <a:lumOff val="24000"/>
+                  </a:schemeClr>
+                </a:solidFill>
+                <a:ea typeface="Source Sans Pro Black"/>
+              </a:rPr>
+              <a:t>Now you try</a:t>
+            </a:r>
+            <a:endParaRPr lang="en-US" sz="3200" u="sng" dirty="0">
+              <a:ln w="41275">
+                <a:noFill/>
+              </a:ln>
+              <a:solidFill>
+                <a:schemeClr val="tx1">
+                  <a:lumMod val="76000"/>
+                  <a:lumOff val="24000"/>
+                </a:schemeClr>
+              </a:solidFill>
+              <a:ea typeface="Source Sans Pro Black"/>
+            </a:endParaRPr>
+          </a:p>
+        </p:txBody>
+      </p:sp>
+      <p:cxnSp>
+        <p:nvCxnSpPr>
+          <p:cNvPr id="47" name="Straight Connector 46">
+            <a:extLst>
+              <a:ext uri="{FF2B5EF4-FFF2-40B4-BE49-F238E27FC236}">
+                <a16:creationId xmlns:a16="http://schemas.microsoft.com/office/drawing/2014/main" id="{F32EE9D3-A600-E9F4-8D9D-786DD965EB50}"/>
+              </a:ext>
+              <a:ext uri="{C183D7F6-B498-43B3-948B-1728B52AA6E4}">
+                <adec:decorative xmlns:adec="http://schemas.microsoft.com/office/drawing/2017/decorative" val="1"/>
+              </a:ext>
+            </a:extLst>
+          </p:cNvPr>
+          <p:cNvCxnSpPr>
+            <a:cxnSpLocks/>
+          </p:cNvCxnSpPr>
+          <p:nvPr/>
+        </p:nvCxnSpPr>
+        <p:spPr>
+          <a:xfrm>
+            <a:off x="839615" y="1271285"/>
+            <a:ext cx="8677751" cy="0"/>
+          </a:xfrm>
+          <a:prstGeom prst="line">
+            <a:avLst/>
+          </a:prstGeom>
+          <a:ln w="25400">
+            <a:solidFill>
+              <a:schemeClr val="accent2"/>
+            </a:solidFill>
+          </a:ln>
+        </p:spPr>
+        <p:style>
+          <a:lnRef idx="1">
+            <a:schemeClr val="accent1"/>
+          </a:lnRef>
+          <a:fillRef idx="0">
+            <a:schemeClr val="accent1"/>
+          </a:fillRef>
+          <a:effectRef idx="0">
+            <a:schemeClr val="accent1"/>
+          </a:effectRef>
+          <a:fontRef idx="minor">
+            <a:schemeClr val="tx1"/>
+          </a:fontRef>
+        </p:style>
+      </p:cxnSp>
+      <p:pic>
+        <p:nvPicPr>
+          <p:cNvPr id="9" name="Picture 8">
+            <a:extLst>
+              <a:ext uri="{FF2B5EF4-FFF2-40B4-BE49-F238E27FC236}">
+                <a16:creationId xmlns:a16="http://schemas.microsoft.com/office/drawing/2014/main" id="{ECEC0805-AE50-5914-A08D-C6CBCD41BBC9}"/>
+              </a:ext>
+            </a:extLst>
+          </p:cNvPr>
+          <p:cNvPicPr>
+            <a:picLocks noChangeAspect="1"/>
+          </p:cNvPicPr>
+          <p:nvPr/>
+        </p:nvPicPr>
+        <p:blipFill>
+          <a:blip r:embed="rId2"/>
+          <a:stretch>
+            <a:fillRect/>
+          </a:stretch>
+        </p:blipFill>
+        <p:spPr>
+          <a:xfrm>
+            <a:off x="1142457" y="1757003"/>
+            <a:ext cx="7773485" cy="4744112"/>
+          </a:xfrm>
+          <a:prstGeom prst="rect">
+            <a:avLst/>
+          </a:prstGeom>
+        </p:spPr>
+      </p:pic>
+      <p:cxnSp>
+        <p:nvCxnSpPr>
+          <p:cNvPr id="14" name="Straight Arrow Connector 13">
+            <a:extLst>
+              <a:ext uri="{FF2B5EF4-FFF2-40B4-BE49-F238E27FC236}">
+                <a16:creationId xmlns:a16="http://schemas.microsoft.com/office/drawing/2014/main" id="{E351C5C2-C361-4417-2BEE-DD487B4286C5}"/>
+              </a:ext>
+            </a:extLst>
+          </p:cNvPr>
+          <p:cNvCxnSpPr>
+            <a:cxnSpLocks/>
+          </p:cNvCxnSpPr>
+          <p:nvPr/>
+        </p:nvCxnSpPr>
+        <p:spPr>
+          <a:xfrm flipH="1">
+            <a:off x="3030876" y="5198724"/>
+            <a:ext cx="2033486" cy="0"/>
+          </a:xfrm>
+          <a:prstGeom prst="straightConnector1">
+            <a:avLst/>
+          </a:prstGeom>
+          <a:ln>
+            <a:tailEnd type="triangle"/>
+          </a:ln>
+        </p:spPr>
+        <p:style>
+          <a:lnRef idx="1">
+            <a:schemeClr val="accent1"/>
+          </a:lnRef>
+          <a:fillRef idx="0">
+            <a:schemeClr val="accent1"/>
+          </a:fillRef>
+          <a:effectRef idx="0">
+            <a:schemeClr val="accent1"/>
+          </a:effectRef>
+          <a:fontRef idx="minor">
+            <a:schemeClr val="tx1"/>
+          </a:fontRef>
+        </p:style>
+      </p:cxnSp>
+      <p:sp>
+        <p:nvSpPr>
+          <p:cNvPr id="15" name="TextBox 14">
+            <a:extLst>
+              <a:ext uri="{FF2B5EF4-FFF2-40B4-BE49-F238E27FC236}">
+                <a16:creationId xmlns:a16="http://schemas.microsoft.com/office/drawing/2014/main" id="{553EFA20-90D9-2E82-3F49-90B51DC912A7}"/>
+              </a:ext>
+            </a:extLst>
+          </p:cNvPr>
+          <p:cNvSpPr txBox="1"/>
+          <p:nvPr/>
+        </p:nvSpPr>
+        <p:spPr>
+          <a:xfrm>
+            <a:off x="5064362" y="4998220"/>
+            <a:ext cx="2359941" cy="401007"/>
+          </a:xfrm>
+          <a:prstGeom prst="rect">
+            <a:avLst/>
+          </a:prstGeom>
+          <a:noFill/>
+        </p:spPr>
+        <p:txBody>
+          <a:bodyPr wrap="none" rtlCol="0">
+            <a:spAutoFit/>
+          </a:bodyPr>
+          <a:lstStyle/>
+          <a:p>
+            <a:r>
+              <a:rPr lang="en-US" dirty="0">
+                <a:solidFill>
+                  <a:schemeClr val="accent1"/>
+                </a:solidFill>
+              </a:rPr>
+              <a:t>The id we’ll be using</a:t>
+            </a:r>
+            <a:endParaRPr lang="en-001" dirty="0">
+              <a:solidFill>
+                <a:schemeClr val="accent1"/>
+              </a:solidFill>
+            </a:endParaRPr>
+          </a:p>
+        </p:txBody>
+      </p:sp>
+    </p:spTree>
+    <p:extLst>
+      <p:ext uri="{BB962C8B-B14F-4D97-AF65-F5344CB8AC3E}">
+        <p14:creationId xmlns:p14="http://schemas.microsoft.com/office/powerpoint/2010/main" val="3058018143"/>
+      </p:ext>
+    </p:extLst>
+  </p:cSld>
+  <p:clrMapOvr>
+    <a:masterClrMapping/>
+  </p:clrMapOvr>
+</p:sld>
+</file>
+
+<file path=ppt/slides/slide23.xml><?xml version="1.0" encoding="utf-8"?>
+<p:sld xmlns:a="http://schemas.openxmlformats.org/drawingml/2006/main" xmlns:r="http://schemas.openxmlformats.org/officeDocument/2006/relationships" xmlns:p="http://schemas.openxmlformats.org/presentationml/2006/main">
+  <p:cSld>
+    <p:spTree>
+      <p:nvGrpSpPr>
+        <p:cNvPr id="1" name="">
+          <a:extLst>
+            <a:ext uri="{FF2B5EF4-FFF2-40B4-BE49-F238E27FC236}">
+              <a16:creationId xmlns:a16="http://schemas.microsoft.com/office/drawing/2014/main" id="{37226847-260D-6F8B-A1BD-A3CA35DA6F34}"/>
+            </a:ext>
+          </a:extLst>
+        </p:cNvPr>
+        <p:cNvGrpSpPr/>
+        <p:nvPr/>
+      </p:nvGrpSpPr>
+      <p:grpSpPr>
+        <a:xfrm>
+          <a:off x="0" y="0"/>
+          <a:ext cx="0" cy="0"/>
+          <a:chOff x="0" y="0"/>
+          <a:chExt cx="0" cy="0"/>
+        </a:xfrm>
+      </p:grpSpPr>
+      <p:sp>
+        <p:nvSpPr>
+          <p:cNvPr id="2" name="Title 1" hidden="1">
+            <a:extLst>
+              <a:ext uri="{FF2B5EF4-FFF2-40B4-BE49-F238E27FC236}">
+                <a16:creationId xmlns:a16="http://schemas.microsoft.com/office/drawing/2014/main" id="{B9E28DFB-41C0-FD6A-803F-1391B61B5B0E}"/>
+              </a:ext>
+            </a:extLst>
+          </p:cNvPr>
+          <p:cNvSpPr>
+            <a:spLocks noGrp="1"/>
+          </p:cNvSpPr>
+          <p:nvPr>
+            <p:ph type="title"/>
+          </p:nvPr>
+        </p:nvSpPr>
+        <p:spPr/>
+        <p:txBody>
+          <a:bodyPr/>
+          <a:lstStyle/>
+          <a:p>
+            <a:r>
+              <a:rPr lang="en-US" dirty="0"/>
+              <a:t>Cover Page</a:t>
+            </a:r>
+          </a:p>
+        </p:txBody>
+      </p:sp>
+      <p:sp>
+        <p:nvSpPr>
+          <p:cNvPr id="8" name="Title 1">
+            <a:extLst>
+              <a:ext uri="{FF2B5EF4-FFF2-40B4-BE49-F238E27FC236}">
+                <a16:creationId xmlns:a16="http://schemas.microsoft.com/office/drawing/2014/main" id="{5F6691F8-00DD-9FEB-420D-48124E15EC72}"/>
+              </a:ext>
+            </a:extLst>
+          </p:cNvPr>
+          <p:cNvSpPr txBox="1">
+            <a:spLocks/>
+          </p:cNvSpPr>
+          <p:nvPr/>
+        </p:nvSpPr>
+        <p:spPr>
+          <a:xfrm>
+            <a:off x="1161975" y="151635"/>
+            <a:ext cx="7804774" cy="719719"/>
+          </a:xfrm>
+          <a:prstGeom prst="rect">
+            <a:avLst/>
+          </a:prstGeom>
+        </p:spPr>
+        <p:txBody>
+          <a:bodyPr vert="horz" lIns="0" tIns="0" rIns="0" bIns="0" rtlCol="0" anchor="t">
+            <a:noAutofit/>
+          </a:bodyPr>
+          <a:lstStyle>
+            <a:lvl1pPr algn="ctr" defTabSz="754380" rtl="0" eaLnBrk="1" latinLnBrk="0" hangingPunct="1">
+              <a:lnSpc>
+                <a:spcPct val="90000"/>
+              </a:lnSpc>
+              <a:spcBef>
+                <a:spcPct val="0"/>
+              </a:spcBef>
+              <a:buNone/>
+              <a:defRPr sz="4000" kern="1200">
+                <a:solidFill>
+                  <a:schemeClr val="tx1"/>
+                </a:solidFill>
+                <a:latin typeface="+mj-lt"/>
+                <a:ea typeface="+mj-ea"/>
+                <a:cs typeface="+mj-cs"/>
+              </a:defRPr>
+            </a:lvl1pPr>
+          </a:lstStyle>
+          <a:p>
+            <a:pPr>
+              <a:lnSpc>
+                <a:spcPct val="75000"/>
+              </a:lnSpc>
+            </a:pPr>
+            <a:r>
+              <a:rPr lang="en-US" sz="6000" u="sng" dirty="0">
+                <a:ln w="41275">
+                  <a:noFill/>
+                </a:ln>
+                <a:solidFill>
+                  <a:schemeClr val="accent2"/>
+                </a:solidFill>
+                <a:ea typeface="Source Sans Pro Black"/>
+              </a:rPr>
+              <a:t>Back to Postman</a:t>
+            </a:r>
+          </a:p>
+          <a:p>
+            <a:pPr>
+              <a:lnSpc>
+                <a:spcPct val="75000"/>
+              </a:lnSpc>
+            </a:pPr>
+            <a:r>
+              <a:rPr lang="en-US" sz="3200" dirty="0">
+                <a:ln w="41275">
+                  <a:noFill/>
+                </a:ln>
+                <a:solidFill>
+                  <a:schemeClr val="tx1">
+                    <a:lumMod val="76000"/>
+                    <a:lumOff val="24000"/>
+                  </a:schemeClr>
+                </a:solidFill>
+                <a:ea typeface="Source Sans Pro Black"/>
+              </a:rPr>
+              <a:t>Now you try</a:t>
+            </a:r>
+            <a:endParaRPr lang="en-US" sz="3200" u="sng" dirty="0">
+              <a:ln w="41275">
+                <a:noFill/>
+              </a:ln>
+              <a:solidFill>
+                <a:schemeClr val="tx1">
+                  <a:lumMod val="76000"/>
+                  <a:lumOff val="24000"/>
+                </a:schemeClr>
+              </a:solidFill>
+              <a:ea typeface="Source Sans Pro Black"/>
+            </a:endParaRPr>
+          </a:p>
+        </p:txBody>
+      </p:sp>
+      <p:cxnSp>
+        <p:nvCxnSpPr>
+          <p:cNvPr id="47" name="Straight Connector 46">
+            <a:extLst>
+              <a:ext uri="{FF2B5EF4-FFF2-40B4-BE49-F238E27FC236}">
+                <a16:creationId xmlns:a16="http://schemas.microsoft.com/office/drawing/2014/main" id="{69D31E41-9A1E-4190-6B8A-BB5F7535A40D}"/>
+              </a:ext>
+              <a:ext uri="{C183D7F6-B498-43B3-948B-1728B52AA6E4}">
+                <adec:decorative xmlns:adec="http://schemas.microsoft.com/office/drawing/2017/decorative" val="1"/>
+              </a:ext>
+            </a:extLst>
+          </p:cNvPr>
+          <p:cNvCxnSpPr>
+            <a:cxnSpLocks/>
+          </p:cNvCxnSpPr>
+          <p:nvPr/>
+        </p:nvCxnSpPr>
+        <p:spPr>
+          <a:xfrm>
+            <a:off x="839615" y="1271285"/>
+            <a:ext cx="8677751" cy="0"/>
+          </a:xfrm>
+          <a:prstGeom prst="line">
+            <a:avLst/>
+          </a:prstGeom>
+          <a:ln w="25400">
+            <a:solidFill>
+              <a:schemeClr val="accent2"/>
+            </a:solidFill>
+          </a:ln>
+        </p:spPr>
+        <p:style>
+          <a:lnRef idx="1">
+            <a:schemeClr val="accent1"/>
+          </a:lnRef>
+          <a:fillRef idx="0">
+            <a:schemeClr val="accent1"/>
+          </a:fillRef>
+          <a:effectRef idx="0">
+            <a:schemeClr val="accent1"/>
+          </a:effectRef>
+          <a:fontRef idx="minor">
+            <a:schemeClr val="tx1"/>
+          </a:fontRef>
+        </p:style>
+      </p:cxnSp>
+      <p:pic>
+        <p:nvPicPr>
+          <p:cNvPr id="6" name="Picture 5">
+            <a:extLst>
+              <a:ext uri="{FF2B5EF4-FFF2-40B4-BE49-F238E27FC236}">
+                <a16:creationId xmlns:a16="http://schemas.microsoft.com/office/drawing/2014/main" id="{6F21B9D5-ADCB-818B-B98C-031DFC9458BE}"/>
+              </a:ext>
+            </a:extLst>
+          </p:cNvPr>
+          <p:cNvPicPr>
+            <a:picLocks noChangeAspect="1"/>
+          </p:cNvPicPr>
+          <p:nvPr/>
+        </p:nvPicPr>
+        <p:blipFill>
+          <a:blip r:embed="rId2"/>
+          <a:stretch>
+            <a:fillRect/>
+          </a:stretch>
+        </p:blipFill>
+        <p:spPr>
+          <a:xfrm>
+            <a:off x="1132931" y="2166697"/>
+            <a:ext cx="7792537" cy="3439005"/>
+          </a:xfrm>
+          <a:prstGeom prst="rect">
+            <a:avLst/>
+          </a:prstGeom>
+        </p:spPr>
+      </p:pic>
+      <p:cxnSp>
+        <p:nvCxnSpPr>
+          <p:cNvPr id="10" name="Straight Arrow Connector 9">
+            <a:extLst>
+              <a:ext uri="{FF2B5EF4-FFF2-40B4-BE49-F238E27FC236}">
+                <a16:creationId xmlns:a16="http://schemas.microsoft.com/office/drawing/2014/main" id="{E6DA2297-78DB-6802-E5C6-2ACFAE871F18}"/>
+              </a:ext>
+            </a:extLst>
+          </p:cNvPr>
+          <p:cNvCxnSpPr>
+            <a:cxnSpLocks/>
+          </p:cNvCxnSpPr>
+          <p:nvPr/>
+        </p:nvCxnSpPr>
+        <p:spPr>
+          <a:xfrm flipV="1">
+            <a:off x="1839074" y="5239820"/>
+            <a:ext cx="0" cy="852755"/>
+          </a:xfrm>
+          <a:prstGeom prst="straightConnector1">
+            <a:avLst/>
+          </a:prstGeom>
+          <a:ln>
+            <a:tailEnd type="triangle"/>
+          </a:ln>
+        </p:spPr>
+        <p:style>
+          <a:lnRef idx="3">
+            <a:schemeClr val="accent1"/>
+          </a:lnRef>
+          <a:fillRef idx="0">
+            <a:schemeClr val="accent1"/>
+          </a:fillRef>
+          <a:effectRef idx="2">
+            <a:schemeClr val="accent1"/>
+          </a:effectRef>
+          <a:fontRef idx="minor">
+            <a:schemeClr val="tx1"/>
+          </a:fontRef>
+        </p:style>
+      </p:cxnSp>
+      <p:cxnSp>
+        <p:nvCxnSpPr>
+          <p:cNvPr id="12" name="Straight Arrow Connector 11">
+            <a:extLst>
+              <a:ext uri="{FF2B5EF4-FFF2-40B4-BE49-F238E27FC236}">
+                <a16:creationId xmlns:a16="http://schemas.microsoft.com/office/drawing/2014/main" id="{2D246AB7-2610-6B20-FB77-E7277B615F41}"/>
+              </a:ext>
+            </a:extLst>
+          </p:cNvPr>
+          <p:cNvCxnSpPr>
+            <a:cxnSpLocks/>
+          </p:cNvCxnSpPr>
+          <p:nvPr/>
+        </p:nvCxnSpPr>
+        <p:spPr>
+          <a:xfrm flipV="1">
+            <a:off x="6635393" y="4899060"/>
+            <a:ext cx="0" cy="1193515"/>
+          </a:xfrm>
+          <a:prstGeom prst="straightConnector1">
+            <a:avLst/>
+          </a:prstGeom>
+          <a:ln>
+            <a:tailEnd type="triangle"/>
+          </a:ln>
+        </p:spPr>
+        <p:style>
+          <a:lnRef idx="3">
+            <a:schemeClr val="accent1"/>
+          </a:lnRef>
+          <a:fillRef idx="0">
+            <a:schemeClr val="accent1"/>
+          </a:fillRef>
+          <a:effectRef idx="2">
+            <a:schemeClr val="accent1"/>
+          </a:effectRef>
+          <a:fontRef idx="minor">
+            <a:schemeClr val="tx1"/>
+          </a:fontRef>
+        </p:style>
+      </p:cxnSp>
+      <p:cxnSp>
+        <p:nvCxnSpPr>
+          <p:cNvPr id="17" name="Straight Arrow Connector 16">
+            <a:extLst>
+              <a:ext uri="{FF2B5EF4-FFF2-40B4-BE49-F238E27FC236}">
+                <a16:creationId xmlns:a16="http://schemas.microsoft.com/office/drawing/2014/main" id="{DFA1BF13-DCDA-4371-82FB-8FD9E2EEC5DE}"/>
+              </a:ext>
+            </a:extLst>
+          </p:cNvPr>
+          <p:cNvCxnSpPr>
+            <a:cxnSpLocks/>
+          </p:cNvCxnSpPr>
+          <p:nvPr/>
+        </p:nvCxnSpPr>
+        <p:spPr>
+          <a:xfrm>
+            <a:off x="1580508" y="1900720"/>
+            <a:ext cx="0" cy="789398"/>
+          </a:xfrm>
+          <a:prstGeom prst="straightConnector1">
+            <a:avLst/>
+          </a:prstGeom>
+          <a:ln>
+            <a:tailEnd type="triangle"/>
+          </a:ln>
+        </p:spPr>
+        <p:style>
+          <a:lnRef idx="3">
+            <a:schemeClr val="accent1"/>
+          </a:lnRef>
+          <a:fillRef idx="0">
+            <a:schemeClr val="accent1"/>
+          </a:fillRef>
+          <a:effectRef idx="2">
+            <a:schemeClr val="accent1"/>
+          </a:effectRef>
+          <a:fontRef idx="minor">
+            <a:schemeClr val="tx1"/>
+          </a:fontRef>
+        </p:style>
+      </p:cxnSp>
+      <p:cxnSp>
+        <p:nvCxnSpPr>
+          <p:cNvPr id="20" name="Straight Arrow Connector 19">
+            <a:extLst>
+              <a:ext uri="{FF2B5EF4-FFF2-40B4-BE49-F238E27FC236}">
+                <a16:creationId xmlns:a16="http://schemas.microsoft.com/office/drawing/2014/main" id="{AAE841B0-B16C-7A7F-D372-AB7046B79C24}"/>
+              </a:ext>
+            </a:extLst>
+          </p:cNvPr>
+          <p:cNvCxnSpPr>
+            <a:cxnSpLocks/>
+            <a:stCxn id="23" idx="2"/>
+          </p:cNvCxnSpPr>
+          <p:nvPr/>
+        </p:nvCxnSpPr>
+        <p:spPr>
+          <a:xfrm>
+            <a:off x="4157609" y="2121605"/>
+            <a:ext cx="0" cy="568513"/>
+          </a:xfrm>
+          <a:prstGeom prst="straightConnector1">
+            <a:avLst/>
+          </a:prstGeom>
+          <a:ln>
+            <a:tailEnd type="triangle"/>
+          </a:ln>
+        </p:spPr>
+        <p:style>
+          <a:lnRef idx="3">
+            <a:schemeClr val="accent1"/>
+          </a:lnRef>
+          <a:fillRef idx="0">
+            <a:schemeClr val="accent1"/>
+          </a:fillRef>
+          <a:effectRef idx="2">
+            <a:schemeClr val="accent1"/>
+          </a:effectRef>
+          <a:fontRef idx="minor">
+            <a:schemeClr val="tx1"/>
+          </a:fontRef>
+        </p:style>
+      </p:cxnSp>
+      <p:sp>
+        <p:nvSpPr>
+          <p:cNvPr id="21" name="TextBox 20">
+            <a:extLst>
+              <a:ext uri="{FF2B5EF4-FFF2-40B4-BE49-F238E27FC236}">
+                <a16:creationId xmlns:a16="http://schemas.microsoft.com/office/drawing/2014/main" id="{7AAE2146-59AD-0015-EEC8-2580088C59DD}"/>
+              </a:ext>
+            </a:extLst>
+          </p:cNvPr>
+          <p:cNvSpPr txBox="1"/>
+          <p:nvPr/>
+        </p:nvSpPr>
+        <p:spPr>
+          <a:xfrm>
+            <a:off x="483574" y="6092575"/>
+            <a:ext cx="2710999" cy="1018356"/>
+          </a:xfrm>
+          <a:prstGeom prst="rect">
+            <a:avLst/>
+          </a:prstGeom>
+          <a:noFill/>
+        </p:spPr>
+        <p:txBody>
+          <a:bodyPr wrap="none" rtlCol="0">
+            <a:spAutoFit/>
+          </a:bodyPr>
+          <a:lstStyle/>
+          <a:p>
+            <a:r>
+              <a:rPr lang="en-US" dirty="0"/>
+              <a:t>There’s no response</a:t>
+            </a:r>
+            <a:br>
+              <a:rPr lang="en-US" dirty="0"/>
+            </a:br>
+            <a:r>
+              <a:rPr lang="en-US" dirty="0"/>
+              <a:t>as delete doesn’t</a:t>
+            </a:r>
+            <a:br>
+              <a:rPr lang="en-US" dirty="0"/>
+            </a:br>
+            <a:r>
+              <a:rPr lang="en-US" dirty="0"/>
+              <a:t>return a response value</a:t>
+            </a:r>
+            <a:endParaRPr lang="en-001" dirty="0"/>
+          </a:p>
+        </p:txBody>
+      </p:sp>
+      <p:sp>
+        <p:nvSpPr>
+          <p:cNvPr id="22" name="TextBox 21">
+            <a:extLst>
+              <a:ext uri="{FF2B5EF4-FFF2-40B4-BE49-F238E27FC236}">
+                <a16:creationId xmlns:a16="http://schemas.microsoft.com/office/drawing/2014/main" id="{CFD85A5E-1DFC-7950-FC9A-DBF59F0C55D2}"/>
+              </a:ext>
+            </a:extLst>
+          </p:cNvPr>
+          <p:cNvSpPr txBox="1"/>
+          <p:nvPr/>
+        </p:nvSpPr>
+        <p:spPr>
+          <a:xfrm>
+            <a:off x="4931240" y="6092575"/>
+            <a:ext cx="3408305" cy="709681"/>
+          </a:xfrm>
+          <a:prstGeom prst="rect">
+            <a:avLst/>
+          </a:prstGeom>
+          <a:noFill/>
+        </p:spPr>
+        <p:txBody>
+          <a:bodyPr wrap="none" rtlCol="0">
+            <a:spAutoFit/>
+          </a:bodyPr>
+          <a:lstStyle/>
+          <a:p>
+            <a:r>
+              <a:rPr lang="en-US" dirty="0"/>
+              <a:t>204 means it’s successful</a:t>
+            </a:r>
+            <a:br>
+              <a:rPr lang="en-US" dirty="0"/>
+            </a:br>
+            <a:r>
+              <a:rPr lang="en-US" dirty="0"/>
+              <a:t>but it has no content to return</a:t>
+            </a:r>
+            <a:endParaRPr lang="en-001" dirty="0"/>
+          </a:p>
+        </p:txBody>
+      </p:sp>
+      <p:sp>
+        <p:nvSpPr>
+          <p:cNvPr id="23" name="TextBox 22">
+            <a:extLst>
+              <a:ext uri="{FF2B5EF4-FFF2-40B4-BE49-F238E27FC236}">
+                <a16:creationId xmlns:a16="http://schemas.microsoft.com/office/drawing/2014/main" id="{EEC4DCBE-069B-93CA-0869-0FD3B0250F6D}"/>
+              </a:ext>
+            </a:extLst>
+          </p:cNvPr>
+          <p:cNvSpPr txBox="1"/>
+          <p:nvPr/>
+        </p:nvSpPr>
+        <p:spPr>
+          <a:xfrm>
+            <a:off x="3096300" y="1411924"/>
+            <a:ext cx="2122617" cy="709681"/>
+          </a:xfrm>
+          <a:prstGeom prst="rect">
+            <a:avLst/>
+          </a:prstGeom>
+          <a:noFill/>
+        </p:spPr>
+        <p:txBody>
+          <a:bodyPr wrap="square" rtlCol="0">
+            <a:spAutoFit/>
+          </a:bodyPr>
+          <a:lstStyle/>
+          <a:p>
+            <a:r>
+              <a:rPr lang="en-US" dirty="0"/>
+              <a:t>The ID from the API GET response</a:t>
+            </a:r>
+            <a:endParaRPr lang="en-001" dirty="0"/>
+          </a:p>
+        </p:txBody>
+      </p:sp>
+      <p:sp>
+        <p:nvSpPr>
+          <p:cNvPr id="24" name="TextBox 23">
+            <a:extLst>
+              <a:ext uri="{FF2B5EF4-FFF2-40B4-BE49-F238E27FC236}">
+                <a16:creationId xmlns:a16="http://schemas.microsoft.com/office/drawing/2014/main" id="{18D6104C-B0D4-DDDF-80C5-7C98A3C65663}"/>
+              </a:ext>
+            </a:extLst>
+          </p:cNvPr>
+          <p:cNvSpPr txBox="1"/>
+          <p:nvPr/>
+        </p:nvSpPr>
+        <p:spPr>
+          <a:xfrm>
+            <a:off x="874225" y="1552126"/>
+            <a:ext cx="1412566" cy="401007"/>
+          </a:xfrm>
+          <a:prstGeom prst="rect">
+            <a:avLst/>
+          </a:prstGeom>
+          <a:noFill/>
+        </p:spPr>
+        <p:txBody>
+          <a:bodyPr wrap="none" rtlCol="0">
+            <a:spAutoFit/>
+          </a:bodyPr>
+          <a:lstStyle/>
+          <a:p>
+            <a:r>
+              <a:rPr lang="en-US" dirty="0"/>
+              <a:t>API Method</a:t>
+            </a:r>
+            <a:endParaRPr lang="en-001" dirty="0"/>
+          </a:p>
+        </p:txBody>
+      </p:sp>
+    </p:spTree>
+    <p:extLst>
+      <p:ext uri="{BB962C8B-B14F-4D97-AF65-F5344CB8AC3E}">
+        <p14:creationId xmlns:p14="http://schemas.microsoft.com/office/powerpoint/2010/main" val="1418178802"/>
+      </p:ext>
+    </p:extLst>
+  </p:cSld>
+  <p:clrMapOvr>
+    <a:masterClrMapping/>
+  </p:clrMapOvr>
+</p:sld>
+</file>
+
+<file path=ppt/slides/slide24.xml><?xml version="1.0" encoding="utf-8"?>
+<p:sld xmlns:a="http://schemas.openxmlformats.org/drawingml/2006/main" xmlns:r="http://schemas.openxmlformats.org/officeDocument/2006/relationships" xmlns:p="http://schemas.openxmlformats.org/presentationml/2006/main">
+  <p:cSld>
+    <p:spTree>
+      <p:nvGrpSpPr>
+        <p:cNvPr id="1" name="">
+          <a:extLst>
+            <a:ext uri="{FF2B5EF4-FFF2-40B4-BE49-F238E27FC236}">
+              <a16:creationId xmlns:a16="http://schemas.microsoft.com/office/drawing/2014/main" id="{509CC211-4B50-87B5-DD49-781CC9D8B26B}"/>
+            </a:ext>
+          </a:extLst>
+        </p:cNvPr>
+        <p:cNvGrpSpPr/>
+        <p:nvPr/>
+      </p:nvGrpSpPr>
+      <p:grpSpPr>
+        <a:xfrm>
+          <a:off x="0" y="0"/>
+          <a:ext cx="0" cy="0"/>
+          <a:chOff x="0" y="0"/>
+          <a:chExt cx="0" cy="0"/>
+        </a:xfrm>
+      </p:grpSpPr>
+      <p:sp>
+        <p:nvSpPr>
+          <p:cNvPr id="2" name="Title 1" hidden="1">
+            <a:extLst>
+              <a:ext uri="{FF2B5EF4-FFF2-40B4-BE49-F238E27FC236}">
+                <a16:creationId xmlns:a16="http://schemas.microsoft.com/office/drawing/2014/main" id="{5C91E144-1851-549C-2FA5-C83B7DD88E1C}"/>
+              </a:ext>
+            </a:extLst>
+          </p:cNvPr>
+          <p:cNvSpPr>
+            <a:spLocks noGrp="1"/>
+          </p:cNvSpPr>
+          <p:nvPr>
+            <p:ph type="title"/>
+          </p:nvPr>
+        </p:nvSpPr>
+        <p:spPr/>
+        <p:txBody>
+          <a:bodyPr/>
+          <a:lstStyle/>
+          <a:p>
+            <a:r>
+              <a:rPr lang="en-US" dirty="0"/>
+              <a:t>Cover Page</a:t>
+            </a:r>
+          </a:p>
+        </p:txBody>
+      </p:sp>
+      <p:sp>
+        <p:nvSpPr>
+          <p:cNvPr id="8" name="Title 1">
+            <a:extLst>
+              <a:ext uri="{FF2B5EF4-FFF2-40B4-BE49-F238E27FC236}">
+                <a16:creationId xmlns:a16="http://schemas.microsoft.com/office/drawing/2014/main" id="{FE5F88B3-188D-C8C8-83F1-D40D03DE288C}"/>
+              </a:ext>
+            </a:extLst>
+          </p:cNvPr>
+          <p:cNvSpPr txBox="1">
+            <a:spLocks/>
+          </p:cNvSpPr>
+          <p:nvPr/>
+        </p:nvSpPr>
+        <p:spPr>
+          <a:xfrm>
+            <a:off x="1126813" y="3166481"/>
+            <a:ext cx="7804774" cy="719719"/>
+          </a:xfrm>
+          <a:prstGeom prst="rect">
+            <a:avLst/>
+          </a:prstGeom>
+        </p:spPr>
+        <p:txBody>
+          <a:bodyPr vert="horz" lIns="0" tIns="0" rIns="0" bIns="0" rtlCol="0" anchor="t">
+            <a:noAutofit/>
+          </a:bodyPr>
+          <a:lstStyle>
+            <a:lvl1pPr algn="ctr" defTabSz="754380" rtl="0" eaLnBrk="1" latinLnBrk="0" hangingPunct="1">
+              <a:lnSpc>
+                <a:spcPct val="90000"/>
+              </a:lnSpc>
+              <a:spcBef>
+                <a:spcPct val="0"/>
+              </a:spcBef>
+              <a:buNone/>
+              <a:defRPr sz="4000" kern="1200">
+                <a:solidFill>
+                  <a:schemeClr val="tx1"/>
+                </a:solidFill>
+                <a:latin typeface="+mj-lt"/>
+                <a:ea typeface="+mj-ea"/>
+                <a:cs typeface="+mj-cs"/>
+              </a:defRPr>
+            </a:lvl1pPr>
+          </a:lstStyle>
+          <a:p>
+            <a:pPr>
+              <a:lnSpc>
+                <a:spcPct val="75000"/>
+              </a:lnSpc>
+            </a:pPr>
+            <a:r>
+              <a:rPr lang="en-US" sz="16000" dirty="0">
+                <a:ln w="41275">
+                  <a:noFill/>
+                </a:ln>
+                <a:solidFill>
+                  <a:schemeClr val="tx1">
+                    <a:lumMod val="76000"/>
+                    <a:lumOff val="24000"/>
+                  </a:schemeClr>
+                </a:solidFill>
+                <a:ea typeface="Source Sans Pro Black"/>
+              </a:rPr>
+              <a:t>Q&amp;A</a:t>
+            </a:r>
+          </a:p>
+        </p:txBody>
+      </p:sp>
+      <p:pic>
+        <p:nvPicPr>
+          <p:cNvPr id="4" name="Picture 3">
+            <a:extLst>
+              <a:ext uri="{FF2B5EF4-FFF2-40B4-BE49-F238E27FC236}">
+                <a16:creationId xmlns:a16="http://schemas.microsoft.com/office/drawing/2014/main" id="{A8E1C770-B942-6032-68FE-3C8CE4F63F45}"/>
+              </a:ext>
+            </a:extLst>
+          </p:cNvPr>
+          <p:cNvPicPr>
+            <a:picLocks noChangeAspect="1"/>
+          </p:cNvPicPr>
+          <p:nvPr/>
+        </p:nvPicPr>
+        <p:blipFill>
+          <a:blip r:embed="rId2"/>
+          <a:stretch>
+            <a:fillRect/>
+          </a:stretch>
+        </p:blipFill>
+        <p:spPr>
+          <a:xfrm>
+            <a:off x="635943" y="4690919"/>
+            <a:ext cx="2067213" cy="2048161"/>
+          </a:xfrm>
+          <a:prstGeom prst="rect">
+            <a:avLst/>
+          </a:prstGeom>
+        </p:spPr>
+      </p:pic>
+      <p:pic>
+        <p:nvPicPr>
+          <p:cNvPr id="7" name="Picture 6">
+            <a:extLst>
+              <a:ext uri="{FF2B5EF4-FFF2-40B4-BE49-F238E27FC236}">
+                <a16:creationId xmlns:a16="http://schemas.microsoft.com/office/drawing/2014/main" id="{1656D1B7-E399-68D6-E454-1CED93F24CAB}"/>
+              </a:ext>
+            </a:extLst>
+          </p:cNvPr>
+          <p:cNvPicPr>
+            <a:picLocks noChangeAspect="1"/>
+          </p:cNvPicPr>
+          <p:nvPr/>
+        </p:nvPicPr>
+        <p:blipFill>
+          <a:blip r:embed="rId3"/>
+          <a:stretch>
+            <a:fillRect/>
+          </a:stretch>
+        </p:blipFill>
+        <p:spPr>
+          <a:xfrm>
+            <a:off x="7026419" y="4983359"/>
+            <a:ext cx="2019582" cy="2038635"/>
+          </a:xfrm>
+          <a:prstGeom prst="rect">
+            <a:avLst/>
+          </a:prstGeom>
+        </p:spPr>
+      </p:pic>
+      <p:pic>
+        <p:nvPicPr>
+          <p:cNvPr id="12" name="Picture 11">
+            <a:extLst>
+              <a:ext uri="{FF2B5EF4-FFF2-40B4-BE49-F238E27FC236}">
+                <a16:creationId xmlns:a16="http://schemas.microsoft.com/office/drawing/2014/main" id="{985D7AD3-8630-E960-2B7F-D4341EA05C79}"/>
+              </a:ext>
+            </a:extLst>
+          </p:cNvPr>
+          <p:cNvPicPr>
+            <a:picLocks noChangeAspect="1"/>
+          </p:cNvPicPr>
+          <p:nvPr/>
+        </p:nvPicPr>
+        <p:blipFill>
+          <a:blip r:embed="rId4"/>
+          <a:stretch>
+            <a:fillRect/>
+          </a:stretch>
+        </p:blipFill>
+        <p:spPr>
+          <a:xfrm>
+            <a:off x="7026419" y="936629"/>
+            <a:ext cx="1971950" cy="1876687"/>
+          </a:xfrm>
+          <a:prstGeom prst="rect">
+            <a:avLst/>
+          </a:prstGeom>
+        </p:spPr>
+      </p:pic>
+      <p:pic>
+        <p:nvPicPr>
+          <p:cNvPr id="15" name="Picture 14">
+            <a:extLst>
+              <a:ext uri="{FF2B5EF4-FFF2-40B4-BE49-F238E27FC236}">
+                <a16:creationId xmlns:a16="http://schemas.microsoft.com/office/drawing/2014/main" id="{19578398-A5DA-9C27-D12D-CE58C9E820EB}"/>
+              </a:ext>
+            </a:extLst>
+          </p:cNvPr>
+          <p:cNvPicPr>
+            <a:picLocks noChangeAspect="1"/>
+          </p:cNvPicPr>
+          <p:nvPr/>
+        </p:nvPicPr>
+        <p:blipFill>
+          <a:blip r:embed="rId5"/>
+          <a:stretch>
+            <a:fillRect/>
+          </a:stretch>
+        </p:blipFill>
+        <p:spPr>
+          <a:xfrm>
+            <a:off x="2411878" y="578618"/>
+            <a:ext cx="2029108" cy="2095792"/>
+          </a:xfrm>
+          <a:prstGeom prst="rect">
+            <a:avLst/>
+          </a:prstGeom>
+        </p:spPr>
+      </p:pic>
+    </p:spTree>
+    <p:extLst>
+      <p:ext uri="{BB962C8B-B14F-4D97-AF65-F5344CB8AC3E}">
+        <p14:creationId xmlns:p14="http://schemas.microsoft.com/office/powerpoint/2010/main" val="297362243"/>
+      </p:ext>
+    </p:extLst>
+  </p:cSld>
+  <p:clrMapOvr>
+    <a:masterClrMapping/>
+  </p:clrMapOvr>
+</p:sld>
+</file>
+
+<file path=ppt/slides/slide25.xml><?xml version="1.0" encoding="utf-8"?>
+<p:sld xmlns:a="http://schemas.openxmlformats.org/drawingml/2006/main" xmlns:r="http://schemas.openxmlformats.org/officeDocument/2006/relationships" xmlns:p="http://schemas.openxmlformats.org/presentationml/2006/main">
+  <p:cSld>
+    <p:spTree>
+      <p:nvGrpSpPr>
+        <p:cNvPr id="1" name="">
+          <a:extLst>
+            <a:ext uri="{FF2B5EF4-FFF2-40B4-BE49-F238E27FC236}">
+              <a16:creationId xmlns:a16="http://schemas.microsoft.com/office/drawing/2014/main" id="{E068D2A8-4851-B4D3-D002-20200139816C}"/>
+            </a:ext>
+          </a:extLst>
+        </p:cNvPr>
+        <p:cNvGrpSpPr/>
+        <p:nvPr/>
+      </p:nvGrpSpPr>
+      <p:grpSpPr>
+        <a:xfrm>
+          <a:off x="0" y="0"/>
+          <a:ext cx="0" cy="0"/>
+          <a:chOff x="0" y="0"/>
+          <a:chExt cx="0" cy="0"/>
+        </a:xfrm>
+      </p:grpSpPr>
+      <p:sp>
+        <p:nvSpPr>
+          <p:cNvPr id="2" name="Title 1" hidden="1">
+            <a:extLst>
+              <a:ext uri="{FF2B5EF4-FFF2-40B4-BE49-F238E27FC236}">
+                <a16:creationId xmlns:a16="http://schemas.microsoft.com/office/drawing/2014/main" id="{47CDB260-565C-AA8E-D05E-5BBCF7DA09EF}"/>
+              </a:ext>
+            </a:extLst>
+          </p:cNvPr>
+          <p:cNvSpPr>
+            <a:spLocks noGrp="1"/>
+          </p:cNvSpPr>
+          <p:nvPr>
+            <p:ph type="title"/>
+          </p:nvPr>
+        </p:nvSpPr>
+        <p:spPr/>
+        <p:txBody>
+          <a:bodyPr/>
+          <a:lstStyle/>
+          <a:p>
+            <a:r>
+              <a:rPr lang="en-US" dirty="0"/>
+              <a:t>Cover Page</a:t>
+            </a:r>
+          </a:p>
+        </p:txBody>
+      </p:sp>
+      <p:sp>
+        <p:nvSpPr>
+          <p:cNvPr id="8" name="Title 1">
+            <a:extLst>
+              <a:ext uri="{FF2B5EF4-FFF2-40B4-BE49-F238E27FC236}">
+                <a16:creationId xmlns:a16="http://schemas.microsoft.com/office/drawing/2014/main" id="{8D3C42DF-563F-623A-F0DC-3A48547D2AE5}"/>
+              </a:ext>
+            </a:extLst>
+          </p:cNvPr>
+          <p:cNvSpPr txBox="1">
+            <a:spLocks/>
+          </p:cNvSpPr>
+          <p:nvPr/>
+        </p:nvSpPr>
+        <p:spPr>
+          <a:xfrm>
+            <a:off x="1161975" y="151635"/>
+            <a:ext cx="7804774" cy="719719"/>
+          </a:xfrm>
+          <a:prstGeom prst="rect">
+            <a:avLst/>
+          </a:prstGeom>
+        </p:spPr>
+        <p:txBody>
+          <a:bodyPr vert="horz" lIns="0" tIns="0" rIns="0" bIns="0" rtlCol="0" anchor="t">
+            <a:noAutofit/>
+          </a:bodyPr>
+          <a:lstStyle>
+            <a:lvl1pPr algn="ctr" defTabSz="754380" rtl="0" eaLnBrk="1" latinLnBrk="0" hangingPunct="1">
+              <a:lnSpc>
+                <a:spcPct val="90000"/>
+              </a:lnSpc>
+              <a:spcBef>
+                <a:spcPct val="0"/>
+              </a:spcBef>
+              <a:buNone/>
+              <a:defRPr sz="4000" kern="1200">
+                <a:solidFill>
+                  <a:schemeClr val="tx1"/>
+                </a:solidFill>
+                <a:latin typeface="+mj-lt"/>
+                <a:ea typeface="+mj-ea"/>
+                <a:cs typeface="+mj-cs"/>
+              </a:defRPr>
+            </a:lvl1pPr>
+          </a:lstStyle>
+          <a:p>
+            <a:pPr>
+              <a:lnSpc>
+                <a:spcPct val="75000"/>
+              </a:lnSpc>
+            </a:pPr>
+            <a:r>
+              <a:rPr lang="en-US" sz="6000" u="sng" dirty="0">
+                <a:ln w="41275">
+                  <a:noFill/>
+                </a:ln>
+                <a:solidFill>
+                  <a:schemeClr val="accent2"/>
+                </a:solidFill>
+                <a:ea typeface="Source Sans Pro Black"/>
+              </a:rPr>
+              <a:t>Visual Studio Code</a:t>
+            </a:r>
+          </a:p>
+          <a:p>
+            <a:pPr>
+              <a:lnSpc>
+                <a:spcPct val="75000"/>
+              </a:lnSpc>
+            </a:pPr>
+            <a:r>
+              <a:rPr lang="en-US" sz="3200" dirty="0">
+                <a:ln w="41275">
+                  <a:noFill/>
+                </a:ln>
+                <a:solidFill>
+                  <a:schemeClr val="tx1">
+                    <a:lumMod val="76000"/>
+                    <a:lumOff val="24000"/>
+                  </a:schemeClr>
+                </a:solidFill>
+                <a:ea typeface="Source Sans Pro Black"/>
+              </a:rPr>
+              <a:t>Now you try</a:t>
+            </a:r>
+            <a:endParaRPr lang="en-US" sz="3200" u="sng" dirty="0">
+              <a:ln w="41275">
+                <a:noFill/>
+              </a:ln>
+              <a:solidFill>
+                <a:schemeClr val="tx1">
+                  <a:lumMod val="76000"/>
+                  <a:lumOff val="24000"/>
+                </a:schemeClr>
+              </a:solidFill>
+              <a:ea typeface="Source Sans Pro Black"/>
+            </a:endParaRPr>
+          </a:p>
+        </p:txBody>
+      </p:sp>
+      <p:cxnSp>
+        <p:nvCxnSpPr>
+          <p:cNvPr id="47" name="Straight Connector 46">
+            <a:extLst>
+              <a:ext uri="{FF2B5EF4-FFF2-40B4-BE49-F238E27FC236}">
+                <a16:creationId xmlns:a16="http://schemas.microsoft.com/office/drawing/2014/main" id="{9C6BB933-A2FC-BEF0-E724-CF900077B366}"/>
+              </a:ext>
+              <a:ext uri="{C183D7F6-B498-43B3-948B-1728B52AA6E4}">
+                <adec:decorative xmlns:adec="http://schemas.microsoft.com/office/drawing/2017/decorative" val="1"/>
+              </a:ext>
+            </a:extLst>
+          </p:cNvPr>
+          <p:cNvCxnSpPr>
+            <a:cxnSpLocks/>
+          </p:cNvCxnSpPr>
+          <p:nvPr/>
+        </p:nvCxnSpPr>
+        <p:spPr>
+          <a:xfrm>
+            <a:off x="839615" y="1271285"/>
+            <a:ext cx="8677751" cy="0"/>
+          </a:xfrm>
+          <a:prstGeom prst="line">
+            <a:avLst/>
+          </a:prstGeom>
+          <a:ln w="25400">
+            <a:solidFill>
+              <a:schemeClr val="accent2"/>
+            </a:solidFill>
+          </a:ln>
+        </p:spPr>
+        <p:style>
+          <a:lnRef idx="1">
+            <a:schemeClr val="accent1"/>
+          </a:lnRef>
+          <a:fillRef idx="0">
+            <a:schemeClr val="accent1"/>
+          </a:fillRef>
+          <a:effectRef idx="0">
+            <a:schemeClr val="accent1"/>
+          </a:effectRef>
+          <a:fontRef idx="minor">
+            <a:schemeClr val="tx1"/>
+          </a:fontRef>
+        </p:style>
+      </p:cxnSp>
+      <p:pic>
+        <p:nvPicPr>
+          <p:cNvPr id="7" name="Picture 6">
+            <a:extLst>
+              <a:ext uri="{FF2B5EF4-FFF2-40B4-BE49-F238E27FC236}">
+                <a16:creationId xmlns:a16="http://schemas.microsoft.com/office/drawing/2014/main" id="{1AC02A4F-BBC2-FCE4-8757-FEC465352D4F}"/>
+              </a:ext>
+            </a:extLst>
+          </p:cNvPr>
+          <p:cNvPicPr>
+            <a:picLocks noChangeAspect="1"/>
+          </p:cNvPicPr>
+          <p:nvPr/>
+        </p:nvPicPr>
+        <p:blipFill>
+          <a:blip r:embed="rId2"/>
+          <a:stretch>
+            <a:fillRect/>
+          </a:stretch>
+        </p:blipFill>
+        <p:spPr>
+          <a:xfrm>
+            <a:off x="130799" y="2432683"/>
+            <a:ext cx="9867126" cy="5188082"/>
+          </a:xfrm>
+          <a:prstGeom prst="rect">
+            <a:avLst/>
+          </a:prstGeom>
+        </p:spPr>
+      </p:pic>
+      <p:sp>
+        <p:nvSpPr>
+          <p:cNvPr id="9" name="Rectangle 8">
+            <a:extLst>
+              <a:ext uri="{FF2B5EF4-FFF2-40B4-BE49-F238E27FC236}">
+                <a16:creationId xmlns:a16="http://schemas.microsoft.com/office/drawing/2014/main" id="{3AA6E276-7464-784C-166F-7D0CDD016D6D}"/>
+              </a:ext>
+            </a:extLst>
+          </p:cNvPr>
+          <p:cNvSpPr/>
+          <p:nvPr/>
+        </p:nvSpPr>
+        <p:spPr>
+          <a:xfrm>
+            <a:off x="2208944" y="4658138"/>
+            <a:ext cx="1839075" cy="737171"/>
+          </a:xfrm>
+          <a:prstGeom prst="rect">
+            <a:avLst/>
+          </a:prstGeom>
+          <a:noFill/>
+          <a:ln w="9525" cap="flat" cmpd="sng" algn="ctr">
+            <a:solidFill>
+              <a:schemeClr val="accent4"/>
+            </a:solidFill>
+            <a:prstDash val="solid"/>
+            <a:round/>
+            <a:headEnd type="none" w="med" len="med"/>
+            <a:tailEnd type="none" w="med" len="med"/>
+          </a:ln>
+        </p:spPr>
+        <p:style>
+          <a:lnRef idx="0">
+            <a:scrgbClr r="0" g="0" b="0"/>
+          </a:lnRef>
+          <a:fillRef idx="0">
+            <a:scrgbClr r="0" g="0" b="0"/>
+          </a:fillRef>
+          <a:effectRef idx="0">
+            <a:scrgbClr r="0" g="0" b="0"/>
+          </a:effectRef>
+          <a:fontRef idx="minor">
+            <a:schemeClr val="accent4"/>
+          </a:fontRef>
+        </p:style>
+        <p:txBody>
+          <a:bodyPr rtlCol="0" anchor="ctr"/>
+          <a:lstStyle/>
+          <a:p>
+            <a:pPr algn="ctr"/>
+            <a:endParaRPr lang="en-001"/>
+          </a:p>
+        </p:txBody>
+      </p:sp>
+      <p:sp>
+        <p:nvSpPr>
+          <p:cNvPr id="11" name="TextBox 10">
+            <a:extLst>
+              <a:ext uri="{FF2B5EF4-FFF2-40B4-BE49-F238E27FC236}">
+                <a16:creationId xmlns:a16="http://schemas.microsoft.com/office/drawing/2014/main" id="{C5FB11D1-6FE5-82FD-401D-4A5AF9F0A184}"/>
+              </a:ext>
+            </a:extLst>
+          </p:cNvPr>
+          <p:cNvSpPr txBox="1"/>
+          <p:nvPr/>
+        </p:nvSpPr>
+        <p:spPr>
+          <a:xfrm>
+            <a:off x="1520575" y="1715784"/>
+            <a:ext cx="4892686" cy="709681"/>
+          </a:xfrm>
+          <a:prstGeom prst="rect">
+            <a:avLst/>
+          </a:prstGeom>
+          <a:noFill/>
+        </p:spPr>
+        <p:txBody>
+          <a:bodyPr wrap="none" rtlCol="0">
+            <a:spAutoFit/>
+          </a:bodyPr>
+          <a:lstStyle/>
+          <a:p>
+            <a:r>
+              <a:rPr lang="en-US" dirty="0"/>
+              <a:t>Inside: </a:t>
+            </a:r>
+            <a:r>
+              <a:rPr lang="en-US" b="1" dirty="0"/>
+              <a:t>frontend &gt; app &gt; pages &gt; </a:t>
+            </a:r>
+            <a:r>
+              <a:rPr lang="en-US" b="1" dirty="0" err="1"/>
+              <a:t>index.vue</a:t>
+            </a:r>
+            <a:br>
+              <a:rPr lang="en-US" b="1" dirty="0"/>
+            </a:br>
+            <a:r>
+              <a:rPr lang="en-US" b="1" dirty="0"/>
+              <a:t>               on line 159</a:t>
+            </a:r>
+            <a:endParaRPr lang="en-001" b="1" dirty="0"/>
+          </a:p>
+        </p:txBody>
+      </p:sp>
+    </p:spTree>
+    <p:extLst>
+      <p:ext uri="{BB962C8B-B14F-4D97-AF65-F5344CB8AC3E}">
+        <p14:creationId xmlns:p14="http://schemas.microsoft.com/office/powerpoint/2010/main" val="2722349114"/>
       </p:ext>
     </p:extLst>
   </p:cSld>
@@ -20821,6 +26061,349 @@
         <p:cNvPr id="1" name="">
           <a:extLst>
             <a:ext uri="{FF2B5EF4-FFF2-40B4-BE49-F238E27FC236}">
+              <a16:creationId xmlns:a16="http://schemas.microsoft.com/office/drawing/2014/main" id="{05630531-7206-33FB-F94B-BF5308292D07}"/>
+            </a:ext>
+          </a:extLst>
+        </p:cNvPr>
+        <p:cNvGrpSpPr/>
+        <p:nvPr/>
+      </p:nvGrpSpPr>
+      <p:grpSpPr>
+        <a:xfrm>
+          <a:off x="0" y="0"/>
+          <a:ext cx="0" cy="0"/>
+          <a:chOff x="0" y="0"/>
+          <a:chExt cx="0" cy="0"/>
+        </a:xfrm>
+      </p:grpSpPr>
+      <p:sp>
+        <p:nvSpPr>
+          <p:cNvPr id="2" name="Title 1" hidden="1">
+            <a:extLst>
+              <a:ext uri="{FF2B5EF4-FFF2-40B4-BE49-F238E27FC236}">
+                <a16:creationId xmlns:a16="http://schemas.microsoft.com/office/drawing/2014/main" id="{DCFC754A-9529-FB1E-BC24-CFF1D54278B3}"/>
+              </a:ext>
+            </a:extLst>
+          </p:cNvPr>
+          <p:cNvSpPr>
+            <a:spLocks noGrp="1"/>
+          </p:cNvSpPr>
+          <p:nvPr>
+            <p:ph type="title"/>
+          </p:nvPr>
+        </p:nvSpPr>
+        <p:spPr/>
+        <p:txBody>
+          <a:bodyPr/>
+          <a:lstStyle/>
+          <a:p>
+            <a:r>
+              <a:rPr lang="en-US" dirty="0"/>
+              <a:t>Cover Page</a:t>
+            </a:r>
+          </a:p>
+        </p:txBody>
+      </p:sp>
+      <p:sp>
+        <p:nvSpPr>
+          <p:cNvPr id="8" name="Title 1">
+            <a:extLst>
+              <a:ext uri="{FF2B5EF4-FFF2-40B4-BE49-F238E27FC236}">
+                <a16:creationId xmlns:a16="http://schemas.microsoft.com/office/drawing/2014/main" id="{A0D3BA35-83E8-8B22-7F02-E7B265282A6C}"/>
+              </a:ext>
+            </a:extLst>
+          </p:cNvPr>
+          <p:cNvSpPr txBox="1">
+            <a:spLocks/>
+          </p:cNvSpPr>
+          <p:nvPr/>
+        </p:nvSpPr>
+        <p:spPr>
+          <a:xfrm>
+            <a:off x="2394781" y="376308"/>
+            <a:ext cx="5253486" cy="2564017"/>
+          </a:xfrm>
+          <a:prstGeom prst="rect">
+            <a:avLst/>
+          </a:prstGeom>
+        </p:spPr>
+        <p:txBody>
+          <a:bodyPr vert="horz" lIns="0" tIns="0" rIns="0" bIns="0" rtlCol="0" anchor="t">
+            <a:noAutofit/>
+          </a:bodyPr>
+          <a:lstStyle>
+            <a:lvl1pPr algn="ctr" defTabSz="754380" rtl="0" eaLnBrk="1" latinLnBrk="0" hangingPunct="1">
+              <a:lnSpc>
+                <a:spcPct val="90000"/>
+              </a:lnSpc>
+              <a:spcBef>
+                <a:spcPct val="0"/>
+              </a:spcBef>
+              <a:buNone/>
+              <a:defRPr sz="4000" kern="1200">
+                <a:solidFill>
+                  <a:schemeClr val="tx1"/>
+                </a:solidFill>
+                <a:latin typeface="+mj-lt"/>
+                <a:ea typeface="+mj-ea"/>
+                <a:cs typeface="+mj-cs"/>
+              </a:defRPr>
+            </a:lvl1pPr>
+          </a:lstStyle>
+          <a:p>
+            <a:pPr>
+              <a:lnSpc>
+                <a:spcPct val="75000"/>
+              </a:lnSpc>
+            </a:pPr>
+            <a:r>
+              <a:rPr lang="en-US" sz="6000">
+                <a:ln w="41275">
+                  <a:noFill/>
+                </a:ln>
+                <a:solidFill>
+                  <a:schemeClr val="accent2"/>
+                </a:solidFill>
+                <a:ea typeface="Source Sans Pro Black"/>
+              </a:rPr>
+              <a:t>Tools</a:t>
+            </a:r>
+          </a:p>
+          <a:p>
+            <a:pPr>
+              <a:lnSpc>
+                <a:spcPct val="75000"/>
+              </a:lnSpc>
+            </a:pPr>
+            <a:endParaRPr lang="en-US" sz="6000" dirty="0">
+              <a:ln w="41275">
+                <a:noFill/>
+              </a:ln>
+              <a:solidFill>
+                <a:schemeClr val="accent2"/>
+              </a:solidFill>
+              <a:ea typeface="Source Sans Pro Black"/>
+            </a:endParaRPr>
+          </a:p>
+        </p:txBody>
+      </p:sp>
+      <p:sp>
+        <p:nvSpPr>
+          <p:cNvPr id="32" name="TextBox 31">
+            <a:extLst>
+              <a:ext uri="{FF2B5EF4-FFF2-40B4-BE49-F238E27FC236}">
+                <a16:creationId xmlns:a16="http://schemas.microsoft.com/office/drawing/2014/main" id="{5A564511-BA5C-8889-754F-406B91309FC3}"/>
+              </a:ext>
+            </a:extLst>
+          </p:cNvPr>
+          <p:cNvSpPr txBox="1"/>
+          <p:nvPr/>
+        </p:nvSpPr>
+        <p:spPr>
+          <a:xfrm>
+            <a:off x="2395248" y="1652683"/>
+            <a:ext cx="5257799" cy="1200329"/>
+          </a:xfrm>
+          <a:prstGeom prst="rect">
+            <a:avLst/>
+          </a:prstGeom>
+          <a:noFill/>
+        </p:spPr>
+        <p:txBody>
+          <a:bodyPr rot="0" spcFirstLastPara="0" vertOverflow="overflow" horzOverflow="overflow" vert="horz" wrap="square" lIns="91440" tIns="45720" rIns="91440" bIns="45720" numCol="1" spcCol="0" rtlCol="0" fromWordArt="0" anchor="t" anchorCtr="0" forceAA="0" compatLnSpc="1">
+            <a:prstTxWarp prst="textNoShape">
+              <a:avLst/>
+            </a:prstTxWarp>
+            <a:spAutoFit/>
+          </a:bodyPr>
+          <a:lstStyle/>
+          <a:p>
+            <a:pPr algn="ctr"/>
+            <a:br>
+              <a:rPr lang="en-GB" sz="3600" dirty="0">
+                <a:ea typeface="Source Sans Pro"/>
+              </a:rPr>
+            </a:br>
+            <a:endParaRPr lang="en-GB" sz="3600">
+              <a:solidFill>
+                <a:schemeClr val="bg2">
+                  <a:lumMod val="49000"/>
+                </a:schemeClr>
+              </a:solidFill>
+              <a:ea typeface="Source Sans Pro"/>
+            </a:endParaRPr>
+          </a:p>
+        </p:txBody>
+      </p:sp>
+      <p:cxnSp>
+        <p:nvCxnSpPr>
+          <p:cNvPr id="47" name="Straight Connector 46">
+            <a:extLst>
+              <a:ext uri="{FF2B5EF4-FFF2-40B4-BE49-F238E27FC236}">
+                <a16:creationId xmlns:a16="http://schemas.microsoft.com/office/drawing/2014/main" id="{2D5FBB41-FA2F-A846-C79C-19779A605882}"/>
+              </a:ext>
+              <a:ext uri="{C183D7F6-B498-43B3-948B-1728B52AA6E4}">
+                <adec:decorative xmlns:adec="http://schemas.microsoft.com/office/drawing/2017/decorative" val="1"/>
+              </a:ext>
+            </a:extLst>
+          </p:cNvPr>
+          <p:cNvCxnSpPr>
+            <a:cxnSpLocks/>
+          </p:cNvCxnSpPr>
+          <p:nvPr/>
+        </p:nvCxnSpPr>
+        <p:spPr>
+          <a:xfrm>
+            <a:off x="687936" y="1712083"/>
+            <a:ext cx="8677751" cy="0"/>
+          </a:xfrm>
+          <a:prstGeom prst="line">
+            <a:avLst/>
+          </a:prstGeom>
+          <a:ln w="25400">
+            <a:solidFill>
+              <a:schemeClr val="accent2"/>
+            </a:solidFill>
+          </a:ln>
+        </p:spPr>
+        <p:style>
+          <a:lnRef idx="1">
+            <a:schemeClr val="accent1"/>
+          </a:lnRef>
+          <a:fillRef idx="0">
+            <a:schemeClr val="accent1"/>
+          </a:fillRef>
+          <a:effectRef idx="0">
+            <a:schemeClr val="accent1"/>
+          </a:effectRef>
+          <a:fontRef idx="minor">
+            <a:schemeClr val="tx1"/>
+          </a:fontRef>
+        </p:style>
+      </p:cxnSp>
+      <p:sp>
+        <p:nvSpPr>
+          <p:cNvPr id="42" name="TextBox 41">
+            <a:extLst>
+              <a:ext uri="{FF2B5EF4-FFF2-40B4-BE49-F238E27FC236}">
+                <a16:creationId xmlns:a16="http://schemas.microsoft.com/office/drawing/2014/main" id="{49B5CB25-AC51-4AA3-5793-B6C06D497400}"/>
+              </a:ext>
+            </a:extLst>
+          </p:cNvPr>
+          <p:cNvSpPr txBox="1"/>
+          <p:nvPr/>
+        </p:nvSpPr>
+        <p:spPr>
+          <a:xfrm>
+            <a:off x="2741724" y="2383274"/>
+            <a:ext cx="5708533" cy="3785652"/>
+          </a:xfrm>
+          <a:prstGeom prst="rect">
+            <a:avLst/>
+          </a:prstGeom>
+          <a:ln>
+            <a:noFill/>
+          </a:ln>
+        </p:spPr>
+        <p:style>
+          <a:lnRef idx="2">
+            <a:schemeClr val="accent2"/>
+          </a:lnRef>
+          <a:fillRef idx="1">
+            <a:schemeClr val="lt1"/>
+          </a:fillRef>
+          <a:effectRef idx="0">
+            <a:schemeClr val="accent2"/>
+          </a:effectRef>
+          <a:fontRef idx="minor">
+            <a:schemeClr val="dk1"/>
+          </a:fontRef>
+        </p:style>
+        <p:txBody>
+          <a:bodyPr rot="0" spcFirstLastPara="0" vertOverflow="overflow" horzOverflow="overflow" vert="horz" wrap="square" lIns="91440" tIns="45720" rIns="91440" bIns="45720" numCol="1" spcCol="0" rtlCol="0" fromWordArt="0" anchor="t" anchorCtr="0" forceAA="0" compatLnSpc="1">
+            <a:prstTxWarp prst="textNoShape">
+              <a:avLst/>
+            </a:prstTxWarp>
+            <a:spAutoFit/>
+          </a:bodyPr>
+          <a:lstStyle/>
+          <a:p>
+            <a:r>
+              <a:rPr lang="en-GB" sz="12000" b="1" dirty="0">
+                <a:ea typeface="Source Sans Pro"/>
+              </a:rPr>
+              <a:t>READY CHECK</a:t>
+            </a:r>
+            <a:endParaRPr lang="en-GB" sz="12000" dirty="0">
+              <a:ea typeface="Source Sans Pro"/>
+            </a:endParaRPr>
+          </a:p>
+        </p:txBody>
+      </p:sp>
+      <p:pic>
+        <p:nvPicPr>
+          <p:cNvPr id="4" name="Graphic 3" descr="robot to color">
+            <a:extLst>
+              <a:ext uri="{FF2B5EF4-FFF2-40B4-BE49-F238E27FC236}">
+                <a16:creationId xmlns:a16="http://schemas.microsoft.com/office/drawing/2014/main" id="{851C958E-3817-23A5-4E2F-0AA484CA227C}"/>
+              </a:ext>
+            </a:extLst>
+          </p:cNvPr>
+          <p:cNvPicPr>
+            <a:picLocks noChangeAspect="1"/>
+          </p:cNvPicPr>
+          <p:nvPr/>
+        </p:nvPicPr>
+        <p:blipFill rotWithShape="1">
+          <a:blip>
+            <a:extLst>
+              <a:ext uri="{96DAC541-7B7A-43D3-8B79-37D633B846F1}">
+                <asvg:svgBlip xmlns:asvg="http://schemas.microsoft.com/office/drawing/2016/SVG/main" r:embed="rId2"/>
+              </a:ext>
+            </a:extLst>
+          </a:blip>
+          <a:srcRect l="21731" r="19568"/>
+          <a:stretch/>
+        </p:blipFill>
+        <p:spPr>
+          <a:xfrm>
+            <a:off x="4434302" y="157165"/>
+            <a:ext cx="1161689" cy="1790042"/>
+          </a:xfrm>
+          <a:prstGeom prst="rect">
+            <a:avLst/>
+          </a:prstGeom>
+        </p:spPr>
+      </p:pic>
+    </p:spTree>
+    <p:extLst>
+      <p:ext uri="{BB962C8B-B14F-4D97-AF65-F5344CB8AC3E}">
+        <p14:creationId xmlns:p14="http://schemas.microsoft.com/office/powerpoint/2010/main" val="89301837"/>
+      </p:ext>
+    </p:extLst>
+  </p:cSld>
+  <p:clrMapOvr>
+    <a:masterClrMapping/>
+  </p:clrMapOvr>
+</p:sld>
+</file>
+
+<file path=ppt/slides/slide6.xml><?xml version="1.0" encoding="utf-8"?>
+<p:sld xmlns:a="http://schemas.openxmlformats.org/drawingml/2006/main" xmlns:r="http://schemas.openxmlformats.org/officeDocument/2006/relationships" xmlns:p="http://schemas.openxmlformats.org/presentationml/2006/main">
+  <p:cSld>
+    <p:bg>
+      <p:bgPr>
+        <a:solidFill>
+          <a:schemeClr val="bg1"/>
+        </a:solidFill>
+        <a:effectLst/>
+      </p:bgPr>
+    </p:bg>
+    <p:spTree>
+      <p:nvGrpSpPr>
+        <p:cNvPr id="1" name="">
+          <a:extLst>
+            <a:ext uri="{FF2B5EF4-FFF2-40B4-BE49-F238E27FC236}">
               <a16:creationId xmlns:a16="http://schemas.microsoft.com/office/drawing/2014/main" id="{47A76F1A-0EFC-A652-5FB9-17A7C5F3B0D0}"/>
             </a:ext>
           </a:extLst>
@@ -24879,7 +30462,7 @@
 </p:sld>
 </file>
 
-<file path=ppt/slides/slide6.xml><?xml version="1.0" encoding="utf-8"?>
+<file path=ppt/slides/slide7.xml><?xml version="1.0" encoding="utf-8"?>
 <p:sld xmlns:a="http://schemas.openxmlformats.org/drawingml/2006/main" xmlns:r="http://schemas.openxmlformats.org/officeDocument/2006/relationships" xmlns:p="http://schemas.openxmlformats.org/presentationml/2006/main">
   <p:cSld>
     <p:bg>
@@ -25415,7 +30998,7 @@
 </p:sld>
 </file>
 
-<file path=ppt/slides/slide7.xml><?xml version="1.0" encoding="utf-8"?>
+<file path=ppt/slides/slide8.xml><?xml version="1.0" encoding="utf-8"?>
 <p:sld xmlns:a="http://schemas.openxmlformats.org/drawingml/2006/main" xmlns:r="http://schemas.openxmlformats.org/officeDocument/2006/relationships" xmlns:p="http://schemas.openxmlformats.org/presentationml/2006/main">
   <p:cSld>
     <p:bg>
@@ -25975,7 +31558,7 @@
 </p:sld>
 </file>
 
-<file path=ppt/slides/slide8.xml><?xml version="1.0" encoding="utf-8"?>
+<file path=ppt/slides/slide9.xml><?xml version="1.0" encoding="utf-8"?>
 <p:sld xmlns:a="http://schemas.openxmlformats.org/drawingml/2006/main" xmlns:r="http://schemas.openxmlformats.org/officeDocument/2006/relationships" xmlns:p="http://schemas.openxmlformats.org/presentationml/2006/main">
   <p:cSld>
     <p:bg>
@@ -26544,938 +32127,6 @@
     <p:extLst>
       <p:ext uri="{BB962C8B-B14F-4D97-AF65-F5344CB8AC3E}">
         <p14:creationId xmlns:p14="http://schemas.microsoft.com/office/powerpoint/2010/main" val="1120510944"/>
-      </p:ext>
-    </p:extLst>
-  </p:cSld>
-  <p:clrMapOvr>
-    <a:masterClrMapping/>
-  </p:clrMapOvr>
-</p:sld>
-</file>
-
-<file path=ppt/slides/slide9.xml><?xml version="1.0" encoding="utf-8"?>
-<p:sld xmlns:a="http://schemas.openxmlformats.org/drawingml/2006/main" xmlns:r="http://schemas.openxmlformats.org/officeDocument/2006/relationships" xmlns:p="http://schemas.openxmlformats.org/presentationml/2006/main">
-  <p:cSld>
-    <p:bg>
-      <p:bgPr>
-        <a:solidFill>
-          <a:schemeClr val="bg1"/>
-        </a:solidFill>
-        <a:effectLst/>
-      </p:bgPr>
-    </p:bg>
-    <p:spTree>
-      <p:nvGrpSpPr>
-        <p:cNvPr id="1" name="">
-          <a:extLst>
-            <a:ext uri="{FF2B5EF4-FFF2-40B4-BE49-F238E27FC236}">
-              <a16:creationId xmlns:a16="http://schemas.microsoft.com/office/drawing/2014/main" id="{B1799FC5-CC8B-5EAD-DDDA-FB04AEE939BA}"/>
-            </a:ext>
-          </a:extLst>
-        </p:cNvPr>
-        <p:cNvGrpSpPr/>
-        <p:nvPr/>
-      </p:nvGrpSpPr>
-      <p:grpSpPr>
-        <a:xfrm>
-          <a:off x="0" y="0"/>
-          <a:ext cx="0" cy="0"/>
-          <a:chOff x="0" y="0"/>
-          <a:chExt cx="0" cy="0"/>
-        </a:xfrm>
-      </p:grpSpPr>
-      <p:sp>
-        <p:nvSpPr>
-          <p:cNvPr id="2" name="Title 1" hidden="1">
-            <a:extLst>
-              <a:ext uri="{FF2B5EF4-FFF2-40B4-BE49-F238E27FC236}">
-                <a16:creationId xmlns:a16="http://schemas.microsoft.com/office/drawing/2014/main" id="{B6672C1D-04AF-5C93-AF31-F95CBE8A812A}"/>
-              </a:ext>
-            </a:extLst>
-          </p:cNvPr>
-          <p:cNvSpPr>
-            <a:spLocks noGrp="1"/>
-          </p:cNvSpPr>
-          <p:nvPr>
-            <p:ph type="title"/>
-          </p:nvPr>
-        </p:nvSpPr>
-        <p:spPr/>
-        <p:txBody>
-          <a:bodyPr/>
-          <a:lstStyle/>
-          <a:p>
-            <a:r>
-              <a:rPr lang="en-US" dirty="0"/>
-              <a:t>Cover Page</a:t>
-            </a:r>
-          </a:p>
-        </p:txBody>
-      </p:sp>
-      <p:sp>
-        <p:nvSpPr>
-          <p:cNvPr id="8" name="Title 1">
-            <a:extLst>
-              <a:ext uri="{FF2B5EF4-FFF2-40B4-BE49-F238E27FC236}">
-                <a16:creationId xmlns:a16="http://schemas.microsoft.com/office/drawing/2014/main" id="{ED2B5AE5-9694-665D-C1F4-7F4373A33DDF}"/>
-              </a:ext>
-            </a:extLst>
-          </p:cNvPr>
-          <p:cNvSpPr txBox="1">
-            <a:spLocks/>
-          </p:cNvSpPr>
-          <p:nvPr/>
-        </p:nvSpPr>
-        <p:spPr>
-          <a:xfrm>
-            <a:off x="1161975" y="151635"/>
-            <a:ext cx="7804774" cy="719719"/>
-          </a:xfrm>
-          <a:prstGeom prst="rect">
-            <a:avLst/>
-          </a:prstGeom>
-        </p:spPr>
-        <p:txBody>
-          <a:bodyPr vert="horz" lIns="0" tIns="0" rIns="0" bIns="0" rtlCol="0" anchor="t">
-            <a:noAutofit/>
-          </a:bodyPr>
-          <a:lstStyle>
-            <a:lvl1pPr algn="ctr" defTabSz="754380" rtl="0" eaLnBrk="1" latinLnBrk="0" hangingPunct="1">
-              <a:lnSpc>
-                <a:spcPct val="90000"/>
-              </a:lnSpc>
-              <a:spcBef>
-                <a:spcPct val="0"/>
-              </a:spcBef>
-              <a:buNone/>
-              <a:defRPr sz="4000" kern="1200">
-                <a:solidFill>
-                  <a:schemeClr val="tx1"/>
-                </a:solidFill>
-                <a:latin typeface="+mj-lt"/>
-                <a:ea typeface="+mj-ea"/>
-                <a:cs typeface="+mj-cs"/>
-              </a:defRPr>
-            </a:lvl1pPr>
-          </a:lstStyle>
-          <a:p>
-            <a:pPr>
-              <a:lnSpc>
-                <a:spcPct val="75000"/>
-              </a:lnSpc>
-            </a:pPr>
-            <a:r>
-              <a:rPr lang="en-US" sz="6000" u="sng">
-                <a:ln w="41275">
-                  <a:noFill/>
-                </a:ln>
-                <a:solidFill>
-                  <a:schemeClr val="accent2"/>
-                </a:solidFill>
-                <a:ea typeface="Source Sans Pro Black"/>
-              </a:rPr>
-              <a:t>Conventional Commits</a:t>
-            </a:r>
-            <a:endParaRPr lang="en-US" u="sng" dirty="0" err="1">
-              <a:solidFill>
-                <a:schemeClr val="accent2"/>
-              </a:solidFill>
-            </a:endParaRPr>
-          </a:p>
-          <a:p>
-            <a:pPr>
-              <a:lnSpc>
-                <a:spcPct val="75000"/>
-              </a:lnSpc>
-            </a:pPr>
-            <a:r>
-              <a:rPr lang="en-US" sz="3200">
-                <a:ln w="41275">
-                  <a:noFill/>
-                </a:ln>
-                <a:solidFill>
-                  <a:schemeClr val="tx1">
-                    <a:lumMod val="76000"/>
-                    <a:lumOff val="24000"/>
-                  </a:schemeClr>
-                </a:solidFill>
-                <a:ea typeface="Source Sans Pro Black"/>
-              </a:rPr>
-              <a:t>Git Commit Standards</a:t>
-            </a:r>
-            <a:endParaRPr lang="en-US" sz="3200" u="sng" dirty="0">
-              <a:ln w="41275">
-                <a:noFill/>
-              </a:ln>
-              <a:solidFill>
-                <a:schemeClr val="tx1">
-                  <a:lumMod val="76000"/>
-                  <a:lumOff val="24000"/>
-                </a:schemeClr>
-              </a:solidFill>
-              <a:ea typeface="Source Sans Pro Black"/>
-            </a:endParaRPr>
-          </a:p>
-        </p:txBody>
-      </p:sp>
-      <p:sp>
-        <p:nvSpPr>
-          <p:cNvPr id="32" name="TextBox 31">
-            <a:extLst>
-              <a:ext uri="{FF2B5EF4-FFF2-40B4-BE49-F238E27FC236}">
-                <a16:creationId xmlns:a16="http://schemas.microsoft.com/office/drawing/2014/main" id="{D461B505-22F9-5F3F-2A49-7DB9A0BAC8D0}"/>
-              </a:ext>
-            </a:extLst>
-          </p:cNvPr>
-          <p:cNvSpPr txBox="1"/>
-          <p:nvPr/>
-        </p:nvSpPr>
-        <p:spPr>
-          <a:xfrm>
-            <a:off x="2395248" y="1652683"/>
-            <a:ext cx="5257799" cy="1200329"/>
-          </a:xfrm>
-          <a:prstGeom prst="rect">
-            <a:avLst/>
-          </a:prstGeom>
-          <a:noFill/>
-        </p:spPr>
-        <p:txBody>
-          <a:bodyPr rot="0" spcFirstLastPara="0" vertOverflow="overflow" horzOverflow="overflow" vert="horz" wrap="square" lIns="91440" tIns="45720" rIns="91440" bIns="45720" numCol="1" spcCol="0" rtlCol="0" fromWordArt="0" anchor="t" anchorCtr="0" forceAA="0" compatLnSpc="1">
-            <a:prstTxWarp prst="textNoShape">
-              <a:avLst/>
-            </a:prstTxWarp>
-            <a:spAutoFit/>
-          </a:bodyPr>
-          <a:lstStyle/>
-          <a:p>
-            <a:pPr algn="ctr"/>
-            <a:br>
-              <a:rPr lang="en-GB" sz="3600" dirty="0">
-                <a:ea typeface="Source Sans Pro"/>
-              </a:rPr>
-            </a:br>
-            <a:endParaRPr lang="en-GB" sz="3600">
-              <a:solidFill>
-                <a:schemeClr val="bg2">
-                  <a:lumMod val="49000"/>
-                </a:schemeClr>
-              </a:solidFill>
-              <a:ea typeface="Source Sans Pro"/>
-            </a:endParaRPr>
-          </a:p>
-        </p:txBody>
-      </p:sp>
-      <p:cxnSp>
-        <p:nvCxnSpPr>
-          <p:cNvPr id="47" name="Straight Connector 46">
-            <a:extLst>
-              <a:ext uri="{FF2B5EF4-FFF2-40B4-BE49-F238E27FC236}">
-                <a16:creationId xmlns:a16="http://schemas.microsoft.com/office/drawing/2014/main" id="{8A41885E-E046-75DF-27E0-05EAE675EB6A}"/>
-              </a:ext>
-              <a:ext uri="{C183D7F6-B498-43B3-948B-1728B52AA6E4}">
-                <adec:decorative xmlns:adec="http://schemas.microsoft.com/office/drawing/2017/decorative" val="1"/>
-              </a:ext>
-            </a:extLst>
-          </p:cNvPr>
-          <p:cNvCxnSpPr>
-            <a:cxnSpLocks/>
-          </p:cNvCxnSpPr>
-          <p:nvPr/>
-        </p:nvCxnSpPr>
-        <p:spPr>
-          <a:xfrm>
-            <a:off x="839615" y="1271285"/>
-            <a:ext cx="8677751" cy="0"/>
-          </a:xfrm>
-          <a:prstGeom prst="line">
-            <a:avLst/>
-          </a:prstGeom>
-          <a:ln w="25400">
-            <a:solidFill>
-              <a:schemeClr val="accent2"/>
-            </a:solidFill>
-          </a:ln>
-        </p:spPr>
-        <p:style>
-          <a:lnRef idx="1">
-            <a:schemeClr val="accent1"/>
-          </a:lnRef>
-          <a:fillRef idx="0">
-            <a:schemeClr val="accent1"/>
-          </a:fillRef>
-          <a:effectRef idx="0">
-            <a:schemeClr val="accent1"/>
-          </a:effectRef>
-          <a:fontRef idx="minor">
-            <a:schemeClr val="tx1"/>
-          </a:fontRef>
-        </p:style>
-      </p:cxnSp>
-      <p:sp>
-        <p:nvSpPr>
-          <p:cNvPr id="6" name="TextBox 5">
-            <a:extLst>
-              <a:ext uri="{FF2B5EF4-FFF2-40B4-BE49-F238E27FC236}">
-                <a16:creationId xmlns:a16="http://schemas.microsoft.com/office/drawing/2014/main" id="{C096E87A-9787-C9F0-2B5A-72B6AD3B98DF}"/>
-              </a:ext>
-            </a:extLst>
-          </p:cNvPr>
-          <p:cNvSpPr txBox="1"/>
-          <p:nvPr/>
-        </p:nvSpPr>
-        <p:spPr>
-          <a:xfrm>
-            <a:off x="843845" y="6864303"/>
-            <a:ext cx="9217376" cy="1016560"/>
-          </a:xfrm>
-          <a:prstGeom prst="rect">
-            <a:avLst/>
-          </a:prstGeom>
-          <a:noFill/>
-        </p:spPr>
-        <p:txBody>
-          <a:bodyPr rot="0" spcFirstLastPara="0" vertOverflow="overflow" horzOverflow="overflow" vert="horz" wrap="square" lIns="91440" tIns="45720" rIns="91440" bIns="45720" numCol="1" spcCol="0" rtlCol="0" fromWordArt="0" anchor="t" anchorCtr="0" forceAA="0" compatLnSpc="1">
-            <a:prstTxWarp prst="textNoShape">
-              <a:avLst/>
-            </a:prstTxWarp>
-            <a:spAutoFit/>
-          </a:bodyPr>
-          <a:lstStyle/>
-          <a:p>
-            <a:r>
-              <a:rPr lang="en-GB" sz="2000" baseline="0">
-                <a:latin typeface="Source Sans Pro"/>
-              </a:rPr>
-              <a:t>Document reference:</a:t>
-            </a:r>
-            <a:r>
-              <a:rPr sz="2000">
-                <a:latin typeface="Source Sans Pro"/>
-                <a:ea typeface="Source Sans Pro"/>
-                <a:cs typeface="Source Sans Pro"/>
-              </a:rPr>
-              <a:t>​</a:t>
-            </a:r>
-            <a:br>
-              <a:rPr sz="2000" dirty="0">
-                <a:latin typeface="Source Sans Pro"/>
-                <a:ea typeface="Source Sans Pro"/>
-                <a:cs typeface="Source Sans Pro"/>
-              </a:rPr>
-            </a:br>
-            <a:r>
-              <a:rPr lang="en-GB" sz="2000" strike="noStrike" baseline="0" dirty="0">
-                <a:ea typeface="+mn-lt"/>
-                <a:cs typeface="+mn-lt"/>
-                <a:hlinkClick r:id="rId2">
-                  <a:extLst>
-                    <a:ext uri="{A12FA001-AC4F-418D-AE19-62706E023703}">
-                      <ahyp:hlinkClr xmlns:ahyp="http://schemas.microsoft.com/office/drawing/2018/hyperlinkcolor" val="tx"/>
-                    </a:ext>
-                  </a:extLst>
-                </a:hlinkClick>
-              </a:rPr>
-              <a:t>https://www.</a:t>
-            </a:r>
-            <a:r>
-              <a:rPr lang="en-GB" sz="2000" dirty="0">
-                <a:ea typeface="+mn-lt"/>
-                <a:cs typeface="+mn-lt"/>
-                <a:hlinkClick r:id="rId2">
-                  <a:extLst>
-                    <a:ext uri="{A12FA001-AC4F-418D-AE19-62706E023703}">
-                      <ahyp:hlinkClr xmlns:ahyp="http://schemas.microsoft.com/office/drawing/2018/hyperlinkcolor" val="tx"/>
-                    </a:ext>
-                  </a:extLst>
-                </a:hlinkClick>
-              </a:rPr>
-              <a:t>conventionalcommits</a:t>
-            </a:r>
-            <a:r>
-              <a:rPr lang="en-GB" sz="2000" strike="noStrike" baseline="0" dirty="0">
-                <a:ea typeface="+mn-lt"/>
-                <a:cs typeface="+mn-lt"/>
-                <a:hlinkClick r:id="rId2">
-                  <a:extLst>
-                    <a:ext uri="{A12FA001-AC4F-418D-AE19-62706E023703}">
-                      <ahyp:hlinkClr xmlns:ahyp="http://schemas.microsoft.com/office/drawing/2018/hyperlinkcolor" val="tx"/>
-                    </a:ext>
-                  </a:extLst>
-                </a:hlinkClick>
-              </a:rPr>
-              <a:t>.</a:t>
-            </a:r>
-            <a:r>
-              <a:rPr lang="en-GB" sz="2000" dirty="0">
-                <a:ea typeface="+mn-lt"/>
-                <a:cs typeface="+mn-lt"/>
-                <a:hlinkClick r:id="rId2">
-                  <a:extLst>
-                    <a:ext uri="{A12FA001-AC4F-418D-AE19-62706E023703}">
-                      <ahyp:hlinkClr xmlns:ahyp="http://schemas.microsoft.com/office/drawing/2018/hyperlinkcolor" val="tx"/>
-                    </a:ext>
-                  </a:extLst>
-                </a:hlinkClick>
-              </a:rPr>
-              <a:t>org</a:t>
-            </a:r>
-            <a:r>
-              <a:rPr lang="en-GB" sz="2000" strike="noStrike" baseline="0" dirty="0">
-                <a:ea typeface="+mn-lt"/>
-                <a:cs typeface="+mn-lt"/>
-                <a:hlinkClick r:id="rId2">
-                  <a:extLst>
-                    <a:ext uri="{A12FA001-AC4F-418D-AE19-62706E023703}">
-                      <ahyp:hlinkClr xmlns:ahyp="http://schemas.microsoft.com/office/drawing/2018/hyperlinkcolor" val="tx"/>
-                    </a:ext>
-                  </a:extLst>
-                </a:hlinkClick>
-              </a:rPr>
-              <a:t>/</a:t>
-            </a:r>
-            <a:r>
-              <a:rPr lang="en-GB" sz="2000" dirty="0">
-                <a:ea typeface="+mn-lt"/>
-                <a:cs typeface="+mn-lt"/>
-                <a:hlinkClick r:id="rId2">
-                  <a:extLst>
-                    <a:ext uri="{A12FA001-AC4F-418D-AE19-62706E023703}">
-                      <ahyp:hlinkClr xmlns:ahyp="http://schemas.microsoft.com/office/drawing/2018/hyperlinkcolor" val="tx"/>
-                    </a:ext>
-                  </a:extLst>
-                </a:hlinkClick>
-              </a:rPr>
-              <a:t>en</a:t>
-            </a:r>
-            <a:r>
-              <a:rPr lang="en-GB" sz="2000" strike="noStrike" baseline="0" dirty="0">
-                <a:ea typeface="+mn-lt"/>
-                <a:cs typeface="+mn-lt"/>
-                <a:hlinkClick r:id="rId2">
-                  <a:extLst>
-                    <a:ext uri="{A12FA001-AC4F-418D-AE19-62706E023703}">
-                      <ahyp:hlinkClr xmlns:ahyp="http://schemas.microsoft.com/office/drawing/2018/hyperlinkcolor" val="tx"/>
-                    </a:ext>
-                  </a:extLst>
-                </a:hlinkClick>
-              </a:rPr>
-              <a:t>/</a:t>
-            </a:r>
-            <a:r>
-              <a:rPr lang="en-GB" sz="2000" dirty="0">
-                <a:ea typeface="+mn-lt"/>
-                <a:cs typeface="+mn-lt"/>
-                <a:hlinkClick r:id="rId2">
-                  <a:extLst>
-                    <a:ext uri="{A12FA001-AC4F-418D-AE19-62706E023703}">
-                      <ahyp:hlinkClr xmlns:ahyp="http://schemas.microsoft.com/office/drawing/2018/hyperlinkcolor" val="tx"/>
-                    </a:ext>
-                  </a:extLst>
-                </a:hlinkClick>
-              </a:rPr>
-              <a:t>v1.0.0-beta.4/#specification</a:t>
-            </a:r>
-            <a:endParaRPr lang="en-GB"/>
-          </a:p>
-          <a:p>
-            <a:pPr algn="ctr"/>
-            <a:endParaRPr lang="en-GB"/>
-          </a:p>
-        </p:txBody>
-      </p:sp>
-      <p:sp>
-        <p:nvSpPr>
-          <p:cNvPr id="3" name="TextBox 2">
-            <a:extLst>
-              <a:ext uri="{FF2B5EF4-FFF2-40B4-BE49-F238E27FC236}">
-                <a16:creationId xmlns:a16="http://schemas.microsoft.com/office/drawing/2014/main" id="{282E0107-6524-BF5C-CACE-BD5C27E36BA5}"/>
-              </a:ext>
-            </a:extLst>
-          </p:cNvPr>
-          <p:cNvSpPr txBox="1"/>
-          <p:nvPr/>
-        </p:nvSpPr>
-        <p:spPr>
-          <a:xfrm>
-            <a:off x="617576" y="1781609"/>
-            <a:ext cx="8812826" cy="5325432"/>
-          </a:xfrm>
-          <a:prstGeom prst="rect">
-            <a:avLst/>
-          </a:prstGeom>
-          <a:noFill/>
-        </p:spPr>
-        <p:txBody>
-          <a:bodyPr rot="0" spcFirstLastPara="0" vertOverflow="overflow" horzOverflow="overflow" vert="horz" wrap="square" lIns="91440" tIns="45720" rIns="91440" bIns="45720" numCol="1" spcCol="0" rtlCol="0" fromWordArt="0" anchor="t" anchorCtr="0" forceAA="0" compatLnSpc="1">
-            <a:prstTxWarp prst="textNoShape">
-              <a:avLst/>
-            </a:prstTxWarp>
-            <a:spAutoFit/>
-          </a:bodyPr>
-          <a:lstStyle/>
-          <a:p>
-            <a:pPr marL="342900">
-              <a:buFont typeface="Wingdings"/>
-              <a:buChar char="v"/>
-            </a:pPr>
-            <a:r>
-              <a:rPr lang="en-US" sz="2000" b="1">
-                <a:solidFill>
-                  <a:srgbClr val="24292E"/>
-                </a:solidFill>
-                <a:latin typeface="-apple-system"/>
-                <a:ea typeface="-apple-system"/>
-                <a:cs typeface="-apple-system"/>
-              </a:rPr>
-              <a:t>fix - </a:t>
-            </a:r>
-            <a:r>
-              <a:rPr lang="en-US" sz="2000">
-                <a:solidFill>
-                  <a:srgbClr val="24292E"/>
-                </a:solidFill>
-                <a:latin typeface="-apple-system"/>
-                <a:ea typeface="-apple-system"/>
-                <a:cs typeface="-apple-system"/>
-              </a:rPr>
-              <a:t>a commit noting a fix to the codebase</a:t>
-            </a:r>
-            <a:endParaRPr lang="en-US">
-              <a:ea typeface="Source Sans Pro"/>
-            </a:endParaRPr>
-          </a:p>
-          <a:p>
-            <a:pPr marL="342900">
-              <a:buFont typeface="Wingdings"/>
-              <a:buChar char="v"/>
-            </a:pPr>
-            <a:r>
-              <a:rPr lang="en-US" sz="2000" b="1">
-                <a:solidFill>
-                  <a:srgbClr val="24292E"/>
-                </a:solidFill>
-                <a:latin typeface="-apple-system"/>
-                <a:ea typeface="-apple-system"/>
-                <a:cs typeface="-apple-system"/>
-              </a:rPr>
-              <a:t>feat -</a:t>
-            </a:r>
-            <a:r>
-              <a:rPr lang="en-US" sz="2000" b="0" i="0">
-                <a:solidFill>
-                  <a:srgbClr val="24292E"/>
-                </a:solidFill>
-                <a:latin typeface="-apple-system"/>
-                <a:ea typeface="-apple-system"/>
-                <a:cs typeface="-apple-system"/>
-              </a:rPr>
-              <a:t> a commit of the </a:t>
-            </a:r>
-            <a:r>
-              <a:rPr lang="en-US" sz="2000" b="0" i="1">
-                <a:solidFill>
-                  <a:srgbClr val="24292E"/>
-                </a:solidFill>
-                <a:latin typeface="-apple-system"/>
-                <a:ea typeface="-apple-system"/>
-                <a:cs typeface="-apple-system"/>
-              </a:rPr>
-              <a:t>type</a:t>
-            </a:r>
-            <a:r>
-              <a:rPr lang="en-US" sz="2000" b="0" i="0">
-                <a:solidFill>
-                  <a:srgbClr val="24292E"/>
-                </a:solidFill>
-                <a:latin typeface="-apple-system"/>
-                <a:ea typeface="-apple-system"/>
-                <a:cs typeface="-apple-system"/>
-              </a:rPr>
-              <a:t> feat introduces a new feature to the codebase</a:t>
-            </a:r>
-            <a:endParaRPr lang="en-US" sz="2000">
-              <a:solidFill>
-                <a:srgbClr val="24292E"/>
-              </a:solidFill>
-              <a:latin typeface="-apple-system"/>
-              <a:ea typeface="-apple-system"/>
-              <a:cs typeface="-apple-system"/>
-            </a:endParaRPr>
-          </a:p>
-          <a:p>
-            <a:pPr marL="342900">
-              <a:buFont typeface="Wingdings"/>
-              <a:buChar char="v"/>
-            </a:pPr>
-            <a:r>
-              <a:rPr lang="en-US" sz="2000" b="1" i="0" dirty="0">
-                <a:solidFill>
-                  <a:srgbClr val="24292E"/>
-                </a:solidFill>
-                <a:latin typeface="-apple-system"/>
-                <a:ea typeface="-apple-system"/>
-                <a:cs typeface="-apple-system"/>
-              </a:rPr>
-              <a:t>BREAKING CHANGE</a:t>
-            </a:r>
-            <a:r>
-              <a:rPr lang="en-US" sz="2000" b="1" dirty="0">
-                <a:solidFill>
-                  <a:srgbClr val="24292E"/>
-                </a:solidFill>
-                <a:latin typeface="-apple-system"/>
-                <a:ea typeface="-apple-system"/>
-                <a:cs typeface="-apple-system"/>
-              </a:rPr>
-              <a:t> -</a:t>
-            </a:r>
-            <a:r>
-              <a:rPr lang="en-US" sz="2000" b="0" i="0" dirty="0">
-                <a:solidFill>
-                  <a:srgbClr val="24292E"/>
-                </a:solidFill>
-                <a:latin typeface="-apple-system"/>
-                <a:ea typeface="-apple-system"/>
-                <a:cs typeface="-apple-system"/>
-              </a:rPr>
-              <a:t> </a:t>
-            </a:r>
-            <a:r>
-              <a:rPr lang="en-US" sz="2000" dirty="0">
-                <a:solidFill>
-                  <a:srgbClr val="24292E"/>
-                </a:solidFill>
-                <a:latin typeface="-apple-system"/>
-                <a:ea typeface="-apple-system"/>
-                <a:cs typeface="-apple-system"/>
-              </a:rPr>
-              <a:t>specified at the start or end of the commit, noting the </a:t>
-            </a:r>
-            <a:r>
-              <a:rPr lang="en-US" sz="2000">
-                <a:solidFill>
-                  <a:srgbClr val="24292E"/>
-                </a:solidFill>
-                <a:latin typeface="-apple-system"/>
-                <a:ea typeface="-apple-system"/>
-                <a:cs typeface="-apple-system"/>
-              </a:rPr>
-              <a:t>commit will cause changes that will break changes such as to the API.</a:t>
-            </a:r>
-          </a:p>
-          <a:p>
-            <a:pPr marL="342900">
-              <a:buFont typeface="Wingdings"/>
-              <a:buChar char="v"/>
-            </a:pPr>
-            <a:r>
-              <a:rPr lang="en-US" sz="2000" dirty="0">
-                <a:solidFill>
-                  <a:srgbClr val="24292E"/>
-                </a:solidFill>
-                <a:latin typeface="-apple-system"/>
-                <a:ea typeface="-apple-system"/>
-                <a:cs typeface="-apple-system"/>
-              </a:rPr>
-              <a:t>! </a:t>
-            </a:r>
-            <a:r>
-              <a:rPr lang="en-US" sz="2000" b="1" dirty="0">
-                <a:solidFill>
-                  <a:srgbClr val="24292E"/>
-                </a:solidFill>
-                <a:latin typeface="-apple-system"/>
-                <a:ea typeface="-apple-system"/>
-                <a:cs typeface="-apple-system"/>
-              </a:rPr>
-              <a:t>- </a:t>
-            </a:r>
-            <a:r>
-              <a:rPr lang="en-US" sz="2000" dirty="0">
-                <a:solidFill>
-                  <a:srgbClr val="24292E"/>
-                </a:solidFill>
-                <a:latin typeface="-apple-system"/>
-                <a:ea typeface="-apple-system"/>
-                <a:cs typeface="-apple-system"/>
-              </a:rPr>
-              <a:t>can be used together with commit prefixes to indicate there's a BREAKING CHANGE</a:t>
-            </a:r>
-          </a:p>
-          <a:p>
-            <a:pPr marL="342900">
-              <a:buFont typeface="Wingdings"/>
-              <a:buChar char="v"/>
-            </a:pPr>
-            <a:r>
-              <a:rPr lang="en-US" sz="2000">
-                <a:solidFill>
-                  <a:srgbClr val="24292E"/>
-                </a:solidFill>
-                <a:latin typeface="-apple-system"/>
-                <a:ea typeface="-apple-system"/>
-                <a:cs typeface="-apple-system"/>
-              </a:rPr>
-              <a:t>Other kinds such as</a:t>
-            </a:r>
-          </a:p>
-          <a:p>
-            <a:pPr marL="852170" lvl="1">
-              <a:buFont typeface="Courier New"/>
-              <a:buChar char="o"/>
-            </a:pPr>
-            <a:r>
-              <a:rPr lang="en-US" sz="2000" b="1" dirty="0">
-                <a:solidFill>
-                  <a:srgbClr val="24292E"/>
-                </a:solidFill>
-                <a:latin typeface="-apple-system"/>
-                <a:ea typeface="-apple-system"/>
-                <a:cs typeface="-apple-system"/>
-              </a:rPr>
-              <a:t>chore – </a:t>
-            </a:r>
-            <a:r>
-              <a:rPr lang="en-US" sz="2000" dirty="0">
-                <a:solidFill>
-                  <a:srgbClr val="24292E"/>
-                </a:solidFill>
-                <a:latin typeface="-apple-system"/>
-                <a:ea typeface="-apple-system"/>
-                <a:cs typeface="-apple-system"/>
-              </a:rPr>
-              <a:t>a commit that does not affect code changes, e.g. adding comments</a:t>
-            </a:r>
-          </a:p>
-          <a:p>
-            <a:pPr marL="852170" lvl="1">
-              <a:buFont typeface="Courier New"/>
-              <a:buChar char="o"/>
-            </a:pPr>
-            <a:r>
-              <a:rPr lang="en-US" sz="2000" b="1">
-                <a:solidFill>
-                  <a:srgbClr val="24292E"/>
-                </a:solidFill>
-                <a:latin typeface="-apple-system"/>
-                <a:ea typeface="-apple-system"/>
-                <a:cs typeface="-apple-system"/>
-              </a:rPr>
-              <a:t>docs – </a:t>
-            </a:r>
-            <a:r>
-              <a:rPr lang="en-US" sz="2000">
-                <a:solidFill>
-                  <a:srgbClr val="24292E"/>
-                </a:solidFill>
-                <a:latin typeface="-apple-system"/>
-                <a:ea typeface="-apple-system"/>
-                <a:cs typeface="-apple-system"/>
-              </a:rPr>
-              <a:t>a commit to update documentation</a:t>
-            </a:r>
-          </a:p>
-          <a:p>
-            <a:pPr marL="852170" lvl="1">
-              <a:buFont typeface="Courier New"/>
-              <a:buChar char="o"/>
-            </a:pPr>
-            <a:r>
-              <a:rPr lang="en-US" sz="2000" b="1" dirty="0">
-                <a:solidFill>
-                  <a:srgbClr val="24292E"/>
-                </a:solidFill>
-                <a:latin typeface="-apple-system"/>
-                <a:ea typeface="-apple-system"/>
-                <a:cs typeface="-apple-system"/>
-              </a:rPr>
-              <a:t>style – </a:t>
-            </a:r>
-            <a:r>
-              <a:rPr lang="en-US" sz="2000" dirty="0">
-                <a:solidFill>
-                  <a:srgbClr val="24292E"/>
-                </a:solidFill>
-                <a:latin typeface="-apple-system"/>
-                <a:ea typeface="-apple-system"/>
-                <a:cs typeface="-apple-system"/>
-              </a:rPr>
-              <a:t>a commit noting visual changes such as </a:t>
-            </a:r>
-            <a:r>
-              <a:rPr lang="en-US" sz="2000" dirty="0" err="1">
-                <a:solidFill>
-                  <a:srgbClr val="24292E"/>
-                </a:solidFill>
-                <a:latin typeface="-apple-system"/>
-                <a:ea typeface="-apple-system"/>
-                <a:cs typeface="-apple-system"/>
-              </a:rPr>
-              <a:t>css</a:t>
-            </a:r>
-            <a:endParaRPr lang="en-US" sz="2000" dirty="0">
-              <a:solidFill>
-                <a:srgbClr val="24292E"/>
-              </a:solidFill>
-              <a:latin typeface="-apple-system"/>
-              <a:ea typeface="-apple-system"/>
-              <a:cs typeface="-apple-system"/>
-            </a:endParaRPr>
-          </a:p>
-          <a:p>
-            <a:pPr marL="852170" lvl="1">
-              <a:buFont typeface="Courier New"/>
-              <a:buChar char="o"/>
-            </a:pPr>
-            <a:r>
-              <a:rPr lang="en-US" sz="2000" b="1">
-                <a:solidFill>
-                  <a:srgbClr val="24292E"/>
-                </a:solidFill>
-                <a:latin typeface="-apple-system"/>
-                <a:ea typeface="-apple-system"/>
-                <a:cs typeface="-apple-system"/>
-              </a:rPr>
-              <a:t>refactor – </a:t>
-            </a:r>
-            <a:r>
-              <a:rPr lang="en-US" sz="2000">
-                <a:solidFill>
-                  <a:srgbClr val="24292E"/>
-                </a:solidFill>
-                <a:latin typeface="-apple-system"/>
-                <a:ea typeface="-apple-system"/>
-                <a:cs typeface="-apple-system"/>
-              </a:rPr>
-              <a:t>a commit noting a rework in the codebase</a:t>
-            </a:r>
-          </a:p>
-          <a:p>
-            <a:pPr marL="852170" lvl="1">
-              <a:buFont typeface="Courier New"/>
-              <a:buChar char="o"/>
-            </a:pPr>
-            <a:r>
-              <a:rPr lang="en-US" sz="2000" b="1">
-                <a:solidFill>
-                  <a:srgbClr val="24292E"/>
-                </a:solidFill>
-                <a:latin typeface="-apple-system"/>
-                <a:ea typeface="-apple-system"/>
-                <a:cs typeface="-apple-system"/>
-              </a:rPr>
-              <a:t>perf – </a:t>
-            </a:r>
-            <a:r>
-              <a:rPr lang="en-US" sz="2000">
-                <a:solidFill>
-                  <a:srgbClr val="24292E"/>
-                </a:solidFill>
-                <a:latin typeface="-apple-system"/>
-                <a:ea typeface="-apple-system"/>
-                <a:cs typeface="-apple-system"/>
-              </a:rPr>
-              <a:t>a commit noting a performance change such as performance improvements</a:t>
-            </a:r>
-          </a:p>
-          <a:p>
-            <a:pPr marL="852170" lvl="1">
-              <a:buFont typeface="Courier New"/>
-              <a:buChar char="o"/>
-            </a:pPr>
-            <a:r>
-              <a:rPr lang="en-US" sz="2000" b="1">
-                <a:solidFill>
-                  <a:srgbClr val="24292E"/>
-                </a:solidFill>
-                <a:latin typeface="-apple-system"/>
-                <a:ea typeface="-apple-system"/>
-                <a:cs typeface="-apple-system"/>
-              </a:rPr>
-              <a:t>test – </a:t>
-            </a:r>
-            <a:r>
-              <a:rPr lang="en-US" sz="2000">
-                <a:solidFill>
-                  <a:srgbClr val="24292E"/>
-                </a:solidFill>
-                <a:latin typeface="-apple-system"/>
-                <a:ea typeface="-apple-system"/>
-                <a:cs typeface="-apple-system"/>
-              </a:rPr>
-              <a:t>a commit noting changes or additions to the test cases</a:t>
-            </a:r>
-          </a:p>
-          <a:p>
-            <a:pPr marL="852170" lvl="1">
-              <a:buFont typeface="Courier New"/>
-              <a:buChar char="o"/>
-            </a:pPr>
-            <a:r>
-              <a:rPr lang="en-US" sz="2000" b="0" i="0">
-                <a:solidFill>
-                  <a:srgbClr val="24292E"/>
-                </a:solidFill>
-                <a:latin typeface="-apple-system"/>
-                <a:ea typeface="-apple-system"/>
-                <a:cs typeface="-apple-system"/>
-              </a:rPr>
-              <a:t>and others.</a:t>
-            </a:r>
-            <a:endParaRPr lang="en-US" sz="2000">
-              <a:solidFill>
-                <a:srgbClr val="24292E"/>
-              </a:solidFill>
-              <a:latin typeface="-apple-system"/>
-            </a:endParaRPr>
-          </a:p>
-          <a:p>
-            <a:pPr algn="ctr"/>
-            <a:endParaRPr lang="en-GB"/>
-          </a:p>
-        </p:txBody>
-      </p:sp>
-      <p:pic>
-        <p:nvPicPr>
-          <p:cNvPr id="4" name="Picture 3" descr="A cartoon character reading a book&#10;&#10;AI-generated content may be incorrect.">
-            <a:extLst>
-              <a:ext uri="{FF2B5EF4-FFF2-40B4-BE49-F238E27FC236}">
-                <a16:creationId xmlns:a16="http://schemas.microsoft.com/office/drawing/2014/main" id="{3F4A70C2-C3D3-ADEE-2CCD-CE0A093F7396}"/>
-              </a:ext>
-            </a:extLst>
-          </p:cNvPr>
-          <p:cNvPicPr>
-            <a:picLocks noChangeAspect="1"/>
-          </p:cNvPicPr>
-          <p:nvPr/>
-        </p:nvPicPr>
-        <p:blipFill>
-          <a:blip r:embed="rId3"/>
-          <a:stretch>
-            <a:fillRect/>
-          </a:stretch>
-        </p:blipFill>
-        <p:spPr>
-          <a:xfrm>
-            <a:off x="8331537" y="3688422"/>
-            <a:ext cx="1726863" cy="1751264"/>
-          </a:xfrm>
-          <a:prstGeom prst="rect">
-            <a:avLst/>
-          </a:prstGeom>
-          <a:ln>
-            <a:noFill/>
-          </a:ln>
-          <a:effectLst>
-            <a:softEdge rad="112500"/>
-          </a:effectLst>
-        </p:spPr>
-      </p:pic>
-    </p:spTree>
-    <p:extLst>
-      <p:ext uri="{BB962C8B-B14F-4D97-AF65-F5344CB8AC3E}">
-        <p14:creationId xmlns:p14="http://schemas.microsoft.com/office/powerpoint/2010/main" val="3071021880"/>
       </p:ext>
     </p:extLst>
   </p:cSld>
@@ -28277,6 +32928,26 @@
 </file>
 
 <file path=customXml/item1.xml><?xml version="1.0" encoding="utf-8"?>
+<p:properties xmlns:p="http://schemas.microsoft.com/office/2006/metadata/properties" xmlns:xsi="http://www.w3.org/2001/XMLSchema-instance" xmlns:pc="http://schemas.microsoft.com/office/infopath/2007/PartnerControls">
+  <documentManagement>
+    <_ip_UnifiedCompliancePolicyUIAction xmlns="http://schemas.microsoft.com/sharepoint/v3" xsi:nil="true"/>
+    <Image xmlns="71af3243-3dd4-4a8d-8c0d-dd76da1f02a5">
+      <Url xsi:nil="true"/>
+      <Description xsi:nil="true"/>
+    </Image>
+    <Status xmlns="71af3243-3dd4-4a8d-8c0d-dd76da1f02a5">Not started</Status>
+    <Background xmlns="71af3243-3dd4-4a8d-8c0d-dd76da1f02a5">false</Background>
+    <_ip_UnifiedCompliancePolicyProperties xmlns="http://schemas.microsoft.com/sharepoint/v3" xsi:nil="true"/>
+    <ImageTagsTaxHTField xmlns="71af3243-3dd4-4a8d-8c0d-dd76da1f02a5">
+      <Terms xmlns="http://schemas.microsoft.com/office/infopath/2007/PartnerControls"/>
+    </ImageTagsTaxHTField>
+    <TaxCatchAll xmlns="230e9df3-be65-4c73-a93b-d1236ebd677e" xsi:nil="true"/>
+    <MediaServiceKeyPoints xmlns="71af3243-3dd4-4a8d-8c0d-dd76da1f02a5" xsi:nil="true"/>
+  </documentManagement>
+</p:properties>
+</file>
+
+<file path=customXml/item2.xml><?xml version="1.0" encoding="utf-8"?>
 <ct:contentTypeSchema xmlns:ct="http://schemas.microsoft.com/office/2006/metadata/contentType" xmlns:ma="http://schemas.microsoft.com/office/2006/metadata/properties/metaAttributes" ct:_="" ma:_="" ma:contentTypeName="Document" ma:contentTypeID="0x01010079F111ED35F8CC479449609E8A0923A6" ma:contentTypeVersion="26" ma:contentTypeDescription="Create a new document." ma:contentTypeScope="" ma:versionID="ac37c1753acd5e330d2062ccec26ea66">
   <xsd:schema xmlns:xsd="http://www.w3.org/2001/XMLSchema" xmlns:xs="http://www.w3.org/2001/XMLSchema" xmlns:p="http://schemas.microsoft.com/office/2006/metadata/properties" xmlns:ns1="http://schemas.microsoft.com/sharepoint/v3" xmlns:ns2="71af3243-3dd4-4a8d-8c0d-dd76da1f02a5" xmlns:ns3="16c05727-aa75-4e4a-9b5f-8a80a1165891" xmlns:ns4="230e9df3-be65-4c73-a93b-d1236ebd677e" targetNamespace="http://schemas.microsoft.com/office/2006/metadata/properties" ma:root="true" ma:fieldsID="3b340c7101c92c5120abd06486f94548" ns1:_="" ns2:_="" ns3:_="" ns4:_="">
     <xsd:import namespace="http://schemas.microsoft.com/sharepoint/v3"/>
@@ -28576,26 +33247,6 @@
 </ct:contentTypeSchema>
 </file>
 
-<file path=customXml/item2.xml><?xml version="1.0" encoding="utf-8"?>
-<p:properties xmlns:p="http://schemas.microsoft.com/office/2006/metadata/properties" xmlns:xsi="http://www.w3.org/2001/XMLSchema-instance" xmlns:pc="http://schemas.microsoft.com/office/infopath/2007/PartnerControls">
-  <documentManagement>
-    <_ip_UnifiedCompliancePolicyUIAction xmlns="http://schemas.microsoft.com/sharepoint/v3" xsi:nil="true"/>
-    <Image xmlns="71af3243-3dd4-4a8d-8c0d-dd76da1f02a5">
-      <Url xsi:nil="true"/>
-      <Description xsi:nil="true"/>
-    </Image>
-    <Status xmlns="71af3243-3dd4-4a8d-8c0d-dd76da1f02a5">Not started</Status>
-    <Background xmlns="71af3243-3dd4-4a8d-8c0d-dd76da1f02a5">false</Background>
-    <_ip_UnifiedCompliancePolicyProperties xmlns="http://schemas.microsoft.com/sharepoint/v3" xsi:nil="true"/>
-    <ImageTagsTaxHTField xmlns="71af3243-3dd4-4a8d-8c0d-dd76da1f02a5">
-      <Terms xmlns="http://schemas.microsoft.com/office/infopath/2007/PartnerControls"/>
-    </ImageTagsTaxHTField>
-    <TaxCatchAll xmlns="230e9df3-be65-4c73-a93b-d1236ebd677e" xsi:nil="true"/>
-    <MediaServiceKeyPoints xmlns="71af3243-3dd4-4a8d-8c0d-dd76da1f02a5" xsi:nil="true"/>
-  </documentManagement>
-</p:properties>
-</file>
-
 <file path=customXml/item3.xml><?xml version="1.0" encoding="utf-8"?>
 <?mso-contentType ?>
 <FormTemplates xmlns="http://schemas.microsoft.com/sharepoint/v3/contenttype/forms">
@@ -28606,6 +33257,18 @@
 </file>
 
 <file path=customXml/itemProps1.xml><?xml version="1.0" encoding="utf-8"?>
+<ds:datastoreItem xmlns:ds="http://schemas.openxmlformats.org/officeDocument/2006/customXml" ds:itemID="{BA7C7500-373E-4155-9EAA-9FE9576B0BE6}">
+  <ds:schemaRefs>
+    <ds:schemaRef ds:uri="http://schemas.microsoft.com/office/2006/metadata/properties"/>
+    <ds:schemaRef ds:uri="http://schemas.microsoft.com/office/infopath/2007/PartnerControls"/>
+    <ds:schemaRef ds:uri="http://schemas.microsoft.com/sharepoint/v3"/>
+    <ds:schemaRef ds:uri="71af3243-3dd4-4a8d-8c0d-dd76da1f02a5"/>
+    <ds:schemaRef ds:uri="230e9df3-be65-4c73-a93b-d1236ebd677e"/>
+  </ds:schemaRefs>
+</ds:datastoreItem>
+</file>
+
+<file path=customXml/itemProps2.xml><?xml version="1.0" encoding="utf-8"?>
 <ds:datastoreItem xmlns:ds="http://schemas.openxmlformats.org/officeDocument/2006/customXml" ds:itemID="{5D948EC7-70A8-4BA0-9397-CCEC9EEE03CC}">
   <ds:schemaRefs>
     <ds:schemaRef ds:uri="http://schemas.microsoft.com/office/2006/metadata/contentType"/>
@@ -28626,18 +33289,6 @@
 </ds:datastoreItem>
 </file>
 
-<file path=customXml/itemProps2.xml><?xml version="1.0" encoding="utf-8"?>
-<ds:datastoreItem xmlns:ds="http://schemas.openxmlformats.org/officeDocument/2006/customXml" ds:itemID="{BA7C7500-373E-4155-9EAA-9FE9576B0BE6}">
-  <ds:schemaRefs>
-    <ds:schemaRef ds:uri="http://schemas.microsoft.com/office/2006/metadata/properties"/>
-    <ds:schemaRef ds:uri="http://schemas.microsoft.com/office/infopath/2007/PartnerControls"/>
-    <ds:schemaRef ds:uri="http://schemas.microsoft.com/sharepoint/v3"/>
-    <ds:schemaRef ds:uri="71af3243-3dd4-4a8d-8c0d-dd76da1f02a5"/>
-    <ds:schemaRef ds:uri="230e9df3-be65-4c73-a93b-d1236ebd677e"/>
-  </ds:schemaRefs>
-</ds:datastoreItem>
-</file>
-
 <file path=customXml/itemProps3.xml><?xml version="1.0" encoding="utf-8"?>
 <ds:datastoreItem xmlns:ds="http://schemas.openxmlformats.org/officeDocument/2006/customXml" ds:itemID="{C700B919-5B9C-4D06-B24A-7BB87EEF69EA}">
   <ds:schemaRefs>

--- a/docs/REST API Workshop.pptx
+++ b/docs/REST API Workshop.pptx
@@ -5,10 +5,10 @@
     <p:sldMasterId id="2147483648" r:id="rId4"/>
   </p:sldMasterIdLst>
   <p:notesMasterIdLst>
-    <p:notesMasterId r:id="rId30"/>
+    <p:notesMasterId r:id="rId31"/>
   </p:notesMasterIdLst>
   <p:handoutMasterIdLst>
-    <p:handoutMasterId r:id="rId31"/>
+    <p:handoutMasterId r:id="rId32"/>
   </p:handoutMasterIdLst>
   <p:sldIdLst>
     <p:sldId id="281" r:id="rId5"/>
@@ -20,22 +20,23 @@
     <p:sldId id="286" r:id="rId11"/>
     <p:sldId id="287" r:id="rId12"/>
     <p:sldId id="291" r:id="rId13"/>
-    <p:sldId id="288" r:id="rId14"/>
-    <p:sldId id="289" r:id="rId15"/>
-    <p:sldId id="290" r:id="rId16"/>
-    <p:sldId id="292" r:id="rId17"/>
-    <p:sldId id="304" r:id="rId18"/>
-    <p:sldId id="293" r:id="rId19"/>
-    <p:sldId id="294" r:id="rId20"/>
-    <p:sldId id="295" r:id="rId21"/>
-    <p:sldId id="297" r:id="rId22"/>
-    <p:sldId id="298" r:id="rId23"/>
-    <p:sldId id="299" r:id="rId24"/>
-    <p:sldId id="301" r:id="rId25"/>
-    <p:sldId id="302" r:id="rId26"/>
-    <p:sldId id="303" r:id="rId27"/>
-    <p:sldId id="305" r:id="rId28"/>
-    <p:sldId id="306" r:id="rId29"/>
+    <p:sldId id="307" r:id="rId14"/>
+    <p:sldId id="308" r:id="rId15"/>
+    <p:sldId id="311" r:id="rId16"/>
+    <p:sldId id="290" r:id="rId17"/>
+    <p:sldId id="292" r:id="rId18"/>
+    <p:sldId id="304" r:id="rId19"/>
+    <p:sldId id="293" r:id="rId20"/>
+    <p:sldId id="294" r:id="rId21"/>
+    <p:sldId id="295" r:id="rId22"/>
+    <p:sldId id="297" r:id="rId23"/>
+    <p:sldId id="298" r:id="rId24"/>
+    <p:sldId id="299" r:id="rId25"/>
+    <p:sldId id="301" r:id="rId26"/>
+    <p:sldId id="302" r:id="rId27"/>
+    <p:sldId id="303" r:id="rId28"/>
+    <p:sldId id="305" r:id="rId29"/>
+    <p:sldId id="306" r:id="rId30"/>
   </p:sldIdLst>
   <p:sldSz cx="10058400" cy="7772400"/>
   <p:notesSz cx="6858000" cy="9144000"/>
@@ -260,7 +261,7 @@
           <a:p>
             <a:fld id="{668871CB-7D37-4FAB-B9ED-4377A4D8FB20}" type="datetimeFigureOut">
               <a:rPr lang="en-US" smtClean="0"/>
-              <a:t>5/8/2026</a:t>
+              <a:t>5/12/2026</a:t>
             </a:fld>
             <a:endParaRPr lang="en-US" dirty="0"/>
           </a:p>
@@ -437,7 +438,7 @@
           <a:p>
             <a:fld id="{443EEF79-99CC-4F81-B4D6-D8238D76DBFC}" type="datetimeFigureOut">
               <a:rPr lang="en-US" smtClean="0"/>
-              <a:t>5/8/2026</a:t>
+              <a:t>5/12/2026</a:t>
             </a:fld>
             <a:endParaRPr lang="en-US" dirty="0"/>
           </a:p>
@@ -878,7 +879,7 @@
           <a:p>
             <a:fld id="{B32EBECA-3212-4A5B-B9AF-C03EDE72AD91}" type="datetimeFigureOut">
               <a:rPr lang="en-US" smtClean="0"/>
-              <a:t>5/8/2026</a:t>
+              <a:t>5/12/2026</a:t>
             </a:fld>
             <a:endParaRPr lang="en-US" dirty="0"/>
           </a:p>
@@ -1063,7 +1064,7 @@
           <a:p>
             <a:fld id="{B32EBECA-3212-4A5B-B9AF-C03EDE72AD91}" type="datetimeFigureOut">
               <a:rPr lang="en-US" smtClean="0"/>
-              <a:t>5/8/2026</a:t>
+              <a:t>5/12/2026</a:t>
             </a:fld>
             <a:endParaRPr lang="en-US" dirty="0"/>
           </a:p>
@@ -1304,7 +1305,7 @@
           <a:p>
             <a:fld id="{B32EBECA-3212-4A5B-B9AF-C03EDE72AD91}" type="datetimeFigureOut">
               <a:rPr lang="en-US" smtClean="0"/>
-              <a:t>5/8/2026</a:t>
+              <a:t>5/12/2026</a:t>
             </a:fld>
             <a:endParaRPr lang="en-US" dirty="0"/>
           </a:p>
@@ -14017,7 +14018,7 @@
         <p:cNvPr id="1" name="">
           <a:extLst>
             <a:ext uri="{FF2B5EF4-FFF2-40B4-BE49-F238E27FC236}">
-              <a16:creationId xmlns:a16="http://schemas.microsoft.com/office/drawing/2014/main" id="{B1799FC5-CC8B-5EAD-DDDA-FB04AEE939BA}"/>
+              <a16:creationId xmlns:a16="http://schemas.microsoft.com/office/drawing/2014/main" id="{3D95C0EA-D49D-FC99-58BE-60AF032825ED}"/>
             </a:ext>
           </a:extLst>
         </p:cNvPr>
@@ -14037,7 +14038,7 @@
           <p:cNvPr id="2" name="Title 1" hidden="1">
             <a:extLst>
               <a:ext uri="{FF2B5EF4-FFF2-40B4-BE49-F238E27FC236}">
-                <a16:creationId xmlns:a16="http://schemas.microsoft.com/office/drawing/2014/main" id="{B6672C1D-04AF-5C93-AF31-F95CBE8A812A}"/>
+                <a16:creationId xmlns:a16="http://schemas.microsoft.com/office/drawing/2014/main" id="{382B1B13-008F-429F-AF2A-2DCE4E1C4110}"/>
               </a:ext>
             </a:extLst>
           </p:cNvPr>
@@ -14065,7 +14066,7 @@
           <p:cNvPr id="8" name="Title 1">
             <a:extLst>
               <a:ext uri="{FF2B5EF4-FFF2-40B4-BE49-F238E27FC236}">
-                <a16:creationId xmlns:a16="http://schemas.microsoft.com/office/drawing/2014/main" id="{ED2B5AE5-9694-665D-C1F4-7F4373A33DDF}"/>
+                <a16:creationId xmlns:a16="http://schemas.microsoft.com/office/drawing/2014/main" id="{ADE51DE8-50A0-C2D1-15D6-DF584C8AB8B5}"/>
               </a:ext>
             </a:extLst>
           </p:cNvPr>
@@ -14171,7 +14172,7 @@
           <p:cNvPr id="32" name="TextBox 31">
             <a:extLst>
               <a:ext uri="{FF2B5EF4-FFF2-40B4-BE49-F238E27FC236}">
-                <a16:creationId xmlns:a16="http://schemas.microsoft.com/office/drawing/2014/main" id="{D461B505-22F9-5F3F-2A49-7DB9A0BAC8D0}"/>
+                <a16:creationId xmlns:a16="http://schemas.microsoft.com/office/drawing/2014/main" id="{59DE56AA-5634-1E52-DAA3-8552644455E5}"/>
               </a:ext>
             </a:extLst>
           </p:cNvPr>
@@ -14219,7 +14220,7 @@
           <p:cNvPr id="47" name="Straight Connector 46">
             <a:extLst>
               <a:ext uri="{FF2B5EF4-FFF2-40B4-BE49-F238E27FC236}">
-                <a16:creationId xmlns:a16="http://schemas.microsoft.com/office/drawing/2014/main" id="{8A41885E-E046-75DF-27E0-05EAE675EB6A}"/>
+                <a16:creationId xmlns:a16="http://schemas.microsoft.com/office/drawing/2014/main" id="{B2748D39-4414-0665-BA34-E5AA10A60F5B}"/>
               </a:ext>
               <a:ext uri="{C183D7F6-B498-43B3-948B-1728B52AA6E4}">
                 <adec:decorative xmlns:adec="http://schemas.microsoft.com/office/drawing/2017/decorative" val="1"/>
@@ -14265,7 +14266,7 @@
           <p:cNvPr id="6" name="TextBox 5">
             <a:extLst>
               <a:ext uri="{FF2B5EF4-FFF2-40B4-BE49-F238E27FC236}">
-                <a16:creationId xmlns:a16="http://schemas.microsoft.com/office/drawing/2014/main" id="{C096E87A-9787-C9F0-2B5A-72B6AD3B98DF}"/>
+                <a16:creationId xmlns:a16="http://schemas.microsoft.com/office/drawing/2014/main" id="{BF50A609-7438-AE4B-EF87-26911B301982}"/>
               </a:ext>
             </a:extLst>
           </p:cNvPr>
@@ -14292,13 +14293,13 @@
           <a:lstStyle/>
           <a:p>
             <a:r>
-              <a:rPr lang="en-GB" sz="2000" baseline="0">
+              <a:rPr lang="en-GB" sz="2000" baseline="0" dirty="0">
                 <a:latin typeface="Source Sans Pro"/>
               </a:rPr>
               <a:t>Document reference:</a:t>
             </a:r>
             <a:r>
-              <a:rPr sz="2000">
+              <a:rPr sz="2000" dirty="0">
                 <a:latin typeface="Source Sans Pro"/>
                 <a:ea typeface="Source Sans Pro"/>
                 <a:cs typeface="Source Sans Pro"/>
@@ -14424,463 +14425,11 @@
               </a:rPr>
               <a:t>v1.0.0-beta.4/#specification</a:t>
             </a:r>
-            <a:endParaRPr lang="en-GB"/>
+            <a:endParaRPr lang="en-GB" dirty="0"/>
           </a:p>
           <a:p>
             <a:pPr algn="ctr"/>
-            <a:endParaRPr lang="en-GB"/>
-          </a:p>
-        </p:txBody>
-      </p:sp>
-      <p:sp>
-        <p:nvSpPr>
-          <p:cNvPr id="3" name="TextBox 2">
-            <a:extLst>
-              <a:ext uri="{FF2B5EF4-FFF2-40B4-BE49-F238E27FC236}">
-                <a16:creationId xmlns:a16="http://schemas.microsoft.com/office/drawing/2014/main" id="{282E0107-6524-BF5C-CACE-BD5C27E36BA5}"/>
-              </a:ext>
-            </a:extLst>
-          </p:cNvPr>
-          <p:cNvSpPr txBox="1"/>
-          <p:nvPr/>
-        </p:nvSpPr>
-        <p:spPr>
-          <a:xfrm>
-            <a:off x="617576" y="1781609"/>
-            <a:ext cx="8812826" cy="5325432"/>
-          </a:xfrm>
-          <a:prstGeom prst="rect">
-            <a:avLst/>
-          </a:prstGeom>
-          <a:noFill/>
-        </p:spPr>
-        <p:txBody>
-          <a:bodyPr rot="0" spcFirstLastPara="0" vertOverflow="overflow" horzOverflow="overflow" vert="horz" wrap="square" lIns="91440" tIns="45720" rIns="91440" bIns="45720" numCol="1" spcCol="0" rtlCol="0" fromWordArt="0" anchor="t" anchorCtr="0" forceAA="0" compatLnSpc="1">
-            <a:prstTxWarp prst="textNoShape">
-              <a:avLst/>
-            </a:prstTxWarp>
-            <a:spAutoFit/>
-          </a:bodyPr>
-          <a:lstStyle/>
-          <a:p>
-            <a:pPr marL="342900">
-              <a:buFont typeface="Wingdings"/>
-              <a:buChar char="v"/>
-            </a:pPr>
-            <a:r>
-              <a:rPr lang="en-US" sz="2000" b="1">
-                <a:solidFill>
-                  <a:srgbClr val="24292E"/>
-                </a:solidFill>
-                <a:latin typeface="-apple-system"/>
-                <a:ea typeface="-apple-system"/>
-                <a:cs typeface="-apple-system"/>
-              </a:rPr>
-              <a:t>fix - </a:t>
-            </a:r>
-            <a:r>
-              <a:rPr lang="en-US" sz="2000">
-                <a:solidFill>
-                  <a:srgbClr val="24292E"/>
-                </a:solidFill>
-                <a:latin typeface="-apple-system"/>
-                <a:ea typeface="-apple-system"/>
-                <a:cs typeface="-apple-system"/>
-              </a:rPr>
-              <a:t>a commit noting a fix to the codebase</a:t>
-            </a:r>
-            <a:endParaRPr lang="en-US">
-              <a:ea typeface="Source Sans Pro"/>
-            </a:endParaRPr>
-          </a:p>
-          <a:p>
-            <a:pPr marL="342900">
-              <a:buFont typeface="Wingdings"/>
-              <a:buChar char="v"/>
-            </a:pPr>
-            <a:r>
-              <a:rPr lang="en-US" sz="2000" b="1">
-                <a:solidFill>
-                  <a:srgbClr val="24292E"/>
-                </a:solidFill>
-                <a:latin typeface="-apple-system"/>
-                <a:ea typeface="-apple-system"/>
-                <a:cs typeface="-apple-system"/>
-              </a:rPr>
-              <a:t>feat -</a:t>
-            </a:r>
-            <a:r>
-              <a:rPr lang="en-US" sz="2000" b="0" i="0">
-                <a:solidFill>
-                  <a:srgbClr val="24292E"/>
-                </a:solidFill>
-                <a:latin typeface="-apple-system"/>
-                <a:ea typeface="-apple-system"/>
-                <a:cs typeface="-apple-system"/>
-              </a:rPr>
-              <a:t> a commit of the </a:t>
-            </a:r>
-            <a:r>
-              <a:rPr lang="en-US" sz="2000" b="0" i="1">
-                <a:solidFill>
-                  <a:srgbClr val="24292E"/>
-                </a:solidFill>
-                <a:latin typeface="-apple-system"/>
-                <a:ea typeface="-apple-system"/>
-                <a:cs typeface="-apple-system"/>
-              </a:rPr>
-              <a:t>type</a:t>
-            </a:r>
-            <a:r>
-              <a:rPr lang="en-US" sz="2000" b="0" i="0">
-                <a:solidFill>
-                  <a:srgbClr val="24292E"/>
-                </a:solidFill>
-                <a:latin typeface="-apple-system"/>
-                <a:ea typeface="-apple-system"/>
-                <a:cs typeface="-apple-system"/>
-              </a:rPr>
-              <a:t> feat introduces a new feature to the codebase</a:t>
-            </a:r>
-            <a:endParaRPr lang="en-US" sz="2000">
-              <a:solidFill>
-                <a:srgbClr val="24292E"/>
-              </a:solidFill>
-              <a:latin typeface="-apple-system"/>
-              <a:ea typeface="-apple-system"/>
-              <a:cs typeface="-apple-system"/>
-            </a:endParaRPr>
-          </a:p>
-          <a:p>
-            <a:pPr marL="342900">
-              <a:buFont typeface="Wingdings"/>
-              <a:buChar char="v"/>
-            </a:pPr>
-            <a:r>
-              <a:rPr lang="en-US" sz="2000" b="1" i="0" dirty="0">
-                <a:solidFill>
-                  <a:srgbClr val="24292E"/>
-                </a:solidFill>
-                <a:latin typeface="-apple-system"/>
-                <a:ea typeface="-apple-system"/>
-                <a:cs typeface="-apple-system"/>
-              </a:rPr>
-              <a:t>BREAKING CHANGE</a:t>
-            </a:r>
-            <a:r>
-              <a:rPr lang="en-US" sz="2000" b="1" dirty="0">
-                <a:solidFill>
-                  <a:srgbClr val="24292E"/>
-                </a:solidFill>
-                <a:latin typeface="-apple-system"/>
-                <a:ea typeface="-apple-system"/>
-                <a:cs typeface="-apple-system"/>
-              </a:rPr>
-              <a:t> -</a:t>
-            </a:r>
-            <a:r>
-              <a:rPr lang="en-US" sz="2000" b="0" i="0" dirty="0">
-                <a:solidFill>
-                  <a:srgbClr val="24292E"/>
-                </a:solidFill>
-                <a:latin typeface="-apple-system"/>
-                <a:ea typeface="-apple-system"/>
-                <a:cs typeface="-apple-system"/>
-              </a:rPr>
-              <a:t> </a:t>
-            </a:r>
-            <a:r>
-              <a:rPr lang="en-US" sz="2000" dirty="0">
-                <a:solidFill>
-                  <a:srgbClr val="24292E"/>
-                </a:solidFill>
-                <a:latin typeface="-apple-system"/>
-                <a:ea typeface="-apple-system"/>
-                <a:cs typeface="-apple-system"/>
-              </a:rPr>
-              <a:t>specified at the start or end of the commit, noting the </a:t>
-            </a:r>
-            <a:r>
-              <a:rPr lang="en-US" sz="2000">
-                <a:solidFill>
-                  <a:srgbClr val="24292E"/>
-                </a:solidFill>
-                <a:latin typeface="-apple-system"/>
-                <a:ea typeface="-apple-system"/>
-                <a:cs typeface="-apple-system"/>
-              </a:rPr>
-              <a:t>commit will cause changes that will break changes such as to the API.</a:t>
-            </a:r>
-          </a:p>
-          <a:p>
-            <a:pPr marL="342900">
-              <a:buFont typeface="Wingdings"/>
-              <a:buChar char="v"/>
-            </a:pPr>
-            <a:r>
-              <a:rPr lang="en-US" sz="2000" dirty="0">
-                <a:solidFill>
-                  <a:srgbClr val="24292E"/>
-                </a:solidFill>
-                <a:latin typeface="-apple-system"/>
-                <a:ea typeface="-apple-system"/>
-                <a:cs typeface="-apple-system"/>
-              </a:rPr>
-              <a:t>! </a:t>
-            </a:r>
-            <a:r>
-              <a:rPr lang="en-US" sz="2000" b="1" dirty="0">
-                <a:solidFill>
-                  <a:srgbClr val="24292E"/>
-                </a:solidFill>
-                <a:latin typeface="-apple-system"/>
-                <a:ea typeface="-apple-system"/>
-                <a:cs typeface="-apple-system"/>
-              </a:rPr>
-              <a:t>- </a:t>
-            </a:r>
-            <a:r>
-              <a:rPr lang="en-US" sz="2000" dirty="0">
-                <a:solidFill>
-                  <a:srgbClr val="24292E"/>
-                </a:solidFill>
-                <a:latin typeface="-apple-system"/>
-                <a:ea typeface="-apple-system"/>
-                <a:cs typeface="-apple-system"/>
-              </a:rPr>
-              <a:t>can be used together with commit prefixes to indicate there's a BREAKING CHANGE</a:t>
-            </a:r>
-          </a:p>
-          <a:p>
-            <a:pPr marL="342900">
-              <a:buFont typeface="Wingdings"/>
-              <a:buChar char="v"/>
-            </a:pPr>
-            <a:r>
-              <a:rPr lang="en-US" sz="2000">
-                <a:solidFill>
-                  <a:srgbClr val="24292E"/>
-                </a:solidFill>
-                <a:latin typeface="-apple-system"/>
-                <a:ea typeface="-apple-system"/>
-                <a:cs typeface="-apple-system"/>
-              </a:rPr>
-              <a:t>Other kinds such as</a:t>
-            </a:r>
-          </a:p>
-          <a:p>
-            <a:pPr marL="852170" lvl="1">
-              <a:buFont typeface="Courier New"/>
-              <a:buChar char="o"/>
-            </a:pPr>
-            <a:r>
-              <a:rPr lang="en-US" sz="2000" b="1" dirty="0">
-                <a:solidFill>
-                  <a:srgbClr val="24292E"/>
-                </a:solidFill>
-                <a:latin typeface="-apple-system"/>
-                <a:ea typeface="-apple-system"/>
-                <a:cs typeface="-apple-system"/>
-              </a:rPr>
-              <a:t>chore – </a:t>
-            </a:r>
-            <a:r>
-              <a:rPr lang="en-US" sz="2000" dirty="0">
-                <a:solidFill>
-                  <a:srgbClr val="24292E"/>
-                </a:solidFill>
-                <a:latin typeface="-apple-system"/>
-                <a:ea typeface="-apple-system"/>
-                <a:cs typeface="-apple-system"/>
-              </a:rPr>
-              <a:t>a commit that does not affect code changes, e.g. adding comments</a:t>
-            </a:r>
-          </a:p>
-          <a:p>
-            <a:pPr marL="852170" lvl="1">
-              <a:buFont typeface="Courier New"/>
-              <a:buChar char="o"/>
-            </a:pPr>
-            <a:r>
-              <a:rPr lang="en-US" sz="2000" b="1">
-                <a:solidFill>
-                  <a:srgbClr val="24292E"/>
-                </a:solidFill>
-                <a:latin typeface="-apple-system"/>
-                <a:ea typeface="-apple-system"/>
-                <a:cs typeface="-apple-system"/>
-              </a:rPr>
-              <a:t>docs – </a:t>
-            </a:r>
-            <a:r>
-              <a:rPr lang="en-US" sz="2000">
-                <a:solidFill>
-                  <a:srgbClr val="24292E"/>
-                </a:solidFill>
-                <a:latin typeface="-apple-system"/>
-                <a:ea typeface="-apple-system"/>
-                <a:cs typeface="-apple-system"/>
-              </a:rPr>
-              <a:t>a commit to update documentation</a:t>
-            </a:r>
-          </a:p>
-          <a:p>
-            <a:pPr marL="852170" lvl="1">
-              <a:buFont typeface="Courier New"/>
-              <a:buChar char="o"/>
-            </a:pPr>
-            <a:r>
-              <a:rPr lang="en-US" sz="2000" b="1" dirty="0">
-                <a:solidFill>
-                  <a:srgbClr val="24292E"/>
-                </a:solidFill>
-                <a:latin typeface="-apple-system"/>
-                <a:ea typeface="-apple-system"/>
-                <a:cs typeface="-apple-system"/>
-              </a:rPr>
-              <a:t>style – </a:t>
-            </a:r>
-            <a:r>
-              <a:rPr lang="en-US" sz="2000" dirty="0">
-                <a:solidFill>
-                  <a:srgbClr val="24292E"/>
-                </a:solidFill>
-                <a:latin typeface="-apple-system"/>
-                <a:ea typeface="-apple-system"/>
-                <a:cs typeface="-apple-system"/>
-              </a:rPr>
-              <a:t>a commit noting visual changes such as </a:t>
-            </a:r>
-            <a:r>
-              <a:rPr lang="en-US" sz="2000" dirty="0" err="1">
-                <a:solidFill>
-                  <a:srgbClr val="24292E"/>
-                </a:solidFill>
-                <a:latin typeface="-apple-system"/>
-                <a:ea typeface="-apple-system"/>
-                <a:cs typeface="-apple-system"/>
-              </a:rPr>
-              <a:t>css</a:t>
-            </a:r>
-            <a:endParaRPr lang="en-US" sz="2000" dirty="0">
-              <a:solidFill>
-                <a:srgbClr val="24292E"/>
-              </a:solidFill>
-              <a:latin typeface="-apple-system"/>
-              <a:ea typeface="-apple-system"/>
-              <a:cs typeface="-apple-system"/>
-            </a:endParaRPr>
-          </a:p>
-          <a:p>
-            <a:pPr marL="852170" lvl="1">
-              <a:buFont typeface="Courier New"/>
-              <a:buChar char="o"/>
-            </a:pPr>
-            <a:r>
-              <a:rPr lang="en-US" sz="2000" b="1">
-                <a:solidFill>
-                  <a:srgbClr val="24292E"/>
-                </a:solidFill>
-                <a:latin typeface="-apple-system"/>
-                <a:ea typeface="-apple-system"/>
-                <a:cs typeface="-apple-system"/>
-              </a:rPr>
-              <a:t>refactor – </a:t>
-            </a:r>
-            <a:r>
-              <a:rPr lang="en-US" sz="2000">
-                <a:solidFill>
-                  <a:srgbClr val="24292E"/>
-                </a:solidFill>
-                <a:latin typeface="-apple-system"/>
-                <a:ea typeface="-apple-system"/>
-                <a:cs typeface="-apple-system"/>
-              </a:rPr>
-              <a:t>a commit noting a rework in the codebase</a:t>
-            </a:r>
-          </a:p>
-          <a:p>
-            <a:pPr marL="852170" lvl="1">
-              <a:buFont typeface="Courier New"/>
-              <a:buChar char="o"/>
-            </a:pPr>
-            <a:r>
-              <a:rPr lang="en-US" sz="2000" b="1">
-                <a:solidFill>
-                  <a:srgbClr val="24292E"/>
-                </a:solidFill>
-                <a:latin typeface="-apple-system"/>
-                <a:ea typeface="-apple-system"/>
-                <a:cs typeface="-apple-system"/>
-              </a:rPr>
-              <a:t>perf – </a:t>
-            </a:r>
-            <a:r>
-              <a:rPr lang="en-US" sz="2000">
-                <a:solidFill>
-                  <a:srgbClr val="24292E"/>
-                </a:solidFill>
-                <a:latin typeface="-apple-system"/>
-                <a:ea typeface="-apple-system"/>
-                <a:cs typeface="-apple-system"/>
-              </a:rPr>
-              <a:t>a commit noting a performance change such as performance improvements</a:t>
-            </a:r>
-          </a:p>
-          <a:p>
-            <a:pPr marL="852170" lvl="1">
-              <a:buFont typeface="Courier New"/>
-              <a:buChar char="o"/>
-            </a:pPr>
-            <a:r>
-              <a:rPr lang="en-US" sz="2000" b="1">
-                <a:solidFill>
-                  <a:srgbClr val="24292E"/>
-                </a:solidFill>
-                <a:latin typeface="-apple-system"/>
-                <a:ea typeface="-apple-system"/>
-                <a:cs typeface="-apple-system"/>
-              </a:rPr>
-              <a:t>test – </a:t>
-            </a:r>
-            <a:r>
-              <a:rPr lang="en-US" sz="2000">
-                <a:solidFill>
-                  <a:srgbClr val="24292E"/>
-                </a:solidFill>
-                <a:latin typeface="-apple-system"/>
-                <a:ea typeface="-apple-system"/>
-                <a:cs typeface="-apple-system"/>
-              </a:rPr>
-              <a:t>a commit noting changes or additions to the test cases</a:t>
-            </a:r>
-          </a:p>
-          <a:p>
-            <a:pPr marL="852170" lvl="1">
-              <a:buFont typeface="Courier New"/>
-              <a:buChar char="o"/>
-            </a:pPr>
-            <a:r>
-              <a:rPr lang="en-US" sz="2000" b="0" i="0">
-                <a:solidFill>
-                  <a:srgbClr val="24292E"/>
-                </a:solidFill>
-                <a:latin typeface="-apple-system"/>
-                <a:ea typeface="-apple-system"/>
-                <a:cs typeface="-apple-system"/>
-              </a:rPr>
-              <a:t>and others.</a:t>
-            </a:r>
-            <a:endParaRPr lang="en-US" sz="2000">
-              <a:solidFill>
-                <a:srgbClr val="24292E"/>
-              </a:solidFill>
-              <a:latin typeface="-apple-system"/>
-            </a:endParaRPr>
-          </a:p>
-          <a:p>
-            <a:pPr algn="ctr"/>
-            <a:endParaRPr lang="en-GB"/>
+            <a:endParaRPr lang="en-GB" dirty="0"/>
           </a:p>
         </p:txBody>
       </p:sp>
@@ -14889,7 +14438,7 @@
           <p:cNvPr id="4" name="Picture 3" descr="A cartoon character reading a book&#10;&#10;AI-generated content may be incorrect.">
             <a:extLst>
               <a:ext uri="{FF2B5EF4-FFF2-40B4-BE49-F238E27FC236}">
-                <a16:creationId xmlns:a16="http://schemas.microsoft.com/office/drawing/2014/main" id="{3F4A70C2-C3D3-ADEE-2CCD-CE0A093F7396}"/>
+                <a16:creationId xmlns:a16="http://schemas.microsoft.com/office/drawing/2014/main" id="{F0629CC8-84BD-149F-A493-62D6A5C0B786}"/>
               </a:ext>
             </a:extLst>
           </p:cNvPr>
@@ -14920,10 +14469,478 @@
           </a:effectLst>
         </p:spPr>
       </p:pic>
+      <p:graphicFrame>
+        <p:nvGraphicFramePr>
+          <p:cNvPr id="5" name="Table 4">
+            <a:extLst>
+              <a:ext uri="{FF2B5EF4-FFF2-40B4-BE49-F238E27FC236}">
+                <a16:creationId xmlns:a16="http://schemas.microsoft.com/office/drawing/2014/main" id="{6A969996-5271-DEF0-B265-5D48FEA213EB}"/>
+              </a:ext>
+            </a:extLst>
+          </p:cNvPr>
+          <p:cNvGraphicFramePr>
+            <a:graphicFrameLocks noGrp="1"/>
+          </p:cNvGraphicFramePr>
+          <p:nvPr>
+            <p:extLst>
+              <p:ext uri="{D42A27DB-BD31-4B8C-83A1-F6EECF244321}">
+                <p14:modId xmlns:p14="http://schemas.microsoft.com/office/powerpoint/2010/main" val="1095691594"/>
+              </p:ext>
+            </p:extLst>
+          </p:nvPr>
+        </p:nvGraphicFramePr>
+        <p:xfrm>
+          <a:off x="840578" y="2764205"/>
+          <a:ext cx="7491922" cy="3026848"/>
+        </p:xfrm>
+        <a:graphic>
+          <a:graphicData uri="http://schemas.openxmlformats.org/drawingml/2006/table">
+            <a:tbl>
+              <a:tblPr firstRow="1" bandRow="1">
+                <a:tableStyleId>{2D5ABB26-0587-4C30-8999-92F81FD0307C}</a:tableStyleId>
+              </a:tblPr>
+              <a:tblGrid>
+                <a:gridCol w="2351196">
+                  <a:extLst>
+                    <a:ext uri="{9D8B030D-6E8A-4147-A177-3AD203B41FA5}">
+                      <a16:colId xmlns:a16="http://schemas.microsoft.com/office/drawing/2014/main" val="625206413"/>
+                    </a:ext>
+                  </a:extLst>
+                </a:gridCol>
+                <a:gridCol w="5140726">
+                  <a:extLst>
+                    <a:ext uri="{9D8B030D-6E8A-4147-A177-3AD203B41FA5}">
+                      <a16:colId xmlns:a16="http://schemas.microsoft.com/office/drawing/2014/main" val="2747230814"/>
+                    </a:ext>
+                  </a:extLst>
+                </a:gridCol>
+              </a:tblGrid>
+              <a:tr h="411424">
+                <a:tc>
+                  <a:txBody>
+                    <a:bodyPr/>
+                    <a:lstStyle/>
+                    <a:p>
+                      <a:pPr algn="l"/>
+                      <a:r>
+                        <a:rPr lang="en-US" b="0" dirty="0"/>
+                        <a:t>Commit Message</a:t>
+                      </a:r>
+                      <a:endParaRPr lang="en-MY" b="0" dirty="0"/>
+                    </a:p>
+                  </a:txBody>
+                  <a:tcPr>
+                    <a:lnL w="12700" cap="flat" cmpd="sng" algn="ctr">
+                      <a:noFill/>
+                      <a:prstDash val="solid"/>
+                      <a:round/>
+                      <a:headEnd type="none" w="med" len="med"/>
+                      <a:tailEnd type="none" w="med" len="med"/>
+                    </a:lnL>
+                    <a:lnR>
+                      <a:noFill/>
+                    </a:lnR>
+                    <a:lnT w="12700" cap="flat" cmpd="sng" algn="ctr">
+                      <a:solidFill>
+                        <a:schemeClr val="tx1"/>
+                      </a:solidFill>
+                      <a:prstDash val="solid"/>
+                      <a:round/>
+                      <a:headEnd type="none" w="med" len="med"/>
+                      <a:tailEnd type="none" w="med" len="med"/>
+                    </a:lnT>
+                    <a:lnB w="12700" cap="flat" cmpd="sng" algn="ctr">
+                      <a:solidFill>
+                        <a:schemeClr val="tx1"/>
+                      </a:solidFill>
+                      <a:prstDash val="solid"/>
+                      <a:round/>
+                      <a:headEnd type="none" w="med" len="med"/>
+                      <a:tailEnd type="none" w="med" len="med"/>
+                    </a:lnB>
+                    <a:lnTlToBr w="12700" cmpd="sng">
+                      <a:noFill/>
+                      <a:prstDash val="solid"/>
+                    </a:lnTlToBr>
+                    <a:lnBlToTr w="12700" cmpd="sng">
+                      <a:noFill/>
+                      <a:prstDash val="solid"/>
+                    </a:lnBlToTr>
+                  </a:tcPr>
+                </a:tc>
+                <a:tc>
+                  <a:txBody>
+                    <a:bodyPr/>
+                    <a:lstStyle/>
+                    <a:p>
+                      <a:pPr algn="l"/>
+                      <a:r>
+                        <a:rPr lang="en-US" b="0" dirty="0"/>
+                        <a:t>Description</a:t>
+                      </a:r>
+                      <a:endParaRPr lang="en-MY" b="0" dirty="0"/>
+                    </a:p>
+                  </a:txBody>
+                  <a:tcPr>
+                    <a:lnL>
+                      <a:noFill/>
+                    </a:lnL>
+                    <a:lnR w="12700" cap="flat" cmpd="sng" algn="ctr">
+                      <a:noFill/>
+                      <a:prstDash val="solid"/>
+                      <a:round/>
+                      <a:headEnd type="none" w="med" len="med"/>
+                      <a:tailEnd type="none" w="med" len="med"/>
+                    </a:lnR>
+                    <a:lnT w="12700" cap="flat" cmpd="sng" algn="ctr">
+                      <a:solidFill>
+                        <a:schemeClr val="tx1"/>
+                      </a:solidFill>
+                      <a:prstDash val="solid"/>
+                      <a:round/>
+                      <a:headEnd type="none" w="med" len="med"/>
+                      <a:tailEnd type="none" w="med" len="med"/>
+                    </a:lnT>
+                    <a:lnB w="12700" cap="flat" cmpd="sng" algn="ctr">
+                      <a:solidFill>
+                        <a:schemeClr val="tx1"/>
+                      </a:solidFill>
+                      <a:prstDash val="solid"/>
+                      <a:round/>
+                      <a:headEnd type="none" w="med" len="med"/>
+                      <a:tailEnd type="none" w="med" len="med"/>
+                    </a:lnB>
+                    <a:lnTlToBr w="12700" cmpd="sng">
+                      <a:noFill/>
+                      <a:prstDash val="solid"/>
+                    </a:lnTlToBr>
+                    <a:lnBlToTr w="12700" cmpd="sng">
+                      <a:noFill/>
+                      <a:prstDash val="solid"/>
+                    </a:lnBlToTr>
+                  </a:tcPr>
+                </a:tc>
+                <a:extLst>
+                  <a:ext uri="{0D108BD9-81ED-4DB2-BD59-A6C34878D82A}">
+                    <a16:rowId xmlns:a16="http://schemas.microsoft.com/office/drawing/2014/main" val="1981924773"/>
+                  </a:ext>
+                </a:extLst>
+              </a:tr>
+              <a:tr h="411424">
+                <a:tc>
+                  <a:txBody>
+                    <a:bodyPr/>
+                    <a:lstStyle/>
+                    <a:p>
+                      <a:pPr algn="l"/>
+                      <a:r>
+                        <a:rPr lang="en-US" sz="1600" b="1" dirty="0">
+                          <a:solidFill>
+                            <a:srgbClr val="24292E"/>
+                          </a:solidFill>
+                        </a:rPr>
+                        <a:t>fix</a:t>
+                      </a:r>
+                      <a:endParaRPr lang="en-MY" b="1" dirty="0"/>
+                    </a:p>
+                  </a:txBody>
+                  <a:tcPr>
+                    <a:lnT w="12700" cap="flat" cmpd="sng" algn="ctr">
+                      <a:solidFill>
+                        <a:schemeClr val="tx1"/>
+                      </a:solidFill>
+                      <a:prstDash val="solid"/>
+                      <a:round/>
+                      <a:headEnd type="none" w="med" len="med"/>
+                      <a:tailEnd type="none" w="med" len="med"/>
+                    </a:lnT>
+                  </a:tcPr>
+                </a:tc>
+                <a:tc>
+                  <a:txBody>
+                    <a:bodyPr/>
+                    <a:lstStyle/>
+                    <a:p>
+                      <a:pPr marL="0" marR="0" lvl="0" indent="0" algn="l" defTabSz="754380" rtl="0" eaLnBrk="1" fontAlgn="auto" latinLnBrk="0" hangingPunct="1">
+                        <a:lnSpc>
+                          <a:spcPct val="100000"/>
+                        </a:lnSpc>
+                        <a:spcBef>
+                          <a:spcPts val="0"/>
+                        </a:spcBef>
+                        <a:spcAft>
+                          <a:spcPts val="0"/>
+                        </a:spcAft>
+                        <a:buClrTx/>
+                        <a:buSzTx/>
+                        <a:buFontTx/>
+                        <a:buNone/>
+                        <a:tabLst/>
+                        <a:defRPr/>
+                      </a:pPr>
+                      <a:r>
+                        <a:rPr lang="en-US" sz="1600" dirty="0">
+                          <a:solidFill>
+                            <a:srgbClr val="24292E"/>
+                          </a:solidFill>
+                        </a:rPr>
+                        <a:t>a commit noting a fix to the codebase</a:t>
+                      </a:r>
+                      <a:endParaRPr lang="en-US" dirty="0">
+                        <a:ea typeface="Source Sans Pro"/>
+                      </a:endParaRPr>
+                    </a:p>
+                  </a:txBody>
+                  <a:tcPr>
+                    <a:lnT w="12700" cap="flat" cmpd="sng" algn="ctr">
+                      <a:solidFill>
+                        <a:schemeClr val="tx1"/>
+                      </a:solidFill>
+                      <a:prstDash val="solid"/>
+                      <a:round/>
+                      <a:headEnd type="none" w="med" len="med"/>
+                      <a:tailEnd type="none" w="med" len="med"/>
+                    </a:lnT>
+                  </a:tcPr>
+                </a:tc>
+                <a:extLst>
+                  <a:ext uri="{0D108BD9-81ED-4DB2-BD59-A6C34878D82A}">
+                    <a16:rowId xmlns:a16="http://schemas.microsoft.com/office/drawing/2014/main" val="3224144256"/>
+                  </a:ext>
+                </a:extLst>
+              </a:tr>
+              <a:tr h="644246">
+                <a:tc>
+                  <a:txBody>
+                    <a:bodyPr/>
+                    <a:lstStyle/>
+                    <a:p>
+                      <a:pPr algn="l"/>
+                      <a:r>
+                        <a:rPr lang="en-US" sz="1600" b="1" dirty="0">
+                          <a:solidFill>
+                            <a:srgbClr val="24292E"/>
+                          </a:solidFill>
+                        </a:rPr>
+                        <a:t>feat</a:t>
+                      </a:r>
+                      <a:endParaRPr lang="en-MY" b="1" dirty="0"/>
+                    </a:p>
+                  </a:txBody>
+                  <a:tcPr/>
+                </a:tc>
+                <a:tc>
+                  <a:txBody>
+                    <a:bodyPr/>
+                    <a:lstStyle/>
+                    <a:p>
+                      <a:pPr marL="0" marR="0" lvl="0" indent="0" algn="l" defTabSz="754380" rtl="0" eaLnBrk="1" fontAlgn="auto" latinLnBrk="0" hangingPunct="1">
+                        <a:lnSpc>
+                          <a:spcPct val="100000"/>
+                        </a:lnSpc>
+                        <a:spcBef>
+                          <a:spcPts val="0"/>
+                        </a:spcBef>
+                        <a:spcAft>
+                          <a:spcPts val="0"/>
+                        </a:spcAft>
+                        <a:buClrTx/>
+                        <a:buSzTx/>
+                        <a:buFontTx/>
+                        <a:buNone/>
+                        <a:tabLst/>
+                        <a:defRPr/>
+                      </a:pPr>
+                      <a:r>
+                        <a:rPr lang="en-US" sz="1600" b="0" dirty="0">
+                          <a:solidFill>
+                            <a:srgbClr val="24292E"/>
+                          </a:solidFill>
+                        </a:rPr>
+                        <a:t>a commit of the type feat introduces a new feature to the codebase</a:t>
+                      </a:r>
+                      <a:endParaRPr lang="en-US" sz="1600" dirty="0">
+                        <a:solidFill>
+                          <a:srgbClr val="24292E"/>
+                        </a:solidFill>
+                        <a:latin typeface="-apple-system"/>
+                        <a:ea typeface="-apple-system"/>
+                        <a:cs typeface="-apple-system"/>
+                      </a:endParaRPr>
+                    </a:p>
+                  </a:txBody>
+                  <a:tcPr/>
+                </a:tc>
+                <a:extLst>
+                  <a:ext uri="{0D108BD9-81ED-4DB2-BD59-A6C34878D82A}">
+                    <a16:rowId xmlns:a16="http://schemas.microsoft.com/office/drawing/2014/main" val="3173293429"/>
+                  </a:ext>
+                </a:extLst>
+              </a:tr>
+              <a:tr h="915508">
+                <a:tc>
+                  <a:txBody>
+                    <a:bodyPr/>
+                    <a:lstStyle/>
+                    <a:p>
+                      <a:pPr algn="l"/>
+                      <a:r>
+                        <a:rPr lang="en-US" sz="1600" b="1" dirty="0">
+                          <a:solidFill>
+                            <a:srgbClr val="24292E"/>
+                          </a:solidFill>
+                        </a:rPr>
+                        <a:t>BREAKING CHANGE </a:t>
+                      </a:r>
+                      <a:endParaRPr lang="en-MY" b="1" dirty="0"/>
+                    </a:p>
+                  </a:txBody>
+                  <a:tcPr/>
+                </a:tc>
+                <a:tc>
+                  <a:txBody>
+                    <a:bodyPr/>
+                    <a:lstStyle/>
+                    <a:p>
+                      <a:pPr marL="0" marR="0" lvl="0" indent="0" algn="l" defTabSz="754380" rtl="0" eaLnBrk="1" fontAlgn="auto" latinLnBrk="0" hangingPunct="1">
+                        <a:lnSpc>
+                          <a:spcPct val="100000"/>
+                        </a:lnSpc>
+                        <a:spcBef>
+                          <a:spcPts val="0"/>
+                        </a:spcBef>
+                        <a:spcAft>
+                          <a:spcPts val="0"/>
+                        </a:spcAft>
+                        <a:buClrTx/>
+                        <a:buSzTx/>
+                        <a:buFontTx/>
+                        <a:buNone/>
+                        <a:tabLst/>
+                        <a:defRPr/>
+                      </a:pPr>
+                      <a:r>
+                        <a:rPr lang="en-US" sz="1600" dirty="0">
+                          <a:solidFill>
+                            <a:srgbClr val="24292E"/>
+                          </a:solidFill>
+                        </a:rPr>
+                        <a:t>specified at the start or end of the commit, noting the commit will cause changes that will break changes such as to the API.</a:t>
+                      </a:r>
+                      <a:endParaRPr lang="en-US" sz="1600" dirty="0">
+                        <a:solidFill>
+                          <a:srgbClr val="24292E"/>
+                        </a:solidFill>
+                        <a:latin typeface="-apple-system"/>
+                        <a:ea typeface="-apple-system"/>
+                        <a:cs typeface="-apple-system"/>
+                      </a:endParaRPr>
+                    </a:p>
+                  </a:txBody>
+                  <a:tcPr/>
+                </a:tc>
+                <a:extLst>
+                  <a:ext uri="{0D108BD9-81ED-4DB2-BD59-A6C34878D82A}">
+                    <a16:rowId xmlns:a16="http://schemas.microsoft.com/office/drawing/2014/main" val="2395316195"/>
+                  </a:ext>
+                </a:extLst>
+              </a:tr>
+              <a:tr h="644246">
+                <a:tc>
+                  <a:txBody>
+                    <a:bodyPr/>
+                    <a:lstStyle/>
+                    <a:p>
+                      <a:pPr algn="l"/>
+                      <a:r>
+                        <a:rPr lang="en-US" sz="1600" b="1" dirty="0">
+                          <a:solidFill>
+                            <a:srgbClr val="24292E"/>
+                          </a:solidFill>
+                        </a:rPr>
+                        <a:t>!</a:t>
+                      </a:r>
+                      <a:endParaRPr lang="en-MY" b="1" dirty="0"/>
+                    </a:p>
+                  </a:txBody>
+                  <a:tcPr>
+                    <a:lnB w="12700" cap="flat" cmpd="sng" algn="ctr">
+                      <a:solidFill>
+                        <a:schemeClr val="tx1"/>
+                      </a:solidFill>
+                      <a:prstDash val="solid"/>
+                      <a:round/>
+                      <a:headEnd type="none" w="med" len="med"/>
+                      <a:tailEnd type="none" w="med" len="med"/>
+                    </a:lnB>
+                  </a:tcPr>
+                </a:tc>
+                <a:tc>
+                  <a:txBody>
+                    <a:bodyPr/>
+                    <a:lstStyle/>
+                    <a:p>
+                      <a:pPr marL="0" marR="0" lvl="0" indent="0" algn="l" defTabSz="754380" rtl="0" eaLnBrk="1" fontAlgn="auto" latinLnBrk="0" hangingPunct="1">
+                        <a:lnSpc>
+                          <a:spcPct val="100000"/>
+                        </a:lnSpc>
+                        <a:spcBef>
+                          <a:spcPts val="0"/>
+                        </a:spcBef>
+                        <a:spcAft>
+                          <a:spcPts val="0"/>
+                        </a:spcAft>
+                        <a:buClrTx/>
+                        <a:buSzTx/>
+                        <a:buFontTx/>
+                        <a:buNone/>
+                        <a:tabLst/>
+                        <a:defRPr/>
+                      </a:pPr>
+                      <a:r>
+                        <a:rPr lang="en-US" sz="1600" dirty="0">
+                          <a:solidFill>
+                            <a:srgbClr val="24292E"/>
+                          </a:solidFill>
+                        </a:rPr>
+                        <a:t>can be used together with commit prefixes to indicate there's a BREAKING CHANGE</a:t>
+                      </a:r>
+                      <a:endParaRPr lang="en-US" sz="1600" dirty="0">
+                        <a:solidFill>
+                          <a:srgbClr val="24292E"/>
+                        </a:solidFill>
+                        <a:latin typeface="-apple-system"/>
+                        <a:ea typeface="-apple-system"/>
+                        <a:cs typeface="-apple-system"/>
+                      </a:endParaRPr>
+                    </a:p>
+                  </a:txBody>
+                  <a:tcPr>
+                    <a:lnB w="12700" cap="flat" cmpd="sng" algn="ctr">
+                      <a:solidFill>
+                        <a:schemeClr val="tx1"/>
+                      </a:solidFill>
+                      <a:prstDash val="solid"/>
+                      <a:round/>
+                      <a:headEnd type="none" w="med" len="med"/>
+                      <a:tailEnd type="none" w="med" len="med"/>
+                    </a:lnB>
+                  </a:tcPr>
+                </a:tc>
+                <a:extLst>
+                  <a:ext uri="{0D108BD9-81ED-4DB2-BD59-A6C34878D82A}">
+                    <a16:rowId xmlns:a16="http://schemas.microsoft.com/office/drawing/2014/main" val="4290537241"/>
+                  </a:ext>
+                </a:extLst>
+              </a:tr>
+            </a:tbl>
+          </a:graphicData>
+        </a:graphic>
+      </p:graphicFrame>
     </p:spTree>
     <p:extLst>
       <p:ext uri="{BB962C8B-B14F-4D97-AF65-F5344CB8AC3E}">
-        <p14:creationId xmlns:p14="http://schemas.microsoft.com/office/powerpoint/2010/main" val="3071021880"/>
+        <p14:creationId xmlns:p14="http://schemas.microsoft.com/office/powerpoint/2010/main" val="4116592198"/>
       </p:ext>
     </p:extLst>
   </p:cSld>
@@ -14949,7 +14966,7 @@
         <p:cNvPr id="1" name="">
           <a:extLst>
             <a:ext uri="{FF2B5EF4-FFF2-40B4-BE49-F238E27FC236}">
-              <a16:creationId xmlns:a16="http://schemas.microsoft.com/office/drawing/2014/main" id="{729415D0-0171-1124-BD38-1882015A14FA}"/>
+              <a16:creationId xmlns:a16="http://schemas.microsoft.com/office/drawing/2014/main" id="{F2CAC903-C2CD-92E1-A7DF-3BD3AD0C451F}"/>
             </a:ext>
           </a:extLst>
         </p:cNvPr>
@@ -14969,7 +14986,7 @@
           <p:cNvPr id="2" name="Title 1" hidden="1">
             <a:extLst>
               <a:ext uri="{FF2B5EF4-FFF2-40B4-BE49-F238E27FC236}">
-                <a16:creationId xmlns:a16="http://schemas.microsoft.com/office/drawing/2014/main" id="{AEE10076-8F55-43B8-987B-19D99AB1E805}"/>
+                <a16:creationId xmlns:a16="http://schemas.microsoft.com/office/drawing/2014/main" id="{11C42A63-C321-074C-702E-E7E0603DC497}"/>
               </a:ext>
             </a:extLst>
           </p:cNvPr>
@@ -14997,7 +15014,1068 @@
           <p:cNvPr id="8" name="Title 1">
             <a:extLst>
               <a:ext uri="{FF2B5EF4-FFF2-40B4-BE49-F238E27FC236}">
-                <a16:creationId xmlns:a16="http://schemas.microsoft.com/office/drawing/2014/main" id="{A54DBE3F-5E38-960F-65C5-FEF61BE9B021}"/>
+                <a16:creationId xmlns:a16="http://schemas.microsoft.com/office/drawing/2014/main" id="{E0DEC16D-0E3D-37DD-59F3-D4C4A350D574}"/>
+              </a:ext>
+            </a:extLst>
+          </p:cNvPr>
+          <p:cNvSpPr txBox="1">
+            <a:spLocks/>
+          </p:cNvSpPr>
+          <p:nvPr/>
+        </p:nvSpPr>
+        <p:spPr>
+          <a:xfrm>
+            <a:off x="1161975" y="151635"/>
+            <a:ext cx="7804774" cy="719719"/>
+          </a:xfrm>
+          <a:prstGeom prst="rect">
+            <a:avLst/>
+          </a:prstGeom>
+        </p:spPr>
+        <p:txBody>
+          <a:bodyPr vert="horz" lIns="0" tIns="0" rIns="0" bIns="0" rtlCol="0" anchor="t">
+            <a:noAutofit/>
+          </a:bodyPr>
+          <a:lstStyle>
+            <a:lvl1pPr algn="ctr" defTabSz="754380" rtl="0" eaLnBrk="1" latinLnBrk="0" hangingPunct="1">
+              <a:lnSpc>
+                <a:spcPct val="90000"/>
+              </a:lnSpc>
+              <a:spcBef>
+                <a:spcPct val="0"/>
+              </a:spcBef>
+              <a:buNone/>
+              <a:defRPr sz="4000" kern="1200">
+                <a:solidFill>
+                  <a:schemeClr val="tx1"/>
+                </a:solidFill>
+                <a:latin typeface="+mj-lt"/>
+                <a:ea typeface="+mj-ea"/>
+                <a:cs typeface="+mj-cs"/>
+              </a:defRPr>
+            </a:lvl1pPr>
+          </a:lstStyle>
+          <a:p>
+            <a:pPr>
+              <a:lnSpc>
+                <a:spcPct val="75000"/>
+              </a:lnSpc>
+            </a:pPr>
+            <a:r>
+              <a:rPr lang="en-US" sz="6000" u="sng" dirty="0">
+                <a:ln w="41275">
+                  <a:noFill/>
+                </a:ln>
+                <a:solidFill>
+                  <a:schemeClr val="accent2"/>
+                </a:solidFill>
+                <a:ea typeface="Source Sans Pro Black"/>
+              </a:rPr>
+              <a:t>Conventional Commits</a:t>
+            </a:r>
+            <a:endParaRPr lang="en-US" u="sng" dirty="0">
+              <a:solidFill>
+                <a:schemeClr val="accent2"/>
+              </a:solidFill>
+            </a:endParaRPr>
+          </a:p>
+          <a:p>
+            <a:pPr>
+              <a:lnSpc>
+                <a:spcPct val="75000"/>
+              </a:lnSpc>
+            </a:pPr>
+            <a:r>
+              <a:rPr lang="en-US" sz="3200" dirty="0">
+                <a:ln w="41275">
+                  <a:noFill/>
+                </a:ln>
+                <a:solidFill>
+                  <a:schemeClr val="tx1">
+                    <a:lumMod val="76000"/>
+                    <a:lumOff val="24000"/>
+                  </a:schemeClr>
+                </a:solidFill>
+                <a:ea typeface="Source Sans Pro Black"/>
+              </a:rPr>
+              <a:t>Other kinds of Git Commit Standards</a:t>
+            </a:r>
+            <a:endParaRPr lang="en-US" sz="3200" u="sng" dirty="0">
+              <a:ln w="41275">
+                <a:noFill/>
+              </a:ln>
+              <a:solidFill>
+                <a:schemeClr val="tx1">
+                  <a:lumMod val="76000"/>
+                  <a:lumOff val="24000"/>
+                </a:schemeClr>
+              </a:solidFill>
+              <a:ea typeface="Source Sans Pro Black"/>
+            </a:endParaRPr>
+          </a:p>
+        </p:txBody>
+      </p:sp>
+      <p:sp>
+        <p:nvSpPr>
+          <p:cNvPr id="32" name="TextBox 31">
+            <a:extLst>
+              <a:ext uri="{FF2B5EF4-FFF2-40B4-BE49-F238E27FC236}">
+                <a16:creationId xmlns:a16="http://schemas.microsoft.com/office/drawing/2014/main" id="{5BDC8CB6-5027-6085-6D20-477DC54C9216}"/>
+              </a:ext>
+            </a:extLst>
+          </p:cNvPr>
+          <p:cNvSpPr txBox="1"/>
+          <p:nvPr/>
+        </p:nvSpPr>
+        <p:spPr>
+          <a:xfrm>
+            <a:off x="2395248" y="1652683"/>
+            <a:ext cx="5257799" cy="1200329"/>
+          </a:xfrm>
+          <a:prstGeom prst="rect">
+            <a:avLst/>
+          </a:prstGeom>
+          <a:noFill/>
+        </p:spPr>
+        <p:txBody>
+          <a:bodyPr rot="0" spcFirstLastPara="0" vertOverflow="overflow" horzOverflow="overflow" vert="horz" wrap="square" lIns="91440" tIns="45720" rIns="91440" bIns="45720" numCol="1" spcCol="0" rtlCol="0" fromWordArt="0" anchor="t" anchorCtr="0" forceAA="0" compatLnSpc="1">
+            <a:prstTxWarp prst="textNoShape">
+              <a:avLst/>
+            </a:prstTxWarp>
+            <a:spAutoFit/>
+          </a:bodyPr>
+          <a:lstStyle/>
+          <a:p>
+            <a:pPr algn="ctr"/>
+            <a:br>
+              <a:rPr lang="en-GB" sz="3600" dirty="0">
+                <a:ea typeface="Source Sans Pro"/>
+              </a:rPr>
+            </a:br>
+            <a:endParaRPr lang="en-GB" sz="3600">
+              <a:solidFill>
+                <a:schemeClr val="bg2">
+                  <a:lumMod val="49000"/>
+                </a:schemeClr>
+              </a:solidFill>
+              <a:ea typeface="Source Sans Pro"/>
+            </a:endParaRPr>
+          </a:p>
+        </p:txBody>
+      </p:sp>
+      <p:cxnSp>
+        <p:nvCxnSpPr>
+          <p:cNvPr id="47" name="Straight Connector 46">
+            <a:extLst>
+              <a:ext uri="{FF2B5EF4-FFF2-40B4-BE49-F238E27FC236}">
+                <a16:creationId xmlns:a16="http://schemas.microsoft.com/office/drawing/2014/main" id="{392DA84A-F56A-78DD-FB8D-B6EA75A8D88A}"/>
+              </a:ext>
+              <a:ext uri="{C183D7F6-B498-43B3-948B-1728B52AA6E4}">
+                <adec:decorative xmlns:adec="http://schemas.microsoft.com/office/drawing/2017/decorative" val="1"/>
+              </a:ext>
+            </a:extLst>
+          </p:cNvPr>
+          <p:cNvCxnSpPr>
+            <a:cxnSpLocks/>
+          </p:cNvCxnSpPr>
+          <p:nvPr/>
+        </p:nvCxnSpPr>
+        <p:spPr>
+          <a:xfrm>
+            <a:off x="839615" y="1271285"/>
+            <a:ext cx="8677751" cy="0"/>
+          </a:xfrm>
+          <a:prstGeom prst="line">
+            <a:avLst/>
+          </a:prstGeom>
+          <a:ln w="25400">
+            <a:solidFill>
+              <a:schemeClr val="accent2"/>
+            </a:solidFill>
+          </a:ln>
+        </p:spPr>
+        <p:style>
+          <a:lnRef idx="1">
+            <a:schemeClr val="accent1"/>
+          </a:lnRef>
+          <a:fillRef idx="0">
+            <a:schemeClr val="accent1"/>
+          </a:fillRef>
+          <a:effectRef idx="0">
+            <a:schemeClr val="accent1"/>
+          </a:effectRef>
+          <a:fontRef idx="minor">
+            <a:schemeClr val="tx1"/>
+          </a:fontRef>
+        </p:style>
+      </p:cxnSp>
+      <p:sp>
+        <p:nvSpPr>
+          <p:cNvPr id="6" name="TextBox 5">
+            <a:extLst>
+              <a:ext uri="{FF2B5EF4-FFF2-40B4-BE49-F238E27FC236}">
+                <a16:creationId xmlns:a16="http://schemas.microsoft.com/office/drawing/2014/main" id="{30346335-B43E-8197-CF8E-C32E09C84708}"/>
+              </a:ext>
+            </a:extLst>
+          </p:cNvPr>
+          <p:cNvSpPr txBox="1"/>
+          <p:nvPr/>
+        </p:nvSpPr>
+        <p:spPr>
+          <a:xfrm>
+            <a:off x="843845" y="6864303"/>
+            <a:ext cx="9217376" cy="1016560"/>
+          </a:xfrm>
+          <a:prstGeom prst="rect">
+            <a:avLst/>
+          </a:prstGeom>
+          <a:noFill/>
+        </p:spPr>
+        <p:txBody>
+          <a:bodyPr rot="0" spcFirstLastPara="0" vertOverflow="overflow" horzOverflow="overflow" vert="horz" wrap="square" lIns="91440" tIns="45720" rIns="91440" bIns="45720" numCol="1" spcCol="0" rtlCol="0" fromWordArt="0" anchor="t" anchorCtr="0" forceAA="0" compatLnSpc="1">
+            <a:prstTxWarp prst="textNoShape">
+              <a:avLst/>
+            </a:prstTxWarp>
+            <a:spAutoFit/>
+          </a:bodyPr>
+          <a:lstStyle/>
+          <a:p>
+            <a:r>
+              <a:rPr lang="en-GB" sz="2000" baseline="0" dirty="0">
+                <a:latin typeface="Source Sans Pro"/>
+              </a:rPr>
+              <a:t>Document reference:</a:t>
+            </a:r>
+            <a:r>
+              <a:rPr sz="2000" dirty="0">
+                <a:latin typeface="Source Sans Pro"/>
+                <a:ea typeface="Source Sans Pro"/>
+                <a:cs typeface="Source Sans Pro"/>
+              </a:rPr>
+              <a:t>​</a:t>
+            </a:r>
+            <a:br>
+              <a:rPr sz="2000" dirty="0">
+                <a:latin typeface="Source Sans Pro"/>
+                <a:ea typeface="Source Sans Pro"/>
+                <a:cs typeface="Source Sans Pro"/>
+              </a:rPr>
+            </a:br>
+            <a:r>
+              <a:rPr lang="en-GB" sz="2000" strike="noStrike" baseline="0" dirty="0">
+                <a:ea typeface="+mn-lt"/>
+                <a:cs typeface="+mn-lt"/>
+                <a:hlinkClick r:id="rId2">
+                  <a:extLst>
+                    <a:ext uri="{A12FA001-AC4F-418D-AE19-62706E023703}">
+                      <ahyp:hlinkClr xmlns:ahyp="http://schemas.microsoft.com/office/drawing/2018/hyperlinkcolor" val="tx"/>
+                    </a:ext>
+                  </a:extLst>
+                </a:hlinkClick>
+              </a:rPr>
+              <a:t>https://www.</a:t>
+            </a:r>
+            <a:r>
+              <a:rPr lang="en-GB" sz="2000" dirty="0">
+                <a:ea typeface="+mn-lt"/>
+                <a:cs typeface="+mn-lt"/>
+                <a:hlinkClick r:id="rId2">
+                  <a:extLst>
+                    <a:ext uri="{A12FA001-AC4F-418D-AE19-62706E023703}">
+                      <ahyp:hlinkClr xmlns:ahyp="http://schemas.microsoft.com/office/drawing/2018/hyperlinkcolor" val="tx"/>
+                    </a:ext>
+                  </a:extLst>
+                </a:hlinkClick>
+              </a:rPr>
+              <a:t>conventionalcommits</a:t>
+            </a:r>
+            <a:r>
+              <a:rPr lang="en-GB" sz="2000" strike="noStrike" baseline="0" dirty="0">
+                <a:ea typeface="+mn-lt"/>
+                <a:cs typeface="+mn-lt"/>
+                <a:hlinkClick r:id="rId2">
+                  <a:extLst>
+                    <a:ext uri="{A12FA001-AC4F-418D-AE19-62706E023703}">
+                      <ahyp:hlinkClr xmlns:ahyp="http://schemas.microsoft.com/office/drawing/2018/hyperlinkcolor" val="tx"/>
+                    </a:ext>
+                  </a:extLst>
+                </a:hlinkClick>
+              </a:rPr>
+              <a:t>.</a:t>
+            </a:r>
+            <a:r>
+              <a:rPr lang="en-GB" sz="2000" dirty="0">
+                <a:ea typeface="+mn-lt"/>
+                <a:cs typeface="+mn-lt"/>
+                <a:hlinkClick r:id="rId2">
+                  <a:extLst>
+                    <a:ext uri="{A12FA001-AC4F-418D-AE19-62706E023703}">
+                      <ahyp:hlinkClr xmlns:ahyp="http://schemas.microsoft.com/office/drawing/2018/hyperlinkcolor" val="tx"/>
+                    </a:ext>
+                  </a:extLst>
+                </a:hlinkClick>
+              </a:rPr>
+              <a:t>org</a:t>
+            </a:r>
+            <a:r>
+              <a:rPr lang="en-GB" sz="2000" strike="noStrike" baseline="0" dirty="0">
+                <a:ea typeface="+mn-lt"/>
+                <a:cs typeface="+mn-lt"/>
+                <a:hlinkClick r:id="rId2">
+                  <a:extLst>
+                    <a:ext uri="{A12FA001-AC4F-418D-AE19-62706E023703}">
+                      <ahyp:hlinkClr xmlns:ahyp="http://schemas.microsoft.com/office/drawing/2018/hyperlinkcolor" val="tx"/>
+                    </a:ext>
+                  </a:extLst>
+                </a:hlinkClick>
+              </a:rPr>
+              <a:t>/</a:t>
+            </a:r>
+            <a:r>
+              <a:rPr lang="en-GB" sz="2000" dirty="0">
+                <a:ea typeface="+mn-lt"/>
+                <a:cs typeface="+mn-lt"/>
+                <a:hlinkClick r:id="rId2">
+                  <a:extLst>
+                    <a:ext uri="{A12FA001-AC4F-418D-AE19-62706E023703}">
+                      <ahyp:hlinkClr xmlns:ahyp="http://schemas.microsoft.com/office/drawing/2018/hyperlinkcolor" val="tx"/>
+                    </a:ext>
+                  </a:extLst>
+                </a:hlinkClick>
+              </a:rPr>
+              <a:t>en</a:t>
+            </a:r>
+            <a:r>
+              <a:rPr lang="en-GB" sz="2000" strike="noStrike" baseline="0" dirty="0">
+                <a:ea typeface="+mn-lt"/>
+                <a:cs typeface="+mn-lt"/>
+                <a:hlinkClick r:id="rId2">
+                  <a:extLst>
+                    <a:ext uri="{A12FA001-AC4F-418D-AE19-62706E023703}">
+                      <ahyp:hlinkClr xmlns:ahyp="http://schemas.microsoft.com/office/drawing/2018/hyperlinkcolor" val="tx"/>
+                    </a:ext>
+                  </a:extLst>
+                </a:hlinkClick>
+              </a:rPr>
+              <a:t>/</a:t>
+            </a:r>
+            <a:r>
+              <a:rPr lang="en-GB" sz="2000" dirty="0">
+                <a:ea typeface="+mn-lt"/>
+                <a:cs typeface="+mn-lt"/>
+                <a:hlinkClick r:id="rId2">
+                  <a:extLst>
+                    <a:ext uri="{A12FA001-AC4F-418D-AE19-62706E023703}">
+                      <ahyp:hlinkClr xmlns:ahyp="http://schemas.microsoft.com/office/drawing/2018/hyperlinkcolor" val="tx"/>
+                    </a:ext>
+                  </a:extLst>
+                </a:hlinkClick>
+              </a:rPr>
+              <a:t>v1.0.0-beta.4/#specification</a:t>
+            </a:r>
+            <a:endParaRPr lang="en-GB" dirty="0"/>
+          </a:p>
+          <a:p>
+            <a:pPr algn="ctr"/>
+            <a:endParaRPr lang="en-GB" dirty="0"/>
+          </a:p>
+        </p:txBody>
+      </p:sp>
+      <p:pic>
+        <p:nvPicPr>
+          <p:cNvPr id="4" name="Picture 3" descr="A cartoon character reading a book&#10;&#10;AI-generated content may be incorrect.">
+            <a:extLst>
+              <a:ext uri="{FF2B5EF4-FFF2-40B4-BE49-F238E27FC236}">
+                <a16:creationId xmlns:a16="http://schemas.microsoft.com/office/drawing/2014/main" id="{F6688222-EFB7-87E4-E34D-99343FCB5465}"/>
+              </a:ext>
+            </a:extLst>
+          </p:cNvPr>
+          <p:cNvPicPr>
+            <a:picLocks noChangeAspect="1"/>
+          </p:cNvPicPr>
+          <p:nvPr/>
+        </p:nvPicPr>
+        <p:blipFill>
+          <a:blip r:embed="rId3"/>
+          <a:stretch>
+            <a:fillRect/>
+          </a:stretch>
+        </p:blipFill>
+        <p:spPr>
+          <a:xfrm>
+            <a:off x="8331537" y="3688422"/>
+            <a:ext cx="1726863" cy="1751264"/>
+          </a:xfrm>
+          <a:prstGeom prst="rect">
+            <a:avLst/>
+          </a:prstGeom>
+          <a:ln>
+            <a:noFill/>
+          </a:ln>
+          <a:effectLst>
+            <a:softEdge rad="112500"/>
+          </a:effectLst>
+        </p:spPr>
+      </p:pic>
+      <p:graphicFrame>
+        <p:nvGraphicFramePr>
+          <p:cNvPr id="5" name="Table 4">
+            <a:extLst>
+              <a:ext uri="{FF2B5EF4-FFF2-40B4-BE49-F238E27FC236}">
+                <a16:creationId xmlns:a16="http://schemas.microsoft.com/office/drawing/2014/main" id="{AC5E6455-7EA8-C095-116C-D10D0891EBFA}"/>
+              </a:ext>
+            </a:extLst>
+          </p:cNvPr>
+          <p:cNvGraphicFramePr>
+            <a:graphicFrameLocks noGrp="1"/>
+          </p:cNvGraphicFramePr>
+          <p:nvPr>
+            <p:extLst>
+              <p:ext uri="{D42A27DB-BD31-4B8C-83A1-F6EECF244321}">
+                <p14:modId xmlns:p14="http://schemas.microsoft.com/office/powerpoint/2010/main" val="2172063292"/>
+              </p:ext>
+            </p:extLst>
+          </p:nvPr>
+        </p:nvGraphicFramePr>
+        <p:xfrm>
+          <a:off x="839615" y="2695903"/>
+          <a:ext cx="7491922" cy="3343556"/>
+        </p:xfrm>
+        <a:graphic>
+          <a:graphicData uri="http://schemas.openxmlformats.org/drawingml/2006/table">
+            <a:tbl>
+              <a:tblPr firstRow="1" bandRow="1">
+                <a:tableStyleId>{2D5ABB26-0587-4C30-8999-92F81FD0307C}</a:tableStyleId>
+              </a:tblPr>
+              <a:tblGrid>
+                <a:gridCol w="2351196">
+                  <a:extLst>
+                    <a:ext uri="{9D8B030D-6E8A-4147-A177-3AD203B41FA5}">
+                      <a16:colId xmlns:a16="http://schemas.microsoft.com/office/drawing/2014/main" val="625206413"/>
+                    </a:ext>
+                  </a:extLst>
+                </a:gridCol>
+                <a:gridCol w="5140726">
+                  <a:extLst>
+                    <a:ext uri="{9D8B030D-6E8A-4147-A177-3AD203B41FA5}">
+                      <a16:colId xmlns:a16="http://schemas.microsoft.com/office/drawing/2014/main" val="2747230814"/>
+                    </a:ext>
+                  </a:extLst>
+                </a:gridCol>
+              </a:tblGrid>
+              <a:tr h="411424">
+                <a:tc>
+                  <a:txBody>
+                    <a:bodyPr/>
+                    <a:lstStyle/>
+                    <a:p>
+                      <a:pPr algn="l"/>
+                      <a:r>
+                        <a:rPr lang="en-US" b="0" dirty="0"/>
+                        <a:t>Commit Message</a:t>
+                      </a:r>
+                      <a:endParaRPr lang="en-MY" b="0" dirty="0"/>
+                    </a:p>
+                  </a:txBody>
+                  <a:tcPr>
+                    <a:lnL w="12700" cap="flat" cmpd="sng" algn="ctr">
+                      <a:noFill/>
+                      <a:prstDash val="solid"/>
+                      <a:round/>
+                      <a:headEnd type="none" w="med" len="med"/>
+                      <a:tailEnd type="none" w="med" len="med"/>
+                    </a:lnL>
+                    <a:lnR>
+                      <a:noFill/>
+                    </a:lnR>
+                    <a:lnT w="12700" cap="flat" cmpd="sng" algn="ctr">
+                      <a:solidFill>
+                        <a:schemeClr val="tx1"/>
+                      </a:solidFill>
+                      <a:prstDash val="solid"/>
+                      <a:round/>
+                      <a:headEnd type="none" w="med" len="med"/>
+                      <a:tailEnd type="none" w="med" len="med"/>
+                    </a:lnT>
+                    <a:lnB w="12700" cap="flat" cmpd="sng" algn="ctr">
+                      <a:solidFill>
+                        <a:schemeClr val="tx1"/>
+                      </a:solidFill>
+                      <a:prstDash val="solid"/>
+                      <a:round/>
+                      <a:headEnd type="none" w="med" len="med"/>
+                      <a:tailEnd type="none" w="med" len="med"/>
+                    </a:lnB>
+                    <a:lnTlToBr w="12700" cmpd="sng">
+                      <a:noFill/>
+                      <a:prstDash val="solid"/>
+                    </a:lnTlToBr>
+                    <a:lnBlToTr w="12700" cmpd="sng">
+                      <a:noFill/>
+                      <a:prstDash val="solid"/>
+                    </a:lnBlToTr>
+                  </a:tcPr>
+                </a:tc>
+                <a:tc>
+                  <a:txBody>
+                    <a:bodyPr/>
+                    <a:lstStyle/>
+                    <a:p>
+                      <a:pPr algn="l"/>
+                      <a:r>
+                        <a:rPr lang="en-US" b="0" dirty="0"/>
+                        <a:t>Description</a:t>
+                      </a:r>
+                      <a:endParaRPr lang="en-MY" b="0" dirty="0"/>
+                    </a:p>
+                  </a:txBody>
+                  <a:tcPr>
+                    <a:lnL>
+                      <a:noFill/>
+                    </a:lnL>
+                    <a:lnR w="12700" cap="flat" cmpd="sng" algn="ctr">
+                      <a:noFill/>
+                      <a:prstDash val="solid"/>
+                      <a:round/>
+                      <a:headEnd type="none" w="med" len="med"/>
+                      <a:tailEnd type="none" w="med" len="med"/>
+                    </a:lnR>
+                    <a:lnT w="12700" cap="flat" cmpd="sng" algn="ctr">
+                      <a:solidFill>
+                        <a:schemeClr val="tx1"/>
+                      </a:solidFill>
+                      <a:prstDash val="solid"/>
+                      <a:round/>
+                      <a:headEnd type="none" w="med" len="med"/>
+                      <a:tailEnd type="none" w="med" len="med"/>
+                    </a:lnT>
+                    <a:lnB w="12700" cap="flat" cmpd="sng" algn="ctr">
+                      <a:solidFill>
+                        <a:schemeClr val="tx1"/>
+                      </a:solidFill>
+                      <a:prstDash val="solid"/>
+                      <a:round/>
+                      <a:headEnd type="none" w="med" len="med"/>
+                      <a:tailEnd type="none" w="med" len="med"/>
+                    </a:lnB>
+                    <a:lnTlToBr w="12700" cmpd="sng">
+                      <a:noFill/>
+                      <a:prstDash val="solid"/>
+                    </a:lnTlToBr>
+                    <a:lnBlToTr w="12700" cmpd="sng">
+                      <a:noFill/>
+                      <a:prstDash val="solid"/>
+                    </a:lnBlToTr>
+                  </a:tcPr>
+                </a:tc>
+                <a:extLst>
+                  <a:ext uri="{0D108BD9-81ED-4DB2-BD59-A6C34878D82A}">
+                    <a16:rowId xmlns:a16="http://schemas.microsoft.com/office/drawing/2014/main" val="1981924773"/>
+                  </a:ext>
+                </a:extLst>
+              </a:tr>
+              <a:tr h="411424">
+                <a:tc>
+                  <a:txBody>
+                    <a:bodyPr/>
+                    <a:lstStyle/>
+                    <a:p>
+                      <a:pPr algn="l"/>
+                      <a:r>
+                        <a:rPr lang="en-US" sz="1600" b="1" dirty="0">
+                          <a:solidFill>
+                            <a:srgbClr val="24292E"/>
+                          </a:solidFill>
+                          <a:latin typeface="-apple-system"/>
+                          <a:ea typeface="-apple-system"/>
+                          <a:cs typeface="-apple-system"/>
+                        </a:rPr>
+                        <a:t>chore</a:t>
+                      </a:r>
+                      <a:endParaRPr lang="en-MY" b="1" dirty="0"/>
+                    </a:p>
+                  </a:txBody>
+                  <a:tcPr>
+                    <a:lnT w="12700" cap="flat" cmpd="sng" algn="ctr">
+                      <a:solidFill>
+                        <a:schemeClr val="tx1"/>
+                      </a:solidFill>
+                      <a:prstDash val="solid"/>
+                      <a:round/>
+                      <a:headEnd type="none" w="med" len="med"/>
+                      <a:tailEnd type="none" w="med" len="med"/>
+                    </a:lnT>
+                  </a:tcPr>
+                </a:tc>
+                <a:tc>
+                  <a:txBody>
+                    <a:bodyPr/>
+                    <a:lstStyle/>
+                    <a:p>
+                      <a:pPr marL="0" marR="0" lvl="0" indent="0" algn="l" defTabSz="754380" rtl="0" eaLnBrk="1" fontAlgn="auto" latinLnBrk="0" hangingPunct="1">
+                        <a:lnSpc>
+                          <a:spcPct val="100000"/>
+                        </a:lnSpc>
+                        <a:spcBef>
+                          <a:spcPts val="0"/>
+                        </a:spcBef>
+                        <a:spcAft>
+                          <a:spcPts val="0"/>
+                        </a:spcAft>
+                        <a:buClrTx/>
+                        <a:buSzTx/>
+                        <a:buFontTx/>
+                        <a:buNone/>
+                        <a:tabLst/>
+                        <a:defRPr/>
+                      </a:pPr>
+                      <a:r>
+                        <a:rPr lang="en-US" sz="1600" dirty="0">
+                          <a:solidFill>
+                            <a:srgbClr val="24292E"/>
+                          </a:solidFill>
+                        </a:rPr>
+                        <a:t>a commit that does not affect code changes, e.g. adding comments</a:t>
+                      </a:r>
+                    </a:p>
+                  </a:txBody>
+                  <a:tcPr>
+                    <a:lnT w="12700" cap="flat" cmpd="sng" algn="ctr">
+                      <a:solidFill>
+                        <a:schemeClr val="tx1"/>
+                      </a:solidFill>
+                      <a:prstDash val="solid"/>
+                      <a:round/>
+                      <a:headEnd type="none" w="med" len="med"/>
+                      <a:tailEnd type="none" w="med" len="med"/>
+                    </a:lnT>
+                  </a:tcPr>
+                </a:tc>
+                <a:extLst>
+                  <a:ext uri="{0D108BD9-81ED-4DB2-BD59-A6C34878D82A}">
+                    <a16:rowId xmlns:a16="http://schemas.microsoft.com/office/drawing/2014/main" val="3224144256"/>
+                  </a:ext>
+                </a:extLst>
+              </a:tr>
+              <a:tr h="487242">
+                <a:tc>
+                  <a:txBody>
+                    <a:bodyPr/>
+                    <a:lstStyle/>
+                    <a:p>
+                      <a:pPr algn="l"/>
+                      <a:r>
+                        <a:rPr lang="en-US" sz="1600" b="1" dirty="0">
+                          <a:solidFill>
+                            <a:srgbClr val="24292E"/>
+                          </a:solidFill>
+                        </a:rPr>
+                        <a:t>docs</a:t>
+                      </a:r>
+                      <a:endParaRPr lang="en-MY" b="1" dirty="0"/>
+                    </a:p>
+                  </a:txBody>
+                  <a:tcPr/>
+                </a:tc>
+                <a:tc>
+                  <a:txBody>
+                    <a:bodyPr/>
+                    <a:lstStyle/>
+                    <a:p>
+                      <a:pPr marL="0" marR="0" lvl="0" indent="0" algn="l" defTabSz="754380" rtl="0" eaLnBrk="1" fontAlgn="auto" latinLnBrk="0" hangingPunct="1">
+                        <a:lnSpc>
+                          <a:spcPct val="100000"/>
+                        </a:lnSpc>
+                        <a:spcBef>
+                          <a:spcPts val="0"/>
+                        </a:spcBef>
+                        <a:spcAft>
+                          <a:spcPts val="0"/>
+                        </a:spcAft>
+                        <a:buClrTx/>
+                        <a:buSzTx/>
+                        <a:buFontTx/>
+                        <a:buNone/>
+                        <a:tabLst/>
+                        <a:defRPr/>
+                      </a:pPr>
+                      <a:r>
+                        <a:rPr lang="en-US" sz="1600" b="0" dirty="0">
+                          <a:solidFill>
+                            <a:srgbClr val="24292E"/>
+                          </a:solidFill>
+                        </a:rPr>
+                        <a:t>a commit to update documentation</a:t>
+                      </a:r>
+                    </a:p>
+                  </a:txBody>
+                  <a:tcPr/>
+                </a:tc>
+                <a:extLst>
+                  <a:ext uri="{0D108BD9-81ED-4DB2-BD59-A6C34878D82A}">
+                    <a16:rowId xmlns:a16="http://schemas.microsoft.com/office/drawing/2014/main" val="3173293429"/>
+                  </a:ext>
+                </a:extLst>
+              </a:tr>
+              <a:tr h="442606">
+                <a:tc>
+                  <a:txBody>
+                    <a:bodyPr/>
+                    <a:lstStyle/>
+                    <a:p>
+                      <a:pPr algn="l"/>
+                      <a:r>
+                        <a:rPr lang="en-US" sz="1600" b="1" dirty="0">
+                          <a:solidFill>
+                            <a:srgbClr val="24292E"/>
+                          </a:solidFill>
+                        </a:rPr>
+                        <a:t>style</a:t>
+                      </a:r>
+                      <a:endParaRPr lang="en-MY" b="1" dirty="0"/>
+                    </a:p>
+                  </a:txBody>
+                  <a:tcPr/>
+                </a:tc>
+                <a:tc>
+                  <a:txBody>
+                    <a:bodyPr/>
+                    <a:lstStyle/>
+                    <a:p>
+                      <a:pPr marL="0" marR="0" lvl="0" indent="0" algn="l" defTabSz="754380" rtl="0" eaLnBrk="1" fontAlgn="auto" latinLnBrk="0" hangingPunct="1">
+                        <a:lnSpc>
+                          <a:spcPct val="100000"/>
+                        </a:lnSpc>
+                        <a:spcBef>
+                          <a:spcPts val="0"/>
+                        </a:spcBef>
+                        <a:spcAft>
+                          <a:spcPts val="0"/>
+                        </a:spcAft>
+                        <a:buClrTx/>
+                        <a:buSzTx/>
+                        <a:buFontTx/>
+                        <a:buNone/>
+                        <a:tabLst/>
+                        <a:defRPr/>
+                      </a:pPr>
+                      <a:r>
+                        <a:rPr lang="en-US" sz="1600" dirty="0">
+                          <a:solidFill>
+                            <a:srgbClr val="24292E"/>
+                          </a:solidFill>
+                        </a:rPr>
+                        <a:t>a commit noting visual changes such as </a:t>
+                      </a:r>
+                      <a:r>
+                        <a:rPr lang="en-US" sz="1600" dirty="0" err="1">
+                          <a:solidFill>
+                            <a:srgbClr val="24292E"/>
+                          </a:solidFill>
+                        </a:rPr>
+                        <a:t>css</a:t>
+                      </a:r>
+                      <a:endParaRPr lang="en-US" sz="1600" dirty="0">
+                        <a:solidFill>
+                          <a:srgbClr val="24292E"/>
+                        </a:solidFill>
+                      </a:endParaRPr>
+                    </a:p>
+                  </a:txBody>
+                  <a:tcPr/>
+                </a:tc>
+                <a:extLst>
+                  <a:ext uri="{0D108BD9-81ED-4DB2-BD59-A6C34878D82A}">
+                    <a16:rowId xmlns:a16="http://schemas.microsoft.com/office/drawing/2014/main" val="2395316195"/>
+                  </a:ext>
+                </a:extLst>
+              </a:tr>
+              <a:tr h="433137">
+                <a:tc>
+                  <a:txBody>
+                    <a:bodyPr/>
+                    <a:lstStyle/>
+                    <a:p>
+                      <a:pPr algn="l"/>
+                      <a:r>
+                        <a:rPr lang="en-US" sz="1600" b="1" dirty="0">
+                          <a:solidFill>
+                            <a:srgbClr val="24292E"/>
+                          </a:solidFill>
+                          <a:latin typeface="-apple-system"/>
+                          <a:ea typeface="-apple-system"/>
+                          <a:cs typeface="-apple-system"/>
+                        </a:rPr>
+                        <a:t>refactor</a:t>
+                      </a:r>
+                      <a:endParaRPr lang="en-MY" b="1" dirty="0"/>
+                    </a:p>
+                  </a:txBody>
+                  <a:tcPr/>
+                </a:tc>
+                <a:tc>
+                  <a:txBody>
+                    <a:bodyPr/>
+                    <a:lstStyle/>
+                    <a:p>
+                      <a:pPr marL="0" marR="0" lvl="0" indent="0" algn="l" defTabSz="754380" rtl="0" eaLnBrk="1" fontAlgn="auto" latinLnBrk="0" hangingPunct="1">
+                        <a:lnSpc>
+                          <a:spcPct val="100000"/>
+                        </a:lnSpc>
+                        <a:spcBef>
+                          <a:spcPts val="0"/>
+                        </a:spcBef>
+                        <a:spcAft>
+                          <a:spcPts val="0"/>
+                        </a:spcAft>
+                        <a:buClrTx/>
+                        <a:buSzTx/>
+                        <a:buFontTx/>
+                        <a:buNone/>
+                        <a:tabLst/>
+                        <a:defRPr/>
+                      </a:pPr>
+                      <a:r>
+                        <a:rPr lang="en-US" sz="1600" dirty="0">
+                          <a:solidFill>
+                            <a:srgbClr val="24292E"/>
+                          </a:solidFill>
+                        </a:rPr>
+                        <a:t>a commit noting a rework in the codebase</a:t>
+                      </a:r>
+                    </a:p>
+                  </a:txBody>
+                  <a:tcPr/>
+                </a:tc>
+                <a:extLst>
+                  <a:ext uri="{0D108BD9-81ED-4DB2-BD59-A6C34878D82A}">
+                    <a16:rowId xmlns:a16="http://schemas.microsoft.com/office/drawing/2014/main" val="4290537241"/>
+                  </a:ext>
+                </a:extLst>
+              </a:tr>
+              <a:tr h="440053">
+                <a:tc>
+                  <a:txBody>
+                    <a:bodyPr/>
+                    <a:lstStyle/>
+                    <a:p>
+                      <a:pPr algn="l"/>
+                      <a:r>
+                        <a:rPr lang="en-US" sz="1600" b="1" dirty="0">
+                          <a:solidFill>
+                            <a:srgbClr val="24292E"/>
+                          </a:solidFill>
+                          <a:latin typeface="-apple-system"/>
+                          <a:ea typeface="-apple-system"/>
+                          <a:cs typeface="-apple-system"/>
+                        </a:rPr>
+                        <a:t>perf</a:t>
+                      </a:r>
+                      <a:endParaRPr lang="en-MY" b="1" dirty="0"/>
+                    </a:p>
+                  </a:txBody>
+                  <a:tcPr/>
+                </a:tc>
+                <a:tc>
+                  <a:txBody>
+                    <a:bodyPr/>
+                    <a:lstStyle/>
+                    <a:p>
+                      <a:pPr marL="0" marR="0" lvl="0" indent="0" algn="l" defTabSz="754380" rtl="0" eaLnBrk="1" fontAlgn="auto" latinLnBrk="0" hangingPunct="1">
+                        <a:lnSpc>
+                          <a:spcPct val="100000"/>
+                        </a:lnSpc>
+                        <a:spcBef>
+                          <a:spcPts val="0"/>
+                        </a:spcBef>
+                        <a:spcAft>
+                          <a:spcPts val="0"/>
+                        </a:spcAft>
+                        <a:buClrTx/>
+                        <a:buSzTx/>
+                        <a:buFontTx/>
+                        <a:buNone/>
+                        <a:tabLst/>
+                        <a:defRPr/>
+                      </a:pPr>
+                      <a:r>
+                        <a:rPr lang="en-US" sz="1600" dirty="0">
+                          <a:solidFill>
+                            <a:srgbClr val="24292E"/>
+                          </a:solidFill>
+                          <a:latin typeface="-apple-system"/>
+                          <a:ea typeface="-apple-system"/>
+                          <a:cs typeface="-apple-system"/>
+                        </a:rPr>
+                        <a:t>a commit noting a performance change such as performance improvements</a:t>
+                      </a:r>
+                    </a:p>
+                  </a:txBody>
+                  <a:tcPr/>
+                </a:tc>
+                <a:extLst>
+                  <a:ext uri="{0D108BD9-81ED-4DB2-BD59-A6C34878D82A}">
+                    <a16:rowId xmlns:a16="http://schemas.microsoft.com/office/drawing/2014/main" val="3890154355"/>
+                  </a:ext>
+                </a:extLst>
+              </a:tr>
+              <a:tr h="410907">
+                <a:tc>
+                  <a:txBody>
+                    <a:bodyPr/>
+                    <a:lstStyle/>
+                    <a:p>
+                      <a:pPr algn="l"/>
+                      <a:r>
+                        <a:rPr lang="en-MY" b="1" dirty="0"/>
+                        <a:t>test </a:t>
+                      </a:r>
+                    </a:p>
+                  </a:txBody>
+                  <a:tcPr>
+                    <a:lnB w="12700" cap="flat" cmpd="sng" algn="ctr">
+                      <a:solidFill>
+                        <a:schemeClr val="tx1"/>
+                      </a:solidFill>
+                      <a:prstDash val="solid"/>
+                      <a:round/>
+                      <a:headEnd type="none" w="med" len="med"/>
+                      <a:tailEnd type="none" w="med" len="med"/>
+                    </a:lnB>
+                  </a:tcPr>
+                </a:tc>
+                <a:tc>
+                  <a:txBody>
+                    <a:bodyPr/>
+                    <a:lstStyle/>
+                    <a:p>
+                      <a:pPr marL="0" marR="0" lvl="0" indent="0" algn="l" defTabSz="754380" rtl="0" eaLnBrk="1" fontAlgn="auto" latinLnBrk="0" hangingPunct="1">
+                        <a:lnSpc>
+                          <a:spcPct val="100000"/>
+                        </a:lnSpc>
+                        <a:spcBef>
+                          <a:spcPts val="0"/>
+                        </a:spcBef>
+                        <a:spcAft>
+                          <a:spcPts val="0"/>
+                        </a:spcAft>
+                        <a:buClrTx/>
+                        <a:buSzTx/>
+                        <a:buFontTx/>
+                        <a:buNone/>
+                        <a:tabLst/>
+                        <a:defRPr/>
+                      </a:pPr>
+                      <a:r>
+                        <a:rPr lang="en-US" sz="1600" dirty="0">
+                          <a:solidFill>
+                            <a:srgbClr val="24292E"/>
+                          </a:solidFill>
+                        </a:rPr>
+                        <a:t>a commit noting changes or additions to the test cases</a:t>
+                      </a:r>
+                    </a:p>
+                  </a:txBody>
+                  <a:tcPr>
+                    <a:lnB w="12700" cap="flat" cmpd="sng" algn="ctr">
+                      <a:solidFill>
+                        <a:schemeClr val="tx1"/>
+                      </a:solidFill>
+                      <a:prstDash val="solid"/>
+                      <a:round/>
+                      <a:headEnd type="none" w="med" len="med"/>
+                      <a:tailEnd type="none" w="med" len="med"/>
+                    </a:lnB>
+                  </a:tcPr>
+                </a:tc>
+                <a:extLst>
+                  <a:ext uri="{0D108BD9-81ED-4DB2-BD59-A6C34878D82A}">
+                    <a16:rowId xmlns:a16="http://schemas.microsoft.com/office/drawing/2014/main" val="3196901021"/>
+                  </a:ext>
+                </a:extLst>
+              </a:tr>
+            </a:tbl>
+          </a:graphicData>
+        </a:graphic>
+      </p:graphicFrame>
+    </p:spTree>
+    <p:extLst>
+      <p:ext uri="{BB962C8B-B14F-4D97-AF65-F5344CB8AC3E}">
+        <p14:creationId xmlns:p14="http://schemas.microsoft.com/office/powerpoint/2010/main" val="1176553661"/>
+      </p:ext>
+    </p:extLst>
+  </p:cSld>
+  <p:clrMapOvr>
+    <a:masterClrMapping/>
+  </p:clrMapOvr>
+</p:sld>
+</file>
+
+<file path=ppt/slides/slide12.xml><?xml version="1.0" encoding="utf-8"?>
+<p:sld xmlns:a="http://schemas.openxmlformats.org/drawingml/2006/main" xmlns:r="http://schemas.openxmlformats.org/officeDocument/2006/relationships" xmlns:p="http://schemas.openxmlformats.org/presentationml/2006/main">
+  <p:cSld>
+    <p:bg>
+      <p:bgPr>
+        <a:solidFill>
+          <a:schemeClr val="bg1"/>
+        </a:solidFill>
+        <a:effectLst/>
+      </p:bgPr>
+    </p:bg>
+    <p:spTree>
+      <p:nvGrpSpPr>
+        <p:cNvPr id="1" name="">
+          <a:extLst>
+            <a:ext uri="{FF2B5EF4-FFF2-40B4-BE49-F238E27FC236}">
+              <a16:creationId xmlns:a16="http://schemas.microsoft.com/office/drawing/2014/main" id="{58492F53-6F97-6986-FB20-ED3ED7D47E09}"/>
+            </a:ext>
+          </a:extLst>
+        </p:cNvPr>
+        <p:cNvGrpSpPr/>
+        <p:nvPr/>
+      </p:nvGrpSpPr>
+      <p:grpSpPr>
+        <a:xfrm>
+          <a:off x="0" y="0"/>
+          <a:ext cx="0" cy="0"/>
+          <a:chOff x="0" y="0"/>
+          <a:chExt cx="0" cy="0"/>
+        </a:xfrm>
+      </p:grpSpPr>
+      <p:sp>
+        <p:nvSpPr>
+          <p:cNvPr id="2" name="Title 1" hidden="1">
+            <a:extLst>
+              <a:ext uri="{FF2B5EF4-FFF2-40B4-BE49-F238E27FC236}">
+                <a16:creationId xmlns:a16="http://schemas.microsoft.com/office/drawing/2014/main" id="{8D0DD773-CA50-098B-A4CC-66DFBF012B6C}"/>
+              </a:ext>
+            </a:extLst>
+          </p:cNvPr>
+          <p:cNvSpPr>
+            <a:spLocks noGrp="1"/>
+          </p:cNvSpPr>
+          <p:nvPr>
+            <p:ph type="title"/>
+          </p:nvPr>
+        </p:nvSpPr>
+        <p:spPr/>
+        <p:txBody>
+          <a:bodyPr/>
+          <a:lstStyle/>
+          <a:p>
+            <a:r>
+              <a:rPr lang="en-US" dirty="0"/>
+              <a:t>Cover Page</a:t>
+            </a:r>
+          </a:p>
+        </p:txBody>
+      </p:sp>
+      <p:sp>
+        <p:nvSpPr>
+          <p:cNvPr id="8" name="Title 1">
+            <a:extLst>
+              <a:ext uri="{FF2B5EF4-FFF2-40B4-BE49-F238E27FC236}">
+                <a16:creationId xmlns:a16="http://schemas.microsoft.com/office/drawing/2014/main" id="{4F797EB1-0AB0-339E-92D7-E8ED99823DFD}"/>
               </a:ext>
             </a:extLst>
           </p:cNvPr>
@@ -15103,7 +16181,7 @@
           <p:cNvPr id="32" name="TextBox 31">
             <a:extLst>
               <a:ext uri="{FF2B5EF4-FFF2-40B4-BE49-F238E27FC236}">
-                <a16:creationId xmlns:a16="http://schemas.microsoft.com/office/drawing/2014/main" id="{08EFD2FB-A4BA-DA29-E4DA-589C56615D5A}"/>
+                <a16:creationId xmlns:a16="http://schemas.microsoft.com/office/drawing/2014/main" id="{91245FAB-D986-2128-F11D-CFF67C5DA2A6}"/>
               </a:ext>
             </a:extLst>
           </p:cNvPr>
@@ -15151,7 +16229,7 @@
           <p:cNvPr id="47" name="Straight Connector 46">
             <a:extLst>
               <a:ext uri="{FF2B5EF4-FFF2-40B4-BE49-F238E27FC236}">
-                <a16:creationId xmlns:a16="http://schemas.microsoft.com/office/drawing/2014/main" id="{FE6540DA-D076-6901-2493-4E7979A53516}"/>
+                <a16:creationId xmlns:a16="http://schemas.microsoft.com/office/drawing/2014/main" id="{A7B50CB2-C4F7-FACE-59E1-99FA0E0FC768}"/>
               </a:ext>
               <a:ext uri="{C183D7F6-B498-43B3-948B-1728B52AA6E4}">
                 <adec:decorative xmlns:adec="http://schemas.microsoft.com/office/drawing/2017/decorative" val="1"/>
@@ -15192,311 +16270,12 @@
           </a:fontRef>
         </p:style>
       </p:cxnSp>
-      <p:sp>
-        <p:nvSpPr>
-          <p:cNvPr id="5" name="TextBox 4">
-            <a:extLst>
-              <a:ext uri="{FF2B5EF4-FFF2-40B4-BE49-F238E27FC236}">
-                <a16:creationId xmlns:a16="http://schemas.microsoft.com/office/drawing/2014/main" id="{18B6891D-7E54-8D9B-1C3D-806FB7D6C387}"/>
-              </a:ext>
-            </a:extLst>
-          </p:cNvPr>
-          <p:cNvSpPr txBox="1"/>
-          <p:nvPr/>
-        </p:nvSpPr>
-        <p:spPr>
-          <a:xfrm>
-            <a:off x="450804" y="1427371"/>
-            <a:ext cx="9365256" cy="6463308"/>
-          </a:xfrm>
-          <a:prstGeom prst="rect">
-            <a:avLst/>
-          </a:prstGeom>
-          <a:noFill/>
-        </p:spPr>
-        <p:txBody>
-          <a:bodyPr rot="0" spcFirstLastPara="0" vertOverflow="overflow" horzOverflow="overflow" vert="horz" wrap="square" lIns="91440" tIns="45720" rIns="91440" bIns="45720" numCol="1" spcCol="0" rtlCol="0" fromWordArt="0" anchor="t" anchorCtr="0" forceAA="0" compatLnSpc="1">
-            <a:prstTxWarp prst="textNoShape">
-              <a:avLst/>
-            </a:prstTxWarp>
-            <a:spAutoFit/>
-          </a:bodyPr>
-          <a:lstStyle/>
-          <a:p>
-            <a:r>
-              <a:rPr lang="en-US" sz="1800" b="1">
-                <a:solidFill>
-                  <a:srgbClr val="FA6673"/>
-                </a:solidFill>
-                <a:latin typeface="-apple-system"/>
-                <a:ea typeface="-apple-system"/>
-                <a:cs typeface="-apple-system"/>
-              </a:rPr>
-              <a:t>Commit message with description and breaking change in body</a:t>
-            </a:r>
-            <a:endParaRPr lang="en-US" sz="1800" b="1" dirty="0">
-              <a:solidFill>
-                <a:srgbClr val="FA6673"/>
-              </a:solidFill>
-              <a:latin typeface="-apple-system"/>
-              <a:ea typeface="-apple-system"/>
-              <a:cs typeface="-apple-system"/>
-            </a:endParaRPr>
-          </a:p>
-          <a:p>
-            <a:r>
-              <a:rPr lang="en-US" sz="1800" b="1"/>
-              <a:t>feat</a:t>
-            </a:r>
-            <a:r>
-              <a:rPr lang="en-US" sz="1800"/>
-              <a:t>: allow provided config object to extend other configs</a:t>
-            </a:r>
-          </a:p>
-          <a:p>
-            <a:br>
-              <a:rPr lang="en-US" sz="1800" dirty="0"/>
-            </a:br>
-            <a:r>
-              <a:rPr lang="en-US" sz="1800" b="1"/>
-              <a:t>BREAKING CHANGE</a:t>
-            </a:r>
-            <a:r>
-              <a:rPr lang="en-US" sz="1800"/>
-              <a:t>: </a:t>
-            </a:r>
-            <a:r>
-              <a:rPr lang="en-US" sz="1800" dirty="0"/>
-              <a:t>`extends` key in config file is now used for extending other config files</a:t>
-            </a:r>
-            <a:br>
-              <a:rPr lang="en-US" sz="1800" dirty="0">
-                <a:ea typeface="Source Sans Pro"/>
-              </a:rPr>
-            </a:br>
-            <a:br>
-              <a:rPr lang="en-US" sz="1800" dirty="0">
-                <a:ea typeface="Source Sans Pro"/>
-              </a:rPr>
-            </a:br>
-            <a:r>
-              <a:rPr lang="en-US" sz="1800" b="1" dirty="0">
-                <a:solidFill>
-                  <a:srgbClr val="FA6673"/>
-                </a:solidFill>
-                <a:latin typeface="-apple-system"/>
-                <a:ea typeface="-apple-system"/>
-                <a:cs typeface="-apple-system"/>
-              </a:rPr>
-              <a:t>Commit message with optional ! to draw attention to breaking change</a:t>
-            </a:r>
-            <a:endParaRPr lang="en-US"/>
-          </a:p>
-          <a:p>
-            <a:r>
-              <a:rPr lang="en-US" sz="1800" b="1"/>
-              <a:t>chore</a:t>
-            </a:r>
-            <a:r>
-              <a:rPr lang="en-US" sz="1800"/>
-              <a:t>!: drop Node 6 from testing matrix</a:t>
-            </a:r>
-            <a:endParaRPr lang="en-US" sz="1800" dirty="0">
-              <a:ea typeface="Source Sans Pro"/>
-            </a:endParaRPr>
-          </a:p>
-          <a:p>
-            <a:endParaRPr lang="en-US" sz="1800" dirty="0"/>
-          </a:p>
-          <a:p>
-            <a:r>
-              <a:rPr lang="en-US" sz="1800" b="1"/>
-              <a:t>BREAKING CHANGE</a:t>
-            </a:r>
-            <a:r>
-              <a:rPr lang="en-US" sz="1800"/>
-              <a:t>: dropping Node 6 which </a:t>
-            </a:r>
-            <a:r>
-              <a:rPr lang="en-US" sz="1800" dirty="0"/>
-              <a:t>hits end of life in April</a:t>
-            </a:r>
-            <a:br>
-              <a:rPr lang="en-US" sz="1800" dirty="0">
-                <a:ea typeface="Source Sans Pro"/>
-              </a:rPr>
-            </a:br>
-            <a:br>
-              <a:rPr lang="en-US" sz="1800" dirty="0">
-                <a:ea typeface="Source Sans Pro"/>
-              </a:rPr>
-            </a:br>
-            <a:r>
-              <a:rPr lang="en-US" sz="1800" b="1" dirty="0">
-                <a:solidFill>
-                  <a:srgbClr val="FA6673"/>
-                </a:solidFill>
-                <a:latin typeface="-apple-system"/>
-                <a:ea typeface="-apple-system"/>
-                <a:cs typeface="-apple-system"/>
-              </a:rPr>
-              <a:t>Commit message with no body</a:t>
-            </a:r>
-            <a:endParaRPr lang="en-US" sz="1800" dirty="0">
-              <a:ea typeface="Source Sans Pro"/>
-            </a:endParaRPr>
-          </a:p>
-          <a:p>
-            <a:r>
-              <a:rPr lang="en-US" sz="1800" b="1"/>
-              <a:t>docs</a:t>
-            </a:r>
-            <a:r>
-              <a:rPr lang="en-US" sz="1800"/>
-              <a:t>: correct spelling of CHANGELOG</a:t>
-            </a:r>
-            <a:br>
-              <a:rPr lang="en-US" sz="1800" dirty="0">
-                <a:ea typeface="Source Sans Pro"/>
-              </a:rPr>
-            </a:br>
-            <a:br>
-              <a:rPr lang="en-US" sz="1800" dirty="0">
-                <a:latin typeface="Source Sans Pro"/>
-                <a:ea typeface="Source Sans Pro"/>
-              </a:rPr>
-            </a:br>
-            <a:r>
-              <a:rPr lang="en-US" sz="1800" b="1">
-                <a:solidFill>
-                  <a:srgbClr val="FA6673"/>
-                </a:solidFill>
-                <a:latin typeface="-apple-system"/>
-                <a:ea typeface="-apple-system"/>
-                <a:cs typeface="-apple-system"/>
-              </a:rPr>
-              <a:t>Commit message with scope</a:t>
-            </a:r>
-            <a:endParaRPr lang="en-US" sz="1800" b="1" dirty="0">
-              <a:solidFill>
-                <a:srgbClr val="FA6673"/>
-              </a:solidFill>
-              <a:latin typeface="-apple-system"/>
-              <a:ea typeface="-apple-system"/>
-              <a:cs typeface="-apple-system"/>
-            </a:endParaRPr>
-          </a:p>
-          <a:p>
-            <a:r>
-              <a:rPr lang="en-US" sz="1800" b="1"/>
-              <a:t>feat</a:t>
-            </a:r>
-            <a:r>
-              <a:rPr lang="en-US" sz="1800"/>
-              <a:t>(lang): add polish language</a:t>
-            </a:r>
-            <a:br>
-              <a:rPr lang="en-US" sz="1800" dirty="0">
-                <a:ea typeface="Source Sans Pro"/>
-              </a:rPr>
-            </a:br>
-            <a:br>
-              <a:rPr lang="en-US" sz="1800" dirty="0">
-                <a:latin typeface="Source Sans Pro"/>
-                <a:ea typeface="Source Sans Pro"/>
-              </a:rPr>
-            </a:br>
-            <a:r>
-              <a:rPr lang="en-US" sz="1800" b="1">
-                <a:solidFill>
-                  <a:srgbClr val="FA6673"/>
-                </a:solidFill>
-                <a:latin typeface="-apple-system"/>
-              </a:rPr>
-              <a:t>Commit</a:t>
-            </a:r>
-            <a:r>
-              <a:rPr lang="en-US" sz="1800" b="1">
-                <a:solidFill>
-                  <a:srgbClr val="FA6673"/>
-                </a:solidFill>
-                <a:latin typeface="-apple-system"/>
-                <a:ea typeface="-apple-system"/>
-                <a:cs typeface="-apple-system"/>
-              </a:rPr>
-              <a:t> message for a fix using an (optional) issue </a:t>
-            </a:r>
-            <a:r>
-              <a:rPr lang="en-US" sz="1800" b="1" dirty="0">
-                <a:solidFill>
-                  <a:srgbClr val="FA6673"/>
-                </a:solidFill>
-                <a:latin typeface="-apple-system"/>
-                <a:ea typeface="-apple-system"/>
-                <a:cs typeface="-apple-system"/>
-              </a:rPr>
-              <a:t>number.</a:t>
-            </a:r>
-          </a:p>
-          <a:p>
-            <a:r>
-              <a:rPr lang="en-US" sz="1800" b="1"/>
-              <a:t>fix</a:t>
-            </a:r>
-            <a:r>
-              <a:rPr lang="en-US" sz="1800"/>
-              <a:t>: correct minor typos in code</a:t>
-            </a:r>
-            <a:endParaRPr lang="en-US" sz="1800" dirty="0">
-              <a:ea typeface="Source Sans Pro"/>
-            </a:endParaRPr>
-          </a:p>
-          <a:p>
-            <a:endParaRPr lang="en-US" sz="1800" dirty="0">
-              <a:ea typeface="Source Sans Pro"/>
-            </a:endParaRPr>
-          </a:p>
-          <a:p>
-            <a:r>
-              <a:rPr lang="en-US" sz="1800"/>
-              <a:t>see the issue for details on the typos fixed</a:t>
-            </a:r>
-            <a:endParaRPr lang="en-US" sz="1800" dirty="0">
-              <a:ea typeface="Source Sans Pro"/>
-            </a:endParaRPr>
-          </a:p>
-          <a:p>
-            <a:endParaRPr lang="en-US" sz="1800" dirty="0">
-              <a:ea typeface="Source Sans Pro"/>
-            </a:endParaRPr>
-          </a:p>
-          <a:p>
-            <a:r>
-              <a:rPr lang="en-US" sz="1800"/>
-              <a:t>closes issue </a:t>
-            </a:r>
-            <a:r>
-              <a:rPr lang="en-US" sz="1800" dirty="0"/>
-              <a:t>#12</a:t>
-            </a:r>
-            <a:endParaRPr lang="en-US" sz="1800" dirty="0">
-              <a:ea typeface="Source Sans Pro"/>
-            </a:endParaRPr>
-          </a:p>
-          <a:p>
-            <a:pPr algn="ctr"/>
-            <a:endParaRPr lang="en-GB" sz="1800" dirty="0">
-              <a:ea typeface="Source Sans Pro"/>
-            </a:endParaRPr>
-          </a:p>
-        </p:txBody>
-      </p:sp>
       <p:pic>
         <p:nvPicPr>
           <p:cNvPr id="3" name="Picture 2" descr="A cartoon of a robot&#10;&#10;AI-generated content may be incorrect.">
             <a:extLst>
               <a:ext uri="{FF2B5EF4-FFF2-40B4-BE49-F238E27FC236}">
-                <a16:creationId xmlns:a16="http://schemas.microsoft.com/office/drawing/2014/main" id="{BCA01059-F692-C89B-512E-19938EFDF2C2}"/>
+                <a16:creationId xmlns:a16="http://schemas.microsoft.com/office/drawing/2014/main" id="{1FA778CA-1406-57D5-CE84-B781FEAC910A}"/>
               </a:ext>
             </a:extLst>
           </p:cNvPr>
@@ -15513,7 +16292,7 @@
         </p:blipFill>
         <p:spPr>
           <a:xfrm>
-            <a:off x="6851014" y="4115489"/>
+            <a:off x="8331537" y="5696783"/>
             <a:ext cx="1905813" cy="2000250"/>
           </a:xfrm>
           <a:prstGeom prst="rect">
@@ -15527,10 +16306,1134 @@
           </a:effectLst>
         </p:spPr>
       </p:pic>
+      <p:graphicFrame>
+        <p:nvGraphicFramePr>
+          <p:cNvPr id="6" name="Table 5">
+            <a:extLst>
+              <a:ext uri="{FF2B5EF4-FFF2-40B4-BE49-F238E27FC236}">
+                <a16:creationId xmlns:a16="http://schemas.microsoft.com/office/drawing/2014/main" id="{5231721E-7016-21AA-93A4-3F3C624403E5}"/>
+              </a:ext>
+            </a:extLst>
+          </p:cNvPr>
+          <p:cNvGraphicFramePr>
+            <a:graphicFrameLocks noGrp="1"/>
+          </p:cNvGraphicFramePr>
+          <p:nvPr>
+            <p:extLst>
+              <p:ext uri="{D42A27DB-BD31-4B8C-83A1-F6EECF244321}">
+                <p14:modId xmlns:p14="http://schemas.microsoft.com/office/powerpoint/2010/main" val="3044698918"/>
+              </p:ext>
+            </p:extLst>
+          </p:nvPr>
+        </p:nvGraphicFramePr>
+        <p:xfrm>
+          <a:off x="839615" y="1374633"/>
+          <a:ext cx="7491922" cy="1401968"/>
+        </p:xfrm>
+        <a:graphic>
+          <a:graphicData uri="http://schemas.openxmlformats.org/drawingml/2006/table">
+            <a:tbl>
+              <a:tblPr firstRow="1" bandRow="1">
+                <a:tableStyleId>{2D5ABB26-0587-4C30-8999-92F81FD0307C}</a:tableStyleId>
+              </a:tblPr>
+              <a:tblGrid>
+                <a:gridCol w="7491922">
+                  <a:extLst>
+                    <a:ext uri="{9D8B030D-6E8A-4147-A177-3AD203B41FA5}">
+                      <a16:colId xmlns:a16="http://schemas.microsoft.com/office/drawing/2014/main" val="625206413"/>
+                    </a:ext>
+                  </a:extLst>
+                </a:gridCol>
+              </a:tblGrid>
+              <a:tr h="411424">
+                <a:tc>
+                  <a:txBody>
+                    <a:bodyPr/>
+                    <a:lstStyle/>
+                    <a:p>
+                      <a:r>
+                        <a:rPr lang="en-US" sz="1800" b="1" dirty="0">
+                          <a:solidFill>
+                            <a:srgbClr val="FA6673"/>
+                          </a:solidFill>
+                          <a:latin typeface="-apple-system"/>
+                          <a:ea typeface="-apple-system"/>
+                          <a:cs typeface="-apple-system"/>
+                        </a:rPr>
+                        <a:t>Commit message with description and breaking change in body</a:t>
+                      </a:r>
+                    </a:p>
+                  </a:txBody>
+                  <a:tcPr>
+                    <a:lnL w="12700" cap="flat" cmpd="sng" algn="ctr">
+                      <a:noFill/>
+                      <a:prstDash val="solid"/>
+                      <a:round/>
+                      <a:headEnd type="none" w="med" len="med"/>
+                      <a:tailEnd type="none" w="med" len="med"/>
+                    </a:lnL>
+                    <a:lnR w="12700" cap="flat" cmpd="sng" algn="ctr">
+                      <a:noFill/>
+                      <a:prstDash val="solid"/>
+                      <a:round/>
+                      <a:headEnd type="none" w="med" len="med"/>
+                      <a:tailEnd type="none" w="med" len="med"/>
+                    </a:lnR>
+                    <a:lnT w="12700" cap="flat" cmpd="sng" algn="ctr">
+                      <a:noFill/>
+                      <a:prstDash val="solid"/>
+                      <a:round/>
+                      <a:headEnd type="none" w="med" len="med"/>
+                      <a:tailEnd type="none" w="med" len="med"/>
+                    </a:lnT>
+                    <a:lnB w="12700" cap="flat" cmpd="sng" algn="ctr">
+                      <a:noFill/>
+                      <a:prstDash val="solid"/>
+                      <a:round/>
+                      <a:headEnd type="none" w="med" len="med"/>
+                      <a:tailEnd type="none" w="med" len="med"/>
+                    </a:lnB>
+                    <a:lnTlToBr w="12700" cmpd="sng">
+                      <a:noFill/>
+                      <a:prstDash val="solid"/>
+                    </a:lnTlToBr>
+                    <a:lnBlToTr w="12700" cmpd="sng">
+                      <a:noFill/>
+                      <a:prstDash val="solid"/>
+                    </a:lnBlToTr>
+                  </a:tcPr>
+                </a:tc>
+                <a:extLst>
+                  <a:ext uri="{0D108BD9-81ED-4DB2-BD59-A6C34878D82A}">
+                    <a16:rowId xmlns:a16="http://schemas.microsoft.com/office/drawing/2014/main" val="1981924773"/>
+                  </a:ext>
+                </a:extLst>
+              </a:tr>
+              <a:tr h="411424">
+                <a:tc>
+                  <a:txBody>
+                    <a:bodyPr/>
+                    <a:lstStyle/>
+                    <a:p>
+                      <a:pPr algn="l"/>
+                      <a:r>
+                        <a:rPr lang="en-US" sz="1600" b="1" dirty="0"/>
+                        <a:t>feat: </a:t>
+                      </a:r>
+                      <a:r>
+                        <a:rPr lang="en-US" sz="1600" dirty="0"/>
+                        <a:t>allow provided config object to extend other configs</a:t>
+                      </a:r>
+                      <a:endParaRPr lang="en-US" sz="1600" dirty="0">
+                        <a:solidFill>
+                          <a:srgbClr val="24292E"/>
+                        </a:solidFill>
+                      </a:endParaRPr>
+                    </a:p>
+                  </a:txBody>
+                  <a:tcPr>
+                    <a:lnL w="12700" cap="flat" cmpd="sng" algn="ctr">
+                      <a:noFill/>
+                      <a:prstDash val="solid"/>
+                      <a:round/>
+                      <a:headEnd type="none" w="med" len="med"/>
+                      <a:tailEnd type="none" w="med" len="med"/>
+                    </a:lnL>
+                    <a:lnR w="12700" cap="flat" cmpd="sng" algn="ctr">
+                      <a:noFill/>
+                      <a:prstDash val="solid"/>
+                      <a:round/>
+                      <a:headEnd type="none" w="med" len="med"/>
+                      <a:tailEnd type="none" w="med" len="med"/>
+                    </a:lnR>
+                    <a:lnT w="12700" cap="flat" cmpd="sng" algn="ctr">
+                      <a:noFill/>
+                      <a:prstDash val="solid"/>
+                      <a:round/>
+                      <a:headEnd type="none" w="med" len="med"/>
+                      <a:tailEnd type="none" w="med" len="med"/>
+                    </a:lnT>
+                    <a:lnB>
+                      <a:noFill/>
+                    </a:lnB>
+                    <a:lnTlToBr w="12700" cmpd="sng">
+                      <a:noFill/>
+                      <a:prstDash val="solid"/>
+                    </a:lnTlToBr>
+                    <a:lnBlToTr w="12700" cmpd="sng">
+                      <a:noFill/>
+                      <a:prstDash val="solid"/>
+                    </a:lnBlToTr>
+                    <a:solidFill>
+                      <a:schemeClr val="bg1">
+                        <a:lumMod val="95000"/>
+                      </a:schemeClr>
+                    </a:solidFill>
+                  </a:tcPr>
+                </a:tc>
+                <a:extLst>
+                  <a:ext uri="{0D108BD9-81ED-4DB2-BD59-A6C34878D82A}">
+                    <a16:rowId xmlns:a16="http://schemas.microsoft.com/office/drawing/2014/main" val="3224144256"/>
+                  </a:ext>
+                </a:extLst>
+              </a:tr>
+              <a:tr h="487242">
+                <a:tc>
+                  <a:txBody>
+                    <a:bodyPr/>
+                    <a:lstStyle/>
+                    <a:p>
+                      <a:pPr marL="0" marR="0" lvl="0" indent="0" algn="l" defTabSz="754380" rtl="0" eaLnBrk="1" fontAlgn="auto" latinLnBrk="0" hangingPunct="1">
+                        <a:lnSpc>
+                          <a:spcPct val="100000"/>
+                        </a:lnSpc>
+                        <a:spcBef>
+                          <a:spcPts val="0"/>
+                        </a:spcBef>
+                        <a:spcAft>
+                          <a:spcPts val="0"/>
+                        </a:spcAft>
+                        <a:buClrTx/>
+                        <a:buSzTx/>
+                        <a:buFontTx/>
+                        <a:buNone/>
+                        <a:tabLst/>
+                        <a:defRPr/>
+                      </a:pPr>
+                      <a:r>
+                        <a:rPr lang="en-US" sz="1600" b="1" dirty="0"/>
+                        <a:t>BREAKING CHANGE: </a:t>
+                      </a:r>
+                      <a:r>
+                        <a:rPr lang="en-US" sz="1600" dirty="0"/>
+                        <a:t>`extends` key in config file is now used for extending other config files</a:t>
+                      </a:r>
+                      <a:endParaRPr lang="en-US" sz="1600" b="0" dirty="0">
+                        <a:solidFill>
+                          <a:srgbClr val="24292E"/>
+                        </a:solidFill>
+                      </a:endParaRPr>
+                    </a:p>
+                  </a:txBody>
+                  <a:tcPr>
+                    <a:lnL w="12700" cap="flat" cmpd="sng" algn="ctr">
+                      <a:noFill/>
+                      <a:prstDash val="solid"/>
+                      <a:round/>
+                      <a:headEnd type="none" w="med" len="med"/>
+                      <a:tailEnd type="none" w="med" len="med"/>
+                    </a:lnL>
+                    <a:lnR w="12700" cap="flat" cmpd="sng" algn="ctr">
+                      <a:noFill/>
+                      <a:prstDash val="solid"/>
+                      <a:round/>
+                      <a:headEnd type="none" w="med" len="med"/>
+                      <a:tailEnd type="none" w="med" len="med"/>
+                    </a:lnR>
+                    <a:lnT>
+                      <a:noFill/>
+                    </a:lnT>
+                    <a:lnB w="12700" cap="flat" cmpd="sng" algn="ctr">
+                      <a:noFill/>
+                      <a:prstDash val="solid"/>
+                      <a:round/>
+                      <a:headEnd type="none" w="med" len="med"/>
+                      <a:tailEnd type="none" w="med" len="med"/>
+                    </a:lnB>
+                    <a:lnTlToBr w="12700" cmpd="sng">
+                      <a:noFill/>
+                      <a:prstDash val="solid"/>
+                    </a:lnTlToBr>
+                    <a:lnBlToTr w="12700" cmpd="sng">
+                      <a:noFill/>
+                      <a:prstDash val="solid"/>
+                    </a:lnBlToTr>
+                    <a:solidFill>
+                      <a:schemeClr val="bg1">
+                        <a:lumMod val="95000"/>
+                      </a:schemeClr>
+                    </a:solidFill>
+                  </a:tcPr>
+                </a:tc>
+                <a:extLst>
+                  <a:ext uri="{0D108BD9-81ED-4DB2-BD59-A6C34878D82A}">
+                    <a16:rowId xmlns:a16="http://schemas.microsoft.com/office/drawing/2014/main" val="3173293429"/>
+                  </a:ext>
+                </a:extLst>
+              </a:tr>
+            </a:tbl>
+          </a:graphicData>
+        </a:graphic>
+      </p:graphicFrame>
+      <p:graphicFrame>
+        <p:nvGraphicFramePr>
+          <p:cNvPr id="11" name="Table 10">
+            <a:extLst>
+              <a:ext uri="{FF2B5EF4-FFF2-40B4-BE49-F238E27FC236}">
+                <a16:creationId xmlns:a16="http://schemas.microsoft.com/office/drawing/2014/main" id="{6AC3A134-3BA1-A78A-919F-DEC349BEEB18}"/>
+              </a:ext>
+            </a:extLst>
+          </p:cNvPr>
+          <p:cNvGraphicFramePr>
+            <a:graphicFrameLocks noGrp="1"/>
+          </p:cNvGraphicFramePr>
+          <p:nvPr>
+            <p:extLst>
+              <p:ext uri="{D42A27DB-BD31-4B8C-83A1-F6EECF244321}">
+                <p14:modId xmlns:p14="http://schemas.microsoft.com/office/powerpoint/2010/main" val="1415219970"/>
+              </p:ext>
+            </p:extLst>
+          </p:nvPr>
+        </p:nvGraphicFramePr>
+        <p:xfrm>
+          <a:off x="839615" y="2784073"/>
+          <a:ext cx="7491922" cy="1310090"/>
+        </p:xfrm>
+        <a:graphic>
+          <a:graphicData uri="http://schemas.openxmlformats.org/drawingml/2006/table">
+            <a:tbl>
+              <a:tblPr firstRow="1" bandRow="1">
+                <a:tableStyleId>{2D5ABB26-0587-4C30-8999-92F81FD0307C}</a:tableStyleId>
+              </a:tblPr>
+              <a:tblGrid>
+                <a:gridCol w="7491922">
+                  <a:extLst>
+                    <a:ext uri="{9D8B030D-6E8A-4147-A177-3AD203B41FA5}">
+                      <a16:colId xmlns:a16="http://schemas.microsoft.com/office/drawing/2014/main" val="625206413"/>
+                    </a:ext>
+                  </a:extLst>
+                </a:gridCol>
+              </a:tblGrid>
+              <a:tr h="411424">
+                <a:tc>
+                  <a:txBody>
+                    <a:bodyPr/>
+                    <a:lstStyle/>
+                    <a:p>
+                      <a:r>
+                        <a:rPr lang="en-US" sz="1800" b="1" dirty="0">
+                          <a:solidFill>
+                            <a:srgbClr val="FA6673"/>
+                          </a:solidFill>
+                          <a:latin typeface="-apple-system"/>
+                          <a:ea typeface="-apple-system"/>
+                          <a:cs typeface="-apple-system"/>
+                        </a:rPr>
+                        <a:t>Commit message with optional ! to draw attention to breaking change</a:t>
+                      </a:r>
+                      <a:endParaRPr lang="en-US" sz="1800" dirty="0"/>
+                    </a:p>
+                  </a:txBody>
+                  <a:tcPr>
+                    <a:lnL w="12700" cap="flat" cmpd="sng" algn="ctr">
+                      <a:noFill/>
+                      <a:prstDash val="solid"/>
+                      <a:round/>
+                      <a:headEnd type="none" w="med" len="med"/>
+                      <a:tailEnd type="none" w="med" len="med"/>
+                    </a:lnL>
+                    <a:lnR w="12700" cap="flat" cmpd="sng" algn="ctr">
+                      <a:noFill/>
+                      <a:prstDash val="solid"/>
+                      <a:round/>
+                      <a:headEnd type="none" w="med" len="med"/>
+                      <a:tailEnd type="none" w="med" len="med"/>
+                    </a:lnR>
+                    <a:lnT w="12700" cap="flat" cmpd="sng" algn="ctr">
+                      <a:noFill/>
+                      <a:prstDash val="solid"/>
+                      <a:round/>
+                      <a:headEnd type="none" w="med" len="med"/>
+                      <a:tailEnd type="none" w="med" len="med"/>
+                    </a:lnT>
+                    <a:lnB w="12700" cap="flat" cmpd="sng" algn="ctr">
+                      <a:noFill/>
+                      <a:prstDash val="solid"/>
+                      <a:round/>
+                      <a:headEnd type="none" w="med" len="med"/>
+                      <a:tailEnd type="none" w="med" len="med"/>
+                    </a:lnB>
+                    <a:lnTlToBr w="12700" cmpd="sng">
+                      <a:noFill/>
+                      <a:prstDash val="solid"/>
+                    </a:lnTlToBr>
+                    <a:lnBlToTr w="12700" cmpd="sng">
+                      <a:noFill/>
+                      <a:prstDash val="solid"/>
+                    </a:lnBlToTr>
+                  </a:tcPr>
+                </a:tc>
+                <a:extLst>
+                  <a:ext uri="{0D108BD9-81ED-4DB2-BD59-A6C34878D82A}">
+                    <a16:rowId xmlns:a16="http://schemas.microsoft.com/office/drawing/2014/main" val="1981924773"/>
+                  </a:ext>
+                </a:extLst>
+              </a:tr>
+              <a:tr h="411424">
+                <a:tc>
+                  <a:txBody>
+                    <a:bodyPr/>
+                    <a:lstStyle/>
+                    <a:p>
+                      <a:pPr algn="l"/>
+                      <a:r>
+                        <a:rPr lang="en-US" sz="1600" b="1" dirty="0"/>
+                        <a:t>chore</a:t>
+                      </a:r>
+                      <a:r>
+                        <a:rPr lang="en-US" sz="1600" dirty="0"/>
+                        <a:t>!: drop Node 6 from testing matrix</a:t>
+                      </a:r>
+                      <a:endParaRPr lang="en-US" sz="1600" dirty="0">
+                        <a:ea typeface="Source Sans Pro"/>
+                      </a:endParaRPr>
+                    </a:p>
+                  </a:txBody>
+                  <a:tcPr>
+                    <a:lnL w="12700" cap="flat" cmpd="sng" algn="ctr">
+                      <a:noFill/>
+                      <a:prstDash val="solid"/>
+                      <a:round/>
+                      <a:headEnd type="none" w="med" len="med"/>
+                      <a:tailEnd type="none" w="med" len="med"/>
+                    </a:lnL>
+                    <a:lnR w="12700" cap="flat" cmpd="sng" algn="ctr">
+                      <a:noFill/>
+                      <a:prstDash val="solid"/>
+                      <a:round/>
+                      <a:headEnd type="none" w="med" len="med"/>
+                      <a:tailEnd type="none" w="med" len="med"/>
+                    </a:lnR>
+                    <a:lnT w="12700" cap="flat" cmpd="sng" algn="ctr">
+                      <a:noFill/>
+                      <a:prstDash val="solid"/>
+                      <a:round/>
+                      <a:headEnd type="none" w="med" len="med"/>
+                      <a:tailEnd type="none" w="med" len="med"/>
+                    </a:lnT>
+                    <a:lnB>
+                      <a:noFill/>
+                    </a:lnB>
+                    <a:lnTlToBr w="12700" cmpd="sng">
+                      <a:noFill/>
+                      <a:prstDash val="solid"/>
+                    </a:lnTlToBr>
+                    <a:lnBlToTr w="12700" cmpd="sng">
+                      <a:noFill/>
+                      <a:prstDash val="solid"/>
+                    </a:lnBlToTr>
+                    <a:solidFill>
+                      <a:schemeClr val="bg1">
+                        <a:lumMod val="95000"/>
+                      </a:schemeClr>
+                    </a:solidFill>
+                  </a:tcPr>
+                </a:tc>
+                <a:extLst>
+                  <a:ext uri="{0D108BD9-81ED-4DB2-BD59-A6C34878D82A}">
+                    <a16:rowId xmlns:a16="http://schemas.microsoft.com/office/drawing/2014/main" val="3224144256"/>
+                  </a:ext>
+                </a:extLst>
+              </a:tr>
+              <a:tr h="487242">
+                <a:tc>
+                  <a:txBody>
+                    <a:bodyPr/>
+                    <a:lstStyle/>
+                    <a:p>
+                      <a:pPr algn="l"/>
+                      <a:r>
+                        <a:rPr lang="en-US" sz="1600" b="1" dirty="0"/>
+                        <a:t>BREAKING CHANGE: </a:t>
+                      </a:r>
+                      <a:r>
+                        <a:rPr lang="en-US" sz="1600" dirty="0"/>
+                        <a:t>dropping Node 6 which hits end of life in April</a:t>
+                      </a:r>
+                      <a:endParaRPr lang="en-US" sz="1600" b="0" dirty="0">
+                        <a:solidFill>
+                          <a:srgbClr val="24292E"/>
+                        </a:solidFill>
+                      </a:endParaRPr>
+                    </a:p>
+                  </a:txBody>
+                  <a:tcPr>
+                    <a:lnL w="12700" cap="flat" cmpd="sng" algn="ctr">
+                      <a:noFill/>
+                      <a:prstDash val="solid"/>
+                      <a:round/>
+                      <a:headEnd type="none" w="med" len="med"/>
+                      <a:tailEnd type="none" w="med" len="med"/>
+                    </a:lnL>
+                    <a:lnR w="12700" cap="flat" cmpd="sng" algn="ctr">
+                      <a:noFill/>
+                      <a:prstDash val="solid"/>
+                      <a:round/>
+                      <a:headEnd type="none" w="med" len="med"/>
+                      <a:tailEnd type="none" w="med" len="med"/>
+                    </a:lnR>
+                    <a:lnT>
+                      <a:noFill/>
+                    </a:lnT>
+                    <a:lnB w="12700" cap="flat" cmpd="sng" algn="ctr">
+                      <a:noFill/>
+                      <a:prstDash val="solid"/>
+                      <a:round/>
+                      <a:headEnd type="none" w="med" len="med"/>
+                      <a:tailEnd type="none" w="med" len="med"/>
+                    </a:lnB>
+                    <a:lnTlToBr w="12700" cmpd="sng">
+                      <a:noFill/>
+                      <a:prstDash val="solid"/>
+                    </a:lnTlToBr>
+                    <a:lnBlToTr w="12700" cmpd="sng">
+                      <a:noFill/>
+                      <a:prstDash val="solid"/>
+                    </a:lnBlToTr>
+                    <a:solidFill>
+                      <a:schemeClr val="bg1">
+                        <a:lumMod val="95000"/>
+                      </a:schemeClr>
+                    </a:solidFill>
+                  </a:tcPr>
+                </a:tc>
+                <a:extLst>
+                  <a:ext uri="{0D108BD9-81ED-4DB2-BD59-A6C34878D82A}">
+                    <a16:rowId xmlns:a16="http://schemas.microsoft.com/office/drawing/2014/main" val="3173293429"/>
+                  </a:ext>
+                </a:extLst>
+              </a:tr>
+            </a:tbl>
+          </a:graphicData>
+        </a:graphic>
+      </p:graphicFrame>
+      <p:graphicFrame>
+        <p:nvGraphicFramePr>
+          <p:cNvPr id="7" name="Table 6">
+            <a:extLst>
+              <a:ext uri="{FF2B5EF4-FFF2-40B4-BE49-F238E27FC236}">
+                <a16:creationId xmlns:a16="http://schemas.microsoft.com/office/drawing/2014/main" id="{4693DC1A-0D50-2C51-27D6-EF980BE8AB6B}"/>
+              </a:ext>
+            </a:extLst>
+          </p:cNvPr>
+          <p:cNvGraphicFramePr>
+            <a:graphicFrameLocks noGrp="1"/>
+          </p:cNvGraphicFramePr>
+          <p:nvPr>
+            <p:extLst>
+              <p:ext uri="{D42A27DB-BD31-4B8C-83A1-F6EECF244321}">
+                <p14:modId xmlns:p14="http://schemas.microsoft.com/office/powerpoint/2010/main" val="2085766310"/>
+              </p:ext>
+            </p:extLst>
+          </p:nvPr>
+        </p:nvGraphicFramePr>
+        <p:xfrm>
+          <a:off x="839615" y="5404253"/>
+          <a:ext cx="7491922" cy="822848"/>
+        </p:xfrm>
+        <a:graphic>
+          <a:graphicData uri="http://schemas.openxmlformats.org/drawingml/2006/table">
+            <a:tbl>
+              <a:tblPr firstRow="1" bandRow="1">
+                <a:tableStyleId>{2D5ABB26-0587-4C30-8999-92F81FD0307C}</a:tableStyleId>
+              </a:tblPr>
+              <a:tblGrid>
+                <a:gridCol w="7491922">
+                  <a:extLst>
+                    <a:ext uri="{9D8B030D-6E8A-4147-A177-3AD203B41FA5}">
+                      <a16:colId xmlns:a16="http://schemas.microsoft.com/office/drawing/2014/main" val="625206413"/>
+                    </a:ext>
+                  </a:extLst>
+                </a:gridCol>
+              </a:tblGrid>
+              <a:tr h="411424">
+                <a:tc>
+                  <a:txBody>
+                    <a:bodyPr/>
+                    <a:lstStyle/>
+                    <a:p>
+                      <a:r>
+                        <a:rPr lang="en-US" sz="1800" b="1" dirty="0">
+                          <a:solidFill>
+                            <a:srgbClr val="FA6673"/>
+                          </a:solidFill>
+                          <a:latin typeface="-apple-system"/>
+                          <a:ea typeface="-apple-system"/>
+                          <a:cs typeface="-apple-system"/>
+                        </a:rPr>
+                        <a:t>Commit message with scope</a:t>
+                      </a:r>
+                    </a:p>
+                  </a:txBody>
+                  <a:tcPr>
+                    <a:lnL w="12700" cap="flat" cmpd="sng" algn="ctr">
+                      <a:noFill/>
+                      <a:prstDash val="solid"/>
+                      <a:round/>
+                      <a:headEnd type="none" w="med" len="med"/>
+                      <a:tailEnd type="none" w="med" len="med"/>
+                    </a:lnL>
+                    <a:lnR w="12700" cap="flat" cmpd="sng" algn="ctr">
+                      <a:noFill/>
+                      <a:prstDash val="solid"/>
+                      <a:round/>
+                      <a:headEnd type="none" w="med" len="med"/>
+                      <a:tailEnd type="none" w="med" len="med"/>
+                    </a:lnR>
+                    <a:lnT w="12700" cap="flat" cmpd="sng" algn="ctr">
+                      <a:noFill/>
+                      <a:prstDash val="solid"/>
+                      <a:round/>
+                      <a:headEnd type="none" w="med" len="med"/>
+                      <a:tailEnd type="none" w="med" len="med"/>
+                    </a:lnT>
+                    <a:lnB w="12700" cap="flat" cmpd="sng" algn="ctr">
+                      <a:noFill/>
+                      <a:prstDash val="solid"/>
+                      <a:round/>
+                      <a:headEnd type="none" w="med" len="med"/>
+                      <a:tailEnd type="none" w="med" len="med"/>
+                    </a:lnB>
+                    <a:lnTlToBr w="12700" cmpd="sng">
+                      <a:noFill/>
+                      <a:prstDash val="solid"/>
+                    </a:lnTlToBr>
+                    <a:lnBlToTr w="12700" cmpd="sng">
+                      <a:noFill/>
+                      <a:prstDash val="solid"/>
+                    </a:lnBlToTr>
+                  </a:tcPr>
+                </a:tc>
+                <a:extLst>
+                  <a:ext uri="{0D108BD9-81ED-4DB2-BD59-A6C34878D82A}">
+                    <a16:rowId xmlns:a16="http://schemas.microsoft.com/office/drawing/2014/main" val="1981924773"/>
+                  </a:ext>
+                </a:extLst>
+              </a:tr>
+              <a:tr h="411424">
+                <a:tc>
+                  <a:txBody>
+                    <a:bodyPr/>
+                    <a:lstStyle/>
+                    <a:p>
+                      <a:pPr algn="l"/>
+                      <a:r>
+                        <a:rPr lang="en-US" sz="1600" b="1" dirty="0"/>
+                        <a:t>feat</a:t>
+                      </a:r>
+                      <a:r>
+                        <a:rPr lang="en-US" sz="1600" b="0" dirty="0"/>
+                        <a:t>(lang): </a:t>
+                      </a:r>
+                      <a:r>
+                        <a:rPr lang="en-US" sz="1600" dirty="0"/>
+                        <a:t>add polish language</a:t>
+                      </a:r>
+                      <a:endParaRPr lang="en-US" sz="1600" dirty="0">
+                        <a:solidFill>
+                          <a:srgbClr val="24292E"/>
+                        </a:solidFill>
+                      </a:endParaRPr>
+                    </a:p>
+                  </a:txBody>
+                  <a:tcPr>
+                    <a:lnL w="12700" cap="flat" cmpd="sng" algn="ctr">
+                      <a:noFill/>
+                      <a:prstDash val="solid"/>
+                      <a:round/>
+                      <a:headEnd type="none" w="med" len="med"/>
+                      <a:tailEnd type="none" w="med" len="med"/>
+                    </a:lnL>
+                    <a:lnR w="12700" cap="flat" cmpd="sng" algn="ctr">
+                      <a:noFill/>
+                      <a:prstDash val="solid"/>
+                      <a:round/>
+                      <a:headEnd type="none" w="med" len="med"/>
+                      <a:tailEnd type="none" w="med" len="med"/>
+                    </a:lnR>
+                    <a:lnT w="12700" cap="flat" cmpd="sng" algn="ctr">
+                      <a:noFill/>
+                      <a:prstDash val="solid"/>
+                      <a:round/>
+                      <a:headEnd type="none" w="med" len="med"/>
+                      <a:tailEnd type="none" w="med" len="med"/>
+                    </a:lnT>
+                    <a:lnB w="12700" cap="flat" cmpd="sng" algn="ctr">
+                      <a:noFill/>
+                      <a:prstDash val="solid"/>
+                      <a:round/>
+                      <a:headEnd type="none" w="med" len="med"/>
+                      <a:tailEnd type="none" w="med" len="med"/>
+                    </a:lnB>
+                    <a:lnTlToBr w="12700" cmpd="sng">
+                      <a:noFill/>
+                      <a:prstDash val="solid"/>
+                    </a:lnTlToBr>
+                    <a:lnBlToTr w="12700" cmpd="sng">
+                      <a:noFill/>
+                      <a:prstDash val="solid"/>
+                    </a:lnBlToTr>
+                    <a:solidFill>
+                      <a:schemeClr val="bg1">
+                        <a:lumMod val="95000"/>
+                      </a:schemeClr>
+                    </a:solidFill>
+                  </a:tcPr>
+                </a:tc>
+                <a:extLst>
+                  <a:ext uri="{0D108BD9-81ED-4DB2-BD59-A6C34878D82A}">
+                    <a16:rowId xmlns:a16="http://schemas.microsoft.com/office/drawing/2014/main" val="3224144256"/>
+                  </a:ext>
+                </a:extLst>
+              </a:tr>
+            </a:tbl>
+          </a:graphicData>
+        </a:graphic>
+      </p:graphicFrame>
+      <p:graphicFrame>
+        <p:nvGraphicFramePr>
+          <p:cNvPr id="9" name="Table 8">
+            <a:extLst>
+              <a:ext uri="{FF2B5EF4-FFF2-40B4-BE49-F238E27FC236}">
+                <a16:creationId xmlns:a16="http://schemas.microsoft.com/office/drawing/2014/main" id="{D853AB10-B7AB-A5EF-DD4B-EE08B9BDC40F}"/>
+              </a:ext>
+            </a:extLst>
+          </p:cNvPr>
+          <p:cNvGraphicFramePr>
+            <a:graphicFrameLocks noGrp="1"/>
+          </p:cNvGraphicFramePr>
+          <p:nvPr>
+            <p:extLst>
+              <p:ext uri="{D42A27DB-BD31-4B8C-83A1-F6EECF244321}">
+                <p14:modId xmlns:p14="http://schemas.microsoft.com/office/powerpoint/2010/main" val="988944377"/>
+              </p:ext>
+            </p:extLst>
+          </p:nvPr>
+        </p:nvGraphicFramePr>
+        <p:xfrm>
+          <a:off x="839615" y="6233980"/>
+          <a:ext cx="7491922" cy="1234384"/>
+        </p:xfrm>
+        <a:graphic>
+          <a:graphicData uri="http://schemas.openxmlformats.org/drawingml/2006/table">
+            <a:tbl>
+              <a:tblPr firstRow="1" bandRow="1">
+                <a:tableStyleId>{2D5ABB26-0587-4C30-8999-92F81FD0307C}</a:tableStyleId>
+              </a:tblPr>
+              <a:tblGrid>
+                <a:gridCol w="7491922">
+                  <a:extLst>
+                    <a:ext uri="{9D8B030D-6E8A-4147-A177-3AD203B41FA5}">
+                      <a16:colId xmlns:a16="http://schemas.microsoft.com/office/drawing/2014/main" val="625206413"/>
+                    </a:ext>
+                  </a:extLst>
+                </a:gridCol>
+              </a:tblGrid>
+              <a:tr h="411424">
+                <a:tc>
+                  <a:txBody>
+                    <a:bodyPr/>
+                    <a:lstStyle/>
+                    <a:p>
+                      <a:r>
+                        <a:rPr lang="en-US" sz="1800" b="1" dirty="0">
+                          <a:solidFill>
+                            <a:srgbClr val="FA6673"/>
+                          </a:solidFill>
+                          <a:latin typeface="-apple-system"/>
+                        </a:rPr>
+                        <a:t>Commit</a:t>
+                      </a:r>
+                      <a:r>
+                        <a:rPr lang="en-US" sz="1800" b="1" dirty="0">
+                          <a:solidFill>
+                            <a:srgbClr val="FA6673"/>
+                          </a:solidFill>
+                          <a:latin typeface="-apple-system"/>
+                          <a:ea typeface="-apple-system"/>
+                          <a:cs typeface="-apple-system"/>
+                        </a:rPr>
+                        <a:t> message for a fix using an (optional) issue number.</a:t>
+                      </a:r>
+                    </a:p>
+                  </a:txBody>
+                  <a:tcPr>
+                    <a:lnL w="12700" cap="flat" cmpd="sng" algn="ctr">
+                      <a:noFill/>
+                      <a:prstDash val="solid"/>
+                      <a:round/>
+                      <a:headEnd type="none" w="med" len="med"/>
+                      <a:tailEnd type="none" w="med" len="med"/>
+                    </a:lnL>
+                    <a:lnR w="12700" cap="flat" cmpd="sng" algn="ctr">
+                      <a:noFill/>
+                      <a:prstDash val="solid"/>
+                      <a:round/>
+                      <a:headEnd type="none" w="med" len="med"/>
+                      <a:tailEnd type="none" w="med" len="med"/>
+                    </a:lnR>
+                    <a:lnT w="12700" cap="flat" cmpd="sng" algn="ctr">
+                      <a:noFill/>
+                      <a:prstDash val="solid"/>
+                      <a:round/>
+                      <a:headEnd type="none" w="med" len="med"/>
+                      <a:tailEnd type="none" w="med" len="med"/>
+                    </a:lnT>
+                    <a:lnB w="12700" cap="flat" cmpd="sng" algn="ctr">
+                      <a:noFill/>
+                      <a:prstDash val="solid"/>
+                      <a:round/>
+                      <a:headEnd type="none" w="med" len="med"/>
+                      <a:tailEnd type="none" w="med" len="med"/>
+                    </a:lnB>
+                    <a:lnTlToBr w="12700" cmpd="sng">
+                      <a:noFill/>
+                      <a:prstDash val="solid"/>
+                    </a:lnTlToBr>
+                    <a:lnBlToTr w="12700" cmpd="sng">
+                      <a:noFill/>
+                      <a:prstDash val="solid"/>
+                    </a:lnBlToTr>
+                  </a:tcPr>
+                </a:tc>
+                <a:extLst>
+                  <a:ext uri="{0D108BD9-81ED-4DB2-BD59-A6C34878D82A}">
+                    <a16:rowId xmlns:a16="http://schemas.microsoft.com/office/drawing/2014/main" val="1981924773"/>
+                  </a:ext>
+                </a:extLst>
+              </a:tr>
+              <a:tr h="411424">
+                <a:tc>
+                  <a:txBody>
+                    <a:bodyPr/>
+                    <a:lstStyle/>
+                    <a:p>
+                      <a:pPr algn="l"/>
+                      <a:r>
+                        <a:rPr lang="en-US" sz="1600" b="1" dirty="0"/>
+                        <a:t>fix: </a:t>
+                      </a:r>
+                      <a:r>
+                        <a:rPr lang="en-US" sz="1600" dirty="0"/>
+                        <a:t>correct minor typos in code</a:t>
+                      </a:r>
+                    </a:p>
+                    <a:p>
+                      <a:r>
+                        <a:rPr lang="en-US" sz="1600" dirty="0"/>
+                        <a:t>see the issue for details on the typos fixed</a:t>
+                      </a:r>
+                      <a:endParaRPr lang="en-US" sz="1600" dirty="0">
+                        <a:ea typeface="Source Sans Pro"/>
+                      </a:endParaRPr>
+                    </a:p>
+                    <a:p>
+                      <a:r>
+                        <a:rPr lang="en-US" sz="1600" dirty="0"/>
+                        <a:t>closes issue #12</a:t>
+                      </a:r>
+                      <a:endParaRPr lang="en-US" sz="1600" dirty="0">
+                        <a:ea typeface="Source Sans Pro"/>
+                      </a:endParaRPr>
+                    </a:p>
+                  </a:txBody>
+                  <a:tcPr>
+                    <a:lnL w="12700" cap="flat" cmpd="sng" algn="ctr">
+                      <a:noFill/>
+                      <a:prstDash val="solid"/>
+                      <a:round/>
+                      <a:headEnd type="none" w="med" len="med"/>
+                      <a:tailEnd type="none" w="med" len="med"/>
+                    </a:lnL>
+                    <a:lnR w="12700" cap="flat" cmpd="sng" algn="ctr">
+                      <a:noFill/>
+                      <a:prstDash val="solid"/>
+                      <a:round/>
+                      <a:headEnd type="none" w="med" len="med"/>
+                      <a:tailEnd type="none" w="med" len="med"/>
+                    </a:lnR>
+                    <a:lnT w="12700" cap="flat" cmpd="sng" algn="ctr">
+                      <a:noFill/>
+                      <a:prstDash val="solid"/>
+                      <a:round/>
+                      <a:headEnd type="none" w="med" len="med"/>
+                      <a:tailEnd type="none" w="med" len="med"/>
+                    </a:lnT>
+                    <a:lnB w="12700" cap="flat" cmpd="sng" algn="ctr">
+                      <a:noFill/>
+                      <a:prstDash val="solid"/>
+                      <a:round/>
+                      <a:headEnd type="none" w="med" len="med"/>
+                      <a:tailEnd type="none" w="med" len="med"/>
+                    </a:lnB>
+                    <a:lnTlToBr w="12700" cmpd="sng">
+                      <a:noFill/>
+                      <a:prstDash val="solid"/>
+                    </a:lnTlToBr>
+                    <a:lnBlToTr w="12700" cmpd="sng">
+                      <a:noFill/>
+                      <a:prstDash val="solid"/>
+                    </a:lnBlToTr>
+                    <a:solidFill>
+                      <a:schemeClr val="bg1">
+                        <a:lumMod val="95000"/>
+                      </a:schemeClr>
+                    </a:solidFill>
+                  </a:tcPr>
+                </a:tc>
+                <a:extLst>
+                  <a:ext uri="{0D108BD9-81ED-4DB2-BD59-A6C34878D82A}">
+                    <a16:rowId xmlns:a16="http://schemas.microsoft.com/office/drawing/2014/main" val="3224144256"/>
+                  </a:ext>
+                </a:extLst>
+              </a:tr>
+            </a:tbl>
+          </a:graphicData>
+        </a:graphic>
+      </p:graphicFrame>
+      <p:graphicFrame>
+        <p:nvGraphicFramePr>
+          <p:cNvPr id="10" name="Table 9">
+            <a:extLst>
+              <a:ext uri="{FF2B5EF4-FFF2-40B4-BE49-F238E27FC236}">
+                <a16:creationId xmlns:a16="http://schemas.microsoft.com/office/drawing/2014/main" id="{263CF8B6-F9A5-4982-D5FB-E3D5806C68CC}"/>
+              </a:ext>
+            </a:extLst>
+          </p:cNvPr>
+          <p:cNvGraphicFramePr>
+            <a:graphicFrameLocks noGrp="1"/>
+          </p:cNvGraphicFramePr>
+          <p:nvPr>
+            <p:extLst>
+              <p:ext uri="{D42A27DB-BD31-4B8C-83A1-F6EECF244321}">
+                <p14:modId xmlns:p14="http://schemas.microsoft.com/office/powerpoint/2010/main" val="1077106233"/>
+              </p:ext>
+            </p:extLst>
+          </p:nvPr>
+        </p:nvGraphicFramePr>
+        <p:xfrm>
+          <a:off x="839615" y="4066448"/>
+          <a:ext cx="7491922" cy="1310090"/>
+        </p:xfrm>
+        <a:graphic>
+          <a:graphicData uri="http://schemas.openxmlformats.org/drawingml/2006/table">
+            <a:tbl>
+              <a:tblPr firstRow="1" bandRow="1">
+                <a:tableStyleId>{2D5ABB26-0587-4C30-8999-92F81FD0307C}</a:tableStyleId>
+              </a:tblPr>
+              <a:tblGrid>
+                <a:gridCol w="7491922">
+                  <a:extLst>
+                    <a:ext uri="{9D8B030D-6E8A-4147-A177-3AD203B41FA5}">
+                      <a16:colId xmlns:a16="http://schemas.microsoft.com/office/drawing/2014/main" val="625206413"/>
+                    </a:ext>
+                  </a:extLst>
+                </a:gridCol>
+              </a:tblGrid>
+              <a:tr h="411424">
+                <a:tc>
+                  <a:txBody>
+                    <a:bodyPr/>
+                    <a:lstStyle/>
+                    <a:p>
+                      <a:r>
+                        <a:rPr lang="en-US" sz="1800" b="1" dirty="0">
+                          <a:solidFill>
+                            <a:srgbClr val="FA6673"/>
+                          </a:solidFill>
+                          <a:latin typeface="-apple-system"/>
+                          <a:ea typeface="-apple-system"/>
+                          <a:cs typeface="-apple-system"/>
+                        </a:rPr>
+                        <a:t>Commit message with no body</a:t>
+                      </a:r>
+                      <a:endParaRPr lang="en-US" sz="1800" dirty="0"/>
+                    </a:p>
+                  </a:txBody>
+                  <a:tcPr>
+                    <a:lnL w="12700" cap="flat" cmpd="sng" algn="ctr">
+                      <a:noFill/>
+                      <a:prstDash val="solid"/>
+                      <a:round/>
+                      <a:headEnd type="none" w="med" len="med"/>
+                      <a:tailEnd type="none" w="med" len="med"/>
+                    </a:lnL>
+                    <a:lnR w="12700" cap="flat" cmpd="sng" algn="ctr">
+                      <a:noFill/>
+                      <a:prstDash val="solid"/>
+                      <a:round/>
+                      <a:headEnd type="none" w="med" len="med"/>
+                      <a:tailEnd type="none" w="med" len="med"/>
+                    </a:lnR>
+                    <a:lnT w="12700" cap="flat" cmpd="sng" algn="ctr">
+                      <a:noFill/>
+                      <a:prstDash val="solid"/>
+                      <a:round/>
+                      <a:headEnd type="none" w="med" len="med"/>
+                      <a:tailEnd type="none" w="med" len="med"/>
+                    </a:lnT>
+                    <a:lnB w="12700" cap="flat" cmpd="sng" algn="ctr">
+                      <a:noFill/>
+                      <a:prstDash val="solid"/>
+                      <a:round/>
+                      <a:headEnd type="none" w="med" len="med"/>
+                      <a:tailEnd type="none" w="med" len="med"/>
+                    </a:lnB>
+                    <a:lnTlToBr w="12700" cmpd="sng">
+                      <a:noFill/>
+                      <a:prstDash val="solid"/>
+                    </a:lnTlToBr>
+                    <a:lnBlToTr w="12700" cmpd="sng">
+                      <a:noFill/>
+                      <a:prstDash val="solid"/>
+                    </a:lnBlToTr>
+                  </a:tcPr>
+                </a:tc>
+                <a:extLst>
+                  <a:ext uri="{0D108BD9-81ED-4DB2-BD59-A6C34878D82A}">
+                    <a16:rowId xmlns:a16="http://schemas.microsoft.com/office/drawing/2014/main" val="1981924773"/>
+                  </a:ext>
+                </a:extLst>
+              </a:tr>
+              <a:tr h="411424">
+                <a:tc>
+                  <a:txBody>
+                    <a:bodyPr/>
+                    <a:lstStyle/>
+                    <a:p>
+                      <a:pPr algn="l"/>
+                      <a:r>
+                        <a:rPr lang="en-US" sz="1600" b="1" dirty="0"/>
+                        <a:t>docs: </a:t>
+                      </a:r>
+                      <a:r>
+                        <a:rPr lang="en-US" sz="1600" dirty="0"/>
+                        <a:t>correct spelling of CHANGELOG</a:t>
+                      </a:r>
+                    </a:p>
+                  </a:txBody>
+                  <a:tcPr>
+                    <a:lnL w="12700" cap="flat" cmpd="sng" algn="ctr">
+                      <a:noFill/>
+                      <a:prstDash val="solid"/>
+                      <a:round/>
+                      <a:headEnd type="none" w="med" len="med"/>
+                      <a:tailEnd type="none" w="med" len="med"/>
+                    </a:lnL>
+                    <a:lnR w="12700" cap="flat" cmpd="sng" algn="ctr">
+                      <a:noFill/>
+                      <a:prstDash val="solid"/>
+                      <a:round/>
+                      <a:headEnd type="none" w="med" len="med"/>
+                      <a:tailEnd type="none" w="med" len="med"/>
+                    </a:lnR>
+                    <a:lnT w="12700" cap="flat" cmpd="sng" algn="ctr">
+                      <a:noFill/>
+                      <a:prstDash val="solid"/>
+                      <a:round/>
+                      <a:headEnd type="none" w="med" len="med"/>
+                      <a:tailEnd type="none" w="med" len="med"/>
+                    </a:lnT>
+                    <a:lnB>
+                      <a:noFill/>
+                    </a:lnB>
+                    <a:lnTlToBr w="12700" cmpd="sng">
+                      <a:noFill/>
+                      <a:prstDash val="solid"/>
+                    </a:lnTlToBr>
+                    <a:lnBlToTr w="12700" cmpd="sng">
+                      <a:noFill/>
+                      <a:prstDash val="solid"/>
+                    </a:lnBlToTr>
+                    <a:solidFill>
+                      <a:schemeClr val="bg1">
+                        <a:lumMod val="95000"/>
+                      </a:schemeClr>
+                    </a:solidFill>
+                  </a:tcPr>
+                </a:tc>
+                <a:extLst>
+                  <a:ext uri="{0D108BD9-81ED-4DB2-BD59-A6C34878D82A}">
+                    <a16:rowId xmlns:a16="http://schemas.microsoft.com/office/drawing/2014/main" val="3224144256"/>
+                  </a:ext>
+                </a:extLst>
+              </a:tr>
+              <a:tr h="487242">
+                <a:tc>
+                  <a:txBody>
+                    <a:bodyPr/>
+                    <a:lstStyle/>
+                    <a:p>
+                      <a:pPr algn="l"/>
+                      <a:r>
+                        <a:rPr lang="en-US" sz="1600" b="1" dirty="0"/>
+                        <a:t>BREAKING CHANGE: </a:t>
+                      </a:r>
+                      <a:r>
+                        <a:rPr lang="en-US" sz="1600" dirty="0"/>
+                        <a:t>dropping Node 6 which hits end of life in April</a:t>
+                      </a:r>
+                      <a:endParaRPr lang="en-US" sz="1600" b="0" dirty="0">
+                        <a:solidFill>
+                          <a:srgbClr val="24292E"/>
+                        </a:solidFill>
+                      </a:endParaRPr>
+                    </a:p>
+                  </a:txBody>
+                  <a:tcPr>
+                    <a:lnL w="12700" cap="flat" cmpd="sng" algn="ctr">
+                      <a:noFill/>
+                      <a:prstDash val="solid"/>
+                      <a:round/>
+                      <a:headEnd type="none" w="med" len="med"/>
+                      <a:tailEnd type="none" w="med" len="med"/>
+                    </a:lnL>
+                    <a:lnR w="12700" cap="flat" cmpd="sng" algn="ctr">
+                      <a:noFill/>
+                      <a:prstDash val="solid"/>
+                      <a:round/>
+                      <a:headEnd type="none" w="med" len="med"/>
+                      <a:tailEnd type="none" w="med" len="med"/>
+                    </a:lnR>
+                    <a:lnT>
+                      <a:noFill/>
+                    </a:lnT>
+                    <a:lnB w="12700" cap="flat" cmpd="sng" algn="ctr">
+                      <a:noFill/>
+                      <a:prstDash val="solid"/>
+                      <a:round/>
+                      <a:headEnd type="none" w="med" len="med"/>
+                      <a:tailEnd type="none" w="med" len="med"/>
+                    </a:lnB>
+                    <a:lnTlToBr w="12700" cmpd="sng">
+                      <a:noFill/>
+                      <a:prstDash val="solid"/>
+                    </a:lnTlToBr>
+                    <a:lnBlToTr w="12700" cmpd="sng">
+                      <a:noFill/>
+                      <a:prstDash val="solid"/>
+                    </a:lnBlToTr>
+                    <a:solidFill>
+                      <a:schemeClr val="bg1">
+                        <a:lumMod val="95000"/>
+                      </a:schemeClr>
+                    </a:solidFill>
+                  </a:tcPr>
+                </a:tc>
+                <a:extLst>
+                  <a:ext uri="{0D108BD9-81ED-4DB2-BD59-A6C34878D82A}">
+                    <a16:rowId xmlns:a16="http://schemas.microsoft.com/office/drawing/2014/main" val="3173293429"/>
+                  </a:ext>
+                </a:extLst>
+              </a:tr>
+            </a:tbl>
+          </a:graphicData>
+        </a:graphic>
+      </p:graphicFrame>
     </p:spTree>
     <p:extLst>
       <p:ext uri="{BB962C8B-B14F-4D97-AF65-F5344CB8AC3E}">
-        <p14:creationId xmlns:p14="http://schemas.microsoft.com/office/powerpoint/2010/main" val="2915502504"/>
+        <p14:creationId xmlns:p14="http://schemas.microsoft.com/office/powerpoint/2010/main" val="467831668"/>
       </p:ext>
     </p:extLst>
   </p:cSld>
@@ -15540,7 +17443,7 @@
 </p:sld>
 </file>
 
-<file path=ppt/slides/slide12.xml><?xml version="1.0" encoding="utf-8"?>
+<file path=ppt/slides/slide13.xml><?xml version="1.0" encoding="utf-8"?>
 <p:sld xmlns:a="http://schemas.openxmlformats.org/drawingml/2006/main" xmlns:r="http://schemas.openxmlformats.org/officeDocument/2006/relationships" xmlns:p="http://schemas.openxmlformats.org/presentationml/2006/main">
   <p:cSld>
     <p:bg>
@@ -15872,7 +17775,7 @@
 </p:sld>
 </file>
 
-<file path=ppt/slides/slide13.xml><?xml version="1.0" encoding="utf-8"?>
+<file path=ppt/slides/slide14.xml><?xml version="1.0" encoding="utf-8"?>
 <p:sld xmlns:a="http://schemas.openxmlformats.org/drawingml/2006/main" xmlns:r="http://schemas.openxmlformats.org/officeDocument/2006/relationships" xmlns:p="http://schemas.openxmlformats.org/presentationml/2006/main">
   <p:cSld>
     <p:bg>
@@ -16169,7 +18072,7 @@
 </p:sld>
 </file>
 
-<file path=ppt/slides/slide14.xml><?xml version="1.0" encoding="utf-8"?>
+<file path=ppt/slides/slide15.xml><?xml version="1.0" encoding="utf-8"?>
 <p:sld xmlns:a="http://schemas.openxmlformats.org/drawingml/2006/main" xmlns:r="http://schemas.openxmlformats.org/officeDocument/2006/relationships" xmlns:p="http://schemas.openxmlformats.org/presentationml/2006/main">
   <p:cSld>
     <p:bg>
@@ -16431,7 +18334,7 @@
 </p:sld>
 </file>
 
-<file path=ppt/slides/slide15.xml><?xml version="1.0" encoding="utf-8"?>
+<file path=ppt/slides/slide16.xml><?xml version="1.0" encoding="utf-8"?>
 <p:sld xmlns:a="http://schemas.openxmlformats.org/drawingml/2006/main" xmlns:r="http://schemas.openxmlformats.org/officeDocument/2006/relationships" xmlns:p="http://schemas.openxmlformats.org/presentationml/2006/main">
   <p:cSld>
     <p:bg>
@@ -16881,7 +18784,7 @@
 </p:sld>
 </file>
 
-<file path=ppt/slides/slide16.xml><?xml version="1.0" encoding="utf-8"?>
+<file path=ppt/slides/slide17.xml><?xml version="1.0" encoding="utf-8"?>
 <p:sld xmlns:a="http://schemas.openxmlformats.org/drawingml/2006/main" xmlns:r="http://schemas.openxmlformats.org/officeDocument/2006/relationships" xmlns:p="http://schemas.openxmlformats.org/presentationml/2006/main">
   <p:cSld>
     <p:bg>
@@ -17184,7 +19087,7 @@
 </p:sld>
 </file>
 
-<file path=ppt/slides/slide17.xml><?xml version="1.0" encoding="utf-8"?>
+<file path=ppt/slides/slide18.xml><?xml version="1.0" encoding="utf-8"?>
 <p:sld xmlns:a="http://schemas.openxmlformats.org/drawingml/2006/main" xmlns:r="http://schemas.openxmlformats.org/officeDocument/2006/relationships" xmlns:p="http://schemas.openxmlformats.org/presentationml/2006/main">
   <p:cSld>
     <p:bg>
@@ -17666,7 +19569,7 @@
 </p:sld>
 </file>
 
-<file path=ppt/slides/slide18.xml><?xml version="1.0" encoding="utf-8"?>
+<file path=ppt/slides/slide19.xml><?xml version="1.0" encoding="utf-8"?>
 <p:sld xmlns:a="http://schemas.openxmlformats.org/drawingml/2006/main" xmlns:r="http://schemas.openxmlformats.org/officeDocument/2006/relationships" xmlns:p="http://schemas.openxmlformats.org/presentationml/2006/main">
   <p:cSld>
     <p:bg>
@@ -17967,332 +19870,6 @@
     <p:extLst>
       <p:ext uri="{BB962C8B-B14F-4D97-AF65-F5344CB8AC3E}">
         <p14:creationId xmlns:p14="http://schemas.microsoft.com/office/powerpoint/2010/main" val="767257223"/>
-      </p:ext>
-    </p:extLst>
-  </p:cSld>
-  <p:clrMapOvr>
-    <a:masterClrMapping/>
-  </p:clrMapOvr>
-</p:sld>
-</file>
-
-<file path=ppt/slides/slide19.xml><?xml version="1.0" encoding="utf-8"?>
-<p:sld xmlns:a="http://schemas.openxmlformats.org/drawingml/2006/main" xmlns:r="http://schemas.openxmlformats.org/officeDocument/2006/relationships" xmlns:p="http://schemas.openxmlformats.org/presentationml/2006/main">
-  <p:cSld>
-    <p:bg>
-      <p:bgPr>
-        <a:solidFill>
-          <a:schemeClr val="bg1"/>
-        </a:solidFill>
-        <a:effectLst/>
-      </p:bgPr>
-    </p:bg>
-    <p:spTree>
-      <p:nvGrpSpPr>
-        <p:cNvPr id="1" name="">
-          <a:extLst>
-            <a:ext uri="{FF2B5EF4-FFF2-40B4-BE49-F238E27FC236}">
-              <a16:creationId xmlns:a16="http://schemas.microsoft.com/office/drawing/2014/main" id="{1AE891E2-3DEB-70ED-5E82-C981D8871A27}"/>
-            </a:ext>
-          </a:extLst>
-        </p:cNvPr>
-        <p:cNvGrpSpPr/>
-        <p:nvPr/>
-      </p:nvGrpSpPr>
-      <p:grpSpPr>
-        <a:xfrm>
-          <a:off x="0" y="0"/>
-          <a:ext cx="0" cy="0"/>
-          <a:chOff x="0" y="0"/>
-          <a:chExt cx="0" cy="0"/>
-        </a:xfrm>
-      </p:grpSpPr>
-      <p:sp>
-        <p:nvSpPr>
-          <p:cNvPr id="2" name="Title 1" hidden="1">
-            <a:extLst>
-              <a:ext uri="{FF2B5EF4-FFF2-40B4-BE49-F238E27FC236}">
-                <a16:creationId xmlns:a16="http://schemas.microsoft.com/office/drawing/2014/main" id="{7D249ED0-9F09-24E6-BBA9-3063F7FA8A06}"/>
-              </a:ext>
-            </a:extLst>
-          </p:cNvPr>
-          <p:cNvSpPr>
-            <a:spLocks noGrp="1"/>
-          </p:cNvSpPr>
-          <p:nvPr>
-            <p:ph type="title"/>
-          </p:nvPr>
-        </p:nvSpPr>
-        <p:spPr/>
-        <p:txBody>
-          <a:bodyPr/>
-          <a:lstStyle/>
-          <a:p>
-            <a:r>
-              <a:rPr lang="en-US" dirty="0"/>
-              <a:t>Cover Page</a:t>
-            </a:r>
-          </a:p>
-        </p:txBody>
-      </p:sp>
-      <p:sp>
-        <p:nvSpPr>
-          <p:cNvPr id="8" name="Title 1">
-            <a:extLst>
-              <a:ext uri="{FF2B5EF4-FFF2-40B4-BE49-F238E27FC236}">
-                <a16:creationId xmlns:a16="http://schemas.microsoft.com/office/drawing/2014/main" id="{1252D777-353B-DC6A-D03D-333EF73131A2}"/>
-              </a:ext>
-            </a:extLst>
-          </p:cNvPr>
-          <p:cNvSpPr txBox="1">
-            <a:spLocks/>
-          </p:cNvSpPr>
-          <p:nvPr/>
-        </p:nvSpPr>
-        <p:spPr>
-          <a:xfrm>
-            <a:off x="1161975" y="151635"/>
-            <a:ext cx="7804774" cy="719719"/>
-          </a:xfrm>
-          <a:prstGeom prst="rect">
-            <a:avLst/>
-          </a:prstGeom>
-        </p:spPr>
-        <p:txBody>
-          <a:bodyPr vert="horz" lIns="0" tIns="0" rIns="0" bIns="0" rtlCol="0" anchor="t">
-            <a:noAutofit/>
-          </a:bodyPr>
-          <a:lstStyle>
-            <a:lvl1pPr algn="ctr" defTabSz="754380" rtl="0" eaLnBrk="1" latinLnBrk="0" hangingPunct="1">
-              <a:lnSpc>
-                <a:spcPct val="90000"/>
-              </a:lnSpc>
-              <a:spcBef>
-                <a:spcPct val="0"/>
-              </a:spcBef>
-              <a:buNone/>
-              <a:defRPr sz="4000" kern="1200">
-                <a:solidFill>
-                  <a:schemeClr val="tx1"/>
-                </a:solidFill>
-                <a:latin typeface="+mj-lt"/>
-                <a:ea typeface="+mj-ea"/>
-                <a:cs typeface="+mj-cs"/>
-              </a:defRPr>
-            </a:lvl1pPr>
-          </a:lstStyle>
-          <a:p>
-            <a:pPr>
-              <a:lnSpc>
-                <a:spcPct val="75000"/>
-              </a:lnSpc>
-            </a:pPr>
-            <a:r>
-              <a:rPr lang="en-US" sz="6000" u="sng" dirty="0">
-                <a:ln w="41275">
-                  <a:noFill/>
-                </a:ln>
-                <a:solidFill>
-                  <a:schemeClr val="accent2"/>
-                </a:solidFill>
-                <a:ea typeface="Source Sans Pro Black"/>
-              </a:rPr>
-              <a:t>Website</a:t>
-            </a:r>
-          </a:p>
-          <a:p>
-            <a:pPr>
-              <a:lnSpc>
-                <a:spcPct val="75000"/>
-              </a:lnSpc>
-            </a:pPr>
-            <a:r>
-              <a:rPr lang="en-US" sz="3200" dirty="0">
-                <a:ln w="41275">
-                  <a:noFill/>
-                </a:ln>
-                <a:solidFill>
-                  <a:schemeClr val="tx1">
-                    <a:lumMod val="76000"/>
-                    <a:lumOff val="24000"/>
-                  </a:schemeClr>
-                </a:solidFill>
-                <a:ea typeface="Source Sans Pro Black"/>
-              </a:rPr>
-              <a:t>Now you try</a:t>
-            </a:r>
-            <a:endParaRPr lang="en-US" sz="3200" u="sng" dirty="0">
-              <a:ln w="41275">
-                <a:noFill/>
-              </a:ln>
-              <a:solidFill>
-                <a:schemeClr val="tx1">
-                  <a:lumMod val="76000"/>
-                  <a:lumOff val="24000"/>
-                </a:schemeClr>
-              </a:solidFill>
-              <a:ea typeface="Source Sans Pro Black"/>
-            </a:endParaRPr>
-          </a:p>
-        </p:txBody>
-      </p:sp>
-      <p:cxnSp>
-        <p:nvCxnSpPr>
-          <p:cNvPr id="47" name="Straight Connector 46">
-            <a:extLst>
-              <a:ext uri="{FF2B5EF4-FFF2-40B4-BE49-F238E27FC236}">
-                <a16:creationId xmlns:a16="http://schemas.microsoft.com/office/drawing/2014/main" id="{B33DBE30-D644-2F1A-E870-BC9784407308}"/>
-              </a:ext>
-              <a:ext uri="{C183D7F6-B498-43B3-948B-1728B52AA6E4}">
-                <adec:decorative xmlns:adec="http://schemas.microsoft.com/office/drawing/2017/decorative" val="1"/>
-              </a:ext>
-            </a:extLst>
-          </p:cNvPr>
-          <p:cNvCxnSpPr>
-            <a:cxnSpLocks/>
-          </p:cNvCxnSpPr>
-          <p:nvPr/>
-        </p:nvCxnSpPr>
-        <p:spPr>
-          <a:xfrm>
-            <a:off x="839615" y="1271285"/>
-            <a:ext cx="8677751" cy="0"/>
-          </a:xfrm>
-          <a:prstGeom prst="line">
-            <a:avLst/>
-          </a:prstGeom>
-          <a:ln w="25400">
-            <a:solidFill>
-              <a:schemeClr val="accent2"/>
-            </a:solidFill>
-          </a:ln>
-        </p:spPr>
-        <p:style>
-          <a:lnRef idx="1">
-            <a:schemeClr val="accent1"/>
-          </a:lnRef>
-          <a:fillRef idx="0">
-            <a:schemeClr val="accent1"/>
-          </a:fillRef>
-          <a:effectRef idx="0">
-            <a:schemeClr val="accent1"/>
-          </a:effectRef>
-          <a:fontRef idx="minor">
-            <a:schemeClr val="tx1"/>
-          </a:fontRef>
-        </p:style>
-      </p:cxnSp>
-      <p:pic>
-        <p:nvPicPr>
-          <p:cNvPr id="6" name="Picture 5">
-            <a:extLst>
-              <a:ext uri="{FF2B5EF4-FFF2-40B4-BE49-F238E27FC236}">
-                <a16:creationId xmlns:a16="http://schemas.microsoft.com/office/drawing/2014/main" id="{2E5807B5-8197-33A9-F7C8-FF57246D8179}"/>
-              </a:ext>
-            </a:extLst>
-          </p:cNvPr>
-          <p:cNvPicPr>
-            <a:picLocks noChangeAspect="1"/>
-          </p:cNvPicPr>
-          <p:nvPr/>
-        </p:nvPicPr>
-        <p:blipFill>
-          <a:blip r:embed="rId2"/>
-          <a:stretch>
-            <a:fillRect/>
-          </a:stretch>
-        </p:blipFill>
-        <p:spPr>
-          <a:xfrm>
-            <a:off x="1513984" y="1671217"/>
-            <a:ext cx="7030431" cy="4096322"/>
-          </a:xfrm>
-          <a:prstGeom prst="rect">
-            <a:avLst/>
-          </a:prstGeom>
-        </p:spPr>
-      </p:pic>
-      <p:sp>
-        <p:nvSpPr>
-          <p:cNvPr id="7" name="TextBox 6">
-            <a:extLst>
-              <a:ext uri="{FF2B5EF4-FFF2-40B4-BE49-F238E27FC236}">
-                <a16:creationId xmlns:a16="http://schemas.microsoft.com/office/drawing/2014/main" id="{FD1881F3-1895-9655-B589-01B0A2FDDDB1}"/>
-              </a:ext>
-            </a:extLst>
-          </p:cNvPr>
-          <p:cNvSpPr txBox="1"/>
-          <p:nvPr/>
-        </p:nvSpPr>
-        <p:spPr>
-          <a:xfrm>
-            <a:off x="6655063" y="5938463"/>
-            <a:ext cx="2075380" cy="709681"/>
-          </a:xfrm>
-          <a:prstGeom prst="rect">
-            <a:avLst/>
-          </a:prstGeom>
-          <a:noFill/>
-        </p:spPr>
-        <p:txBody>
-          <a:bodyPr wrap="square" rtlCol="0">
-            <a:spAutoFit/>
-          </a:bodyPr>
-          <a:lstStyle/>
-          <a:p>
-            <a:r>
-              <a:rPr lang="en-US" dirty="0"/>
-              <a:t>This intentionally doesn’t work</a:t>
-            </a:r>
-            <a:endParaRPr lang="en-001" dirty="0"/>
-          </a:p>
-        </p:txBody>
-      </p:sp>
-      <p:cxnSp>
-        <p:nvCxnSpPr>
-          <p:cNvPr id="12" name="Straight Arrow Connector 11">
-            <a:extLst>
-              <a:ext uri="{FF2B5EF4-FFF2-40B4-BE49-F238E27FC236}">
-                <a16:creationId xmlns:a16="http://schemas.microsoft.com/office/drawing/2014/main" id="{38F12B92-775C-A230-34DC-E36BEC16D829}"/>
-              </a:ext>
-            </a:extLst>
-          </p:cNvPr>
-          <p:cNvCxnSpPr>
-            <a:endCxn id="7" idx="0"/>
-          </p:cNvCxnSpPr>
-          <p:nvPr/>
-        </p:nvCxnSpPr>
-        <p:spPr>
-          <a:xfrm>
-            <a:off x="7582328" y="5568593"/>
-            <a:ext cx="110425" cy="369870"/>
-          </a:xfrm>
-          <a:prstGeom prst="straightConnector1">
-            <a:avLst/>
-          </a:prstGeom>
-          <a:ln>
-            <a:tailEnd type="triangle"/>
-          </a:ln>
-        </p:spPr>
-        <p:style>
-          <a:lnRef idx="3">
-            <a:schemeClr val="accent4"/>
-          </a:lnRef>
-          <a:fillRef idx="0">
-            <a:schemeClr val="accent4"/>
-          </a:fillRef>
-          <a:effectRef idx="2">
-            <a:schemeClr val="accent4"/>
-          </a:effectRef>
-          <a:fontRef idx="minor">
-            <a:schemeClr val="tx1"/>
-          </a:fontRef>
-        </p:style>
-      </p:cxnSp>
-    </p:spTree>
-    <p:extLst>
-      <p:ext uri="{BB962C8B-B14F-4D97-AF65-F5344CB8AC3E}">
-        <p14:creationId xmlns:p14="http://schemas.microsoft.com/office/powerpoint/2010/main" val="3562649241"/>
       </p:ext>
     </p:extLst>
   </p:cSld>
@@ -22971,6 +24548,332 @@
         <p:cNvPr id="1" name="">
           <a:extLst>
             <a:ext uri="{FF2B5EF4-FFF2-40B4-BE49-F238E27FC236}">
+              <a16:creationId xmlns:a16="http://schemas.microsoft.com/office/drawing/2014/main" id="{1AE891E2-3DEB-70ED-5E82-C981D8871A27}"/>
+            </a:ext>
+          </a:extLst>
+        </p:cNvPr>
+        <p:cNvGrpSpPr/>
+        <p:nvPr/>
+      </p:nvGrpSpPr>
+      <p:grpSpPr>
+        <a:xfrm>
+          <a:off x="0" y="0"/>
+          <a:ext cx="0" cy="0"/>
+          <a:chOff x="0" y="0"/>
+          <a:chExt cx="0" cy="0"/>
+        </a:xfrm>
+      </p:grpSpPr>
+      <p:sp>
+        <p:nvSpPr>
+          <p:cNvPr id="2" name="Title 1" hidden="1">
+            <a:extLst>
+              <a:ext uri="{FF2B5EF4-FFF2-40B4-BE49-F238E27FC236}">
+                <a16:creationId xmlns:a16="http://schemas.microsoft.com/office/drawing/2014/main" id="{7D249ED0-9F09-24E6-BBA9-3063F7FA8A06}"/>
+              </a:ext>
+            </a:extLst>
+          </p:cNvPr>
+          <p:cNvSpPr>
+            <a:spLocks noGrp="1"/>
+          </p:cNvSpPr>
+          <p:nvPr>
+            <p:ph type="title"/>
+          </p:nvPr>
+        </p:nvSpPr>
+        <p:spPr/>
+        <p:txBody>
+          <a:bodyPr/>
+          <a:lstStyle/>
+          <a:p>
+            <a:r>
+              <a:rPr lang="en-US" dirty="0"/>
+              <a:t>Cover Page</a:t>
+            </a:r>
+          </a:p>
+        </p:txBody>
+      </p:sp>
+      <p:sp>
+        <p:nvSpPr>
+          <p:cNvPr id="8" name="Title 1">
+            <a:extLst>
+              <a:ext uri="{FF2B5EF4-FFF2-40B4-BE49-F238E27FC236}">
+                <a16:creationId xmlns:a16="http://schemas.microsoft.com/office/drawing/2014/main" id="{1252D777-353B-DC6A-D03D-333EF73131A2}"/>
+              </a:ext>
+            </a:extLst>
+          </p:cNvPr>
+          <p:cNvSpPr txBox="1">
+            <a:spLocks/>
+          </p:cNvSpPr>
+          <p:nvPr/>
+        </p:nvSpPr>
+        <p:spPr>
+          <a:xfrm>
+            <a:off x="1161975" y="151635"/>
+            <a:ext cx="7804774" cy="719719"/>
+          </a:xfrm>
+          <a:prstGeom prst="rect">
+            <a:avLst/>
+          </a:prstGeom>
+        </p:spPr>
+        <p:txBody>
+          <a:bodyPr vert="horz" lIns="0" tIns="0" rIns="0" bIns="0" rtlCol="0" anchor="t">
+            <a:noAutofit/>
+          </a:bodyPr>
+          <a:lstStyle>
+            <a:lvl1pPr algn="ctr" defTabSz="754380" rtl="0" eaLnBrk="1" latinLnBrk="0" hangingPunct="1">
+              <a:lnSpc>
+                <a:spcPct val="90000"/>
+              </a:lnSpc>
+              <a:spcBef>
+                <a:spcPct val="0"/>
+              </a:spcBef>
+              <a:buNone/>
+              <a:defRPr sz="4000" kern="1200">
+                <a:solidFill>
+                  <a:schemeClr val="tx1"/>
+                </a:solidFill>
+                <a:latin typeface="+mj-lt"/>
+                <a:ea typeface="+mj-ea"/>
+                <a:cs typeface="+mj-cs"/>
+              </a:defRPr>
+            </a:lvl1pPr>
+          </a:lstStyle>
+          <a:p>
+            <a:pPr>
+              <a:lnSpc>
+                <a:spcPct val="75000"/>
+              </a:lnSpc>
+            </a:pPr>
+            <a:r>
+              <a:rPr lang="en-US" sz="6000" u="sng" dirty="0">
+                <a:ln w="41275">
+                  <a:noFill/>
+                </a:ln>
+                <a:solidFill>
+                  <a:schemeClr val="accent2"/>
+                </a:solidFill>
+                <a:ea typeface="Source Sans Pro Black"/>
+              </a:rPr>
+              <a:t>Website</a:t>
+            </a:r>
+          </a:p>
+          <a:p>
+            <a:pPr>
+              <a:lnSpc>
+                <a:spcPct val="75000"/>
+              </a:lnSpc>
+            </a:pPr>
+            <a:r>
+              <a:rPr lang="en-US" sz="3200" dirty="0">
+                <a:ln w="41275">
+                  <a:noFill/>
+                </a:ln>
+                <a:solidFill>
+                  <a:schemeClr val="tx1">
+                    <a:lumMod val="76000"/>
+                    <a:lumOff val="24000"/>
+                  </a:schemeClr>
+                </a:solidFill>
+                <a:ea typeface="Source Sans Pro Black"/>
+              </a:rPr>
+              <a:t>Now you try</a:t>
+            </a:r>
+            <a:endParaRPr lang="en-US" sz="3200" u="sng" dirty="0">
+              <a:ln w="41275">
+                <a:noFill/>
+              </a:ln>
+              <a:solidFill>
+                <a:schemeClr val="tx1">
+                  <a:lumMod val="76000"/>
+                  <a:lumOff val="24000"/>
+                </a:schemeClr>
+              </a:solidFill>
+              <a:ea typeface="Source Sans Pro Black"/>
+            </a:endParaRPr>
+          </a:p>
+        </p:txBody>
+      </p:sp>
+      <p:cxnSp>
+        <p:nvCxnSpPr>
+          <p:cNvPr id="47" name="Straight Connector 46">
+            <a:extLst>
+              <a:ext uri="{FF2B5EF4-FFF2-40B4-BE49-F238E27FC236}">
+                <a16:creationId xmlns:a16="http://schemas.microsoft.com/office/drawing/2014/main" id="{B33DBE30-D644-2F1A-E870-BC9784407308}"/>
+              </a:ext>
+              <a:ext uri="{C183D7F6-B498-43B3-948B-1728B52AA6E4}">
+                <adec:decorative xmlns:adec="http://schemas.microsoft.com/office/drawing/2017/decorative" val="1"/>
+              </a:ext>
+            </a:extLst>
+          </p:cNvPr>
+          <p:cNvCxnSpPr>
+            <a:cxnSpLocks/>
+          </p:cNvCxnSpPr>
+          <p:nvPr/>
+        </p:nvCxnSpPr>
+        <p:spPr>
+          <a:xfrm>
+            <a:off x="839615" y="1271285"/>
+            <a:ext cx="8677751" cy="0"/>
+          </a:xfrm>
+          <a:prstGeom prst="line">
+            <a:avLst/>
+          </a:prstGeom>
+          <a:ln w="25400">
+            <a:solidFill>
+              <a:schemeClr val="accent2"/>
+            </a:solidFill>
+          </a:ln>
+        </p:spPr>
+        <p:style>
+          <a:lnRef idx="1">
+            <a:schemeClr val="accent1"/>
+          </a:lnRef>
+          <a:fillRef idx="0">
+            <a:schemeClr val="accent1"/>
+          </a:fillRef>
+          <a:effectRef idx="0">
+            <a:schemeClr val="accent1"/>
+          </a:effectRef>
+          <a:fontRef idx="minor">
+            <a:schemeClr val="tx1"/>
+          </a:fontRef>
+        </p:style>
+      </p:cxnSp>
+      <p:pic>
+        <p:nvPicPr>
+          <p:cNvPr id="6" name="Picture 5">
+            <a:extLst>
+              <a:ext uri="{FF2B5EF4-FFF2-40B4-BE49-F238E27FC236}">
+                <a16:creationId xmlns:a16="http://schemas.microsoft.com/office/drawing/2014/main" id="{2E5807B5-8197-33A9-F7C8-FF57246D8179}"/>
+              </a:ext>
+            </a:extLst>
+          </p:cNvPr>
+          <p:cNvPicPr>
+            <a:picLocks noChangeAspect="1"/>
+          </p:cNvPicPr>
+          <p:nvPr/>
+        </p:nvPicPr>
+        <p:blipFill>
+          <a:blip r:embed="rId2"/>
+          <a:stretch>
+            <a:fillRect/>
+          </a:stretch>
+        </p:blipFill>
+        <p:spPr>
+          <a:xfrm>
+            <a:off x="1513984" y="1671217"/>
+            <a:ext cx="7030431" cy="4096322"/>
+          </a:xfrm>
+          <a:prstGeom prst="rect">
+            <a:avLst/>
+          </a:prstGeom>
+        </p:spPr>
+      </p:pic>
+      <p:sp>
+        <p:nvSpPr>
+          <p:cNvPr id="7" name="TextBox 6">
+            <a:extLst>
+              <a:ext uri="{FF2B5EF4-FFF2-40B4-BE49-F238E27FC236}">
+                <a16:creationId xmlns:a16="http://schemas.microsoft.com/office/drawing/2014/main" id="{FD1881F3-1895-9655-B589-01B0A2FDDDB1}"/>
+              </a:ext>
+            </a:extLst>
+          </p:cNvPr>
+          <p:cNvSpPr txBox="1"/>
+          <p:nvPr/>
+        </p:nvSpPr>
+        <p:spPr>
+          <a:xfrm>
+            <a:off x="6655063" y="5938463"/>
+            <a:ext cx="2075380" cy="709681"/>
+          </a:xfrm>
+          <a:prstGeom prst="rect">
+            <a:avLst/>
+          </a:prstGeom>
+          <a:noFill/>
+        </p:spPr>
+        <p:txBody>
+          <a:bodyPr wrap="square" rtlCol="0">
+            <a:spAutoFit/>
+          </a:bodyPr>
+          <a:lstStyle/>
+          <a:p>
+            <a:r>
+              <a:rPr lang="en-US" dirty="0"/>
+              <a:t>This intentionally doesn’t work</a:t>
+            </a:r>
+            <a:endParaRPr lang="en-001" dirty="0"/>
+          </a:p>
+        </p:txBody>
+      </p:sp>
+      <p:cxnSp>
+        <p:nvCxnSpPr>
+          <p:cNvPr id="12" name="Straight Arrow Connector 11">
+            <a:extLst>
+              <a:ext uri="{FF2B5EF4-FFF2-40B4-BE49-F238E27FC236}">
+                <a16:creationId xmlns:a16="http://schemas.microsoft.com/office/drawing/2014/main" id="{38F12B92-775C-A230-34DC-E36BEC16D829}"/>
+              </a:ext>
+            </a:extLst>
+          </p:cNvPr>
+          <p:cNvCxnSpPr>
+            <a:endCxn id="7" idx="0"/>
+          </p:cNvCxnSpPr>
+          <p:nvPr/>
+        </p:nvCxnSpPr>
+        <p:spPr>
+          <a:xfrm>
+            <a:off x="7582328" y="5568593"/>
+            <a:ext cx="110425" cy="369870"/>
+          </a:xfrm>
+          <a:prstGeom prst="straightConnector1">
+            <a:avLst/>
+          </a:prstGeom>
+          <a:ln>
+            <a:tailEnd type="triangle"/>
+          </a:ln>
+        </p:spPr>
+        <p:style>
+          <a:lnRef idx="3">
+            <a:schemeClr val="accent4"/>
+          </a:lnRef>
+          <a:fillRef idx="0">
+            <a:schemeClr val="accent4"/>
+          </a:fillRef>
+          <a:effectRef idx="2">
+            <a:schemeClr val="accent4"/>
+          </a:effectRef>
+          <a:fontRef idx="minor">
+            <a:schemeClr val="tx1"/>
+          </a:fontRef>
+        </p:style>
+      </p:cxnSp>
+    </p:spTree>
+    <p:extLst>
+      <p:ext uri="{BB962C8B-B14F-4D97-AF65-F5344CB8AC3E}">
+        <p14:creationId xmlns:p14="http://schemas.microsoft.com/office/powerpoint/2010/main" val="3562649241"/>
+      </p:ext>
+    </p:extLst>
+  </p:cSld>
+  <p:clrMapOvr>
+    <a:masterClrMapping/>
+  </p:clrMapOvr>
+</p:sld>
+</file>
+
+<file path=ppt/slides/slide21.xml><?xml version="1.0" encoding="utf-8"?>
+<p:sld xmlns:a="http://schemas.openxmlformats.org/drawingml/2006/main" xmlns:r="http://schemas.openxmlformats.org/officeDocument/2006/relationships" xmlns:p="http://schemas.openxmlformats.org/presentationml/2006/main">
+  <p:cSld>
+    <p:bg>
+      <p:bgPr>
+        <a:solidFill>
+          <a:schemeClr val="bg1"/>
+        </a:solidFill>
+        <a:effectLst/>
+      </p:bgPr>
+    </p:bg>
+    <p:spTree>
+      <p:nvGrpSpPr>
+        <p:cNvPr id="1" name="">
+          <a:extLst>
+            <a:ext uri="{FF2B5EF4-FFF2-40B4-BE49-F238E27FC236}">
               <a16:creationId xmlns:a16="http://schemas.microsoft.com/office/drawing/2014/main" id="{29192E6A-2D42-3B69-A4E6-2A5289F9EAE0}"/>
             </a:ext>
           </a:extLst>
@@ -23204,7 +25107,7 @@
 </p:sld>
 </file>
 
-<file path=ppt/slides/slide21.xml><?xml version="1.0" encoding="utf-8"?>
+<file path=ppt/slides/slide22.xml><?xml version="1.0" encoding="utf-8"?>
 <p:sld xmlns:a="http://schemas.openxmlformats.org/drawingml/2006/main" xmlns:r="http://schemas.openxmlformats.org/officeDocument/2006/relationships" xmlns:p="http://schemas.openxmlformats.org/presentationml/2006/main">
   <p:cSld>
     <p:spTree>
@@ -23590,7 +25493,7 @@
 </p:sld>
 </file>
 
-<file path=ppt/slides/slide22.xml><?xml version="1.0" encoding="utf-8"?>
+<file path=ppt/slides/slide23.xml><?xml version="1.0" encoding="utf-8"?>
 <p:sld xmlns:a="http://schemas.openxmlformats.org/drawingml/2006/main" xmlns:r="http://schemas.openxmlformats.org/officeDocument/2006/relationships" xmlns:p="http://schemas.openxmlformats.org/presentationml/2006/main">
   <p:cSld>
     <p:spTree>
@@ -23916,7 +25819,7 @@
 </p:sld>
 </file>
 
-<file path=ppt/slides/slide23.xml><?xml version="1.0" encoding="utf-8"?>
+<file path=ppt/slides/slide24.xml><?xml version="1.0" encoding="utf-8"?>
 <p:sld xmlns:a="http://schemas.openxmlformats.org/drawingml/2006/main" xmlns:r="http://schemas.openxmlformats.org/officeDocument/2006/relationships" xmlns:p="http://schemas.openxmlformats.org/presentationml/2006/main">
   <p:cSld>
     <p:spTree>
@@ -24487,7 +26390,7 @@
 </p:sld>
 </file>
 
-<file path=ppt/slides/slide24.xml><?xml version="1.0" encoding="utf-8"?>
+<file path=ppt/slides/slide25.xml><?xml version="1.0" encoding="utf-8"?>
 <p:sld xmlns:a="http://schemas.openxmlformats.org/drawingml/2006/main" xmlns:r="http://schemas.openxmlformats.org/officeDocument/2006/relationships" xmlns:p="http://schemas.openxmlformats.org/presentationml/2006/main">
   <p:cSld>
     <p:spTree>
@@ -24741,7 +26644,7 @@
 </p:sld>
 </file>
 
-<file path=ppt/slides/slide25.xml><?xml version="1.0" encoding="utf-8"?>
+<file path=ppt/slides/slide26.xml><?xml version="1.0" encoding="utf-8"?>
 <p:sld xmlns:a="http://schemas.openxmlformats.org/drawingml/2006/main" xmlns:r="http://schemas.openxmlformats.org/officeDocument/2006/relationships" xmlns:p="http://schemas.openxmlformats.org/presentationml/2006/main">
   <p:cSld>
     <p:spTree>
@@ -25789,14 +27692,11 @@
           <a:lstStyle/>
           <a:p>
             <a:r>
-              <a:rPr lang="en-GB" sz="2000" b="1">
+              <a:rPr lang="en-GB" sz="2000" b="1" dirty="0">
                 <a:ea typeface="Source Sans Pro"/>
               </a:rPr>
               <a:t>Code Editor</a:t>
             </a:r>
-            <a:endParaRPr lang="en-GB" sz="2000" b="1" dirty="0">
-              <a:ea typeface="Source Sans Pro"/>
-            </a:endParaRPr>
           </a:p>
           <a:p>
             <a:pPr marL="342900" indent="-342900">
@@ -25823,14 +27723,11 @@
           </a:p>
           <a:p>
             <a:r>
-              <a:rPr lang="en-GB" sz="2000" b="1">
+              <a:rPr lang="en-GB" sz="2000" b="1" dirty="0">
                 <a:ea typeface="Source Sans Pro"/>
               </a:rPr>
               <a:t>Database Viewer</a:t>
             </a:r>
-            <a:endParaRPr lang="en-GB" sz="2000" b="1" dirty="0">
-              <a:ea typeface="Source Sans Pro"/>
-            </a:endParaRPr>
           </a:p>
           <a:p>
             <a:pPr marL="342900" indent="-342900">
@@ -25859,7 +27756,7 @@
           </a:p>
           <a:p>
             <a:r>
-              <a:rPr lang="en-GB" sz="2000" b="1">
+              <a:rPr lang="en-GB" sz="2000" b="1" dirty="0">
                 <a:ea typeface="Source Sans Pro"/>
               </a:rPr>
               <a:t>Software (In order of top to bottom)</a:t>
@@ -25880,7 +27777,7 @@
               </a:rPr>
               <a:t>NodeJS – v24.10.0 (LTS)</a:t>
             </a:r>
-            <a:endParaRPr lang="en-GB" sz="2000" b="1">
+            <a:endParaRPr lang="en-GB" sz="2000" b="1" dirty="0">
               <a:ea typeface="Source Sans Pro"/>
             </a:endParaRPr>
           </a:p>
@@ -25896,7 +27793,7 @@
               </a:rPr>
               <a:t>Bun</a:t>
             </a:r>
-            <a:endParaRPr lang="en-GB" sz="2000" b="1">
+            <a:endParaRPr lang="en-GB" sz="2000" b="1" dirty="0">
               <a:ea typeface="Source Sans Pro"/>
             </a:endParaRPr>
           </a:p>
@@ -25912,7 +27809,7 @@
               </a:rPr>
               <a:t>Python – v3.14.3</a:t>
             </a:r>
-            <a:endParaRPr lang="en-GB" sz="2000" b="1">
+            <a:endParaRPr lang="en-GB" sz="2000" b="1" dirty="0">
               <a:ea typeface="Source Sans Pro"/>
             </a:endParaRPr>
           </a:p>
@@ -25928,7 +27825,7 @@
               </a:rPr>
               <a:t>UV</a:t>
             </a:r>
-            <a:endParaRPr lang="en-GB" sz="2000" b="1">
+            <a:endParaRPr lang="en-GB" sz="2000" b="1" dirty="0">
               <a:ea typeface="Source Sans Pro"/>
             </a:endParaRPr>
           </a:p>
@@ -25960,14 +27857,11 @@
           <a:p>
             <a:pPr algn="just"/>
             <a:r>
-              <a:rPr lang="en-GB" sz="2000" b="1">
+              <a:rPr lang="en-GB" sz="2000" b="1" dirty="0">
                 <a:ea typeface="Source Sans Pro"/>
               </a:rPr>
               <a:t>Repository</a:t>
             </a:r>
-            <a:endParaRPr lang="en-GB" sz="2000" b="1" dirty="0">
-              <a:ea typeface="Source Sans Pro"/>
-            </a:endParaRPr>
           </a:p>
           <a:p>
             <a:pPr marL="342900" indent="-342900" algn="just">
@@ -32928,26 +34822,6 @@
 </file>
 
 <file path=customXml/item1.xml><?xml version="1.0" encoding="utf-8"?>
-<p:properties xmlns:p="http://schemas.microsoft.com/office/2006/metadata/properties" xmlns:xsi="http://www.w3.org/2001/XMLSchema-instance" xmlns:pc="http://schemas.microsoft.com/office/infopath/2007/PartnerControls">
-  <documentManagement>
-    <_ip_UnifiedCompliancePolicyUIAction xmlns="http://schemas.microsoft.com/sharepoint/v3" xsi:nil="true"/>
-    <Image xmlns="71af3243-3dd4-4a8d-8c0d-dd76da1f02a5">
-      <Url xsi:nil="true"/>
-      <Description xsi:nil="true"/>
-    </Image>
-    <Status xmlns="71af3243-3dd4-4a8d-8c0d-dd76da1f02a5">Not started</Status>
-    <Background xmlns="71af3243-3dd4-4a8d-8c0d-dd76da1f02a5">false</Background>
-    <_ip_UnifiedCompliancePolicyProperties xmlns="http://schemas.microsoft.com/sharepoint/v3" xsi:nil="true"/>
-    <ImageTagsTaxHTField xmlns="71af3243-3dd4-4a8d-8c0d-dd76da1f02a5">
-      <Terms xmlns="http://schemas.microsoft.com/office/infopath/2007/PartnerControls"/>
-    </ImageTagsTaxHTField>
-    <TaxCatchAll xmlns="230e9df3-be65-4c73-a93b-d1236ebd677e" xsi:nil="true"/>
-    <MediaServiceKeyPoints xmlns="71af3243-3dd4-4a8d-8c0d-dd76da1f02a5" xsi:nil="true"/>
-  </documentManagement>
-</p:properties>
-</file>
-
-<file path=customXml/item2.xml><?xml version="1.0" encoding="utf-8"?>
 <ct:contentTypeSchema xmlns:ct="http://schemas.microsoft.com/office/2006/metadata/contentType" xmlns:ma="http://schemas.microsoft.com/office/2006/metadata/properties/metaAttributes" ct:_="" ma:_="" ma:contentTypeName="Document" ma:contentTypeID="0x01010079F111ED35F8CC479449609E8A0923A6" ma:contentTypeVersion="26" ma:contentTypeDescription="Create a new document." ma:contentTypeScope="" ma:versionID="ac37c1753acd5e330d2062ccec26ea66">
   <xsd:schema xmlns:xsd="http://www.w3.org/2001/XMLSchema" xmlns:xs="http://www.w3.org/2001/XMLSchema" xmlns:p="http://schemas.microsoft.com/office/2006/metadata/properties" xmlns:ns1="http://schemas.microsoft.com/sharepoint/v3" xmlns:ns2="71af3243-3dd4-4a8d-8c0d-dd76da1f02a5" xmlns:ns3="16c05727-aa75-4e4a-9b5f-8a80a1165891" xmlns:ns4="230e9df3-be65-4c73-a93b-d1236ebd677e" targetNamespace="http://schemas.microsoft.com/office/2006/metadata/properties" ma:root="true" ma:fieldsID="3b340c7101c92c5120abd06486f94548" ns1:_="" ns2:_="" ns3:_="" ns4:_="">
     <xsd:import namespace="http://schemas.microsoft.com/sharepoint/v3"/>
@@ -33247,6 +35121,26 @@
 </ct:contentTypeSchema>
 </file>
 
+<file path=customXml/item2.xml><?xml version="1.0" encoding="utf-8"?>
+<p:properties xmlns:p="http://schemas.microsoft.com/office/2006/metadata/properties" xmlns:xsi="http://www.w3.org/2001/XMLSchema-instance" xmlns:pc="http://schemas.microsoft.com/office/infopath/2007/PartnerControls">
+  <documentManagement>
+    <_ip_UnifiedCompliancePolicyUIAction xmlns="http://schemas.microsoft.com/sharepoint/v3" xsi:nil="true"/>
+    <Image xmlns="71af3243-3dd4-4a8d-8c0d-dd76da1f02a5">
+      <Url xsi:nil="true"/>
+      <Description xsi:nil="true"/>
+    </Image>
+    <Status xmlns="71af3243-3dd4-4a8d-8c0d-dd76da1f02a5">Not started</Status>
+    <Background xmlns="71af3243-3dd4-4a8d-8c0d-dd76da1f02a5">false</Background>
+    <_ip_UnifiedCompliancePolicyProperties xmlns="http://schemas.microsoft.com/sharepoint/v3" xsi:nil="true"/>
+    <ImageTagsTaxHTField xmlns="71af3243-3dd4-4a8d-8c0d-dd76da1f02a5">
+      <Terms xmlns="http://schemas.microsoft.com/office/infopath/2007/PartnerControls"/>
+    </ImageTagsTaxHTField>
+    <TaxCatchAll xmlns="230e9df3-be65-4c73-a93b-d1236ebd677e" xsi:nil="true"/>
+    <MediaServiceKeyPoints xmlns="71af3243-3dd4-4a8d-8c0d-dd76da1f02a5" xsi:nil="true"/>
+  </documentManagement>
+</p:properties>
+</file>
+
 <file path=customXml/item3.xml><?xml version="1.0" encoding="utf-8"?>
 <?mso-contentType ?>
 <FormTemplates xmlns="http://schemas.microsoft.com/sharepoint/v3/contenttype/forms">
@@ -33257,18 +35151,6 @@
 </file>
 
 <file path=customXml/itemProps1.xml><?xml version="1.0" encoding="utf-8"?>
-<ds:datastoreItem xmlns:ds="http://schemas.openxmlformats.org/officeDocument/2006/customXml" ds:itemID="{BA7C7500-373E-4155-9EAA-9FE9576B0BE6}">
-  <ds:schemaRefs>
-    <ds:schemaRef ds:uri="http://schemas.microsoft.com/office/2006/metadata/properties"/>
-    <ds:schemaRef ds:uri="http://schemas.microsoft.com/office/infopath/2007/PartnerControls"/>
-    <ds:schemaRef ds:uri="http://schemas.microsoft.com/sharepoint/v3"/>
-    <ds:schemaRef ds:uri="71af3243-3dd4-4a8d-8c0d-dd76da1f02a5"/>
-    <ds:schemaRef ds:uri="230e9df3-be65-4c73-a93b-d1236ebd677e"/>
-  </ds:schemaRefs>
-</ds:datastoreItem>
-</file>
-
-<file path=customXml/itemProps2.xml><?xml version="1.0" encoding="utf-8"?>
 <ds:datastoreItem xmlns:ds="http://schemas.openxmlformats.org/officeDocument/2006/customXml" ds:itemID="{5D948EC7-70A8-4BA0-9397-CCEC9EEE03CC}">
   <ds:schemaRefs>
     <ds:schemaRef ds:uri="http://schemas.microsoft.com/office/2006/metadata/contentType"/>
@@ -33289,6 +35171,18 @@
 </ds:datastoreItem>
 </file>
 
+<file path=customXml/itemProps2.xml><?xml version="1.0" encoding="utf-8"?>
+<ds:datastoreItem xmlns:ds="http://schemas.openxmlformats.org/officeDocument/2006/customXml" ds:itemID="{BA7C7500-373E-4155-9EAA-9FE9576B0BE6}">
+  <ds:schemaRefs>
+    <ds:schemaRef ds:uri="http://schemas.microsoft.com/office/2006/metadata/properties"/>
+    <ds:schemaRef ds:uri="http://schemas.microsoft.com/office/infopath/2007/PartnerControls"/>
+    <ds:schemaRef ds:uri="http://schemas.microsoft.com/sharepoint/v3"/>
+    <ds:schemaRef ds:uri="71af3243-3dd4-4a8d-8c0d-dd76da1f02a5"/>
+    <ds:schemaRef ds:uri="230e9df3-be65-4c73-a93b-d1236ebd677e"/>
+  </ds:schemaRefs>
+</ds:datastoreItem>
+</file>
+
 <file path=customXml/itemProps3.xml><?xml version="1.0" encoding="utf-8"?>
 <ds:datastoreItem xmlns:ds="http://schemas.openxmlformats.org/officeDocument/2006/customXml" ds:itemID="{C700B919-5B9C-4D06-B24A-7BB87EEF69EA}">
   <ds:schemaRefs>

--- a/docs/REST API Workshop.pptx
+++ b/docs/REST API Workshop.pptx
@@ -5,10 +5,10 @@
     <p:sldMasterId id="2147483648" r:id="rId4"/>
   </p:sldMasterIdLst>
   <p:notesMasterIdLst>
-    <p:notesMasterId r:id="rId31"/>
+    <p:notesMasterId r:id="rId33"/>
   </p:notesMasterIdLst>
   <p:handoutMasterIdLst>
-    <p:handoutMasterId r:id="rId32"/>
+    <p:handoutMasterId r:id="rId34"/>
   </p:handoutMasterIdLst>
   <p:sldIdLst>
     <p:sldId id="281" r:id="rId5"/>
@@ -16,27 +16,29 @@
     <p:sldId id="283" r:id="rId7"/>
     <p:sldId id="284" r:id="rId8"/>
     <p:sldId id="296" r:id="rId9"/>
-    <p:sldId id="285" r:id="rId10"/>
-    <p:sldId id="286" r:id="rId11"/>
-    <p:sldId id="287" r:id="rId12"/>
-    <p:sldId id="291" r:id="rId13"/>
-    <p:sldId id="307" r:id="rId14"/>
-    <p:sldId id="308" r:id="rId15"/>
-    <p:sldId id="311" r:id="rId16"/>
-    <p:sldId id="290" r:id="rId17"/>
-    <p:sldId id="292" r:id="rId18"/>
-    <p:sldId id="304" r:id="rId19"/>
-    <p:sldId id="293" r:id="rId20"/>
-    <p:sldId id="294" r:id="rId21"/>
-    <p:sldId id="295" r:id="rId22"/>
-    <p:sldId id="297" r:id="rId23"/>
-    <p:sldId id="298" r:id="rId24"/>
-    <p:sldId id="299" r:id="rId25"/>
-    <p:sldId id="301" r:id="rId26"/>
-    <p:sldId id="302" r:id="rId27"/>
-    <p:sldId id="303" r:id="rId28"/>
-    <p:sldId id="305" r:id="rId29"/>
-    <p:sldId id="306" r:id="rId30"/>
+    <p:sldId id="312" r:id="rId10"/>
+    <p:sldId id="285" r:id="rId11"/>
+    <p:sldId id="286" r:id="rId12"/>
+    <p:sldId id="287" r:id="rId13"/>
+    <p:sldId id="291" r:id="rId14"/>
+    <p:sldId id="307" r:id="rId15"/>
+    <p:sldId id="308" r:id="rId16"/>
+    <p:sldId id="311" r:id="rId17"/>
+    <p:sldId id="290" r:id="rId18"/>
+    <p:sldId id="292" r:id="rId19"/>
+    <p:sldId id="304" r:id="rId20"/>
+    <p:sldId id="293" r:id="rId21"/>
+    <p:sldId id="294" r:id="rId22"/>
+    <p:sldId id="295" r:id="rId23"/>
+    <p:sldId id="297" r:id="rId24"/>
+    <p:sldId id="298" r:id="rId25"/>
+    <p:sldId id="299" r:id="rId26"/>
+    <p:sldId id="301" r:id="rId27"/>
+    <p:sldId id="302" r:id="rId28"/>
+    <p:sldId id="303" r:id="rId29"/>
+    <p:sldId id="305" r:id="rId30"/>
+    <p:sldId id="306" r:id="rId31"/>
+    <p:sldId id="313" r:id="rId32"/>
   </p:sldIdLst>
   <p:sldSz cx="10058400" cy="7772400"/>
   <p:notesSz cx="6858000" cy="9144000"/>
@@ -261,7 +263,7 @@
           <a:p>
             <a:fld id="{668871CB-7D37-4FAB-B9ED-4377A4D8FB20}" type="datetimeFigureOut">
               <a:rPr lang="en-US" smtClean="0"/>
-              <a:t>5/12/2026</a:t>
+              <a:t>5/14/2026</a:t>
             </a:fld>
             <a:endParaRPr lang="en-US" dirty="0"/>
           </a:p>
@@ -438,7 +440,7 @@
           <a:p>
             <a:fld id="{443EEF79-99CC-4F81-B4D6-D8238D76DBFC}" type="datetimeFigureOut">
               <a:rPr lang="en-US" smtClean="0"/>
-              <a:t>5/12/2026</a:t>
+              <a:t>5/14/2026</a:t>
             </a:fld>
             <a:endParaRPr lang="en-US" dirty="0"/>
           </a:p>
@@ -879,7 +881,7 @@
           <a:p>
             <a:fld id="{B32EBECA-3212-4A5B-B9AF-C03EDE72AD91}" type="datetimeFigureOut">
               <a:rPr lang="en-US" smtClean="0"/>
-              <a:t>5/12/2026</a:t>
+              <a:t>5/14/2026</a:t>
             </a:fld>
             <a:endParaRPr lang="en-US" dirty="0"/>
           </a:p>
@@ -1064,7 +1066,7 @@
           <a:p>
             <a:fld id="{B32EBECA-3212-4A5B-B9AF-C03EDE72AD91}" type="datetimeFigureOut">
               <a:rPr lang="en-US" smtClean="0"/>
-              <a:t>5/12/2026</a:t>
+              <a:t>5/14/2026</a:t>
             </a:fld>
             <a:endParaRPr lang="en-US" dirty="0"/>
           </a:p>
@@ -1305,7 +1307,7 @@
           <a:p>
             <a:fld id="{B32EBECA-3212-4A5B-B9AF-C03EDE72AD91}" type="datetimeFigureOut">
               <a:rPr lang="en-US" smtClean="0"/>
-              <a:t>5/12/2026</a:t>
+              <a:t>5/14/2026</a:t>
             </a:fld>
             <a:endParaRPr lang="en-US" dirty="0"/>
           </a:p>
@@ -14018,6 +14020,584 @@
         <p:cNvPr id="1" name="">
           <a:extLst>
             <a:ext uri="{FF2B5EF4-FFF2-40B4-BE49-F238E27FC236}">
+              <a16:creationId xmlns:a16="http://schemas.microsoft.com/office/drawing/2014/main" id="{3620E0B4-EF70-230E-FE50-7B9FF95E94EE}"/>
+            </a:ext>
+          </a:extLst>
+        </p:cNvPr>
+        <p:cNvGrpSpPr/>
+        <p:nvPr/>
+      </p:nvGrpSpPr>
+      <p:grpSpPr>
+        <a:xfrm>
+          <a:off x="0" y="0"/>
+          <a:ext cx="0" cy="0"/>
+          <a:chOff x="0" y="0"/>
+          <a:chExt cx="0" cy="0"/>
+        </a:xfrm>
+      </p:grpSpPr>
+      <p:sp>
+        <p:nvSpPr>
+          <p:cNvPr id="2" name="Title 1" hidden="1">
+            <a:extLst>
+              <a:ext uri="{FF2B5EF4-FFF2-40B4-BE49-F238E27FC236}">
+                <a16:creationId xmlns:a16="http://schemas.microsoft.com/office/drawing/2014/main" id="{582F56C0-4B4F-4445-7D2D-69CC65646A61}"/>
+              </a:ext>
+            </a:extLst>
+          </p:cNvPr>
+          <p:cNvSpPr>
+            <a:spLocks noGrp="1"/>
+          </p:cNvSpPr>
+          <p:nvPr>
+            <p:ph type="title"/>
+          </p:nvPr>
+        </p:nvSpPr>
+        <p:spPr/>
+        <p:txBody>
+          <a:bodyPr/>
+          <a:lstStyle/>
+          <a:p>
+            <a:r>
+              <a:rPr lang="en-US" dirty="0"/>
+              <a:t>Cover Page</a:t>
+            </a:r>
+          </a:p>
+        </p:txBody>
+      </p:sp>
+      <p:sp>
+        <p:nvSpPr>
+          <p:cNvPr id="8" name="Title 1">
+            <a:extLst>
+              <a:ext uri="{FF2B5EF4-FFF2-40B4-BE49-F238E27FC236}">
+                <a16:creationId xmlns:a16="http://schemas.microsoft.com/office/drawing/2014/main" id="{CC281F5C-A967-F0BE-F681-D41DC883BFF6}"/>
+              </a:ext>
+            </a:extLst>
+          </p:cNvPr>
+          <p:cNvSpPr txBox="1">
+            <a:spLocks/>
+          </p:cNvSpPr>
+          <p:nvPr/>
+        </p:nvSpPr>
+        <p:spPr>
+          <a:xfrm>
+            <a:off x="2403752" y="399811"/>
+            <a:ext cx="5253486" cy="719719"/>
+          </a:xfrm>
+          <a:prstGeom prst="rect">
+            <a:avLst/>
+          </a:prstGeom>
+        </p:spPr>
+        <p:txBody>
+          <a:bodyPr vert="horz" lIns="0" tIns="0" rIns="0" bIns="0" rtlCol="0" anchor="t">
+            <a:noAutofit/>
+          </a:bodyPr>
+          <a:lstStyle>
+            <a:lvl1pPr algn="ctr" defTabSz="754380" rtl="0" eaLnBrk="1" latinLnBrk="0" hangingPunct="1">
+              <a:lnSpc>
+                <a:spcPct val="90000"/>
+              </a:lnSpc>
+              <a:spcBef>
+                <a:spcPct val="0"/>
+              </a:spcBef>
+              <a:buNone/>
+              <a:defRPr sz="4000" kern="1200">
+                <a:solidFill>
+                  <a:schemeClr val="tx1"/>
+                </a:solidFill>
+                <a:latin typeface="+mj-lt"/>
+                <a:ea typeface="+mj-ea"/>
+                <a:cs typeface="+mj-cs"/>
+              </a:defRPr>
+            </a:lvl1pPr>
+          </a:lstStyle>
+          <a:p>
+            <a:pPr>
+              <a:lnSpc>
+                <a:spcPct val="75000"/>
+              </a:lnSpc>
+            </a:pPr>
+            <a:r>
+              <a:rPr lang="en-US" sz="6000" u="sng" dirty="0" err="1">
+                <a:ln w="41275">
+                  <a:noFill/>
+                </a:ln>
+                <a:solidFill>
+                  <a:schemeClr val="accent2"/>
+                </a:solidFill>
+                <a:ea typeface="Source Sans Pro Black"/>
+              </a:rPr>
+              <a:t>Gitflow</a:t>
+            </a:r>
+            <a:endParaRPr lang="en-US" u="sng" dirty="0" err="1">
+              <a:solidFill>
+                <a:schemeClr val="accent2"/>
+              </a:solidFill>
+            </a:endParaRPr>
+          </a:p>
+          <a:p>
+            <a:pPr>
+              <a:lnSpc>
+                <a:spcPct val="75000"/>
+              </a:lnSpc>
+            </a:pPr>
+            <a:r>
+              <a:rPr lang="en-US" sz="3200">
+                <a:ln w="41275">
+                  <a:noFill/>
+                </a:ln>
+                <a:solidFill>
+                  <a:schemeClr val="tx1">
+                    <a:lumMod val="76000"/>
+                    <a:lumOff val="24000"/>
+                  </a:schemeClr>
+                </a:solidFill>
+                <a:ea typeface="Source Sans Pro Black"/>
+              </a:rPr>
+              <a:t>Git Workflows</a:t>
+            </a:r>
+            <a:endParaRPr lang="en-US" sz="3200" u="sng" dirty="0">
+              <a:ln w="41275">
+                <a:noFill/>
+              </a:ln>
+              <a:solidFill>
+                <a:schemeClr val="tx1">
+                  <a:lumMod val="76000"/>
+                  <a:lumOff val="24000"/>
+                </a:schemeClr>
+              </a:solidFill>
+              <a:ea typeface="Source Sans Pro Black"/>
+            </a:endParaRPr>
+          </a:p>
+        </p:txBody>
+      </p:sp>
+      <p:sp>
+        <p:nvSpPr>
+          <p:cNvPr id="32" name="TextBox 31">
+            <a:extLst>
+              <a:ext uri="{FF2B5EF4-FFF2-40B4-BE49-F238E27FC236}">
+                <a16:creationId xmlns:a16="http://schemas.microsoft.com/office/drawing/2014/main" id="{B5712A2E-1781-225E-238D-5E6E3E3CEA5B}"/>
+              </a:ext>
+            </a:extLst>
+          </p:cNvPr>
+          <p:cNvSpPr txBox="1"/>
+          <p:nvPr/>
+        </p:nvSpPr>
+        <p:spPr>
+          <a:xfrm>
+            <a:off x="2395248" y="1652683"/>
+            <a:ext cx="5257799" cy="1200329"/>
+          </a:xfrm>
+          <a:prstGeom prst="rect">
+            <a:avLst/>
+          </a:prstGeom>
+          <a:noFill/>
+        </p:spPr>
+        <p:txBody>
+          <a:bodyPr rot="0" spcFirstLastPara="0" vertOverflow="overflow" horzOverflow="overflow" vert="horz" wrap="square" lIns="91440" tIns="45720" rIns="91440" bIns="45720" numCol="1" spcCol="0" rtlCol="0" fromWordArt="0" anchor="t" anchorCtr="0" forceAA="0" compatLnSpc="1">
+            <a:prstTxWarp prst="textNoShape">
+              <a:avLst/>
+            </a:prstTxWarp>
+            <a:spAutoFit/>
+          </a:bodyPr>
+          <a:lstStyle/>
+          <a:p>
+            <a:pPr algn="ctr"/>
+            <a:br>
+              <a:rPr lang="en-GB" sz="3600" dirty="0">
+                <a:ea typeface="Source Sans Pro"/>
+              </a:rPr>
+            </a:br>
+            <a:endParaRPr lang="en-GB" sz="3600">
+              <a:solidFill>
+                <a:schemeClr val="bg2">
+                  <a:lumMod val="49000"/>
+                </a:schemeClr>
+              </a:solidFill>
+              <a:ea typeface="Source Sans Pro"/>
+            </a:endParaRPr>
+          </a:p>
+        </p:txBody>
+      </p:sp>
+      <p:cxnSp>
+        <p:nvCxnSpPr>
+          <p:cNvPr id="47" name="Straight Connector 46">
+            <a:extLst>
+              <a:ext uri="{FF2B5EF4-FFF2-40B4-BE49-F238E27FC236}">
+                <a16:creationId xmlns:a16="http://schemas.microsoft.com/office/drawing/2014/main" id="{17CE5083-F6E9-18C8-284B-F1C4AF5FA3D9}"/>
+              </a:ext>
+              <a:ext uri="{C183D7F6-B498-43B3-948B-1728B52AA6E4}">
+                <adec:decorative xmlns:adec="http://schemas.microsoft.com/office/drawing/2017/decorative" val="1"/>
+              </a:ext>
+            </a:extLst>
+          </p:cNvPr>
+          <p:cNvCxnSpPr>
+            <a:cxnSpLocks/>
+          </p:cNvCxnSpPr>
+          <p:nvPr/>
+        </p:nvCxnSpPr>
+        <p:spPr>
+          <a:xfrm>
+            <a:off x="929926" y="1880443"/>
+            <a:ext cx="8677751" cy="0"/>
+          </a:xfrm>
+          <a:prstGeom prst="line">
+            <a:avLst/>
+          </a:prstGeom>
+          <a:ln w="25400">
+            <a:solidFill>
+              <a:schemeClr val="accent2"/>
+            </a:solidFill>
+          </a:ln>
+        </p:spPr>
+        <p:style>
+          <a:lnRef idx="1">
+            <a:schemeClr val="accent1"/>
+          </a:lnRef>
+          <a:fillRef idx="0">
+            <a:schemeClr val="accent1"/>
+          </a:fillRef>
+          <a:effectRef idx="0">
+            <a:schemeClr val="accent1"/>
+          </a:effectRef>
+          <a:fontRef idx="minor">
+            <a:schemeClr val="tx1"/>
+          </a:fontRef>
+        </p:style>
+      </p:cxnSp>
+      <p:pic>
+        <p:nvPicPr>
+          <p:cNvPr id="5" name="Graphic 4" descr="Hotfix branch within git workflow">
+            <a:extLst>
+              <a:ext uri="{FF2B5EF4-FFF2-40B4-BE49-F238E27FC236}">
+                <a16:creationId xmlns:a16="http://schemas.microsoft.com/office/drawing/2014/main" id="{23673354-41CF-DB5D-738E-24739AB056FB}"/>
+              </a:ext>
+            </a:extLst>
+          </p:cNvPr>
+          <p:cNvPicPr>
+            <a:picLocks noChangeAspect="1"/>
+          </p:cNvPicPr>
+          <p:nvPr/>
+        </p:nvPicPr>
+        <p:blipFill>
+          <a:blip>
+            <a:extLst>
+              <a:ext uri="{96DAC541-7B7A-43D3-8B79-37D633B846F1}">
+                <asvg:svgBlip xmlns:asvg="http://schemas.microsoft.com/office/drawing/2016/SVG/main" r:embed="rId2"/>
+              </a:ext>
+            </a:extLst>
+          </a:blip>
+          <a:stretch>
+            <a:fillRect/>
+          </a:stretch>
+        </p:blipFill>
+        <p:spPr>
+          <a:xfrm>
+            <a:off x="2875578" y="2052123"/>
+            <a:ext cx="6808252" cy="4864661"/>
+          </a:xfrm>
+          <a:prstGeom prst="rect">
+            <a:avLst/>
+          </a:prstGeom>
+        </p:spPr>
+      </p:pic>
+      <p:pic>
+        <p:nvPicPr>
+          <p:cNvPr id="3" name="Picture 2" descr="A cartoon character with a computer&#10;&#10;AI-generated content may be incorrect.">
+            <a:extLst>
+              <a:ext uri="{FF2B5EF4-FFF2-40B4-BE49-F238E27FC236}">
+                <a16:creationId xmlns:a16="http://schemas.microsoft.com/office/drawing/2014/main" id="{21BCB5C4-433E-CBE4-7FE7-7773102DA8C7}"/>
+              </a:ext>
+            </a:extLst>
+          </p:cNvPr>
+          <p:cNvPicPr>
+            <a:picLocks noChangeAspect="1"/>
+          </p:cNvPicPr>
+          <p:nvPr/>
+        </p:nvPicPr>
+        <p:blipFill>
+          <a:blip r:embed="rId3"/>
+          <a:stretch>
+            <a:fillRect/>
+          </a:stretch>
+        </p:blipFill>
+        <p:spPr>
+          <a:xfrm rot="360000">
+            <a:off x="2075205" y="59612"/>
+            <a:ext cx="1595041" cy="1509430"/>
+          </a:xfrm>
+          <a:prstGeom prst="rect">
+            <a:avLst/>
+          </a:prstGeom>
+          <a:ln>
+            <a:noFill/>
+          </a:ln>
+          <a:effectLst>
+            <a:softEdge rad="112500"/>
+          </a:effectLst>
+        </p:spPr>
+      </p:pic>
+      <p:sp>
+        <p:nvSpPr>
+          <p:cNvPr id="4" name="TextBox 3">
+            <a:extLst>
+              <a:ext uri="{FF2B5EF4-FFF2-40B4-BE49-F238E27FC236}">
+                <a16:creationId xmlns:a16="http://schemas.microsoft.com/office/drawing/2014/main" id="{29EA55F1-5084-6A30-566B-F1583FF7DA2E}"/>
+              </a:ext>
+            </a:extLst>
+          </p:cNvPr>
+          <p:cNvSpPr txBox="1"/>
+          <p:nvPr/>
+        </p:nvSpPr>
+        <p:spPr>
+          <a:xfrm>
+            <a:off x="130679" y="3232340"/>
+            <a:ext cx="2743199" cy="1938992"/>
+          </a:xfrm>
+          <a:prstGeom prst="rect">
+            <a:avLst/>
+          </a:prstGeom>
+          <a:noFill/>
+        </p:spPr>
+        <p:txBody>
+          <a:bodyPr rot="0" spcFirstLastPara="0" vertOverflow="overflow" horzOverflow="overflow" vert="horz" wrap="square" lIns="91440" tIns="45720" rIns="91440" bIns="45720" numCol="1" spcCol="0" rtlCol="0" fromWordArt="0" anchor="t" anchorCtr="0" forceAA="0" compatLnSpc="1">
+            <a:prstTxWarp prst="textNoShape">
+              <a:avLst/>
+            </a:prstTxWarp>
+            <a:spAutoFit/>
+          </a:bodyPr>
+          <a:lstStyle/>
+          <a:p>
+            <a:r>
+              <a:rPr lang="en-GB" sz="2000" b="1">
+                <a:ea typeface="Source Sans Pro"/>
+              </a:rPr>
+              <a:t>Examples of branches:</a:t>
+            </a:r>
+            <a:endParaRPr lang="en-US" b="1"/>
+          </a:p>
+          <a:p>
+            <a:pPr marL="342900" indent="-342900">
+              <a:buFont typeface="Wingdings"/>
+              <a:buChar char="ü"/>
+            </a:pPr>
+            <a:r>
+              <a:rPr lang="en-GB" sz="2000" b="1">
+                <a:ea typeface="Source Sans Pro"/>
+              </a:rPr>
+              <a:t>main</a:t>
+            </a:r>
+            <a:endParaRPr lang="en-GB" sz="2000" dirty="0">
+              <a:ea typeface="Source Sans Pro"/>
+            </a:endParaRPr>
+          </a:p>
+          <a:p>
+            <a:pPr marL="342900" indent="-342900">
+              <a:buFont typeface="Wingdings"/>
+              <a:buChar char="ü"/>
+            </a:pPr>
+            <a:r>
+              <a:rPr lang="en-GB" sz="2000" b="1">
+                <a:ea typeface="Source Sans Pro"/>
+              </a:rPr>
+              <a:t>develop</a:t>
+            </a:r>
+            <a:endParaRPr lang="en-GB" sz="2000" dirty="0">
+              <a:ea typeface="Source Sans Pro"/>
+            </a:endParaRPr>
+          </a:p>
+          <a:p>
+            <a:pPr marL="342900" indent="-342900">
+              <a:buFont typeface="Wingdings"/>
+              <a:buChar char="ü"/>
+            </a:pPr>
+            <a:r>
+              <a:rPr lang="en-GB" sz="2000" b="1">
+                <a:ea typeface="Source Sans Pro"/>
+              </a:rPr>
+              <a:t>hotfix</a:t>
+            </a:r>
+            <a:r>
+              <a:rPr lang="en-GB" sz="2000">
+                <a:ea typeface="Source Sans Pro"/>
+              </a:rPr>
+              <a:t>/page-crash</a:t>
+            </a:r>
+          </a:p>
+          <a:p>
+            <a:pPr marL="342900" indent="-342900">
+              <a:buFont typeface="Wingdings"/>
+              <a:buChar char="ü"/>
+            </a:pPr>
+            <a:r>
+              <a:rPr lang="en-GB" sz="2000" b="1">
+                <a:ea typeface="Source Sans Pro"/>
+              </a:rPr>
+              <a:t>release</a:t>
+            </a:r>
+            <a:r>
+              <a:rPr lang="en-GB" sz="2000">
+                <a:ea typeface="Source Sans Pro"/>
+              </a:rPr>
+              <a:t>/1.0.0</a:t>
+            </a:r>
+          </a:p>
+          <a:p>
+            <a:pPr marL="342900" indent="-342900">
+              <a:buFont typeface="Wingdings"/>
+              <a:buChar char="ü"/>
+            </a:pPr>
+            <a:r>
+              <a:rPr lang="en-GB" sz="2000" b="1" dirty="0">
+                <a:ea typeface="Source Sans Pro"/>
+              </a:rPr>
+              <a:t>feature</a:t>
+            </a:r>
+            <a:r>
+              <a:rPr lang="en-GB" sz="2000" dirty="0">
+                <a:ea typeface="Source Sans Pro"/>
+              </a:rPr>
+              <a:t>/</a:t>
+            </a:r>
+            <a:r>
+              <a:rPr lang="en-GB" sz="2000" dirty="0" err="1">
+                <a:ea typeface="Source Sans Pro"/>
+              </a:rPr>
+              <a:t>todo</a:t>
+            </a:r>
+            <a:r>
+              <a:rPr lang="en-GB" sz="2000" dirty="0">
+                <a:ea typeface="Source Sans Pro"/>
+              </a:rPr>
+              <a:t>-page</a:t>
+            </a:r>
+          </a:p>
+        </p:txBody>
+      </p:sp>
+      <p:sp>
+        <p:nvSpPr>
+          <p:cNvPr id="6" name="TextBox 5">
+            <a:extLst>
+              <a:ext uri="{FF2B5EF4-FFF2-40B4-BE49-F238E27FC236}">
+                <a16:creationId xmlns:a16="http://schemas.microsoft.com/office/drawing/2014/main" id="{E3B2EB25-E3AE-77E3-8923-7FACD0D1D8FA}"/>
+              </a:ext>
+            </a:extLst>
+          </p:cNvPr>
+          <p:cNvSpPr txBox="1"/>
+          <p:nvPr/>
+        </p:nvSpPr>
+        <p:spPr>
+          <a:xfrm>
+            <a:off x="638421" y="7001411"/>
+            <a:ext cx="8791979" cy="1222642"/>
+          </a:xfrm>
+          <a:prstGeom prst="rect">
+            <a:avLst/>
+          </a:prstGeom>
+          <a:noFill/>
+        </p:spPr>
+        <p:txBody>
+          <a:bodyPr rot="0" spcFirstLastPara="0" vertOverflow="overflow" horzOverflow="overflow" vert="horz" wrap="square" lIns="91440" tIns="45720" rIns="91440" bIns="45720" numCol="1" spcCol="0" rtlCol="0" fromWordArt="0" anchor="t" anchorCtr="0" forceAA="0" compatLnSpc="1">
+            <a:prstTxWarp prst="textNoShape">
+              <a:avLst/>
+            </a:prstTxWarp>
+            <a:spAutoFit/>
+          </a:bodyPr>
+          <a:lstStyle/>
+          <a:p>
+            <a:pPr rtl="0">
+              <a:lnSpc>
+                <a:spcPts val="2025"/>
+              </a:lnSpc>
+            </a:pPr>
+            <a:r>
+              <a:rPr lang="en-GB" sz="2000" baseline="0">
+                <a:latin typeface="Source Sans Pro"/>
+                <a:ea typeface="Segoe UI"/>
+                <a:cs typeface="Segoe UI"/>
+              </a:rPr>
+              <a:t>Document reference:</a:t>
+            </a:r>
+            <a:r>
+              <a:rPr lang="en-GB" sz="2000">
+                <a:latin typeface="Source Sans Pro"/>
+                <a:ea typeface="Segoe UI"/>
+                <a:cs typeface="Segoe UI"/>
+              </a:rPr>
+              <a:t>​</a:t>
+            </a:r>
+            <a:br>
+              <a:rPr lang="en-GB" sz="2000">
+                <a:latin typeface="Source Sans Pro"/>
+                <a:ea typeface="Segoe UI"/>
+                <a:cs typeface="Segoe UI"/>
+              </a:rPr>
+            </a:br>
+            <a:r>
+              <a:rPr lang="en-GB" sz="2000" u="sng" strike="noStrike" baseline="0">
+                <a:solidFill>
+                  <a:srgbClr val="5F5F5F"/>
+                </a:solidFill>
+                <a:latin typeface="Source Sans Pro"/>
+                <a:ea typeface="Segoe UI"/>
+                <a:cs typeface="Segoe UI"/>
+                <a:hlinkClick r:id="rId4"/>
+              </a:rPr>
+              <a:t>https://www.atlassian.com/git/tutorials/comparing-workflows/gitflow-workflow</a:t>
+            </a:r>
+            <a:r>
+              <a:rPr lang="en-GB" sz="2000">
+                <a:latin typeface="Source Sans Pro"/>
+                <a:ea typeface="Segoe UI"/>
+                <a:cs typeface="Segoe UI"/>
+              </a:rPr>
+              <a:t>​</a:t>
+            </a:r>
+          </a:p>
+          <a:p>
+            <a:pPr marL="342900" lvl="0" indent="-342900" rtl="0">
+              <a:buFont typeface="Wingdings,Sans-Serif"/>
+              <a:buChar char="ü"/>
+            </a:pPr>
+            <a:endParaRPr lang="en-GB">
+              <a:latin typeface="Arial"/>
+              <a:ea typeface="Arial"/>
+              <a:cs typeface="Arial"/>
+            </a:endParaRPr>
+          </a:p>
+          <a:p>
+            <a:pPr algn="ctr"/>
+            <a:endParaRPr lang="en-GB"/>
+          </a:p>
+        </p:txBody>
+      </p:sp>
+    </p:spTree>
+    <p:extLst>
+      <p:ext uri="{BB962C8B-B14F-4D97-AF65-F5344CB8AC3E}">
+        <p14:creationId xmlns:p14="http://schemas.microsoft.com/office/powerpoint/2010/main" val="1120510944"/>
+      </p:ext>
+    </p:extLst>
+  </p:cSld>
+  <p:clrMapOvr>
+    <a:masterClrMapping/>
+  </p:clrMapOvr>
+</p:sld>
+</file>
+
+<file path=ppt/slides/slide11.xml><?xml version="1.0" encoding="utf-8"?>
+<p:sld xmlns:a="http://schemas.openxmlformats.org/drawingml/2006/main" xmlns:r="http://schemas.openxmlformats.org/officeDocument/2006/relationships" xmlns:p="http://schemas.openxmlformats.org/presentationml/2006/main">
+  <p:cSld>
+    <p:bg>
+      <p:bgPr>
+        <a:solidFill>
+          <a:schemeClr val="bg1"/>
+        </a:solidFill>
+        <a:effectLst/>
+      </p:bgPr>
+    </p:bg>
+    <p:spTree>
+      <p:nvGrpSpPr>
+        <p:cNvPr id="1" name="">
+          <a:extLst>
+            <a:ext uri="{FF2B5EF4-FFF2-40B4-BE49-F238E27FC236}">
               <a16:creationId xmlns:a16="http://schemas.microsoft.com/office/drawing/2014/main" id="{3D95C0EA-D49D-FC99-58BE-60AF032825ED}"/>
             </a:ext>
           </a:extLst>
@@ -14950,7 +15530,7 @@
 </p:sld>
 </file>
 
-<file path=ppt/slides/slide11.xml><?xml version="1.0" encoding="utf-8"?>
+<file path=ppt/slides/slide12.xml><?xml version="1.0" encoding="utf-8"?>
 <p:sld xmlns:a="http://schemas.openxmlformats.org/drawingml/2006/main" xmlns:r="http://schemas.openxmlformats.org/officeDocument/2006/relationships" xmlns:p="http://schemas.openxmlformats.org/presentationml/2006/main">
   <p:cSld>
     <p:bg>
@@ -16011,7 +16591,7 @@
 </p:sld>
 </file>
 
-<file path=ppt/slides/slide12.xml><?xml version="1.0" encoding="utf-8"?>
+<file path=ppt/slides/slide13.xml><?xml version="1.0" encoding="utf-8"?>
 <p:sld xmlns:a="http://schemas.openxmlformats.org/drawingml/2006/main" xmlns:r="http://schemas.openxmlformats.org/officeDocument/2006/relationships" xmlns:p="http://schemas.openxmlformats.org/presentationml/2006/main">
   <p:cSld>
     <p:bg>
@@ -17443,7 +18023,7 @@
 </p:sld>
 </file>
 
-<file path=ppt/slides/slide13.xml><?xml version="1.0" encoding="utf-8"?>
+<file path=ppt/slides/slide14.xml><?xml version="1.0" encoding="utf-8"?>
 <p:sld xmlns:a="http://schemas.openxmlformats.org/drawingml/2006/main" xmlns:r="http://schemas.openxmlformats.org/officeDocument/2006/relationships" xmlns:p="http://schemas.openxmlformats.org/presentationml/2006/main">
   <p:cSld>
     <p:bg>
@@ -17775,7 +18355,7 @@
 </p:sld>
 </file>
 
-<file path=ppt/slides/slide14.xml><?xml version="1.0" encoding="utf-8"?>
+<file path=ppt/slides/slide15.xml><?xml version="1.0" encoding="utf-8"?>
 <p:sld xmlns:a="http://schemas.openxmlformats.org/drawingml/2006/main" xmlns:r="http://schemas.openxmlformats.org/officeDocument/2006/relationships" xmlns:p="http://schemas.openxmlformats.org/presentationml/2006/main">
   <p:cSld>
     <p:bg>
@@ -18072,7 +18652,7 @@
 </p:sld>
 </file>
 
-<file path=ppt/slides/slide15.xml><?xml version="1.0" encoding="utf-8"?>
+<file path=ppt/slides/slide16.xml><?xml version="1.0" encoding="utf-8"?>
 <p:sld xmlns:a="http://schemas.openxmlformats.org/drawingml/2006/main" xmlns:r="http://schemas.openxmlformats.org/officeDocument/2006/relationships" xmlns:p="http://schemas.openxmlformats.org/presentationml/2006/main">
   <p:cSld>
     <p:bg>
@@ -18334,7 +18914,7 @@
 </p:sld>
 </file>
 
-<file path=ppt/slides/slide16.xml><?xml version="1.0" encoding="utf-8"?>
+<file path=ppt/slides/slide17.xml><?xml version="1.0" encoding="utf-8"?>
 <p:sld xmlns:a="http://schemas.openxmlformats.org/drawingml/2006/main" xmlns:r="http://schemas.openxmlformats.org/officeDocument/2006/relationships" xmlns:p="http://schemas.openxmlformats.org/presentationml/2006/main">
   <p:cSld>
     <p:bg>
@@ -18771,6 +19351,36 @@
           </a:p>
         </p:txBody>
       </p:sp>
+      <p:pic>
+        <p:nvPicPr>
+          <p:cNvPr id="5" name="Picture 4">
+            <a:extLst>
+              <a:ext uri="{FF2B5EF4-FFF2-40B4-BE49-F238E27FC236}">
+                <a16:creationId xmlns:a16="http://schemas.microsoft.com/office/drawing/2014/main" id="{D9F77BC0-3779-F3B8-6EB8-29BBE1DAA6A2}"/>
+              </a:ext>
+            </a:extLst>
+          </p:cNvPr>
+          <p:cNvPicPr>
+            <a:picLocks noChangeAspect="1"/>
+          </p:cNvPicPr>
+          <p:nvPr/>
+        </p:nvPicPr>
+        <p:blipFill>
+          <a:blip r:embed="rId6"/>
+          <a:stretch>
+            <a:fillRect/>
+          </a:stretch>
+        </p:blipFill>
+        <p:spPr>
+          <a:xfrm>
+            <a:off x="8733595" y="153454"/>
+            <a:ext cx="904996" cy="1117831"/>
+          </a:xfrm>
+          <a:prstGeom prst="rect">
+            <a:avLst/>
+          </a:prstGeom>
+        </p:spPr>
+      </p:pic>
     </p:spTree>
     <p:extLst>
       <p:ext uri="{BB962C8B-B14F-4D97-AF65-F5344CB8AC3E}">
@@ -18784,7 +19394,7 @@
 </p:sld>
 </file>
 
-<file path=ppt/slides/slide17.xml><?xml version="1.0" encoding="utf-8"?>
+<file path=ppt/slides/slide18.xml><?xml version="1.0" encoding="utf-8"?>
 <p:sld xmlns:a="http://schemas.openxmlformats.org/drawingml/2006/main" xmlns:r="http://schemas.openxmlformats.org/officeDocument/2006/relationships" xmlns:p="http://schemas.openxmlformats.org/presentationml/2006/main">
   <p:cSld>
     <p:bg>
@@ -19074,6 +19684,36 @@
           </a:prstGeom>
         </p:spPr>
       </p:pic>
+      <p:pic>
+        <p:nvPicPr>
+          <p:cNvPr id="3" name="Picture 2">
+            <a:extLst>
+              <a:ext uri="{FF2B5EF4-FFF2-40B4-BE49-F238E27FC236}">
+                <a16:creationId xmlns:a16="http://schemas.microsoft.com/office/drawing/2014/main" id="{6BAD4609-7AB0-14A5-EF85-9DF221D985A3}"/>
+              </a:ext>
+            </a:extLst>
+          </p:cNvPr>
+          <p:cNvPicPr>
+            <a:picLocks noChangeAspect="1"/>
+          </p:cNvPicPr>
+          <p:nvPr/>
+        </p:nvPicPr>
+        <p:blipFill>
+          <a:blip r:embed="rId3"/>
+          <a:stretch>
+            <a:fillRect/>
+          </a:stretch>
+        </p:blipFill>
+        <p:spPr>
+          <a:xfrm>
+            <a:off x="6557892" y="73667"/>
+            <a:ext cx="904996" cy="1117831"/>
+          </a:xfrm>
+          <a:prstGeom prst="rect">
+            <a:avLst/>
+          </a:prstGeom>
+        </p:spPr>
+      </p:pic>
     </p:spTree>
     <p:extLst>
       <p:ext uri="{BB962C8B-B14F-4D97-AF65-F5344CB8AC3E}">
@@ -19087,7 +19727,7 @@
 </p:sld>
 </file>
 
-<file path=ppt/slides/slide18.xml><?xml version="1.0" encoding="utf-8"?>
+<file path=ppt/slides/slide19.xml><?xml version="1.0" encoding="utf-8"?>
 <p:sld xmlns:a="http://schemas.openxmlformats.org/drawingml/2006/main" xmlns:r="http://schemas.openxmlformats.org/officeDocument/2006/relationships" xmlns:p="http://schemas.openxmlformats.org/presentationml/2006/main">
   <p:cSld>
     <p:bg>
@@ -19556,292 +20196,12 @@
           </a:p>
         </p:txBody>
       </p:sp>
-    </p:spTree>
-    <p:extLst>
-      <p:ext uri="{BB962C8B-B14F-4D97-AF65-F5344CB8AC3E}">
-        <p14:creationId xmlns:p14="http://schemas.microsoft.com/office/powerpoint/2010/main" val="916057669"/>
-      </p:ext>
-    </p:extLst>
-  </p:cSld>
-  <p:clrMapOvr>
-    <a:masterClrMapping/>
-  </p:clrMapOvr>
-</p:sld>
-</file>
-
-<file path=ppt/slides/slide19.xml><?xml version="1.0" encoding="utf-8"?>
-<p:sld xmlns:a="http://schemas.openxmlformats.org/drawingml/2006/main" xmlns:r="http://schemas.openxmlformats.org/officeDocument/2006/relationships" xmlns:p="http://schemas.openxmlformats.org/presentationml/2006/main">
-  <p:cSld>
-    <p:bg>
-      <p:bgPr>
-        <a:solidFill>
-          <a:schemeClr val="bg1"/>
-        </a:solidFill>
-        <a:effectLst/>
-      </p:bgPr>
-    </p:bg>
-    <p:spTree>
-      <p:nvGrpSpPr>
-        <p:cNvPr id="1" name="">
-          <a:extLst>
-            <a:ext uri="{FF2B5EF4-FFF2-40B4-BE49-F238E27FC236}">
-              <a16:creationId xmlns:a16="http://schemas.microsoft.com/office/drawing/2014/main" id="{7BC18129-AD35-8D8F-4323-77EF478FCE81}"/>
-            </a:ext>
-          </a:extLst>
-        </p:cNvPr>
-        <p:cNvGrpSpPr/>
-        <p:nvPr/>
-      </p:nvGrpSpPr>
-      <p:grpSpPr>
-        <a:xfrm>
-          <a:off x="0" y="0"/>
-          <a:ext cx="0" cy="0"/>
-          <a:chOff x="0" y="0"/>
-          <a:chExt cx="0" cy="0"/>
-        </a:xfrm>
-      </p:grpSpPr>
-      <p:sp>
-        <p:nvSpPr>
-          <p:cNvPr id="2" name="Title 1" hidden="1">
+      <p:pic>
+        <p:nvPicPr>
+          <p:cNvPr id="3" name="Picture 2">
             <a:extLst>
               <a:ext uri="{FF2B5EF4-FFF2-40B4-BE49-F238E27FC236}">
-                <a16:creationId xmlns:a16="http://schemas.microsoft.com/office/drawing/2014/main" id="{B0ACF982-D30B-A0B5-0BE2-923B1F92E274}"/>
-              </a:ext>
-            </a:extLst>
-          </p:cNvPr>
-          <p:cNvSpPr>
-            <a:spLocks noGrp="1"/>
-          </p:cNvSpPr>
-          <p:nvPr>
-            <p:ph type="title"/>
-          </p:nvPr>
-        </p:nvSpPr>
-        <p:spPr/>
-        <p:txBody>
-          <a:bodyPr/>
-          <a:lstStyle/>
-          <a:p>
-            <a:r>
-              <a:rPr lang="en-US" dirty="0"/>
-              <a:t>Cover Page</a:t>
-            </a:r>
-          </a:p>
-        </p:txBody>
-      </p:sp>
-      <p:sp>
-        <p:nvSpPr>
-          <p:cNvPr id="8" name="Title 1">
-            <a:extLst>
-              <a:ext uri="{FF2B5EF4-FFF2-40B4-BE49-F238E27FC236}">
-                <a16:creationId xmlns:a16="http://schemas.microsoft.com/office/drawing/2014/main" id="{94C7D1FE-CC59-998E-68C3-1BD53AA51ECD}"/>
-              </a:ext>
-            </a:extLst>
-          </p:cNvPr>
-          <p:cNvSpPr txBox="1">
-            <a:spLocks/>
-          </p:cNvSpPr>
-          <p:nvPr/>
-        </p:nvSpPr>
-        <p:spPr>
-          <a:xfrm>
-            <a:off x="1161975" y="151635"/>
-            <a:ext cx="7804774" cy="719719"/>
-          </a:xfrm>
-          <a:prstGeom prst="rect">
-            <a:avLst/>
-          </a:prstGeom>
-        </p:spPr>
-        <p:txBody>
-          <a:bodyPr vert="horz" lIns="0" tIns="0" rIns="0" bIns="0" rtlCol="0" anchor="t">
-            <a:noAutofit/>
-          </a:bodyPr>
-          <a:lstStyle>
-            <a:lvl1pPr algn="ctr" defTabSz="754380" rtl="0" eaLnBrk="1" latinLnBrk="0" hangingPunct="1">
-              <a:lnSpc>
-                <a:spcPct val="90000"/>
-              </a:lnSpc>
-              <a:spcBef>
-                <a:spcPct val="0"/>
-              </a:spcBef>
-              <a:buNone/>
-              <a:defRPr sz="4000" kern="1200">
-                <a:solidFill>
-                  <a:schemeClr val="tx1"/>
-                </a:solidFill>
-                <a:latin typeface="+mj-lt"/>
-                <a:ea typeface="+mj-ea"/>
-                <a:cs typeface="+mj-cs"/>
-              </a:defRPr>
-            </a:lvl1pPr>
-          </a:lstStyle>
-          <a:p>
-            <a:pPr>
-              <a:lnSpc>
-                <a:spcPct val="75000"/>
-              </a:lnSpc>
-            </a:pPr>
-            <a:r>
-              <a:rPr lang="en-US" sz="6000" u="sng" dirty="0">
-                <a:ln w="41275">
-                  <a:noFill/>
-                </a:ln>
-                <a:solidFill>
-                  <a:schemeClr val="accent2"/>
-                </a:solidFill>
-                <a:ea typeface="Source Sans Pro Black"/>
-              </a:rPr>
-              <a:t>Website</a:t>
-            </a:r>
-          </a:p>
-          <a:p>
-            <a:pPr>
-              <a:lnSpc>
-                <a:spcPct val="75000"/>
-              </a:lnSpc>
-            </a:pPr>
-            <a:r>
-              <a:rPr lang="en-US" sz="3200" dirty="0">
-                <a:ln w="41275">
-                  <a:noFill/>
-                </a:ln>
-                <a:solidFill>
-                  <a:schemeClr val="tx1">
-                    <a:lumMod val="76000"/>
-                    <a:lumOff val="24000"/>
-                  </a:schemeClr>
-                </a:solidFill>
-                <a:ea typeface="Source Sans Pro Black"/>
-              </a:rPr>
-              <a:t>Now you try</a:t>
-            </a:r>
-            <a:endParaRPr lang="en-US" sz="3200" u="sng" dirty="0">
-              <a:ln w="41275">
-                <a:noFill/>
-              </a:ln>
-              <a:solidFill>
-                <a:schemeClr val="tx1">
-                  <a:lumMod val="76000"/>
-                  <a:lumOff val="24000"/>
-                </a:schemeClr>
-              </a:solidFill>
-              <a:ea typeface="Source Sans Pro Black"/>
-            </a:endParaRPr>
-          </a:p>
-        </p:txBody>
-      </p:sp>
-      <p:cxnSp>
-        <p:nvCxnSpPr>
-          <p:cNvPr id="47" name="Straight Connector 46">
-            <a:extLst>
-              <a:ext uri="{FF2B5EF4-FFF2-40B4-BE49-F238E27FC236}">
-                <a16:creationId xmlns:a16="http://schemas.microsoft.com/office/drawing/2014/main" id="{76FD6A2C-0DF1-6F56-FC5C-B5F79B417FA2}"/>
-              </a:ext>
-              <a:ext uri="{C183D7F6-B498-43B3-948B-1728B52AA6E4}">
-                <adec:decorative xmlns:adec="http://schemas.microsoft.com/office/drawing/2017/decorative" val="1"/>
-              </a:ext>
-            </a:extLst>
-          </p:cNvPr>
-          <p:cNvCxnSpPr>
-            <a:cxnSpLocks/>
-          </p:cNvCxnSpPr>
-          <p:nvPr/>
-        </p:nvCxnSpPr>
-        <p:spPr>
-          <a:xfrm>
-            <a:off x="839615" y="1271285"/>
-            <a:ext cx="8677751" cy="0"/>
-          </a:xfrm>
-          <a:prstGeom prst="line">
-            <a:avLst/>
-          </a:prstGeom>
-          <a:ln w="25400">
-            <a:solidFill>
-              <a:schemeClr val="accent2"/>
-            </a:solidFill>
-          </a:ln>
-        </p:spPr>
-        <p:style>
-          <a:lnRef idx="1">
-            <a:schemeClr val="accent1"/>
-          </a:lnRef>
-          <a:fillRef idx="0">
-            <a:schemeClr val="accent1"/>
-          </a:fillRef>
-          <a:effectRef idx="0">
-            <a:schemeClr val="accent1"/>
-          </a:effectRef>
-          <a:fontRef idx="minor">
-            <a:schemeClr val="tx1"/>
-          </a:fontRef>
-        </p:style>
-      </p:cxnSp>
-      <p:sp>
-        <p:nvSpPr>
-          <p:cNvPr id="4" name="TextBox 3">
-            <a:extLst>
-              <a:ext uri="{FF2B5EF4-FFF2-40B4-BE49-F238E27FC236}">
-                <a16:creationId xmlns:a16="http://schemas.microsoft.com/office/drawing/2014/main" id="{6D634C00-33F6-ED3B-39D9-7C187DEBE2EE}"/>
-              </a:ext>
-            </a:extLst>
-          </p:cNvPr>
-          <p:cNvSpPr txBox="1"/>
-          <p:nvPr/>
-        </p:nvSpPr>
-        <p:spPr>
-          <a:xfrm>
-            <a:off x="2904721" y="2006982"/>
-            <a:ext cx="5029200" cy="401007"/>
-          </a:xfrm>
-          <a:prstGeom prst="rect">
-            <a:avLst/>
-          </a:prstGeom>
-          <a:noFill/>
-        </p:spPr>
-        <p:txBody>
-          <a:bodyPr wrap="square">
-            <a:spAutoFit/>
-          </a:bodyPr>
-          <a:lstStyle/>
-          <a:p>
-            <a:pPr algn="just"/>
-            <a:r>
-              <a:rPr lang="en-US" dirty="0"/>
-              <a:t>Head over to </a:t>
-            </a:r>
-            <a:r>
-              <a:rPr lang="en-001" dirty="0">
-                <a:hlinkClick r:id="rId2"/>
-              </a:rPr>
-              <a:t>http://localhost:</a:t>
-            </a:r>
-            <a:r>
-              <a:rPr lang="en-US" dirty="0">
-                <a:hlinkClick r:id="rId2"/>
-              </a:rPr>
-              <a:t>3</a:t>
-            </a:r>
-            <a:r>
-              <a:rPr lang="en-001" dirty="0">
-                <a:hlinkClick r:id="rId2"/>
-              </a:rPr>
-              <a:t>00</a:t>
-            </a:r>
-            <a:r>
-              <a:rPr lang="en-US" dirty="0">
-                <a:hlinkClick r:id="rId2"/>
-              </a:rPr>
-              <a:t>0/</a:t>
-            </a:r>
-            <a:endParaRPr lang="en-001" dirty="0"/>
-          </a:p>
-        </p:txBody>
-      </p:sp>
-      <p:pic>
-        <p:nvPicPr>
-          <p:cNvPr id="5" name="Picture 4">
-            <a:extLst>
-              <a:ext uri="{FF2B5EF4-FFF2-40B4-BE49-F238E27FC236}">
-                <a16:creationId xmlns:a16="http://schemas.microsoft.com/office/drawing/2014/main" id="{E0838244-AF26-1FD2-3F39-D30FFFC108EE}"/>
+                <a16:creationId xmlns:a16="http://schemas.microsoft.com/office/drawing/2014/main" id="{E8FF45A1-5388-96D3-9151-38D80B3B5EE8}"/>
               </a:ext>
             </a:extLst>
           </p:cNvPr>
@@ -19858,8 +20218,8 @@
         </p:blipFill>
         <p:spPr>
           <a:xfrm>
-            <a:off x="873303" y="2977198"/>
-            <a:ext cx="8311793" cy="2433693"/>
+            <a:off x="2420653" y="68327"/>
+            <a:ext cx="904996" cy="1117831"/>
           </a:xfrm>
           <a:prstGeom prst="rect">
             <a:avLst/>
@@ -19869,7 +20229,7 @@
     </p:spTree>
     <p:extLst>
       <p:ext uri="{BB962C8B-B14F-4D97-AF65-F5344CB8AC3E}">
-        <p14:creationId xmlns:p14="http://schemas.microsoft.com/office/powerpoint/2010/main" val="767257223"/>
+        <p14:creationId xmlns:p14="http://schemas.microsoft.com/office/powerpoint/2010/main" val="916057669"/>
       </p:ext>
     </p:extLst>
   </p:cSld>
@@ -24548,6 +24908,436 @@
         <p:cNvPr id="1" name="">
           <a:extLst>
             <a:ext uri="{FF2B5EF4-FFF2-40B4-BE49-F238E27FC236}">
+              <a16:creationId xmlns:a16="http://schemas.microsoft.com/office/drawing/2014/main" id="{7BC18129-AD35-8D8F-4323-77EF478FCE81}"/>
+            </a:ext>
+          </a:extLst>
+        </p:cNvPr>
+        <p:cNvGrpSpPr/>
+        <p:nvPr/>
+      </p:nvGrpSpPr>
+      <p:grpSpPr>
+        <a:xfrm>
+          <a:off x="0" y="0"/>
+          <a:ext cx="0" cy="0"/>
+          <a:chOff x="0" y="0"/>
+          <a:chExt cx="0" cy="0"/>
+        </a:xfrm>
+      </p:grpSpPr>
+      <p:sp>
+        <p:nvSpPr>
+          <p:cNvPr id="2" name="Title 1" hidden="1">
+            <a:extLst>
+              <a:ext uri="{FF2B5EF4-FFF2-40B4-BE49-F238E27FC236}">
+                <a16:creationId xmlns:a16="http://schemas.microsoft.com/office/drawing/2014/main" id="{B0ACF982-D30B-A0B5-0BE2-923B1F92E274}"/>
+              </a:ext>
+            </a:extLst>
+          </p:cNvPr>
+          <p:cNvSpPr>
+            <a:spLocks noGrp="1"/>
+          </p:cNvSpPr>
+          <p:nvPr>
+            <p:ph type="title"/>
+          </p:nvPr>
+        </p:nvSpPr>
+        <p:spPr/>
+        <p:txBody>
+          <a:bodyPr/>
+          <a:lstStyle/>
+          <a:p>
+            <a:r>
+              <a:rPr lang="en-US" dirty="0"/>
+              <a:t>Cover Page</a:t>
+            </a:r>
+          </a:p>
+        </p:txBody>
+      </p:sp>
+      <p:sp>
+        <p:nvSpPr>
+          <p:cNvPr id="8" name="Title 1">
+            <a:extLst>
+              <a:ext uri="{FF2B5EF4-FFF2-40B4-BE49-F238E27FC236}">
+                <a16:creationId xmlns:a16="http://schemas.microsoft.com/office/drawing/2014/main" id="{94C7D1FE-CC59-998E-68C3-1BD53AA51ECD}"/>
+              </a:ext>
+            </a:extLst>
+          </p:cNvPr>
+          <p:cNvSpPr txBox="1">
+            <a:spLocks/>
+          </p:cNvSpPr>
+          <p:nvPr/>
+        </p:nvSpPr>
+        <p:spPr>
+          <a:xfrm>
+            <a:off x="1161975" y="151635"/>
+            <a:ext cx="7804774" cy="719719"/>
+          </a:xfrm>
+          <a:prstGeom prst="rect">
+            <a:avLst/>
+          </a:prstGeom>
+        </p:spPr>
+        <p:txBody>
+          <a:bodyPr vert="horz" lIns="0" tIns="0" rIns="0" bIns="0" rtlCol="0" anchor="t">
+            <a:noAutofit/>
+          </a:bodyPr>
+          <a:lstStyle>
+            <a:lvl1pPr algn="ctr" defTabSz="754380" rtl="0" eaLnBrk="1" latinLnBrk="0" hangingPunct="1">
+              <a:lnSpc>
+                <a:spcPct val="90000"/>
+              </a:lnSpc>
+              <a:spcBef>
+                <a:spcPct val="0"/>
+              </a:spcBef>
+              <a:buNone/>
+              <a:defRPr sz="4000" kern="1200">
+                <a:solidFill>
+                  <a:schemeClr val="tx1"/>
+                </a:solidFill>
+                <a:latin typeface="+mj-lt"/>
+                <a:ea typeface="+mj-ea"/>
+                <a:cs typeface="+mj-cs"/>
+              </a:defRPr>
+            </a:lvl1pPr>
+          </a:lstStyle>
+          <a:p>
+            <a:pPr>
+              <a:lnSpc>
+                <a:spcPct val="75000"/>
+              </a:lnSpc>
+            </a:pPr>
+            <a:r>
+              <a:rPr lang="en-US" sz="6000" u="sng" dirty="0">
+                <a:ln w="41275">
+                  <a:noFill/>
+                </a:ln>
+                <a:solidFill>
+                  <a:schemeClr val="accent2"/>
+                </a:solidFill>
+                <a:ea typeface="Source Sans Pro Black"/>
+              </a:rPr>
+              <a:t>Website</a:t>
+            </a:r>
+          </a:p>
+          <a:p>
+            <a:pPr>
+              <a:lnSpc>
+                <a:spcPct val="75000"/>
+              </a:lnSpc>
+            </a:pPr>
+            <a:r>
+              <a:rPr lang="en-US" sz="3200" dirty="0">
+                <a:ln w="41275">
+                  <a:noFill/>
+                </a:ln>
+                <a:solidFill>
+                  <a:schemeClr val="tx1">
+                    <a:lumMod val="76000"/>
+                    <a:lumOff val="24000"/>
+                  </a:schemeClr>
+                </a:solidFill>
+                <a:ea typeface="Source Sans Pro Black"/>
+              </a:rPr>
+              <a:t>Now you try</a:t>
+            </a:r>
+            <a:endParaRPr lang="en-US" sz="3200" u="sng" dirty="0">
+              <a:ln w="41275">
+                <a:noFill/>
+              </a:ln>
+              <a:solidFill>
+                <a:schemeClr val="tx1">
+                  <a:lumMod val="76000"/>
+                  <a:lumOff val="24000"/>
+                </a:schemeClr>
+              </a:solidFill>
+              <a:ea typeface="Source Sans Pro Black"/>
+            </a:endParaRPr>
+          </a:p>
+        </p:txBody>
+      </p:sp>
+      <p:cxnSp>
+        <p:nvCxnSpPr>
+          <p:cNvPr id="47" name="Straight Connector 46">
+            <a:extLst>
+              <a:ext uri="{FF2B5EF4-FFF2-40B4-BE49-F238E27FC236}">
+                <a16:creationId xmlns:a16="http://schemas.microsoft.com/office/drawing/2014/main" id="{76FD6A2C-0DF1-6F56-FC5C-B5F79B417FA2}"/>
+              </a:ext>
+              <a:ext uri="{C183D7F6-B498-43B3-948B-1728B52AA6E4}">
+                <adec:decorative xmlns:adec="http://schemas.microsoft.com/office/drawing/2017/decorative" val="1"/>
+              </a:ext>
+            </a:extLst>
+          </p:cNvPr>
+          <p:cNvCxnSpPr>
+            <a:cxnSpLocks/>
+          </p:cNvCxnSpPr>
+          <p:nvPr/>
+        </p:nvCxnSpPr>
+        <p:spPr>
+          <a:xfrm>
+            <a:off x="839615" y="1271285"/>
+            <a:ext cx="8677751" cy="0"/>
+          </a:xfrm>
+          <a:prstGeom prst="line">
+            <a:avLst/>
+          </a:prstGeom>
+          <a:ln w="25400">
+            <a:solidFill>
+              <a:schemeClr val="accent2"/>
+            </a:solidFill>
+          </a:ln>
+        </p:spPr>
+        <p:style>
+          <a:lnRef idx="1">
+            <a:schemeClr val="accent1"/>
+          </a:lnRef>
+          <a:fillRef idx="0">
+            <a:schemeClr val="accent1"/>
+          </a:fillRef>
+          <a:effectRef idx="0">
+            <a:schemeClr val="accent1"/>
+          </a:effectRef>
+          <a:fontRef idx="minor">
+            <a:schemeClr val="tx1"/>
+          </a:fontRef>
+        </p:style>
+      </p:cxnSp>
+      <p:sp>
+        <p:nvSpPr>
+          <p:cNvPr id="4" name="TextBox 3">
+            <a:extLst>
+              <a:ext uri="{FF2B5EF4-FFF2-40B4-BE49-F238E27FC236}">
+                <a16:creationId xmlns:a16="http://schemas.microsoft.com/office/drawing/2014/main" id="{6D634C00-33F6-ED3B-39D9-7C187DEBE2EE}"/>
+              </a:ext>
+            </a:extLst>
+          </p:cNvPr>
+          <p:cNvSpPr txBox="1"/>
+          <p:nvPr/>
+        </p:nvSpPr>
+        <p:spPr>
+          <a:xfrm>
+            <a:off x="2904721" y="2006982"/>
+            <a:ext cx="5029200" cy="401007"/>
+          </a:xfrm>
+          <a:prstGeom prst="rect">
+            <a:avLst/>
+          </a:prstGeom>
+          <a:noFill/>
+        </p:spPr>
+        <p:txBody>
+          <a:bodyPr wrap="square">
+            <a:spAutoFit/>
+          </a:bodyPr>
+          <a:lstStyle/>
+          <a:p>
+            <a:pPr algn="just"/>
+            <a:r>
+              <a:rPr lang="en-US" dirty="0"/>
+              <a:t>Head over to </a:t>
+            </a:r>
+            <a:r>
+              <a:rPr lang="en-001" dirty="0">
+                <a:hlinkClick r:id="rId2"/>
+              </a:rPr>
+              <a:t>http://localhost:</a:t>
+            </a:r>
+            <a:r>
+              <a:rPr lang="en-US" dirty="0">
+                <a:hlinkClick r:id="rId2"/>
+              </a:rPr>
+              <a:t>3</a:t>
+            </a:r>
+            <a:r>
+              <a:rPr lang="en-001" dirty="0">
+                <a:hlinkClick r:id="rId2"/>
+              </a:rPr>
+              <a:t>00</a:t>
+            </a:r>
+            <a:r>
+              <a:rPr lang="en-US" dirty="0">
+                <a:hlinkClick r:id="rId2"/>
+              </a:rPr>
+              <a:t>0/</a:t>
+            </a:r>
+            <a:endParaRPr lang="en-001" dirty="0"/>
+          </a:p>
+        </p:txBody>
+      </p:sp>
+      <p:pic>
+        <p:nvPicPr>
+          <p:cNvPr id="5" name="Picture 4">
+            <a:extLst>
+              <a:ext uri="{FF2B5EF4-FFF2-40B4-BE49-F238E27FC236}">
+                <a16:creationId xmlns:a16="http://schemas.microsoft.com/office/drawing/2014/main" id="{E0838244-AF26-1FD2-3F39-D30FFFC108EE}"/>
+              </a:ext>
+            </a:extLst>
+          </p:cNvPr>
+          <p:cNvPicPr>
+            <a:picLocks noChangeAspect="1"/>
+          </p:cNvPicPr>
+          <p:nvPr/>
+        </p:nvPicPr>
+        <p:blipFill>
+          <a:blip r:embed="rId3"/>
+          <a:stretch>
+            <a:fillRect/>
+          </a:stretch>
+        </p:blipFill>
+        <p:spPr>
+          <a:xfrm>
+            <a:off x="873303" y="2977198"/>
+            <a:ext cx="8311793" cy="2433693"/>
+          </a:xfrm>
+          <a:prstGeom prst="rect">
+            <a:avLst/>
+          </a:prstGeom>
+        </p:spPr>
+      </p:pic>
+      <p:sp>
+        <p:nvSpPr>
+          <p:cNvPr id="3" name="AutoShape 2" descr="Smiling computer robot character">
+            <a:extLst>
+              <a:ext uri="{FF2B5EF4-FFF2-40B4-BE49-F238E27FC236}">
+                <a16:creationId xmlns:a16="http://schemas.microsoft.com/office/drawing/2014/main" id="{9D9882B1-808A-3688-05DC-5057728689EC}"/>
+              </a:ext>
+            </a:extLst>
+          </p:cNvPr>
+          <p:cNvSpPr>
+            <a:spLocks noChangeAspect="1" noChangeArrowheads="1"/>
+          </p:cNvSpPr>
+          <p:nvPr/>
+        </p:nvSpPr>
+        <p:spPr bwMode="auto">
+          <a:xfrm>
+            <a:off x="4876800" y="3733800"/>
+            <a:ext cx="304800" cy="304800"/>
+          </a:xfrm>
+          <a:prstGeom prst="rect">
+            <a:avLst/>
+          </a:prstGeom>
+          <a:noFill/>
+          <a:extLst>
+            <a:ext uri="{909E8E84-426E-40DD-AFC4-6F175D3DCCD1}">
+              <a14:hiddenFill xmlns:a14="http://schemas.microsoft.com/office/drawing/2010/main">
+                <a:solidFill>
+                  <a:srgbClr val="FFFFFF"/>
+                </a:solidFill>
+              </a14:hiddenFill>
+            </a:ext>
+          </a:extLst>
+        </p:spPr>
+        <p:txBody>
+          <a:bodyPr vert="horz" wrap="square" lIns="91440" tIns="45720" rIns="91440" bIns="45720" numCol="1" anchor="t" anchorCtr="0" compatLnSpc="1">
+            <a:prstTxWarp prst="textNoShape">
+              <a:avLst/>
+            </a:prstTxWarp>
+          </a:bodyPr>
+          <a:lstStyle/>
+          <a:p>
+            <a:endParaRPr lang="en-001"/>
+          </a:p>
+        </p:txBody>
+      </p:sp>
+      <p:sp>
+        <p:nvSpPr>
+          <p:cNvPr id="10" name="AutoShape 6" descr="Smiling computer robot character">
+            <a:extLst>
+              <a:ext uri="{FF2B5EF4-FFF2-40B4-BE49-F238E27FC236}">
+                <a16:creationId xmlns:a16="http://schemas.microsoft.com/office/drawing/2014/main" id="{1953AEDF-E224-BD32-8532-BEDA26725252}"/>
+              </a:ext>
+            </a:extLst>
+          </p:cNvPr>
+          <p:cNvSpPr>
+            <a:spLocks noChangeAspect="1" noChangeArrowheads="1"/>
+          </p:cNvSpPr>
+          <p:nvPr/>
+        </p:nvSpPr>
+        <p:spPr bwMode="auto">
+          <a:xfrm>
+            <a:off x="5029200" y="3886200"/>
+            <a:ext cx="304800" cy="304800"/>
+          </a:xfrm>
+          <a:prstGeom prst="rect">
+            <a:avLst/>
+          </a:prstGeom>
+          <a:noFill/>
+          <a:extLst>
+            <a:ext uri="{909E8E84-426E-40DD-AFC4-6F175D3DCCD1}">
+              <a14:hiddenFill xmlns:a14="http://schemas.microsoft.com/office/drawing/2010/main">
+                <a:solidFill>
+                  <a:srgbClr val="FFFFFF"/>
+                </a:solidFill>
+              </a14:hiddenFill>
+            </a:ext>
+          </a:extLst>
+        </p:spPr>
+        <p:txBody>
+          <a:bodyPr vert="horz" wrap="square" lIns="91440" tIns="45720" rIns="91440" bIns="45720" numCol="1" anchor="t" anchorCtr="0" compatLnSpc="1">
+            <a:prstTxWarp prst="textNoShape">
+              <a:avLst/>
+            </a:prstTxWarp>
+          </a:bodyPr>
+          <a:lstStyle/>
+          <a:p>
+            <a:endParaRPr lang="en-001"/>
+          </a:p>
+        </p:txBody>
+      </p:sp>
+      <p:pic>
+        <p:nvPicPr>
+          <p:cNvPr id="12" name="Picture 11">
+            <a:extLst>
+              <a:ext uri="{FF2B5EF4-FFF2-40B4-BE49-F238E27FC236}">
+                <a16:creationId xmlns:a16="http://schemas.microsoft.com/office/drawing/2014/main" id="{69C6A778-662A-4EE9-9E3A-FDDD454948CA}"/>
+              </a:ext>
+            </a:extLst>
+          </p:cNvPr>
+          <p:cNvPicPr>
+            <a:picLocks noChangeAspect="1"/>
+          </p:cNvPicPr>
+          <p:nvPr/>
+        </p:nvPicPr>
+        <p:blipFill>
+          <a:blip r:embed="rId4"/>
+          <a:stretch>
+            <a:fillRect/>
+          </a:stretch>
+        </p:blipFill>
+        <p:spPr>
+          <a:xfrm>
+            <a:off x="6917098" y="1840495"/>
+            <a:ext cx="1421985" cy="1048069"/>
+          </a:xfrm>
+          <a:prstGeom prst="rect">
+            <a:avLst/>
+          </a:prstGeom>
+        </p:spPr>
+      </p:pic>
+    </p:spTree>
+    <p:extLst>
+      <p:ext uri="{BB962C8B-B14F-4D97-AF65-F5344CB8AC3E}">
+        <p14:creationId xmlns:p14="http://schemas.microsoft.com/office/powerpoint/2010/main" val="767257223"/>
+      </p:ext>
+    </p:extLst>
+  </p:cSld>
+  <p:clrMapOvr>
+    <a:masterClrMapping/>
+  </p:clrMapOvr>
+</p:sld>
+</file>
+
+<file path=ppt/slides/slide21.xml><?xml version="1.0" encoding="utf-8"?>
+<p:sld xmlns:a="http://schemas.openxmlformats.org/drawingml/2006/main" xmlns:r="http://schemas.openxmlformats.org/officeDocument/2006/relationships" xmlns:p="http://schemas.openxmlformats.org/presentationml/2006/main">
+  <p:cSld>
+    <p:bg>
+      <p:bgPr>
+        <a:solidFill>
+          <a:schemeClr val="bg1"/>
+        </a:solidFill>
+        <a:effectLst/>
+      </p:bgPr>
+    </p:bg>
+    <p:spTree>
+      <p:nvGrpSpPr>
+        <p:cNvPr id="1" name="">
+          <a:extLst>
+            <a:ext uri="{FF2B5EF4-FFF2-40B4-BE49-F238E27FC236}">
               <a16:creationId xmlns:a16="http://schemas.microsoft.com/office/drawing/2014/main" id="{1AE891E2-3DEB-70ED-5E82-C981D8871A27}"/>
             </a:ext>
           </a:extLst>
@@ -24845,6 +25635,36 @@
           </a:fontRef>
         </p:style>
       </p:cxnSp>
+      <p:pic>
+        <p:nvPicPr>
+          <p:cNvPr id="3" name="Picture 2">
+            <a:extLst>
+              <a:ext uri="{FF2B5EF4-FFF2-40B4-BE49-F238E27FC236}">
+                <a16:creationId xmlns:a16="http://schemas.microsoft.com/office/drawing/2014/main" id="{B11A71E8-6CAF-EF71-2087-306E30E7BA87}"/>
+              </a:ext>
+            </a:extLst>
+          </p:cNvPr>
+          <p:cNvPicPr>
+            <a:picLocks noChangeAspect="1"/>
+          </p:cNvPicPr>
+          <p:nvPr/>
+        </p:nvPicPr>
+        <p:blipFill>
+          <a:blip r:embed="rId3"/>
+          <a:stretch>
+            <a:fillRect/>
+          </a:stretch>
+        </p:blipFill>
+        <p:spPr>
+          <a:xfrm>
+            <a:off x="4195388" y="5767539"/>
+            <a:ext cx="1421985" cy="1048069"/>
+          </a:xfrm>
+          <a:prstGeom prst="rect">
+            <a:avLst/>
+          </a:prstGeom>
+        </p:spPr>
+      </p:pic>
     </p:spTree>
     <p:extLst>
       <p:ext uri="{BB962C8B-B14F-4D97-AF65-F5344CB8AC3E}">
@@ -24858,7 +25678,7 @@
 </p:sld>
 </file>
 
-<file path=ppt/slides/slide21.xml><?xml version="1.0" encoding="utf-8"?>
+<file path=ppt/slides/slide22.xml><?xml version="1.0" encoding="utf-8"?>
 <p:sld xmlns:a="http://schemas.openxmlformats.org/drawingml/2006/main" xmlns:r="http://schemas.openxmlformats.org/officeDocument/2006/relationships" xmlns:p="http://schemas.openxmlformats.org/presentationml/2006/main">
   <p:cSld>
     <p:bg>
@@ -25094,6 +25914,36 @@
           </a:prstGeom>
         </p:spPr>
       </p:pic>
+      <p:pic>
+        <p:nvPicPr>
+          <p:cNvPr id="3" name="Picture 2">
+            <a:extLst>
+              <a:ext uri="{FF2B5EF4-FFF2-40B4-BE49-F238E27FC236}">
+                <a16:creationId xmlns:a16="http://schemas.microsoft.com/office/drawing/2014/main" id="{ABF0490B-0629-3D27-3C41-4625FBB3A10A}"/>
+              </a:ext>
+            </a:extLst>
+          </p:cNvPr>
+          <p:cNvPicPr>
+            <a:picLocks noChangeAspect="1"/>
+          </p:cNvPicPr>
+          <p:nvPr/>
+        </p:nvPicPr>
+        <p:blipFill>
+          <a:blip r:embed="rId3"/>
+          <a:stretch>
+            <a:fillRect/>
+          </a:stretch>
+        </p:blipFill>
+        <p:spPr>
+          <a:xfrm>
+            <a:off x="8540416" y="3362165"/>
+            <a:ext cx="1421985" cy="1048069"/>
+          </a:xfrm>
+          <a:prstGeom prst="rect">
+            <a:avLst/>
+          </a:prstGeom>
+        </p:spPr>
+      </p:pic>
     </p:spTree>
     <p:extLst>
       <p:ext uri="{BB962C8B-B14F-4D97-AF65-F5344CB8AC3E}">
@@ -25107,7 +25957,7 @@
 </p:sld>
 </file>
 
-<file path=ppt/slides/slide22.xml><?xml version="1.0" encoding="utf-8"?>
+<file path=ppt/slides/slide23.xml><?xml version="1.0" encoding="utf-8"?>
 <p:sld xmlns:a="http://schemas.openxmlformats.org/drawingml/2006/main" xmlns:r="http://schemas.openxmlformats.org/officeDocument/2006/relationships" xmlns:p="http://schemas.openxmlformats.org/presentationml/2006/main">
   <p:cSld>
     <p:spTree>
@@ -25480,6 +26330,36 @@
           </a:prstGeom>
         </p:spPr>
       </p:pic>
+      <p:pic>
+        <p:nvPicPr>
+          <p:cNvPr id="3" name="Picture 2">
+            <a:extLst>
+              <a:ext uri="{FF2B5EF4-FFF2-40B4-BE49-F238E27FC236}">
+                <a16:creationId xmlns:a16="http://schemas.microsoft.com/office/drawing/2014/main" id="{E49C729A-749F-AA0E-90F3-81CC360C00CD}"/>
+              </a:ext>
+            </a:extLst>
+          </p:cNvPr>
+          <p:cNvPicPr>
+            <a:picLocks noChangeAspect="1"/>
+          </p:cNvPicPr>
+          <p:nvPr/>
+        </p:nvPicPr>
+        <p:blipFill>
+          <a:blip r:embed="rId6"/>
+          <a:stretch>
+            <a:fillRect/>
+          </a:stretch>
+        </p:blipFill>
+        <p:spPr>
+          <a:xfrm flipH="1">
+            <a:off x="1021825" y="134582"/>
+            <a:ext cx="904996" cy="1117831"/>
+          </a:xfrm>
+          <a:prstGeom prst="rect">
+            <a:avLst/>
+          </a:prstGeom>
+        </p:spPr>
+      </p:pic>
     </p:spTree>
     <p:extLst>
       <p:ext uri="{BB962C8B-B14F-4D97-AF65-F5344CB8AC3E}">
@@ -25493,7 +26373,7 @@
 </p:sld>
 </file>
 
-<file path=ppt/slides/slide23.xml><?xml version="1.0" encoding="utf-8"?>
+<file path=ppt/slides/slide24.xml><?xml version="1.0" encoding="utf-8"?>
 <p:sld xmlns:a="http://schemas.openxmlformats.org/drawingml/2006/main" xmlns:r="http://schemas.openxmlformats.org/officeDocument/2006/relationships" xmlns:p="http://schemas.openxmlformats.org/presentationml/2006/main">
   <p:cSld>
     <p:spTree>
@@ -25806,6 +26686,36 @@
           </a:p>
         </p:txBody>
       </p:sp>
+      <p:pic>
+        <p:nvPicPr>
+          <p:cNvPr id="3" name="Picture 2">
+            <a:extLst>
+              <a:ext uri="{FF2B5EF4-FFF2-40B4-BE49-F238E27FC236}">
+                <a16:creationId xmlns:a16="http://schemas.microsoft.com/office/drawing/2014/main" id="{3D5B4A9C-E124-5F9D-C393-1E907CE1F781}"/>
+              </a:ext>
+            </a:extLst>
+          </p:cNvPr>
+          <p:cNvPicPr>
+            <a:picLocks noChangeAspect="1"/>
+          </p:cNvPicPr>
+          <p:nvPr/>
+        </p:nvPicPr>
+        <p:blipFill>
+          <a:blip r:embed="rId3"/>
+          <a:stretch>
+            <a:fillRect/>
+          </a:stretch>
+        </p:blipFill>
+        <p:spPr>
+          <a:xfrm flipH="1">
+            <a:off x="7991429" y="39147"/>
+            <a:ext cx="904996" cy="1117831"/>
+          </a:xfrm>
+          <a:prstGeom prst="rect">
+            <a:avLst/>
+          </a:prstGeom>
+        </p:spPr>
+      </p:pic>
     </p:spTree>
     <p:extLst>
       <p:ext uri="{BB962C8B-B14F-4D97-AF65-F5344CB8AC3E}">
@@ -25819,7 +26729,7 @@
 </p:sld>
 </file>
 
-<file path=ppt/slides/slide24.xml><?xml version="1.0" encoding="utf-8"?>
+<file path=ppt/slides/slide25.xml><?xml version="1.0" encoding="utf-8"?>
 <p:sld xmlns:a="http://schemas.openxmlformats.org/drawingml/2006/main" xmlns:r="http://schemas.openxmlformats.org/officeDocument/2006/relationships" xmlns:p="http://schemas.openxmlformats.org/presentationml/2006/main">
   <p:cSld>
     <p:spTree>
@@ -26377,6 +27287,36 @@
           </a:p>
         </p:txBody>
       </p:sp>
+      <p:pic>
+        <p:nvPicPr>
+          <p:cNvPr id="3" name="Picture 2">
+            <a:extLst>
+              <a:ext uri="{FF2B5EF4-FFF2-40B4-BE49-F238E27FC236}">
+                <a16:creationId xmlns:a16="http://schemas.microsoft.com/office/drawing/2014/main" id="{B8C36475-3858-D103-7A99-0D04FBDBE7E2}"/>
+              </a:ext>
+            </a:extLst>
+          </p:cNvPr>
+          <p:cNvPicPr>
+            <a:picLocks noChangeAspect="1"/>
+          </p:cNvPicPr>
+          <p:nvPr/>
+        </p:nvPicPr>
+        <p:blipFill>
+          <a:blip r:embed="rId3"/>
+          <a:stretch>
+            <a:fillRect/>
+          </a:stretch>
+        </p:blipFill>
+        <p:spPr>
+          <a:xfrm flipH="1">
+            <a:off x="9153404" y="71118"/>
+            <a:ext cx="904996" cy="1117831"/>
+          </a:xfrm>
+          <a:prstGeom prst="rect">
+            <a:avLst/>
+          </a:prstGeom>
+        </p:spPr>
+      </p:pic>
     </p:spTree>
     <p:extLst>
       <p:ext uri="{BB962C8B-B14F-4D97-AF65-F5344CB8AC3E}">
@@ -26390,7 +27330,7 @@
 </p:sld>
 </file>
 
-<file path=ppt/slides/slide25.xml><?xml version="1.0" encoding="utf-8"?>
+<file path=ppt/slides/slide26.xml><?xml version="1.0" encoding="utf-8"?>
 <p:sld xmlns:a="http://schemas.openxmlformats.org/drawingml/2006/main" xmlns:r="http://schemas.openxmlformats.org/officeDocument/2006/relationships" xmlns:p="http://schemas.openxmlformats.org/presentationml/2006/main">
   <p:cSld>
     <p:spTree>
@@ -26644,7 +27584,7 @@
 </p:sld>
 </file>
 
-<file path=ppt/slides/slide26.xml><?xml version="1.0" encoding="utf-8"?>
+<file path=ppt/slides/slide27.xml><?xml version="1.0" encoding="utf-8"?>
 <p:sld xmlns:a="http://schemas.openxmlformats.org/drawingml/2006/main" xmlns:r="http://schemas.openxmlformats.org/officeDocument/2006/relationships" xmlns:p="http://schemas.openxmlformats.org/presentationml/2006/main">
   <p:cSld>
     <p:spTree>
@@ -26955,8 +27895,12 @@
           <a:lstStyle/>
           <a:p>
             <a:r>
+              <a:rPr lang="en-US" u="sng" dirty="0"/>
+              <a:t>Inside</a:t>
+            </a:r>
+            <a:r>
               <a:rPr lang="en-US" dirty="0"/>
-              <a:t>Inside: </a:t>
+              <a:t>: </a:t>
             </a:r>
             <a:r>
               <a:rPr lang="en-US" b="1" dirty="0"/>
@@ -26977,10 +27921,420 @@
           </a:p>
         </p:txBody>
       </p:sp>
+      <p:pic>
+        <p:nvPicPr>
+          <p:cNvPr id="4" name="Picture 3">
+            <a:extLst>
+              <a:ext uri="{FF2B5EF4-FFF2-40B4-BE49-F238E27FC236}">
+                <a16:creationId xmlns:a16="http://schemas.microsoft.com/office/drawing/2014/main" id="{3BA8F793-8D75-C54D-AE73-B58E97FFD8CF}"/>
+              </a:ext>
+            </a:extLst>
+          </p:cNvPr>
+          <p:cNvPicPr>
+            <a:picLocks noChangeAspect="1"/>
+          </p:cNvPicPr>
+          <p:nvPr/>
+        </p:nvPicPr>
+        <p:blipFill>
+          <a:blip r:embed="rId3"/>
+          <a:stretch>
+            <a:fillRect/>
+          </a:stretch>
+        </p:blipFill>
+        <p:spPr>
+          <a:xfrm>
+            <a:off x="8384599" y="0"/>
+            <a:ext cx="1132767" cy="1103768"/>
+          </a:xfrm>
+          <a:prstGeom prst="rect">
+            <a:avLst/>
+          </a:prstGeom>
+        </p:spPr>
+      </p:pic>
     </p:spTree>
     <p:extLst>
       <p:ext uri="{BB962C8B-B14F-4D97-AF65-F5344CB8AC3E}">
         <p14:creationId xmlns:p14="http://schemas.microsoft.com/office/powerpoint/2010/main" val="2722349114"/>
+      </p:ext>
+    </p:extLst>
+  </p:cSld>
+  <p:clrMapOvr>
+    <a:masterClrMapping/>
+  </p:clrMapOvr>
+</p:sld>
+</file>
+
+<file path=ppt/slides/slide28.xml><?xml version="1.0" encoding="utf-8"?>
+<p:sld xmlns:a="http://schemas.openxmlformats.org/drawingml/2006/main" xmlns:r="http://schemas.openxmlformats.org/officeDocument/2006/relationships" xmlns:p="http://schemas.openxmlformats.org/presentationml/2006/main">
+  <p:cSld>
+    <p:spTree>
+      <p:nvGrpSpPr>
+        <p:cNvPr id="1" name="">
+          <a:extLst>
+            <a:ext uri="{FF2B5EF4-FFF2-40B4-BE49-F238E27FC236}">
+              <a16:creationId xmlns:a16="http://schemas.microsoft.com/office/drawing/2014/main" id="{7E63E60D-C0A3-0490-4B87-BB7B0AB9CD77}"/>
+            </a:ext>
+          </a:extLst>
+        </p:cNvPr>
+        <p:cNvGrpSpPr/>
+        <p:nvPr/>
+      </p:nvGrpSpPr>
+      <p:grpSpPr>
+        <a:xfrm>
+          <a:off x="0" y="0"/>
+          <a:ext cx="0" cy="0"/>
+          <a:chOff x="0" y="0"/>
+          <a:chExt cx="0" cy="0"/>
+        </a:xfrm>
+      </p:grpSpPr>
+      <p:sp>
+        <p:nvSpPr>
+          <p:cNvPr id="2" name="Title 1" hidden="1">
+            <a:extLst>
+              <a:ext uri="{FF2B5EF4-FFF2-40B4-BE49-F238E27FC236}">
+                <a16:creationId xmlns:a16="http://schemas.microsoft.com/office/drawing/2014/main" id="{6872953E-A650-3865-6509-E73EC10530F6}"/>
+              </a:ext>
+            </a:extLst>
+          </p:cNvPr>
+          <p:cNvSpPr>
+            <a:spLocks noGrp="1"/>
+          </p:cNvSpPr>
+          <p:nvPr>
+            <p:ph type="title"/>
+          </p:nvPr>
+        </p:nvSpPr>
+        <p:spPr/>
+        <p:txBody>
+          <a:bodyPr/>
+          <a:lstStyle/>
+          <a:p>
+            <a:r>
+              <a:rPr lang="en-US" dirty="0"/>
+              <a:t>Cover Page</a:t>
+            </a:r>
+          </a:p>
+        </p:txBody>
+      </p:sp>
+      <p:sp>
+        <p:nvSpPr>
+          <p:cNvPr id="8" name="Title 1">
+            <a:extLst>
+              <a:ext uri="{FF2B5EF4-FFF2-40B4-BE49-F238E27FC236}">
+                <a16:creationId xmlns:a16="http://schemas.microsoft.com/office/drawing/2014/main" id="{7EE46A6F-A96B-F9CF-A0FB-9A0C838C6EEA}"/>
+              </a:ext>
+            </a:extLst>
+          </p:cNvPr>
+          <p:cNvSpPr txBox="1">
+            <a:spLocks/>
+          </p:cNvSpPr>
+          <p:nvPr/>
+        </p:nvSpPr>
+        <p:spPr>
+          <a:xfrm>
+            <a:off x="1161975" y="151635"/>
+            <a:ext cx="7804774" cy="719719"/>
+          </a:xfrm>
+          <a:prstGeom prst="rect">
+            <a:avLst/>
+          </a:prstGeom>
+        </p:spPr>
+        <p:txBody>
+          <a:bodyPr vert="horz" lIns="0" tIns="0" rIns="0" bIns="0" rtlCol="0" anchor="t">
+            <a:noAutofit/>
+          </a:bodyPr>
+          <a:lstStyle>
+            <a:lvl1pPr algn="ctr" defTabSz="754380" rtl="0" eaLnBrk="1" latinLnBrk="0" hangingPunct="1">
+              <a:lnSpc>
+                <a:spcPct val="90000"/>
+              </a:lnSpc>
+              <a:spcBef>
+                <a:spcPct val="0"/>
+              </a:spcBef>
+              <a:buNone/>
+              <a:defRPr sz="4000" kern="1200">
+                <a:solidFill>
+                  <a:schemeClr val="tx1"/>
+                </a:solidFill>
+                <a:latin typeface="+mj-lt"/>
+                <a:ea typeface="+mj-ea"/>
+                <a:cs typeface="+mj-cs"/>
+              </a:defRPr>
+            </a:lvl1pPr>
+          </a:lstStyle>
+          <a:p>
+            <a:pPr>
+              <a:lnSpc>
+                <a:spcPct val="75000"/>
+              </a:lnSpc>
+            </a:pPr>
+            <a:r>
+              <a:rPr lang="en-US" sz="6000" u="sng" dirty="0">
+                <a:ln w="41275">
+                  <a:noFill/>
+                </a:ln>
+                <a:solidFill>
+                  <a:schemeClr val="accent2"/>
+                </a:solidFill>
+                <a:ea typeface="Source Sans Pro Black"/>
+              </a:rPr>
+              <a:t>Visual Studio Code</a:t>
+            </a:r>
+          </a:p>
+          <a:p>
+            <a:pPr>
+              <a:lnSpc>
+                <a:spcPct val="75000"/>
+              </a:lnSpc>
+            </a:pPr>
+            <a:r>
+              <a:rPr lang="en-US" sz="3200" dirty="0">
+                <a:ln w="41275">
+                  <a:noFill/>
+                </a:ln>
+                <a:solidFill>
+                  <a:schemeClr val="tx1">
+                    <a:lumMod val="76000"/>
+                    <a:lumOff val="24000"/>
+                  </a:schemeClr>
+                </a:solidFill>
+                <a:ea typeface="Source Sans Pro Black"/>
+              </a:rPr>
+              <a:t>Solution</a:t>
+            </a:r>
+            <a:endParaRPr lang="en-US" sz="3200" u="sng" dirty="0">
+              <a:ln w="41275">
+                <a:noFill/>
+              </a:ln>
+              <a:solidFill>
+                <a:schemeClr val="tx1">
+                  <a:lumMod val="76000"/>
+                  <a:lumOff val="24000"/>
+                </a:schemeClr>
+              </a:solidFill>
+              <a:ea typeface="Source Sans Pro Black"/>
+            </a:endParaRPr>
+          </a:p>
+        </p:txBody>
+      </p:sp>
+      <p:cxnSp>
+        <p:nvCxnSpPr>
+          <p:cNvPr id="47" name="Straight Connector 46">
+            <a:extLst>
+              <a:ext uri="{FF2B5EF4-FFF2-40B4-BE49-F238E27FC236}">
+                <a16:creationId xmlns:a16="http://schemas.microsoft.com/office/drawing/2014/main" id="{16B32A77-E9C9-0FA0-7363-29A897389B1E}"/>
+              </a:ext>
+              <a:ext uri="{C183D7F6-B498-43B3-948B-1728B52AA6E4}">
+                <adec:decorative xmlns:adec="http://schemas.microsoft.com/office/drawing/2017/decorative" val="1"/>
+              </a:ext>
+            </a:extLst>
+          </p:cNvPr>
+          <p:cNvCxnSpPr>
+            <a:cxnSpLocks/>
+          </p:cNvCxnSpPr>
+          <p:nvPr/>
+        </p:nvCxnSpPr>
+        <p:spPr>
+          <a:xfrm>
+            <a:off x="839615" y="1271285"/>
+            <a:ext cx="8677751" cy="0"/>
+          </a:xfrm>
+          <a:prstGeom prst="line">
+            <a:avLst/>
+          </a:prstGeom>
+          <a:ln w="25400">
+            <a:solidFill>
+              <a:schemeClr val="accent2"/>
+            </a:solidFill>
+          </a:ln>
+        </p:spPr>
+        <p:style>
+          <a:lnRef idx="1">
+            <a:schemeClr val="accent1"/>
+          </a:lnRef>
+          <a:fillRef idx="0">
+            <a:schemeClr val="accent1"/>
+          </a:fillRef>
+          <a:effectRef idx="0">
+            <a:schemeClr val="accent1"/>
+          </a:effectRef>
+          <a:fontRef idx="minor">
+            <a:schemeClr val="tx1"/>
+          </a:fontRef>
+        </p:style>
+      </p:cxnSp>
+      <p:sp>
+        <p:nvSpPr>
+          <p:cNvPr id="11" name="TextBox 10">
+            <a:extLst>
+              <a:ext uri="{FF2B5EF4-FFF2-40B4-BE49-F238E27FC236}">
+                <a16:creationId xmlns:a16="http://schemas.microsoft.com/office/drawing/2014/main" id="{3F0407E0-F732-3249-B60D-3BD8BB27C1B7}"/>
+              </a:ext>
+            </a:extLst>
+          </p:cNvPr>
+          <p:cNvSpPr txBox="1"/>
+          <p:nvPr/>
+        </p:nvSpPr>
+        <p:spPr>
+          <a:xfrm>
+            <a:off x="1520575" y="1715784"/>
+            <a:ext cx="6914072" cy="709681"/>
+          </a:xfrm>
+          <a:prstGeom prst="rect">
+            <a:avLst/>
+          </a:prstGeom>
+          <a:noFill/>
+        </p:spPr>
+        <p:txBody>
+          <a:bodyPr wrap="none" rtlCol="0">
+            <a:spAutoFit/>
+          </a:bodyPr>
+          <a:lstStyle/>
+          <a:p>
+            <a:r>
+              <a:rPr lang="en-US" i="1" u="sng" dirty="0"/>
+              <a:t>Solution inside</a:t>
+            </a:r>
+            <a:r>
+              <a:rPr lang="en-US" dirty="0"/>
+              <a:t>: </a:t>
+            </a:r>
+            <a:r>
+              <a:rPr lang="en-US" b="1" dirty="0"/>
+              <a:t>frontend &gt; app &gt; pages &gt; </a:t>
+            </a:r>
+            <a:r>
+              <a:rPr lang="en-US" b="1" dirty="0" err="1"/>
+              <a:t>index_solution.vue</a:t>
+            </a:r>
+            <a:br>
+              <a:rPr lang="en-US" b="1" dirty="0"/>
+            </a:br>
+            <a:r>
+              <a:rPr lang="en-US" b="1" dirty="0"/>
+              <a:t>                                on line 159</a:t>
+            </a:r>
+            <a:endParaRPr lang="en-001" b="1" dirty="0"/>
+          </a:p>
+        </p:txBody>
+      </p:sp>
+      <p:pic>
+        <p:nvPicPr>
+          <p:cNvPr id="4" name="Picture 3">
+            <a:extLst>
+              <a:ext uri="{FF2B5EF4-FFF2-40B4-BE49-F238E27FC236}">
+                <a16:creationId xmlns:a16="http://schemas.microsoft.com/office/drawing/2014/main" id="{8ED04584-560D-00F0-F6AE-333D57AD2939}"/>
+              </a:ext>
+            </a:extLst>
+          </p:cNvPr>
+          <p:cNvPicPr>
+            <a:picLocks noChangeAspect="1"/>
+          </p:cNvPicPr>
+          <p:nvPr/>
+        </p:nvPicPr>
+        <p:blipFill>
+          <a:blip r:embed="rId2"/>
+          <a:stretch>
+            <a:fillRect/>
+          </a:stretch>
+        </p:blipFill>
+        <p:spPr>
+          <a:xfrm>
+            <a:off x="8384599" y="0"/>
+            <a:ext cx="1132767" cy="1103768"/>
+          </a:xfrm>
+          <a:prstGeom prst="rect">
+            <a:avLst/>
+          </a:prstGeom>
+        </p:spPr>
+      </p:pic>
+      <p:pic>
+        <p:nvPicPr>
+          <p:cNvPr id="5" name="Picture 4">
+            <a:extLst>
+              <a:ext uri="{FF2B5EF4-FFF2-40B4-BE49-F238E27FC236}">
+                <a16:creationId xmlns:a16="http://schemas.microsoft.com/office/drawing/2014/main" id="{9BD0665F-B3C4-80ED-6A69-D54F435F056E}"/>
+              </a:ext>
+            </a:extLst>
+          </p:cNvPr>
+          <p:cNvPicPr>
+            <a:picLocks noChangeAspect="1"/>
+          </p:cNvPicPr>
+          <p:nvPr/>
+        </p:nvPicPr>
+        <p:blipFill>
+          <a:blip r:embed="rId3"/>
+          <a:stretch>
+            <a:fillRect/>
+          </a:stretch>
+        </p:blipFill>
+        <p:spPr>
+          <a:xfrm>
+            <a:off x="305871" y="2425464"/>
+            <a:ext cx="9446658" cy="4971926"/>
+          </a:xfrm>
+          <a:prstGeom prst="rect">
+            <a:avLst/>
+          </a:prstGeom>
+        </p:spPr>
+      </p:pic>
+      <p:sp>
+        <p:nvSpPr>
+          <p:cNvPr id="6" name="Rectangle 5">
+            <a:extLst>
+              <a:ext uri="{FF2B5EF4-FFF2-40B4-BE49-F238E27FC236}">
+                <a16:creationId xmlns:a16="http://schemas.microsoft.com/office/drawing/2014/main" id="{B9448FEA-8B91-DC9E-C566-31553ADA6EA2}"/>
+              </a:ext>
+            </a:extLst>
+          </p:cNvPr>
+          <p:cNvSpPr/>
+          <p:nvPr/>
+        </p:nvSpPr>
+        <p:spPr>
+          <a:xfrm>
+            <a:off x="2280862" y="4542841"/>
+            <a:ext cx="2599363" cy="1303155"/>
+          </a:xfrm>
+          <a:prstGeom prst="rect">
+            <a:avLst/>
+          </a:prstGeom>
+          <a:noFill/>
+          <a:ln w="9525" cap="flat" cmpd="sng" algn="ctr">
+            <a:solidFill>
+              <a:schemeClr val="accent4"/>
+            </a:solidFill>
+            <a:prstDash val="solid"/>
+            <a:round/>
+            <a:headEnd type="none" w="med" len="med"/>
+            <a:tailEnd type="none" w="med" len="med"/>
+          </a:ln>
+        </p:spPr>
+        <p:style>
+          <a:lnRef idx="0">
+            <a:scrgbClr r="0" g="0" b="0"/>
+          </a:lnRef>
+          <a:fillRef idx="0">
+            <a:scrgbClr r="0" g="0" b="0"/>
+          </a:fillRef>
+          <a:effectRef idx="0">
+            <a:scrgbClr r="0" g="0" b="0"/>
+          </a:effectRef>
+          <a:fontRef idx="minor">
+            <a:schemeClr val="accent4"/>
+          </a:fontRef>
+        </p:style>
+        <p:txBody>
+          <a:bodyPr rtlCol="0" anchor="ctr"/>
+          <a:lstStyle/>
+          <a:p>
+            <a:pPr algn="ctr"/>
+            <a:endParaRPr lang="en-001"/>
+          </a:p>
+        </p:txBody>
+      </p:sp>
+    </p:spTree>
+    <p:extLst>
+      <p:ext uri="{BB962C8B-B14F-4D97-AF65-F5344CB8AC3E}">
+        <p14:creationId xmlns:p14="http://schemas.microsoft.com/office/powerpoint/2010/main" val="2753748186"/>
       </p:ext>
     </p:extLst>
   </p:cSld>
@@ -28298,6 +29652,537 @@
         <p:cNvPr id="1" name="">
           <a:extLst>
             <a:ext uri="{FF2B5EF4-FFF2-40B4-BE49-F238E27FC236}">
+              <a16:creationId xmlns:a16="http://schemas.microsoft.com/office/drawing/2014/main" id="{17C45239-F511-5CFE-4589-D0F509323228}"/>
+            </a:ext>
+          </a:extLst>
+        </p:cNvPr>
+        <p:cNvGrpSpPr/>
+        <p:nvPr/>
+      </p:nvGrpSpPr>
+      <p:grpSpPr>
+        <a:xfrm>
+          <a:off x="0" y="0"/>
+          <a:ext cx="0" cy="0"/>
+          <a:chOff x="0" y="0"/>
+          <a:chExt cx="0" cy="0"/>
+        </a:xfrm>
+      </p:grpSpPr>
+      <p:sp>
+        <p:nvSpPr>
+          <p:cNvPr id="2" name="Title 1" hidden="1">
+            <a:extLst>
+              <a:ext uri="{FF2B5EF4-FFF2-40B4-BE49-F238E27FC236}">
+                <a16:creationId xmlns:a16="http://schemas.microsoft.com/office/drawing/2014/main" id="{A67948F5-1EBF-B51B-79D9-F4D212C3589A}"/>
+              </a:ext>
+            </a:extLst>
+          </p:cNvPr>
+          <p:cNvSpPr>
+            <a:spLocks noGrp="1"/>
+          </p:cNvSpPr>
+          <p:nvPr>
+            <p:ph type="title"/>
+          </p:nvPr>
+        </p:nvSpPr>
+        <p:spPr/>
+        <p:txBody>
+          <a:bodyPr/>
+          <a:lstStyle/>
+          <a:p>
+            <a:r>
+              <a:rPr lang="en-US" dirty="0"/>
+              <a:t>Cover Page</a:t>
+            </a:r>
+          </a:p>
+        </p:txBody>
+      </p:sp>
+      <p:sp>
+        <p:nvSpPr>
+          <p:cNvPr id="8" name="Title 1">
+            <a:extLst>
+              <a:ext uri="{FF2B5EF4-FFF2-40B4-BE49-F238E27FC236}">
+                <a16:creationId xmlns:a16="http://schemas.microsoft.com/office/drawing/2014/main" id="{926C7EC9-5777-CC1C-F717-43F4FF58CA01}"/>
+              </a:ext>
+            </a:extLst>
+          </p:cNvPr>
+          <p:cNvSpPr txBox="1">
+            <a:spLocks/>
+          </p:cNvSpPr>
+          <p:nvPr/>
+        </p:nvSpPr>
+        <p:spPr>
+          <a:xfrm>
+            <a:off x="2394781" y="376308"/>
+            <a:ext cx="5253486" cy="2564017"/>
+          </a:xfrm>
+          <a:prstGeom prst="rect">
+            <a:avLst/>
+          </a:prstGeom>
+        </p:spPr>
+        <p:txBody>
+          <a:bodyPr vert="horz" lIns="0" tIns="0" rIns="0" bIns="0" rtlCol="0" anchor="t">
+            <a:noAutofit/>
+          </a:bodyPr>
+          <a:lstStyle>
+            <a:lvl1pPr algn="ctr" defTabSz="754380" rtl="0" eaLnBrk="1" latinLnBrk="0" hangingPunct="1">
+              <a:lnSpc>
+                <a:spcPct val="90000"/>
+              </a:lnSpc>
+              <a:spcBef>
+                <a:spcPct val="0"/>
+              </a:spcBef>
+              <a:buNone/>
+              <a:defRPr sz="4000" kern="1200">
+                <a:solidFill>
+                  <a:schemeClr val="tx1"/>
+                </a:solidFill>
+                <a:latin typeface="+mj-lt"/>
+                <a:ea typeface="+mj-ea"/>
+                <a:cs typeface="+mj-cs"/>
+              </a:defRPr>
+            </a:lvl1pPr>
+          </a:lstStyle>
+          <a:p>
+            <a:pPr>
+              <a:lnSpc>
+                <a:spcPct val="75000"/>
+              </a:lnSpc>
+            </a:pPr>
+            <a:r>
+              <a:rPr lang="en-US" sz="6000" dirty="0">
+                <a:ln w="41275">
+                  <a:noFill/>
+                </a:ln>
+                <a:solidFill>
+                  <a:schemeClr val="accent2"/>
+                </a:solidFill>
+                <a:ea typeface="Source Sans Pro Black"/>
+              </a:rPr>
+              <a:t>Tools</a:t>
+            </a:r>
+          </a:p>
+          <a:p>
+            <a:pPr>
+              <a:lnSpc>
+                <a:spcPct val="75000"/>
+              </a:lnSpc>
+            </a:pPr>
+            <a:endParaRPr lang="en-US" sz="6000" dirty="0">
+              <a:ln w="41275">
+                <a:noFill/>
+              </a:ln>
+              <a:solidFill>
+                <a:schemeClr val="accent2"/>
+              </a:solidFill>
+              <a:ea typeface="Source Sans Pro Black"/>
+            </a:endParaRPr>
+          </a:p>
+        </p:txBody>
+      </p:sp>
+      <p:sp>
+        <p:nvSpPr>
+          <p:cNvPr id="32" name="TextBox 31">
+            <a:extLst>
+              <a:ext uri="{FF2B5EF4-FFF2-40B4-BE49-F238E27FC236}">
+                <a16:creationId xmlns:a16="http://schemas.microsoft.com/office/drawing/2014/main" id="{7322CCCE-279A-90CD-4685-30215060570D}"/>
+              </a:ext>
+            </a:extLst>
+          </p:cNvPr>
+          <p:cNvSpPr txBox="1"/>
+          <p:nvPr/>
+        </p:nvSpPr>
+        <p:spPr>
+          <a:xfrm>
+            <a:off x="2395248" y="1652683"/>
+            <a:ext cx="5257799" cy="1200329"/>
+          </a:xfrm>
+          <a:prstGeom prst="rect">
+            <a:avLst/>
+          </a:prstGeom>
+          <a:noFill/>
+        </p:spPr>
+        <p:txBody>
+          <a:bodyPr rot="0" spcFirstLastPara="0" vertOverflow="overflow" horzOverflow="overflow" vert="horz" wrap="square" lIns="91440" tIns="45720" rIns="91440" bIns="45720" numCol="1" spcCol="0" rtlCol="0" fromWordArt="0" anchor="t" anchorCtr="0" forceAA="0" compatLnSpc="1">
+            <a:prstTxWarp prst="textNoShape">
+              <a:avLst/>
+            </a:prstTxWarp>
+            <a:spAutoFit/>
+          </a:bodyPr>
+          <a:lstStyle/>
+          <a:p>
+            <a:pPr algn="ctr"/>
+            <a:br>
+              <a:rPr lang="en-GB" sz="3600" dirty="0">
+                <a:ea typeface="Source Sans Pro"/>
+              </a:rPr>
+            </a:br>
+            <a:endParaRPr lang="en-GB" sz="3600">
+              <a:solidFill>
+                <a:schemeClr val="bg2">
+                  <a:lumMod val="49000"/>
+                </a:schemeClr>
+              </a:solidFill>
+              <a:ea typeface="Source Sans Pro"/>
+            </a:endParaRPr>
+          </a:p>
+        </p:txBody>
+      </p:sp>
+      <p:cxnSp>
+        <p:nvCxnSpPr>
+          <p:cNvPr id="47" name="Straight Connector 46">
+            <a:extLst>
+              <a:ext uri="{FF2B5EF4-FFF2-40B4-BE49-F238E27FC236}">
+                <a16:creationId xmlns:a16="http://schemas.microsoft.com/office/drawing/2014/main" id="{D4D474ED-CC94-E747-3E63-B8E3A7B33C22}"/>
+              </a:ext>
+              <a:ext uri="{C183D7F6-B498-43B3-948B-1728B52AA6E4}">
+                <adec:decorative xmlns:adec="http://schemas.microsoft.com/office/drawing/2017/decorative" val="1"/>
+              </a:ext>
+            </a:extLst>
+          </p:cNvPr>
+          <p:cNvCxnSpPr>
+            <a:cxnSpLocks/>
+          </p:cNvCxnSpPr>
+          <p:nvPr/>
+        </p:nvCxnSpPr>
+        <p:spPr>
+          <a:xfrm>
+            <a:off x="687936" y="1712083"/>
+            <a:ext cx="8677751" cy="0"/>
+          </a:xfrm>
+          <a:prstGeom prst="line">
+            <a:avLst/>
+          </a:prstGeom>
+          <a:ln w="25400">
+            <a:solidFill>
+              <a:schemeClr val="accent2"/>
+            </a:solidFill>
+          </a:ln>
+        </p:spPr>
+        <p:style>
+          <a:lnRef idx="1">
+            <a:schemeClr val="accent1"/>
+          </a:lnRef>
+          <a:fillRef idx="0">
+            <a:schemeClr val="accent1"/>
+          </a:fillRef>
+          <a:effectRef idx="0">
+            <a:schemeClr val="accent1"/>
+          </a:effectRef>
+          <a:fontRef idx="minor">
+            <a:schemeClr val="tx1"/>
+          </a:fontRef>
+        </p:style>
+      </p:cxnSp>
+      <p:sp>
+        <p:nvSpPr>
+          <p:cNvPr id="42" name="TextBox 41">
+            <a:extLst>
+              <a:ext uri="{FF2B5EF4-FFF2-40B4-BE49-F238E27FC236}">
+                <a16:creationId xmlns:a16="http://schemas.microsoft.com/office/drawing/2014/main" id="{3AB5FAE8-8CA0-182F-316F-7B25B62778C1}"/>
+              </a:ext>
+            </a:extLst>
+          </p:cNvPr>
+          <p:cNvSpPr txBox="1"/>
+          <p:nvPr/>
+        </p:nvSpPr>
+        <p:spPr>
+          <a:xfrm>
+            <a:off x="825979" y="2334065"/>
+            <a:ext cx="8410488" cy="3416320"/>
+          </a:xfrm>
+          <a:prstGeom prst="rect">
+            <a:avLst/>
+          </a:prstGeom>
+          <a:ln>
+            <a:noFill/>
+          </a:ln>
+        </p:spPr>
+        <p:style>
+          <a:lnRef idx="2">
+            <a:schemeClr val="accent2"/>
+          </a:lnRef>
+          <a:fillRef idx="1">
+            <a:schemeClr val="lt1"/>
+          </a:fillRef>
+          <a:effectRef idx="0">
+            <a:schemeClr val="accent2"/>
+          </a:effectRef>
+          <a:fontRef idx="minor">
+            <a:schemeClr val="dk1"/>
+          </a:fontRef>
+        </p:style>
+        <p:txBody>
+          <a:bodyPr rot="0" spcFirstLastPara="0" vertOverflow="overflow" horzOverflow="overflow" vert="horz" wrap="square" lIns="91440" tIns="45720" rIns="91440" bIns="45720" numCol="1" spcCol="0" rtlCol="0" fromWordArt="0" anchor="t" anchorCtr="0" forceAA="0" compatLnSpc="1">
+            <a:prstTxWarp prst="textNoShape">
+              <a:avLst/>
+            </a:prstTxWarp>
+            <a:spAutoFit/>
+          </a:bodyPr>
+          <a:lstStyle/>
+          <a:p>
+            <a:pPr marL="457200" indent="-457200">
+              <a:buFont typeface="+mj-lt"/>
+              <a:buAutoNum type="arabicPeriod"/>
+            </a:pPr>
+            <a:r>
+              <a:rPr lang="en-GB" sz="2400" b="1" dirty="0">
+                <a:ea typeface="Source Sans Pro"/>
+              </a:rPr>
+              <a:t>You’ve started your backend server </a:t>
+            </a:r>
+            <a:br>
+              <a:rPr lang="en-GB" sz="2400" b="1" dirty="0">
+                <a:ea typeface="Source Sans Pro"/>
+              </a:rPr>
+            </a:br>
+            <a:r>
+              <a:rPr lang="en-GB" sz="2400" b="1" dirty="0">
+                <a:ea typeface="Source Sans Pro"/>
+              </a:rPr>
+              <a:t>`</a:t>
+            </a:r>
+            <a:r>
+              <a:rPr lang="en-GB" sz="2400" b="1" dirty="0" err="1">
+                <a:solidFill>
+                  <a:schemeClr val="tx1">
+                    <a:lumMod val="50000"/>
+                    <a:lumOff val="50000"/>
+                  </a:schemeClr>
+                </a:solidFill>
+                <a:ea typeface="Source Sans Pro"/>
+              </a:rPr>
+              <a:t>uv</a:t>
+            </a:r>
+            <a:r>
+              <a:rPr lang="en-GB" sz="2400" b="1" dirty="0">
+                <a:solidFill>
+                  <a:schemeClr val="tx1">
+                    <a:lumMod val="50000"/>
+                    <a:lumOff val="50000"/>
+                  </a:schemeClr>
+                </a:solidFill>
+                <a:ea typeface="Source Sans Pro"/>
+              </a:rPr>
+              <a:t> run python manage.py </a:t>
+            </a:r>
+            <a:r>
+              <a:rPr lang="en-GB" sz="2400" b="1" dirty="0" err="1">
+                <a:solidFill>
+                  <a:schemeClr val="tx1">
+                    <a:lumMod val="50000"/>
+                    <a:lumOff val="50000"/>
+                  </a:schemeClr>
+                </a:solidFill>
+                <a:ea typeface="Source Sans Pro"/>
+              </a:rPr>
+              <a:t>runserver</a:t>
+            </a:r>
+            <a:r>
+              <a:rPr lang="en-GB" sz="2400" b="1" dirty="0">
+                <a:ea typeface="Source Sans Pro"/>
+              </a:rPr>
+              <a:t>`</a:t>
+            </a:r>
+          </a:p>
+          <a:p>
+            <a:pPr marL="457200" indent="-457200">
+              <a:buFont typeface="+mj-lt"/>
+              <a:buAutoNum type="arabicPeriod"/>
+            </a:pPr>
+            <a:r>
+              <a:rPr lang="en-GB" sz="2400" b="1" dirty="0">
+                <a:ea typeface="Source Sans Pro"/>
+              </a:rPr>
+              <a:t>You’ve started your frontend server </a:t>
+            </a:r>
+            <a:br>
+              <a:rPr lang="en-GB" sz="2400" b="1" dirty="0">
+                <a:ea typeface="Source Sans Pro"/>
+              </a:rPr>
+            </a:br>
+            <a:r>
+              <a:rPr lang="en-GB" sz="2400" b="1" dirty="0">
+                <a:ea typeface="Source Sans Pro"/>
+              </a:rPr>
+              <a:t>`</a:t>
+            </a:r>
+            <a:r>
+              <a:rPr lang="en-GB" sz="2400" b="1" dirty="0">
+                <a:solidFill>
+                  <a:schemeClr val="tx1">
+                    <a:lumMod val="50000"/>
+                    <a:lumOff val="50000"/>
+                  </a:schemeClr>
+                </a:solidFill>
+                <a:ea typeface="Source Sans Pro"/>
+              </a:rPr>
+              <a:t>bun run dev</a:t>
+            </a:r>
+            <a:r>
+              <a:rPr lang="en-GB" sz="2400" b="1" dirty="0">
+                <a:ea typeface="Source Sans Pro"/>
+              </a:rPr>
+              <a:t>`</a:t>
+            </a:r>
+          </a:p>
+          <a:p>
+            <a:pPr marL="457200" indent="-457200">
+              <a:buFont typeface="+mj-lt"/>
+              <a:buAutoNum type="arabicPeriod"/>
+            </a:pPr>
+            <a:r>
+              <a:rPr lang="en-GB" sz="2400" b="1" dirty="0">
+                <a:ea typeface="Source Sans Pro"/>
+              </a:rPr>
+              <a:t>You’ve started loading the frontend `</a:t>
+            </a:r>
+            <a:r>
+              <a:rPr lang="en-GB" sz="2400" b="1" dirty="0">
+                <a:solidFill>
+                  <a:schemeClr val="tx1">
+                    <a:lumMod val="50000"/>
+                    <a:lumOff val="50000"/>
+                  </a:schemeClr>
+                </a:solidFill>
+                <a:ea typeface="Source Sans Pro"/>
+              </a:rPr>
+              <a:t>http://localhost:3000</a:t>
+            </a:r>
+            <a:r>
+              <a:rPr lang="en-GB" sz="2400" b="1" dirty="0">
+                <a:ea typeface="Source Sans Pro"/>
+              </a:rPr>
+              <a:t>`</a:t>
+            </a:r>
+          </a:p>
+          <a:p>
+            <a:pPr marL="457200" indent="-457200">
+              <a:buFont typeface="+mj-lt"/>
+              <a:buAutoNum type="arabicPeriod"/>
+            </a:pPr>
+            <a:r>
+              <a:rPr lang="en-GB" sz="2400" b="1" dirty="0">
+                <a:ea typeface="Source Sans Pro"/>
+              </a:rPr>
+              <a:t>You’ve started loading the backend `</a:t>
+            </a:r>
+            <a:r>
+              <a:rPr lang="en-GB" sz="2400" b="1" dirty="0">
+                <a:solidFill>
+                  <a:schemeClr val="tx1">
+                    <a:lumMod val="50000"/>
+                    <a:lumOff val="50000"/>
+                  </a:schemeClr>
+                </a:solidFill>
+                <a:ea typeface="Source Sans Pro"/>
+              </a:rPr>
+              <a:t>http://127.0.0.1:8000/</a:t>
+            </a:r>
+            <a:r>
+              <a:rPr lang="en-GB" sz="2400" b="1" dirty="0" err="1">
+                <a:solidFill>
+                  <a:schemeClr val="tx1">
+                    <a:lumMod val="50000"/>
+                    <a:lumOff val="50000"/>
+                  </a:schemeClr>
+                </a:solidFill>
+                <a:ea typeface="Source Sans Pro"/>
+              </a:rPr>
+              <a:t>api</a:t>
+            </a:r>
+            <a:r>
+              <a:rPr lang="en-GB" sz="2400" b="1" dirty="0">
+                <a:solidFill>
+                  <a:schemeClr val="tx1">
+                    <a:lumMod val="50000"/>
+                    <a:lumOff val="50000"/>
+                  </a:schemeClr>
+                </a:solidFill>
+                <a:ea typeface="Source Sans Pro"/>
+              </a:rPr>
+              <a:t>/docs</a:t>
+            </a:r>
+            <a:r>
+              <a:rPr lang="en-GB" sz="2400" b="1" dirty="0">
+                <a:ea typeface="Source Sans Pro"/>
+              </a:rPr>
+              <a:t>`</a:t>
+            </a:r>
+          </a:p>
+          <a:p>
+            <a:pPr marL="342900" indent="-342900">
+              <a:buFont typeface="Arial" panose="020B0604020202020204" pitchFamily="34" charset="0"/>
+              <a:buChar char="•"/>
+            </a:pPr>
+            <a:endParaRPr lang="en-GB" sz="2400" b="1" dirty="0">
+              <a:ea typeface="Source Sans Pro"/>
+            </a:endParaRPr>
+          </a:p>
+        </p:txBody>
+      </p:sp>
+      <p:pic>
+        <p:nvPicPr>
+          <p:cNvPr id="4" name="Graphic 3" descr="robot to color">
+            <a:extLst>
+              <a:ext uri="{FF2B5EF4-FFF2-40B4-BE49-F238E27FC236}">
+                <a16:creationId xmlns:a16="http://schemas.microsoft.com/office/drawing/2014/main" id="{4246EEBE-EA7D-2239-CB94-12E2A7E150D3}"/>
+              </a:ext>
+            </a:extLst>
+          </p:cNvPr>
+          <p:cNvPicPr>
+            <a:picLocks noChangeAspect="1"/>
+          </p:cNvPicPr>
+          <p:nvPr/>
+        </p:nvPicPr>
+        <p:blipFill rotWithShape="1">
+          <a:blip>
+            <a:extLst>
+              <a:ext uri="{96DAC541-7B7A-43D3-8B79-37D633B846F1}">
+                <asvg:svgBlip xmlns:asvg="http://schemas.microsoft.com/office/drawing/2016/SVG/main" r:embed="rId2"/>
+              </a:ext>
+            </a:extLst>
+          </a:blip>
+          <a:srcRect l="21731" r="19568"/>
+          <a:stretch/>
+        </p:blipFill>
+        <p:spPr>
+          <a:xfrm rot="10800000">
+            <a:off x="3273322" y="119475"/>
+            <a:ext cx="1161689" cy="1790042"/>
+          </a:xfrm>
+          <a:prstGeom prst="rect">
+            <a:avLst/>
+          </a:prstGeom>
+        </p:spPr>
+      </p:pic>
+    </p:spTree>
+    <p:extLst>
+      <p:ext uri="{BB962C8B-B14F-4D97-AF65-F5344CB8AC3E}">
+        <p14:creationId xmlns:p14="http://schemas.microsoft.com/office/powerpoint/2010/main" val="218191877"/>
+      </p:ext>
+    </p:extLst>
+  </p:cSld>
+  <p:clrMapOvr>
+    <a:masterClrMapping/>
+  </p:clrMapOvr>
+</p:sld>
+</file>
+
+<file path=ppt/slides/slide7.xml><?xml version="1.0" encoding="utf-8"?>
+<p:sld xmlns:a="http://schemas.openxmlformats.org/drawingml/2006/main" xmlns:r="http://schemas.openxmlformats.org/officeDocument/2006/relationships" xmlns:p="http://schemas.openxmlformats.org/presentationml/2006/main">
+  <p:cSld>
+    <p:bg>
+      <p:bgPr>
+        <a:solidFill>
+          <a:schemeClr val="bg1"/>
+        </a:solidFill>
+        <a:effectLst/>
+      </p:bgPr>
+    </p:bg>
+    <p:spTree>
+      <p:nvGrpSpPr>
+        <p:cNvPr id="1" name="">
+          <a:extLst>
+            <a:ext uri="{FF2B5EF4-FFF2-40B4-BE49-F238E27FC236}">
               <a16:creationId xmlns:a16="http://schemas.microsoft.com/office/drawing/2014/main" id="{47A76F1A-0EFC-A652-5FB9-17A7C5F3B0D0}"/>
             </a:ext>
           </a:extLst>
@@ -32356,7 +34241,7 @@
 </p:sld>
 </file>
 
-<file path=ppt/slides/slide7.xml><?xml version="1.0" encoding="utf-8"?>
+<file path=ppt/slides/slide8.xml><?xml version="1.0" encoding="utf-8"?>
 <p:sld xmlns:a="http://schemas.openxmlformats.org/drawingml/2006/main" xmlns:r="http://schemas.openxmlformats.org/officeDocument/2006/relationships" xmlns:p="http://schemas.openxmlformats.org/presentationml/2006/main">
   <p:cSld>
     <p:bg>
@@ -32892,7 +34777,7 @@
 </p:sld>
 </file>
 
-<file path=ppt/slides/slide8.xml><?xml version="1.0" encoding="utf-8"?>
+<file path=ppt/slides/slide9.xml><?xml version="1.0" encoding="utf-8"?>
 <p:sld xmlns:a="http://schemas.openxmlformats.org/drawingml/2006/main" xmlns:r="http://schemas.openxmlformats.org/officeDocument/2006/relationships" xmlns:p="http://schemas.openxmlformats.org/presentationml/2006/main">
   <p:cSld>
     <p:bg>
@@ -33443,584 +35328,6 @@
     <p:extLst>
       <p:ext uri="{BB962C8B-B14F-4D97-AF65-F5344CB8AC3E}">
         <p14:creationId xmlns:p14="http://schemas.microsoft.com/office/powerpoint/2010/main" val="997040705"/>
-      </p:ext>
-    </p:extLst>
-  </p:cSld>
-  <p:clrMapOvr>
-    <a:masterClrMapping/>
-  </p:clrMapOvr>
-</p:sld>
-</file>
-
-<file path=ppt/slides/slide9.xml><?xml version="1.0" encoding="utf-8"?>
-<p:sld xmlns:a="http://schemas.openxmlformats.org/drawingml/2006/main" xmlns:r="http://schemas.openxmlformats.org/officeDocument/2006/relationships" xmlns:p="http://schemas.openxmlformats.org/presentationml/2006/main">
-  <p:cSld>
-    <p:bg>
-      <p:bgPr>
-        <a:solidFill>
-          <a:schemeClr val="bg1"/>
-        </a:solidFill>
-        <a:effectLst/>
-      </p:bgPr>
-    </p:bg>
-    <p:spTree>
-      <p:nvGrpSpPr>
-        <p:cNvPr id="1" name="">
-          <a:extLst>
-            <a:ext uri="{FF2B5EF4-FFF2-40B4-BE49-F238E27FC236}">
-              <a16:creationId xmlns:a16="http://schemas.microsoft.com/office/drawing/2014/main" id="{3620E0B4-EF70-230E-FE50-7B9FF95E94EE}"/>
-            </a:ext>
-          </a:extLst>
-        </p:cNvPr>
-        <p:cNvGrpSpPr/>
-        <p:nvPr/>
-      </p:nvGrpSpPr>
-      <p:grpSpPr>
-        <a:xfrm>
-          <a:off x="0" y="0"/>
-          <a:ext cx="0" cy="0"/>
-          <a:chOff x="0" y="0"/>
-          <a:chExt cx="0" cy="0"/>
-        </a:xfrm>
-      </p:grpSpPr>
-      <p:sp>
-        <p:nvSpPr>
-          <p:cNvPr id="2" name="Title 1" hidden="1">
-            <a:extLst>
-              <a:ext uri="{FF2B5EF4-FFF2-40B4-BE49-F238E27FC236}">
-                <a16:creationId xmlns:a16="http://schemas.microsoft.com/office/drawing/2014/main" id="{582F56C0-4B4F-4445-7D2D-69CC65646A61}"/>
-              </a:ext>
-            </a:extLst>
-          </p:cNvPr>
-          <p:cNvSpPr>
-            <a:spLocks noGrp="1"/>
-          </p:cNvSpPr>
-          <p:nvPr>
-            <p:ph type="title"/>
-          </p:nvPr>
-        </p:nvSpPr>
-        <p:spPr/>
-        <p:txBody>
-          <a:bodyPr/>
-          <a:lstStyle/>
-          <a:p>
-            <a:r>
-              <a:rPr lang="en-US" dirty="0"/>
-              <a:t>Cover Page</a:t>
-            </a:r>
-          </a:p>
-        </p:txBody>
-      </p:sp>
-      <p:sp>
-        <p:nvSpPr>
-          <p:cNvPr id="8" name="Title 1">
-            <a:extLst>
-              <a:ext uri="{FF2B5EF4-FFF2-40B4-BE49-F238E27FC236}">
-                <a16:creationId xmlns:a16="http://schemas.microsoft.com/office/drawing/2014/main" id="{CC281F5C-A967-F0BE-F681-D41DC883BFF6}"/>
-              </a:ext>
-            </a:extLst>
-          </p:cNvPr>
-          <p:cNvSpPr txBox="1">
-            <a:spLocks/>
-          </p:cNvSpPr>
-          <p:nvPr/>
-        </p:nvSpPr>
-        <p:spPr>
-          <a:xfrm>
-            <a:off x="2403752" y="399811"/>
-            <a:ext cx="5253486" cy="719719"/>
-          </a:xfrm>
-          <a:prstGeom prst="rect">
-            <a:avLst/>
-          </a:prstGeom>
-        </p:spPr>
-        <p:txBody>
-          <a:bodyPr vert="horz" lIns="0" tIns="0" rIns="0" bIns="0" rtlCol="0" anchor="t">
-            <a:noAutofit/>
-          </a:bodyPr>
-          <a:lstStyle>
-            <a:lvl1pPr algn="ctr" defTabSz="754380" rtl="0" eaLnBrk="1" latinLnBrk="0" hangingPunct="1">
-              <a:lnSpc>
-                <a:spcPct val="90000"/>
-              </a:lnSpc>
-              <a:spcBef>
-                <a:spcPct val="0"/>
-              </a:spcBef>
-              <a:buNone/>
-              <a:defRPr sz="4000" kern="1200">
-                <a:solidFill>
-                  <a:schemeClr val="tx1"/>
-                </a:solidFill>
-                <a:latin typeface="+mj-lt"/>
-                <a:ea typeface="+mj-ea"/>
-                <a:cs typeface="+mj-cs"/>
-              </a:defRPr>
-            </a:lvl1pPr>
-          </a:lstStyle>
-          <a:p>
-            <a:pPr>
-              <a:lnSpc>
-                <a:spcPct val="75000"/>
-              </a:lnSpc>
-            </a:pPr>
-            <a:r>
-              <a:rPr lang="en-US" sz="6000" u="sng" dirty="0" err="1">
-                <a:ln w="41275">
-                  <a:noFill/>
-                </a:ln>
-                <a:solidFill>
-                  <a:schemeClr val="accent2"/>
-                </a:solidFill>
-                <a:ea typeface="Source Sans Pro Black"/>
-              </a:rPr>
-              <a:t>Gitflow</a:t>
-            </a:r>
-            <a:endParaRPr lang="en-US" u="sng" dirty="0" err="1">
-              <a:solidFill>
-                <a:schemeClr val="accent2"/>
-              </a:solidFill>
-            </a:endParaRPr>
-          </a:p>
-          <a:p>
-            <a:pPr>
-              <a:lnSpc>
-                <a:spcPct val="75000"/>
-              </a:lnSpc>
-            </a:pPr>
-            <a:r>
-              <a:rPr lang="en-US" sz="3200">
-                <a:ln w="41275">
-                  <a:noFill/>
-                </a:ln>
-                <a:solidFill>
-                  <a:schemeClr val="tx1">
-                    <a:lumMod val="76000"/>
-                    <a:lumOff val="24000"/>
-                  </a:schemeClr>
-                </a:solidFill>
-                <a:ea typeface="Source Sans Pro Black"/>
-              </a:rPr>
-              <a:t>Git Workflows</a:t>
-            </a:r>
-            <a:endParaRPr lang="en-US" sz="3200" u="sng" dirty="0">
-              <a:ln w="41275">
-                <a:noFill/>
-              </a:ln>
-              <a:solidFill>
-                <a:schemeClr val="tx1">
-                  <a:lumMod val="76000"/>
-                  <a:lumOff val="24000"/>
-                </a:schemeClr>
-              </a:solidFill>
-              <a:ea typeface="Source Sans Pro Black"/>
-            </a:endParaRPr>
-          </a:p>
-        </p:txBody>
-      </p:sp>
-      <p:sp>
-        <p:nvSpPr>
-          <p:cNvPr id="32" name="TextBox 31">
-            <a:extLst>
-              <a:ext uri="{FF2B5EF4-FFF2-40B4-BE49-F238E27FC236}">
-                <a16:creationId xmlns:a16="http://schemas.microsoft.com/office/drawing/2014/main" id="{B5712A2E-1781-225E-238D-5E6E3E3CEA5B}"/>
-              </a:ext>
-            </a:extLst>
-          </p:cNvPr>
-          <p:cNvSpPr txBox="1"/>
-          <p:nvPr/>
-        </p:nvSpPr>
-        <p:spPr>
-          <a:xfrm>
-            <a:off x="2395248" y="1652683"/>
-            <a:ext cx="5257799" cy="1200329"/>
-          </a:xfrm>
-          <a:prstGeom prst="rect">
-            <a:avLst/>
-          </a:prstGeom>
-          <a:noFill/>
-        </p:spPr>
-        <p:txBody>
-          <a:bodyPr rot="0" spcFirstLastPara="0" vertOverflow="overflow" horzOverflow="overflow" vert="horz" wrap="square" lIns="91440" tIns="45720" rIns="91440" bIns="45720" numCol="1" spcCol="0" rtlCol="0" fromWordArt="0" anchor="t" anchorCtr="0" forceAA="0" compatLnSpc="1">
-            <a:prstTxWarp prst="textNoShape">
-              <a:avLst/>
-            </a:prstTxWarp>
-            <a:spAutoFit/>
-          </a:bodyPr>
-          <a:lstStyle/>
-          <a:p>
-            <a:pPr algn="ctr"/>
-            <a:br>
-              <a:rPr lang="en-GB" sz="3600" dirty="0">
-                <a:ea typeface="Source Sans Pro"/>
-              </a:rPr>
-            </a:br>
-            <a:endParaRPr lang="en-GB" sz="3600">
-              <a:solidFill>
-                <a:schemeClr val="bg2">
-                  <a:lumMod val="49000"/>
-                </a:schemeClr>
-              </a:solidFill>
-              <a:ea typeface="Source Sans Pro"/>
-            </a:endParaRPr>
-          </a:p>
-        </p:txBody>
-      </p:sp>
-      <p:cxnSp>
-        <p:nvCxnSpPr>
-          <p:cNvPr id="47" name="Straight Connector 46">
-            <a:extLst>
-              <a:ext uri="{FF2B5EF4-FFF2-40B4-BE49-F238E27FC236}">
-                <a16:creationId xmlns:a16="http://schemas.microsoft.com/office/drawing/2014/main" id="{17CE5083-F6E9-18C8-284B-F1C4AF5FA3D9}"/>
-              </a:ext>
-              <a:ext uri="{C183D7F6-B498-43B3-948B-1728B52AA6E4}">
-                <adec:decorative xmlns:adec="http://schemas.microsoft.com/office/drawing/2017/decorative" val="1"/>
-              </a:ext>
-            </a:extLst>
-          </p:cNvPr>
-          <p:cNvCxnSpPr>
-            <a:cxnSpLocks/>
-          </p:cNvCxnSpPr>
-          <p:nvPr/>
-        </p:nvCxnSpPr>
-        <p:spPr>
-          <a:xfrm>
-            <a:off x="929926" y="1880443"/>
-            <a:ext cx="8677751" cy="0"/>
-          </a:xfrm>
-          <a:prstGeom prst="line">
-            <a:avLst/>
-          </a:prstGeom>
-          <a:ln w="25400">
-            <a:solidFill>
-              <a:schemeClr val="accent2"/>
-            </a:solidFill>
-          </a:ln>
-        </p:spPr>
-        <p:style>
-          <a:lnRef idx="1">
-            <a:schemeClr val="accent1"/>
-          </a:lnRef>
-          <a:fillRef idx="0">
-            <a:schemeClr val="accent1"/>
-          </a:fillRef>
-          <a:effectRef idx="0">
-            <a:schemeClr val="accent1"/>
-          </a:effectRef>
-          <a:fontRef idx="minor">
-            <a:schemeClr val="tx1"/>
-          </a:fontRef>
-        </p:style>
-      </p:cxnSp>
-      <p:pic>
-        <p:nvPicPr>
-          <p:cNvPr id="5" name="Graphic 4" descr="Hotfix branch within git workflow">
-            <a:extLst>
-              <a:ext uri="{FF2B5EF4-FFF2-40B4-BE49-F238E27FC236}">
-                <a16:creationId xmlns:a16="http://schemas.microsoft.com/office/drawing/2014/main" id="{23673354-41CF-DB5D-738E-24739AB056FB}"/>
-              </a:ext>
-            </a:extLst>
-          </p:cNvPr>
-          <p:cNvPicPr>
-            <a:picLocks noChangeAspect="1"/>
-          </p:cNvPicPr>
-          <p:nvPr/>
-        </p:nvPicPr>
-        <p:blipFill>
-          <a:blip>
-            <a:extLst>
-              <a:ext uri="{96DAC541-7B7A-43D3-8B79-37D633B846F1}">
-                <asvg:svgBlip xmlns:asvg="http://schemas.microsoft.com/office/drawing/2016/SVG/main" r:embed="rId2"/>
-              </a:ext>
-            </a:extLst>
-          </a:blip>
-          <a:stretch>
-            <a:fillRect/>
-          </a:stretch>
-        </p:blipFill>
-        <p:spPr>
-          <a:xfrm>
-            <a:off x="2875578" y="2052123"/>
-            <a:ext cx="6808252" cy="4864661"/>
-          </a:xfrm>
-          <a:prstGeom prst="rect">
-            <a:avLst/>
-          </a:prstGeom>
-        </p:spPr>
-      </p:pic>
-      <p:pic>
-        <p:nvPicPr>
-          <p:cNvPr id="3" name="Picture 2" descr="A cartoon character with a computer&#10;&#10;AI-generated content may be incorrect.">
-            <a:extLst>
-              <a:ext uri="{FF2B5EF4-FFF2-40B4-BE49-F238E27FC236}">
-                <a16:creationId xmlns:a16="http://schemas.microsoft.com/office/drawing/2014/main" id="{21BCB5C4-433E-CBE4-7FE7-7773102DA8C7}"/>
-              </a:ext>
-            </a:extLst>
-          </p:cNvPr>
-          <p:cNvPicPr>
-            <a:picLocks noChangeAspect="1"/>
-          </p:cNvPicPr>
-          <p:nvPr/>
-        </p:nvPicPr>
-        <p:blipFill>
-          <a:blip r:embed="rId3"/>
-          <a:stretch>
-            <a:fillRect/>
-          </a:stretch>
-        </p:blipFill>
-        <p:spPr>
-          <a:xfrm rot="360000">
-            <a:off x="2075205" y="59612"/>
-            <a:ext cx="1595041" cy="1509430"/>
-          </a:xfrm>
-          <a:prstGeom prst="rect">
-            <a:avLst/>
-          </a:prstGeom>
-          <a:ln>
-            <a:noFill/>
-          </a:ln>
-          <a:effectLst>
-            <a:softEdge rad="112500"/>
-          </a:effectLst>
-        </p:spPr>
-      </p:pic>
-      <p:sp>
-        <p:nvSpPr>
-          <p:cNvPr id="4" name="TextBox 3">
-            <a:extLst>
-              <a:ext uri="{FF2B5EF4-FFF2-40B4-BE49-F238E27FC236}">
-                <a16:creationId xmlns:a16="http://schemas.microsoft.com/office/drawing/2014/main" id="{29EA55F1-5084-6A30-566B-F1583FF7DA2E}"/>
-              </a:ext>
-            </a:extLst>
-          </p:cNvPr>
-          <p:cNvSpPr txBox="1"/>
-          <p:nvPr/>
-        </p:nvSpPr>
-        <p:spPr>
-          <a:xfrm>
-            <a:off x="130679" y="3232340"/>
-            <a:ext cx="2743199" cy="1938992"/>
-          </a:xfrm>
-          <a:prstGeom prst="rect">
-            <a:avLst/>
-          </a:prstGeom>
-          <a:noFill/>
-        </p:spPr>
-        <p:txBody>
-          <a:bodyPr rot="0" spcFirstLastPara="0" vertOverflow="overflow" horzOverflow="overflow" vert="horz" wrap="square" lIns="91440" tIns="45720" rIns="91440" bIns="45720" numCol="1" spcCol="0" rtlCol="0" fromWordArt="0" anchor="t" anchorCtr="0" forceAA="0" compatLnSpc="1">
-            <a:prstTxWarp prst="textNoShape">
-              <a:avLst/>
-            </a:prstTxWarp>
-            <a:spAutoFit/>
-          </a:bodyPr>
-          <a:lstStyle/>
-          <a:p>
-            <a:r>
-              <a:rPr lang="en-GB" sz="2000" b="1">
-                <a:ea typeface="Source Sans Pro"/>
-              </a:rPr>
-              <a:t>Examples of branches:</a:t>
-            </a:r>
-            <a:endParaRPr lang="en-US" b="1"/>
-          </a:p>
-          <a:p>
-            <a:pPr marL="342900" indent="-342900">
-              <a:buFont typeface="Wingdings"/>
-              <a:buChar char="ü"/>
-            </a:pPr>
-            <a:r>
-              <a:rPr lang="en-GB" sz="2000" b="1">
-                <a:ea typeface="Source Sans Pro"/>
-              </a:rPr>
-              <a:t>main</a:t>
-            </a:r>
-            <a:endParaRPr lang="en-GB" sz="2000" dirty="0">
-              <a:ea typeface="Source Sans Pro"/>
-            </a:endParaRPr>
-          </a:p>
-          <a:p>
-            <a:pPr marL="342900" indent="-342900">
-              <a:buFont typeface="Wingdings"/>
-              <a:buChar char="ü"/>
-            </a:pPr>
-            <a:r>
-              <a:rPr lang="en-GB" sz="2000" b="1">
-                <a:ea typeface="Source Sans Pro"/>
-              </a:rPr>
-              <a:t>develop</a:t>
-            </a:r>
-            <a:endParaRPr lang="en-GB" sz="2000" dirty="0">
-              <a:ea typeface="Source Sans Pro"/>
-            </a:endParaRPr>
-          </a:p>
-          <a:p>
-            <a:pPr marL="342900" indent="-342900">
-              <a:buFont typeface="Wingdings"/>
-              <a:buChar char="ü"/>
-            </a:pPr>
-            <a:r>
-              <a:rPr lang="en-GB" sz="2000" b="1">
-                <a:ea typeface="Source Sans Pro"/>
-              </a:rPr>
-              <a:t>hotfix</a:t>
-            </a:r>
-            <a:r>
-              <a:rPr lang="en-GB" sz="2000">
-                <a:ea typeface="Source Sans Pro"/>
-              </a:rPr>
-              <a:t>/page-crash</a:t>
-            </a:r>
-          </a:p>
-          <a:p>
-            <a:pPr marL="342900" indent="-342900">
-              <a:buFont typeface="Wingdings"/>
-              <a:buChar char="ü"/>
-            </a:pPr>
-            <a:r>
-              <a:rPr lang="en-GB" sz="2000" b="1">
-                <a:ea typeface="Source Sans Pro"/>
-              </a:rPr>
-              <a:t>release</a:t>
-            </a:r>
-            <a:r>
-              <a:rPr lang="en-GB" sz="2000">
-                <a:ea typeface="Source Sans Pro"/>
-              </a:rPr>
-              <a:t>/1.0.0</a:t>
-            </a:r>
-          </a:p>
-          <a:p>
-            <a:pPr marL="342900" indent="-342900">
-              <a:buFont typeface="Wingdings"/>
-              <a:buChar char="ü"/>
-            </a:pPr>
-            <a:r>
-              <a:rPr lang="en-GB" sz="2000" b="1" dirty="0">
-                <a:ea typeface="Source Sans Pro"/>
-              </a:rPr>
-              <a:t>feature</a:t>
-            </a:r>
-            <a:r>
-              <a:rPr lang="en-GB" sz="2000" dirty="0">
-                <a:ea typeface="Source Sans Pro"/>
-              </a:rPr>
-              <a:t>/</a:t>
-            </a:r>
-            <a:r>
-              <a:rPr lang="en-GB" sz="2000" dirty="0" err="1">
-                <a:ea typeface="Source Sans Pro"/>
-              </a:rPr>
-              <a:t>todo</a:t>
-            </a:r>
-            <a:r>
-              <a:rPr lang="en-GB" sz="2000" dirty="0">
-                <a:ea typeface="Source Sans Pro"/>
-              </a:rPr>
-              <a:t>-page</a:t>
-            </a:r>
-          </a:p>
-        </p:txBody>
-      </p:sp>
-      <p:sp>
-        <p:nvSpPr>
-          <p:cNvPr id="6" name="TextBox 5">
-            <a:extLst>
-              <a:ext uri="{FF2B5EF4-FFF2-40B4-BE49-F238E27FC236}">
-                <a16:creationId xmlns:a16="http://schemas.microsoft.com/office/drawing/2014/main" id="{E3B2EB25-E3AE-77E3-8923-7FACD0D1D8FA}"/>
-              </a:ext>
-            </a:extLst>
-          </p:cNvPr>
-          <p:cNvSpPr txBox="1"/>
-          <p:nvPr/>
-        </p:nvSpPr>
-        <p:spPr>
-          <a:xfrm>
-            <a:off x="638421" y="7001411"/>
-            <a:ext cx="8791979" cy="1222642"/>
-          </a:xfrm>
-          <a:prstGeom prst="rect">
-            <a:avLst/>
-          </a:prstGeom>
-          <a:noFill/>
-        </p:spPr>
-        <p:txBody>
-          <a:bodyPr rot="0" spcFirstLastPara="0" vertOverflow="overflow" horzOverflow="overflow" vert="horz" wrap="square" lIns="91440" tIns="45720" rIns="91440" bIns="45720" numCol="1" spcCol="0" rtlCol="0" fromWordArt="0" anchor="t" anchorCtr="0" forceAA="0" compatLnSpc="1">
-            <a:prstTxWarp prst="textNoShape">
-              <a:avLst/>
-            </a:prstTxWarp>
-            <a:spAutoFit/>
-          </a:bodyPr>
-          <a:lstStyle/>
-          <a:p>
-            <a:pPr rtl="0">
-              <a:lnSpc>
-                <a:spcPts val="2025"/>
-              </a:lnSpc>
-            </a:pPr>
-            <a:r>
-              <a:rPr lang="en-GB" sz="2000" baseline="0">
-                <a:latin typeface="Source Sans Pro"/>
-                <a:ea typeface="Segoe UI"/>
-                <a:cs typeface="Segoe UI"/>
-              </a:rPr>
-              <a:t>Document reference:</a:t>
-            </a:r>
-            <a:r>
-              <a:rPr lang="en-GB" sz="2000">
-                <a:latin typeface="Source Sans Pro"/>
-                <a:ea typeface="Segoe UI"/>
-                <a:cs typeface="Segoe UI"/>
-              </a:rPr>
-              <a:t>​</a:t>
-            </a:r>
-            <a:br>
-              <a:rPr lang="en-GB" sz="2000">
-                <a:latin typeface="Source Sans Pro"/>
-                <a:ea typeface="Segoe UI"/>
-                <a:cs typeface="Segoe UI"/>
-              </a:rPr>
-            </a:br>
-            <a:r>
-              <a:rPr lang="en-GB" sz="2000" u="sng" strike="noStrike" baseline="0">
-                <a:solidFill>
-                  <a:srgbClr val="5F5F5F"/>
-                </a:solidFill>
-                <a:latin typeface="Source Sans Pro"/>
-                <a:ea typeface="Segoe UI"/>
-                <a:cs typeface="Segoe UI"/>
-                <a:hlinkClick r:id="rId4"/>
-              </a:rPr>
-              <a:t>https://www.atlassian.com/git/tutorials/comparing-workflows/gitflow-workflow</a:t>
-            </a:r>
-            <a:r>
-              <a:rPr lang="en-GB" sz="2000">
-                <a:latin typeface="Source Sans Pro"/>
-                <a:ea typeface="Segoe UI"/>
-                <a:cs typeface="Segoe UI"/>
-              </a:rPr>
-              <a:t>​</a:t>
-            </a:r>
-          </a:p>
-          <a:p>
-            <a:pPr marL="342900" lvl="0" indent="-342900" rtl="0">
-              <a:buFont typeface="Wingdings,Sans-Serif"/>
-              <a:buChar char="ü"/>
-            </a:pPr>
-            <a:endParaRPr lang="en-GB">
-              <a:latin typeface="Arial"/>
-              <a:ea typeface="Arial"/>
-              <a:cs typeface="Arial"/>
-            </a:endParaRPr>
-          </a:p>
-          <a:p>
-            <a:pPr algn="ctr"/>
-            <a:endParaRPr lang="en-GB"/>
-          </a:p>
-        </p:txBody>
-      </p:sp>
-    </p:spTree>
-    <p:extLst>
-      <p:ext uri="{BB962C8B-B14F-4D97-AF65-F5344CB8AC3E}">
-        <p14:creationId xmlns:p14="http://schemas.microsoft.com/office/powerpoint/2010/main" val="1120510944"/>
       </p:ext>
     </p:extLst>
   </p:cSld>
@@ -34822,6 +36129,35 @@
 </file>
 
 <file path=customXml/item1.xml><?xml version="1.0" encoding="utf-8"?>
+<?mso-contentType ?>
+<FormTemplates xmlns="http://schemas.microsoft.com/sharepoint/v3/contenttype/forms">
+  <Display>DocumentLibraryForm</Display>
+  <Edit>DocumentLibraryForm</Edit>
+  <New>DocumentLibraryForm</New>
+</FormTemplates>
+</file>
+
+<file path=customXml/item2.xml><?xml version="1.0" encoding="utf-8"?>
+<p:properties xmlns:p="http://schemas.microsoft.com/office/2006/metadata/properties" xmlns:xsi="http://www.w3.org/2001/XMLSchema-instance" xmlns:pc="http://schemas.microsoft.com/office/infopath/2007/PartnerControls">
+  <documentManagement>
+    <_ip_UnifiedCompliancePolicyUIAction xmlns="http://schemas.microsoft.com/sharepoint/v3" xsi:nil="true"/>
+    <Image xmlns="71af3243-3dd4-4a8d-8c0d-dd76da1f02a5">
+      <Url xsi:nil="true"/>
+      <Description xsi:nil="true"/>
+    </Image>
+    <Status xmlns="71af3243-3dd4-4a8d-8c0d-dd76da1f02a5">Not started</Status>
+    <Background xmlns="71af3243-3dd4-4a8d-8c0d-dd76da1f02a5">false</Background>
+    <_ip_UnifiedCompliancePolicyProperties xmlns="http://schemas.microsoft.com/sharepoint/v3" xsi:nil="true"/>
+    <ImageTagsTaxHTField xmlns="71af3243-3dd4-4a8d-8c0d-dd76da1f02a5">
+      <Terms xmlns="http://schemas.microsoft.com/office/infopath/2007/PartnerControls"/>
+    </ImageTagsTaxHTField>
+    <TaxCatchAll xmlns="230e9df3-be65-4c73-a93b-d1236ebd677e" xsi:nil="true"/>
+    <MediaServiceKeyPoints xmlns="71af3243-3dd4-4a8d-8c0d-dd76da1f02a5" xsi:nil="true"/>
+  </documentManagement>
+</p:properties>
+</file>
+
+<file path=customXml/item3.xml><?xml version="1.0" encoding="utf-8"?>
 <ct:contentTypeSchema xmlns:ct="http://schemas.microsoft.com/office/2006/metadata/contentType" xmlns:ma="http://schemas.microsoft.com/office/2006/metadata/properties/metaAttributes" ct:_="" ma:_="" ma:contentTypeName="Document" ma:contentTypeID="0x01010079F111ED35F8CC479449609E8A0923A6" ma:contentTypeVersion="26" ma:contentTypeDescription="Create a new document." ma:contentTypeScope="" ma:versionID="ac37c1753acd5e330d2062ccec26ea66">
   <xsd:schema xmlns:xsd="http://www.w3.org/2001/XMLSchema" xmlns:xs="http://www.w3.org/2001/XMLSchema" xmlns:p="http://schemas.microsoft.com/office/2006/metadata/properties" xmlns:ns1="http://schemas.microsoft.com/sharepoint/v3" xmlns:ns2="71af3243-3dd4-4a8d-8c0d-dd76da1f02a5" xmlns:ns3="16c05727-aa75-4e4a-9b5f-8a80a1165891" xmlns:ns4="230e9df3-be65-4c73-a93b-d1236ebd677e" targetNamespace="http://schemas.microsoft.com/office/2006/metadata/properties" ma:root="true" ma:fieldsID="3b340c7101c92c5120abd06486f94548" ns1:_="" ns2:_="" ns3:_="" ns4:_="">
     <xsd:import namespace="http://schemas.microsoft.com/sharepoint/v3"/>
@@ -35121,36 +36457,27 @@
 </ct:contentTypeSchema>
 </file>
 
-<file path=customXml/item2.xml><?xml version="1.0" encoding="utf-8"?>
-<p:properties xmlns:p="http://schemas.microsoft.com/office/2006/metadata/properties" xmlns:xsi="http://www.w3.org/2001/XMLSchema-instance" xmlns:pc="http://schemas.microsoft.com/office/infopath/2007/PartnerControls">
-  <documentManagement>
-    <_ip_UnifiedCompliancePolicyUIAction xmlns="http://schemas.microsoft.com/sharepoint/v3" xsi:nil="true"/>
-    <Image xmlns="71af3243-3dd4-4a8d-8c0d-dd76da1f02a5">
-      <Url xsi:nil="true"/>
-      <Description xsi:nil="true"/>
-    </Image>
-    <Status xmlns="71af3243-3dd4-4a8d-8c0d-dd76da1f02a5">Not started</Status>
-    <Background xmlns="71af3243-3dd4-4a8d-8c0d-dd76da1f02a5">false</Background>
-    <_ip_UnifiedCompliancePolicyProperties xmlns="http://schemas.microsoft.com/sharepoint/v3" xsi:nil="true"/>
-    <ImageTagsTaxHTField xmlns="71af3243-3dd4-4a8d-8c0d-dd76da1f02a5">
-      <Terms xmlns="http://schemas.microsoft.com/office/infopath/2007/PartnerControls"/>
-    </ImageTagsTaxHTField>
-    <TaxCatchAll xmlns="230e9df3-be65-4c73-a93b-d1236ebd677e" xsi:nil="true"/>
-    <MediaServiceKeyPoints xmlns="71af3243-3dd4-4a8d-8c0d-dd76da1f02a5" xsi:nil="true"/>
-  </documentManagement>
-</p:properties>
+<file path=customXml/itemProps1.xml><?xml version="1.0" encoding="utf-8"?>
+<ds:datastoreItem xmlns:ds="http://schemas.openxmlformats.org/officeDocument/2006/customXml" ds:itemID="{C700B919-5B9C-4D06-B24A-7BB87EEF69EA}">
+  <ds:schemaRefs>
+    <ds:schemaRef ds:uri="http://schemas.microsoft.com/sharepoint/v3/contenttype/forms"/>
+  </ds:schemaRefs>
+</ds:datastoreItem>
 </file>
 
-<file path=customXml/item3.xml><?xml version="1.0" encoding="utf-8"?>
-<?mso-contentType ?>
-<FormTemplates xmlns="http://schemas.microsoft.com/sharepoint/v3/contenttype/forms">
-  <Display>DocumentLibraryForm</Display>
-  <Edit>DocumentLibraryForm</Edit>
-  <New>DocumentLibraryForm</New>
-</FormTemplates>
+<file path=customXml/itemProps2.xml><?xml version="1.0" encoding="utf-8"?>
+<ds:datastoreItem xmlns:ds="http://schemas.openxmlformats.org/officeDocument/2006/customXml" ds:itemID="{BA7C7500-373E-4155-9EAA-9FE9576B0BE6}">
+  <ds:schemaRefs>
+    <ds:schemaRef ds:uri="http://schemas.microsoft.com/office/2006/metadata/properties"/>
+    <ds:schemaRef ds:uri="http://schemas.microsoft.com/office/infopath/2007/PartnerControls"/>
+    <ds:schemaRef ds:uri="http://schemas.microsoft.com/sharepoint/v3"/>
+    <ds:schemaRef ds:uri="71af3243-3dd4-4a8d-8c0d-dd76da1f02a5"/>
+    <ds:schemaRef ds:uri="230e9df3-be65-4c73-a93b-d1236ebd677e"/>
+  </ds:schemaRefs>
+</ds:datastoreItem>
 </file>
 
-<file path=customXml/itemProps1.xml><?xml version="1.0" encoding="utf-8"?>
+<file path=customXml/itemProps3.xml><?xml version="1.0" encoding="utf-8"?>
 <ds:datastoreItem xmlns:ds="http://schemas.openxmlformats.org/officeDocument/2006/customXml" ds:itemID="{5D948EC7-70A8-4BA0-9397-CCEC9EEE03CC}">
   <ds:schemaRefs>
     <ds:schemaRef ds:uri="http://schemas.microsoft.com/office/2006/metadata/contentType"/>
@@ -35171,26 +36498,6 @@
 </ds:datastoreItem>
 </file>
 
-<file path=customXml/itemProps2.xml><?xml version="1.0" encoding="utf-8"?>
-<ds:datastoreItem xmlns:ds="http://schemas.openxmlformats.org/officeDocument/2006/customXml" ds:itemID="{BA7C7500-373E-4155-9EAA-9FE9576B0BE6}">
-  <ds:schemaRefs>
-    <ds:schemaRef ds:uri="http://schemas.microsoft.com/office/2006/metadata/properties"/>
-    <ds:schemaRef ds:uri="http://schemas.microsoft.com/office/infopath/2007/PartnerControls"/>
-    <ds:schemaRef ds:uri="http://schemas.microsoft.com/sharepoint/v3"/>
-    <ds:schemaRef ds:uri="71af3243-3dd4-4a8d-8c0d-dd76da1f02a5"/>
-    <ds:schemaRef ds:uri="230e9df3-be65-4c73-a93b-d1236ebd677e"/>
-  </ds:schemaRefs>
-</ds:datastoreItem>
-</file>
-
-<file path=customXml/itemProps3.xml><?xml version="1.0" encoding="utf-8"?>
-<ds:datastoreItem xmlns:ds="http://schemas.openxmlformats.org/officeDocument/2006/customXml" ds:itemID="{C700B919-5B9C-4D06-B24A-7BB87EEF69EA}">
-  <ds:schemaRefs>
-    <ds:schemaRef ds:uri="http://schemas.microsoft.com/sharepoint/v3/contenttype/forms"/>
-  </ds:schemaRefs>
-</ds:datastoreItem>
-</file>
-
 <file path=docMetadata/LabelInfo.xml><?xml version="1.0" encoding="utf-8"?>
 <clbl:labelList xmlns:clbl="http://schemas.microsoft.com/office/2020/mipLabelMetadata">
   <clbl:label id="{a8019d2a-b9cd-4e22-ac21-46e49d2ef4f4}" enabled="1" method="Standard" siteId="{300571a7-dc81-432b-9ff0-75fd8ae3dde5}" removed="0"/>

--- a/docs/REST API Workshop.pptx
+++ b/docs/REST API Workshop.pptx
@@ -13960,7 +13960,7 @@
               </a:lnSpc>
             </a:pPr>
             <a:r>
-              <a:rPr lang="en-US" b="1">
+              <a:rPr lang="en-US" b="1" dirty="0">
                 <a:solidFill>
                   <a:schemeClr val="accent5">
                     <a:lumMod val="75000"/>
@@ -13978,7 +13978,7 @@
               </a:lnSpc>
             </a:pPr>
             <a:r>
-              <a:rPr lang="en-US" b="1">
+              <a:rPr lang="en-US" b="1" dirty="0">
                 <a:solidFill>
                   <a:schemeClr val="accent5">
                     <a:lumMod val="75000"/>
@@ -13986,7 +13986,7 @@
                 </a:solidFill>
                 <a:ea typeface="Source Sans Pro"/>
               </a:rPr>
-              <a:t>26/03/2026</a:t>
+              <a:t>14/05/2026</a:t>
             </a:r>
           </a:p>
         </p:txBody>
@@ -24718,7 +24718,7 @@
           <a:p>
             <a:pPr algn="ctr"/>
             <a:r>
-              <a:rPr lang="en-GB" sz="3600" b="1">
+              <a:rPr lang="en-GB" sz="3600" b="1" dirty="0">
                 <a:solidFill>
                   <a:schemeClr val="bg2">
                     <a:lumMod val="49000"/>
@@ -24739,17 +24739,12 @@
               </a:rPr>
             </a:br>
             <a:r>
-              <a:rPr lang="en-GB" sz="3600">
-                <a:ea typeface="Source Sans Pro"/>
-              </a:rPr>
-              <a:t>Senior Software</a:t>
+              <a:rPr lang="en-US" sz="3600" dirty="0"/>
+              <a:t>Chief Technology Officer</a:t>
             </a:r>
-            <a:r>
-              <a:rPr lang="en-GB" sz="3600" dirty="0">
-                <a:ea typeface="Source Sans Pro"/>
-              </a:rPr>
-              <a:t> Engineer</a:t>
-            </a:r>
+            <a:endParaRPr lang="en-GB" sz="3600" dirty="0">
+              <a:ea typeface="Source Sans Pro"/>
+            </a:endParaRPr>
           </a:p>
           <a:p>
             <a:pPr algn="ctr"/>
@@ -24773,18 +24768,7 @@
                 </a:solidFill>
                 <a:ea typeface="Source Sans Pro"/>
               </a:rPr>
-              <a:t>7 </a:t>
-            </a:r>
-            <a:r>
-              <a:rPr lang="en-GB" sz="3600">
-                <a:solidFill>
-                  <a:schemeClr val="bg1">
-                    <a:lumMod val="76000"/>
-                  </a:schemeClr>
-                </a:solidFill>
-                <a:ea typeface="Source Sans Pro"/>
-              </a:rPr>
-              <a:t>years</a:t>
+              <a:t>Over 7 years</a:t>
             </a:r>
             <a:br>
               <a:rPr lang="en-US" sz="2000" dirty="0">
@@ -24796,17 +24780,6 @@
               </a:rPr>
             </a:br>
             <a:r>
-              <a:rPr lang="en-GB" sz="3600">
-                <a:solidFill>
-                  <a:schemeClr val="bg1">
-                    <a:lumMod val="76000"/>
-                  </a:schemeClr>
-                </a:solidFill>
-                <a:ea typeface="Source Sans Pro"/>
-              </a:rPr>
-              <a:t>Employed</a:t>
-            </a:r>
-            <a:r>
               <a:rPr lang="en-GB" sz="3600" dirty="0">
                 <a:solidFill>
                   <a:schemeClr val="bg1">
@@ -24815,7 +24788,7 @@
                 </a:solidFill>
                 <a:ea typeface="Source Sans Pro"/>
               </a:rPr>
-              <a:t> under</a:t>
+              <a:t>Employed under</a:t>
             </a:r>
             <a:br>
               <a:rPr lang="en-GB" sz="3600" dirty="0">
@@ -36129,15 +36102,6 @@
 </file>
 
 <file path=customXml/item1.xml><?xml version="1.0" encoding="utf-8"?>
-<?mso-contentType ?>
-<FormTemplates xmlns="http://schemas.microsoft.com/sharepoint/v3/contenttype/forms">
-  <Display>DocumentLibraryForm</Display>
-  <Edit>DocumentLibraryForm</Edit>
-  <New>DocumentLibraryForm</New>
-</FormTemplates>
-</file>
-
-<file path=customXml/item2.xml><?xml version="1.0" encoding="utf-8"?>
 <p:properties xmlns:p="http://schemas.microsoft.com/office/2006/metadata/properties" xmlns:xsi="http://www.w3.org/2001/XMLSchema-instance" xmlns:pc="http://schemas.microsoft.com/office/infopath/2007/PartnerControls">
   <documentManagement>
     <_ip_UnifiedCompliancePolicyUIAction xmlns="http://schemas.microsoft.com/sharepoint/v3" xsi:nil="true"/>
@@ -36155,6 +36119,15 @@
     <MediaServiceKeyPoints xmlns="71af3243-3dd4-4a8d-8c0d-dd76da1f02a5" xsi:nil="true"/>
   </documentManagement>
 </p:properties>
+</file>
+
+<file path=customXml/item2.xml><?xml version="1.0" encoding="utf-8"?>
+<?mso-contentType ?>
+<FormTemplates xmlns="http://schemas.microsoft.com/sharepoint/v3/contenttype/forms">
+  <Display>DocumentLibraryForm</Display>
+  <Edit>DocumentLibraryForm</Edit>
+  <New>DocumentLibraryForm</New>
+</FormTemplates>
 </file>
 
 <file path=customXml/item3.xml><?xml version="1.0" encoding="utf-8"?>
@@ -36458,14 +36431,6 @@
 </file>
 
 <file path=customXml/itemProps1.xml><?xml version="1.0" encoding="utf-8"?>
-<ds:datastoreItem xmlns:ds="http://schemas.openxmlformats.org/officeDocument/2006/customXml" ds:itemID="{C700B919-5B9C-4D06-B24A-7BB87EEF69EA}">
-  <ds:schemaRefs>
-    <ds:schemaRef ds:uri="http://schemas.microsoft.com/sharepoint/v3/contenttype/forms"/>
-  </ds:schemaRefs>
-</ds:datastoreItem>
-</file>
-
-<file path=customXml/itemProps2.xml><?xml version="1.0" encoding="utf-8"?>
 <ds:datastoreItem xmlns:ds="http://schemas.openxmlformats.org/officeDocument/2006/customXml" ds:itemID="{BA7C7500-373E-4155-9EAA-9FE9576B0BE6}">
   <ds:schemaRefs>
     <ds:schemaRef ds:uri="http://schemas.microsoft.com/office/2006/metadata/properties"/>
@@ -36473,6 +36438,14 @@
     <ds:schemaRef ds:uri="http://schemas.microsoft.com/sharepoint/v3"/>
     <ds:schemaRef ds:uri="71af3243-3dd4-4a8d-8c0d-dd76da1f02a5"/>
     <ds:schemaRef ds:uri="230e9df3-be65-4c73-a93b-d1236ebd677e"/>
+  </ds:schemaRefs>
+</ds:datastoreItem>
+</file>
+
+<file path=customXml/itemProps2.xml><?xml version="1.0" encoding="utf-8"?>
+<ds:datastoreItem xmlns:ds="http://schemas.openxmlformats.org/officeDocument/2006/customXml" ds:itemID="{C700B919-5B9C-4D06-B24A-7BB87EEF69EA}">
+  <ds:schemaRefs>
+    <ds:schemaRef ds:uri="http://schemas.microsoft.com/sharepoint/v3/contenttype/forms"/>
   </ds:schemaRefs>
 </ds:datastoreItem>
 </file>
